--- a/Docs/Week07/Wang_VR_Week07_Midterm.pptx
+++ b/Docs/Week07/Wang_VR_Week07_Midterm.pptx
@@ -2,18 +2,18 @@
 <file path=ppt/presentation.xml><?xml version="1.0" encoding="utf-8"?>
 <p:presentation xmlns:p="http://schemas.openxmlformats.org/presentationml/2006/main">
   <p:sldMasterIdLst>
-    <p:sldMasterId xmlns:r="http://schemas.openxmlformats.org/officeDocument/2006/relationships" id="2147483648" r:id="Rae778ac2b12d40f4"/>
+    <p:sldMasterId xmlns:r="http://schemas.openxmlformats.org/officeDocument/2006/relationships" id="2147483648" r:id="Rfe099805b0d24ad2"/>
   </p:sldMasterIdLst>
   <p:notesMasterIdLst>
-    <p:notesMasterId xmlns:r="http://schemas.openxmlformats.org/officeDocument/2006/relationships" r:id="R57c5f3dbde844345"/>
+    <p:notesMasterId xmlns:r="http://schemas.openxmlformats.org/officeDocument/2006/relationships" r:id="R13cf3b1392fe461c"/>
   </p:notesMasterIdLst>
   <p:sldIdLst>
-    <p:sldId xmlns:r="http://schemas.openxmlformats.org/officeDocument/2006/relationships" id="256" r:id="R10d61bf4d4e84d1d"/>
-    <p:sldId xmlns:r="http://schemas.openxmlformats.org/officeDocument/2006/relationships" id="257" r:id="R3566fd485bb04b01"/>
-    <p:sldId xmlns:r="http://schemas.openxmlformats.org/officeDocument/2006/relationships" id="258" r:id="R7b34ee35303a4647"/>
-    <p:sldId xmlns:r="http://schemas.openxmlformats.org/officeDocument/2006/relationships" id="259" r:id="R9bebfa56ddd34b85"/>
-    <p:sldId xmlns:r="http://schemas.openxmlformats.org/officeDocument/2006/relationships" id="260" r:id="R13d7f34f5e5e4796"/>
-    <p:sldId xmlns:r="http://schemas.openxmlformats.org/officeDocument/2006/relationships" id="261" r:id="R58f7546393ee4782"/>
+    <p:sldId xmlns:r="http://schemas.openxmlformats.org/officeDocument/2006/relationships" id="256" r:id="R7aa8583837f84b9c"/>
+    <p:sldId xmlns:r="http://schemas.openxmlformats.org/officeDocument/2006/relationships" id="257" r:id="Ra76ba9d2f57c48c4"/>
+    <p:sldId xmlns:r="http://schemas.openxmlformats.org/officeDocument/2006/relationships" id="258" r:id="R345770580d0e4bdc"/>
+    <p:sldId xmlns:r="http://schemas.openxmlformats.org/officeDocument/2006/relationships" id="259" r:id="Ra289dae934c24c8f"/>
+    <p:sldId xmlns:r="http://schemas.openxmlformats.org/officeDocument/2006/relationships" id="260" r:id="R82b4818c306040e0"/>
+    <p:sldId xmlns:r="http://schemas.openxmlformats.org/officeDocument/2006/relationships" id="261" r:id="R1cbc1304c1034d08"/>
   </p:sldIdLst>
   <p:sldSz cx="12192000" cy="6858000"/>
   <p:notesSz cx="6858000" cy="9144000"/>
@@ -447,12 +447,12 @@
           <a:lstStyle xmlns:a="http://schemas.openxmlformats.org/drawingml/2006/main"/>
           <a:p xmlns:a="http://schemas.openxmlformats.org/drawingml/2006/main">
             <a:r>
-              <a:t>讲述建议（约 20 秒）：我的一人小组开发了单房间 VR 维修游戏。玩家恢复供电后穿过舱门到达出口。本页图片是 Unity Editor 场景预览，不是 Quest 实机。</a:t>
+              <a:t>讲述建议（约 20 秒）：我的一人小组开发了单房间 VR 维修游戏。玩家恢复供电后穿过舱门到达出口。第七周更新了笼架式能量核心、配套夹爪插槽和分段双门动画。本页图片是 Unity Editor 场景预览，不是 Quest 实机。</a:t>
             </a:r>
           </a:p>
           <a:p xmlns:a="http://schemas.openxmlformats.org/drawingml/2006/main">
             <a:r>
-              <a:t>Source: C:\Users\31797\Documents\ChatGPT\作业 3\VR_Project_2026_2\CourseValidation\Runtime\SoloStation_EditorPreview.png</a:t>
+              <a:t>Source: C:\Users\31797\Documents\ChatGPT\作业 3\VR_Project_2026_2\CourseValidation\Runtime\Week07_Station_EditorPreview.png</a:t>
             </a:r>
           </a:p>
           <a:p xmlns:a="http://schemas.openxmlformats.org/drawingml/2006/main">
@@ -527,12 +527,17 @@
           <a:lstStyle xmlns:a="http://schemas.openxmlformats.org/drawingml/2006/main"/>
           <a:p xmlns:a="http://schemas.openxmlformats.org/drawingml/2006/main">
             <a:r>
-              <a:t>讲述建议（约 45 秒）：用五步解释玩法。抓取后必须在插槽附近松开，单纯接近插槽不会触发。空间站通电，舱门打开，再走到出口。</a:t>
+              <a:t>讲述建议（约 45 秒）：用五步解释玩法。抓取后必须在插槽附近松开，单纯接近插槽不会触发。三只夹爪固定核心，门锁缩回，双门滑开，通行灯变绿，再走到出口。完整开门动画的实现时长为 2.65 秒。</a:t>
             </a:r>
           </a:p>
           <a:p xmlns:a="http://schemas.openxmlformats.org/drawingml/2006/main">
             <a:r>
-              <a:t>Source: C:\Users\31797\Documents\ChatGPT\作业 3\VR_Project_2026_2\Docs\Week07\Wang_VR_Week07_CreativeAward_Draft.docx</a:t>
+              <a:t>Source: C:\Users\31797\Documents\ChatGPT\作业 3\VR_Project_2026_2\Assets\02_Scripts\SpaceStationMission.cs</a:t>
+            </a:r>
+          </a:p>
+          <a:p xmlns:a="http://schemas.openxmlformats.org/drawingml/2006/main">
+            <a:r>
+              <a:t>Source: C:\Users\31797\Documents\ChatGPT\作业 3\VR_Project_2026_2\Assets\02_Scripts\SpaceStationHardware.cs</a:t>
             </a:r>
           </a:p>
           <a:p xmlns:a="http://schemas.openxmlformats.org/drawingml/2006/main">
@@ -687,17 +692,22 @@
           <a:lstStyle xmlns:a="http://schemas.openxmlformats.org/drawingml/2006/main"/>
           <a:p xmlns:a="http://schemas.openxmlformats.org/drawingml/2006/main">
             <a:r>
-              <a:t>讲述建议（约 60 秒）：Meta XR 负责传送、抓取和射线输入；任务脚本维护四个关键状态；灯光、状态、音效、触觉响应同一流程。已记录模拟器连续流程和音效事件调用，APK 已构建，UI 结构检查通过。控制器射线点按、Quest 手感和触觉仍待真机核验。</a:t>
+              <a:t>讲述建议（约 60 秒）：Meta XR 仍负责传送、抓取和射线输入。任务状态连接任务面板与硬件反馈。本周将小球改为带金属笼架和青色晶体的 E-07 核心，配套插槽带三只夹爪和分段灯环。完整开门过程实现为 2.65 秒，依次固定核心、缩回锁扣、双门向两侧滑开、通行灯变绿，并播放机械音效。图中为 Unity Editor 预览，不能视为实际控制器、Quest 性能或触觉测试结果。</a:t>
             </a:r>
           </a:p>
           <a:p xmlns:a="http://schemas.openxmlformats.org/drawingml/2006/main">
             <a:r>
-              <a:t>Source: C:\Users\31797\Documents\ChatGPT\作业 3\VR_Project_2026_2\Docs\Week07\Wang_VR_Week07_CreativeAward_Draft.docx</a:t>
+              <a:t>Source: C:\Users\31797\Documents\ChatGPT\作业 3\VR_Project_2026_2\Assets\02_Scripts\SpaceStationHardware.cs</a:t>
             </a:r>
           </a:p>
           <a:p xmlns:a="http://schemas.openxmlformats.org/drawingml/2006/main">
             <a:r>
-              <a:t>Source: C:\Users\31797\Documents\ChatGPT\作业 3\VR_Project_2026_2\Docs\Week06_Team_Integration.md</a:t>
+              <a:t>Source: C:\Users\31797\Documents\ChatGPT\作业 3\VR_Project_2026_2\Assets\Editor\StationHardwareBuilder.cs</a:t>
+            </a:r>
+          </a:p>
+          <a:p xmlns:a="http://schemas.openxmlformats.org/drawingml/2006/main">
+            <a:r>
+              <a:t>Image: C:\Users\31797\Documents\ChatGPT\作业 3\VR_Project_2026_2\CourseValidation\Runtime\Week07_CoreDock_EditorPreview.png</a:t>
             </a:r>
           </a:p>
         </p:txBody>
@@ -847,12 +857,12 @@
           <a:lstStyle xmlns:a="http://schemas.openxmlformats.org/drawingml/2006/main"/>
           <a:p xmlns:a="http://schemas.openxmlformats.org/drawingml/2006/main">
             <a:r>
-              <a:t>讲述建议（演示约 6 分钟）：演示时依次操作面板、传送、抓取、松开插入、开门到出口、重置。如改为录像，必须在 Quest 实机录制后使用真实画面；本页右侧只是此前 Meta XR Simulator 视频关键帧。</a:t>
+              <a:t>讲述建议（演示约 6 分钟）：演示时依次操作面板、传送、抓取、松开插入、观看夹爪与双门动画、到出口、重置。如改为录像，必须在 Quest 实机录制后使用真实画面。本页右侧是当前双门完全打开时的 Unity Editor 预览，不是视频帧，也不是 Quest 实机。</a:t>
             </a:r>
           </a:p>
           <a:p xmlns:a="http://schemas.openxmlformats.org/drawingml/2006/main">
             <a:r>
-              <a:t>Source video frame: C:\Users\31797\Documents\ChatGPT\作业 3\VR_Presentation_20261008\media\solo_key_t19_hatch_open.png</a:t>
+              <a:t>Image: C:\Users\31797\Documents\ChatGPT\作业 3\VR_Project_2026_2\CourseValidation\Runtime\Week07_AirlockOpen_EditorPreview.png</a:t>
             </a:r>
           </a:p>
           <a:p xmlns:a="http://schemas.openxmlformats.org/drawingml/2006/main">
@@ -904,7 +914,7 @@
           <p:cNvPr id="3" name="Title">
             <a:extLst xmlns:a="http://schemas.openxmlformats.org/drawingml/2006/main">
               <a:ext uri="{FF2B5EF4-FFF2-40B4-BE49-F238E27FC236}">
-                <a16:creationId xmlns:a16="http://schemas.microsoft.com/office/drawing/2014/main" id="{7A85101A-73E7-4C2F-A766-D1EAEE949CD6}"/>
+                <a16:creationId xmlns:a16="http://schemas.microsoft.com/office/drawing/2014/main" id="{B8F4E5B7-F277-441B-8987-46102F699E3F}"/>
               </a:ext>
             </a:extLst>
           </p:cNvPr>
@@ -1133,7 +1143,7 @@
           <p:cNvPr id="2" name="Subtitle">
             <a:extLst xmlns:a="http://schemas.openxmlformats.org/drawingml/2006/main">
               <a:ext uri="{FF2B5EF4-FFF2-40B4-BE49-F238E27FC236}">
-                <a16:creationId xmlns:a16="http://schemas.microsoft.com/office/drawing/2014/main" id="{E2E05DC3-BA9D-4E4A-979D-561206C3D3B7}"/>
+                <a16:creationId xmlns:a16="http://schemas.microsoft.com/office/drawing/2014/main" id="{0C090BBB-E278-431C-97B4-C8E02236EEE0}"/>
               </a:ext>
             </a:extLst>
           </p:cNvPr>
@@ -1379,7 +1389,7 @@
           <p:cNvPr id="2" name="Section title">
             <a:extLst xmlns:a="http://schemas.openxmlformats.org/drawingml/2006/main">
               <a:ext uri="{FF2B5EF4-FFF2-40B4-BE49-F238E27FC236}">
-                <a16:creationId xmlns:a16="http://schemas.microsoft.com/office/drawing/2014/main" id="{9E1AF4E1-60FE-4ADC-A3A2-65478B4178AB}"/>
+                <a16:creationId xmlns:a16="http://schemas.microsoft.com/office/drawing/2014/main" id="{D580490C-6EB1-408F-BE43-475A8C8E98F1}"/>
               </a:ext>
             </a:extLst>
           </p:cNvPr>
@@ -1625,7 +1635,7 @@
           <p:cNvPr id="3" name="Title">
             <a:extLst xmlns:a="http://schemas.openxmlformats.org/drawingml/2006/main">
               <a:ext uri="{FF2B5EF4-FFF2-40B4-BE49-F238E27FC236}">
-                <a16:creationId xmlns:a16="http://schemas.microsoft.com/office/drawing/2014/main" id="{6CACE946-2053-4FFD-BE22-825A0F4DC01B}"/>
+                <a16:creationId xmlns:a16="http://schemas.microsoft.com/office/drawing/2014/main" id="{CA3DEA9E-9ECE-41FF-8073-6DC48B5C945E}"/>
               </a:ext>
             </a:extLst>
           </p:cNvPr>
@@ -1854,7 +1864,7 @@
           <p:cNvPr id="2" name="Body">
             <a:extLst xmlns:a="http://schemas.openxmlformats.org/drawingml/2006/main">
               <a:ext uri="{FF2B5EF4-FFF2-40B4-BE49-F238E27FC236}">
-                <a16:creationId xmlns:a16="http://schemas.microsoft.com/office/drawing/2014/main" id="{5C8CB31A-8058-437D-B9A2-06EF85C39A6D}"/>
+                <a16:creationId xmlns:a16="http://schemas.microsoft.com/office/drawing/2014/main" id="{26B7FB47-6DA9-44FC-8DAC-C1DF6080E270}"/>
               </a:ext>
             </a:extLst>
           </p:cNvPr>
@@ -2100,7 +2110,7 @@
           <p:cNvPr id="4" name="Title">
             <a:extLst xmlns:a="http://schemas.openxmlformats.org/drawingml/2006/main">
               <a:ext uri="{FF2B5EF4-FFF2-40B4-BE49-F238E27FC236}">
-                <a16:creationId xmlns:a16="http://schemas.microsoft.com/office/drawing/2014/main" id="{1D53EA4C-EAC2-42E3-9180-663B54273C40}"/>
+                <a16:creationId xmlns:a16="http://schemas.microsoft.com/office/drawing/2014/main" id="{DAAC9F75-5226-4FEC-BC7B-D9C82C0050B1}"/>
               </a:ext>
             </a:extLst>
           </p:cNvPr>
@@ -2329,7 +2339,7 @@
           <p:cNvPr id="2" name="Left column">
             <a:extLst xmlns:a="http://schemas.openxmlformats.org/drawingml/2006/main">
               <a:ext uri="{FF2B5EF4-FFF2-40B4-BE49-F238E27FC236}">
-                <a16:creationId xmlns:a16="http://schemas.microsoft.com/office/drawing/2014/main" id="{EAB276C0-8A82-4717-AA55-4BA0D3E50C87}"/>
+                <a16:creationId xmlns:a16="http://schemas.microsoft.com/office/drawing/2014/main" id="{5184E02E-A5B8-43E0-9153-ABC1EF6158E3}"/>
               </a:ext>
             </a:extLst>
           </p:cNvPr>
@@ -2558,7 +2568,7 @@
           <p:cNvPr id="3" name="Right column">
             <a:extLst xmlns:a="http://schemas.openxmlformats.org/drawingml/2006/main">
               <a:ext uri="{FF2B5EF4-FFF2-40B4-BE49-F238E27FC236}">
-                <a16:creationId xmlns:a16="http://schemas.microsoft.com/office/drawing/2014/main" id="{5F606438-FB92-459C-BD31-F173D8D7E232}"/>
+                <a16:creationId xmlns:a16="http://schemas.microsoft.com/office/drawing/2014/main" id="{6D369C22-3B3F-40F2-A8E7-ADC03A5B02EE}"/>
               </a:ext>
             </a:extLst>
           </p:cNvPr>
@@ -2804,7 +2814,7 @@
           <p:cNvPr id="3" name="Title">
             <a:extLst xmlns:a="http://schemas.openxmlformats.org/drawingml/2006/main">
               <a:ext uri="{FF2B5EF4-FFF2-40B4-BE49-F238E27FC236}">
-                <a16:creationId xmlns:a16="http://schemas.microsoft.com/office/drawing/2014/main" id="{2684C5E1-C2DE-4F66-9AAB-26F6649A2792}"/>
+                <a16:creationId xmlns:a16="http://schemas.microsoft.com/office/drawing/2014/main" id="{4FEEA8C8-92C0-4CCB-AAC0-1E752A5D3601}"/>
               </a:ext>
             </a:extLst>
           </p:cNvPr>
@@ -3033,7 +3043,7 @@
           <p:cNvPr id="2" name="Left column">
             <a:extLst xmlns:a="http://schemas.openxmlformats.org/drawingml/2006/main">
               <a:ext uri="{FF2B5EF4-FFF2-40B4-BE49-F238E27FC236}">
-                <a16:creationId xmlns:a16="http://schemas.microsoft.com/office/drawing/2014/main" id="{15102677-F2CC-467F-BCF6-A28F5C7990BB}"/>
+                <a16:creationId xmlns:a16="http://schemas.microsoft.com/office/drawing/2014/main" id="{C711CE82-CF88-486E-BCD7-04DBC1CA6EB8}"/>
               </a:ext>
             </a:extLst>
           </p:cNvPr>
@@ -3300,12 +3310,12 @@
   </p:cSld>
   <p:clrMap bg1="lt1" tx1="dk1" bg2="lt2" tx2="dk2" accent1="accent1" accent2="accent2" accent3="accent3" accent4="accent4" accent5="accent5" accent6="accent6" hlink="hlink" folHlink="folHlink"/>
   <p:sldLayoutIdLst>
-    <p:sldLayoutId xmlns:r="http://schemas.openxmlformats.org/officeDocument/2006/relationships" id="2147483649" r:id="Ra354948b63a54baa"/>
-    <p:sldLayoutId xmlns:r="http://schemas.openxmlformats.org/officeDocument/2006/relationships" id="2147483650" r:id="R931bc39c349d4f17"/>
-    <p:sldLayoutId xmlns:r="http://schemas.openxmlformats.org/officeDocument/2006/relationships" id="2147483651" r:id="R10431083746e457b"/>
-    <p:sldLayoutId xmlns:r="http://schemas.openxmlformats.org/officeDocument/2006/relationships" id="2147483652" r:id="R6e8de8c1374f4958"/>
-    <p:sldLayoutId xmlns:r="http://schemas.openxmlformats.org/officeDocument/2006/relationships" id="2147483653" r:id="Rf066a2b200ab4c75"/>
-    <p:sldLayoutId xmlns:r="http://schemas.openxmlformats.org/officeDocument/2006/relationships" id="2147483654" r:id="Rcbf5df8ed3764b20"/>
+    <p:sldLayoutId xmlns:r="http://schemas.openxmlformats.org/officeDocument/2006/relationships" id="2147483649" r:id="R925c8f53bb7d4470"/>
+    <p:sldLayoutId xmlns:r="http://schemas.openxmlformats.org/officeDocument/2006/relationships" id="2147483650" r:id="R505722ad65284e6f"/>
+    <p:sldLayoutId xmlns:r="http://schemas.openxmlformats.org/officeDocument/2006/relationships" id="2147483651" r:id="R3ea7d4079d044cb8"/>
+    <p:sldLayoutId xmlns:r="http://schemas.openxmlformats.org/officeDocument/2006/relationships" id="2147483652" r:id="Rc8e1de56e6714e5e"/>
+    <p:sldLayoutId xmlns:r="http://schemas.openxmlformats.org/officeDocument/2006/relationships" id="2147483653" r:id="Ra7b381510b944a2c"/>
+    <p:sldLayoutId xmlns:r="http://schemas.openxmlformats.org/officeDocument/2006/relationships" id="2147483654" r:id="R43a64591fe4d448c"/>
   </p:sldLayoutIdLst>
   <p:txStyles>
     <p:titleStyle>
@@ -3856,7 +3866,7 @@
           <p:cNvPr id="9" name="">
             <a:extLst xmlns:a="http://schemas.openxmlformats.org/drawingml/2006/main">
               <a:ext uri="{FF2B5EF4-FFF2-40B4-BE49-F238E27FC236}">
-                <a16:creationId xmlns:a16="http://schemas.microsoft.com/office/drawing/2014/main" id="{848C6B73-D6C2-4D08-8ABA-EE4E6BBF908F}"/>
+                <a16:creationId xmlns:a16="http://schemas.microsoft.com/office/drawing/2014/main" id="{95BE53F7-C1CA-4B9B-A3ED-C78CDE6F63C4}"/>
               </a:ext>
             </a:extLst>
           </p:cNvPr>
@@ -3887,7 +3897,7 @@
           <p:cNvPr id="2" name="">
             <a:extLst xmlns:a="http://schemas.openxmlformats.org/drawingml/2006/main">
               <a:ext uri="{FF2B5EF4-FFF2-40B4-BE49-F238E27FC236}">
-                <a16:creationId xmlns:a16="http://schemas.microsoft.com/office/drawing/2014/main" id="{D22BB768-CB3A-4B24-AE42-7B9C9F648775}"/>
+                <a16:creationId xmlns:a16="http://schemas.microsoft.com/office/drawing/2014/main" id="{32F5CD21-2D2D-48F7-ADD2-893C0CDA4804}"/>
               </a:ext>
             </a:extLst>
           </p:cNvPr>
@@ -4046,7 +4056,7 @@
           <p:cNvPr id="3" name="">
             <a:extLst xmlns:a="http://schemas.openxmlformats.org/drawingml/2006/main">
               <a:ext uri="{FF2B5EF4-FFF2-40B4-BE49-F238E27FC236}">
-                <a16:creationId xmlns:a16="http://schemas.microsoft.com/office/drawing/2014/main" id="{2451EBB0-5748-408E-BC36-44DE1F005622}"/>
+                <a16:creationId xmlns:a16="http://schemas.microsoft.com/office/drawing/2014/main" id="{F90A1A4A-4A31-4061-B839-023A079F30CF}"/>
               </a:ext>
             </a:extLst>
           </p:cNvPr>
@@ -4228,7 +4238,7 @@
           <p:cNvPr id="4" name="">
             <a:extLst xmlns:a="http://schemas.openxmlformats.org/drawingml/2006/main">
               <a:ext uri="{FF2B5EF4-FFF2-40B4-BE49-F238E27FC236}">
-                <a16:creationId xmlns:a16="http://schemas.microsoft.com/office/drawing/2014/main" id="{282E9944-264A-43F4-9085-6E7B9364F307}"/>
+                <a16:creationId xmlns:a16="http://schemas.microsoft.com/office/drawing/2014/main" id="{05950725-8696-4029-8AE4-43BD1E8829B7}"/>
               </a:ext>
             </a:extLst>
           </p:cNvPr>
@@ -4259,7 +4269,7 @@
           <p:cNvPr id="5" name="">
             <a:extLst xmlns:a="http://schemas.openxmlformats.org/drawingml/2006/main">
               <a:ext uri="{FF2B5EF4-FFF2-40B4-BE49-F238E27FC236}">
-                <a16:creationId xmlns:a16="http://schemas.microsoft.com/office/drawing/2014/main" id="{5296A4D6-092D-4305-8E52-82588F5DA2C8}"/>
+                <a16:creationId xmlns:a16="http://schemas.microsoft.com/office/drawing/2014/main" id="{8545E68F-33A9-49D0-8CC9-E88E784B1648}"/>
               </a:ext>
             </a:extLst>
           </p:cNvPr>
@@ -4418,7 +4428,7 @@
           <p:cNvPr id="6" name="">
             <a:extLst xmlns:a="http://schemas.openxmlformats.org/drawingml/2006/main">
               <a:ext uri="{FF2B5EF4-FFF2-40B4-BE49-F238E27FC236}">
-                <a16:creationId xmlns:a16="http://schemas.microsoft.com/office/drawing/2014/main" id="{43A2FD03-733C-43E4-91CF-72DFBBF561D4}"/>
+                <a16:creationId xmlns:a16="http://schemas.microsoft.com/office/drawing/2014/main" id="{F78F2679-DD30-4809-8114-66366B828366}"/>
               </a:ext>
             </a:extLst>
           </p:cNvPr>
@@ -4600,7 +4610,7 @@
           <p:cNvPr id="7" name="">
             <a:extLst xmlns:a="http://schemas.openxmlformats.org/drawingml/2006/main">
               <a:ext uri="{FF2B5EF4-FFF2-40B4-BE49-F238E27FC236}">
-                <a16:creationId xmlns:a16="http://schemas.microsoft.com/office/drawing/2014/main" id="{A0D761E4-44AA-4257-93CA-D45D6B9C1C05}"/>
+                <a16:creationId xmlns:a16="http://schemas.microsoft.com/office/drawing/2014/main" id="{A02F336D-A99A-4616-A3F3-8733886BC888}"/>
               </a:ext>
             </a:extLst>
           </p:cNvPr>
@@ -4610,7 +4620,7 @@
           <p:nvPr/>
         </p:nvPicPr>
         <p:blipFill>
-          <a:blip xmlns:r="http://schemas.openxmlformats.org/officeDocument/2006/relationships" xmlns:a="http://schemas.openxmlformats.org/drawingml/2006/main" r:embed="Re281c1b4c9bb48a0"/>
+          <a:blip xmlns:r="http://schemas.openxmlformats.org/officeDocument/2006/relationships" xmlns:a="http://schemas.openxmlformats.org/drawingml/2006/main" r:embed="Raea5678f746d4627"/>
           <a:stretch xmlns:a="http://schemas.openxmlformats.org/drawingml/2006/main"/>
         </p:blipFill>
         <p:spPr>
@@ -4628,7 +4638,7 @@
           <p:cNvPr id="8" name="">
             <a:extLst xmlns:a="http://schemas.openxmlformats.org/drawingml/2006/main">
               <a:ext uri="{FF2B5EF4-FFF2-40B4-BE49-F238E27FC236}">
-                <a16:creationId xmlns:a16="http://schemas.microsoft.com/office/drawing/2014/main" id="{11657ACA-88DB-4E02-B4C2-FCB0E43F8058}"/>
+                <a16:creationId xmlns:a16="http://schemas.microsoft.com/office/drawing/2014/main" id="{BC1B057A-A9C9-461D-B314-050D06A98625}"/>
               </a:ext>
             </a:extLst>
           </p:cNvPr>
@@ -4777,7 +4787,7 @@
                 <a:ea typeface="Arial"/>
                 <a:cs typeface="Arial"/>
               </a:rPr>
-              <a:t>UNITY EDITOR PREVIEW  /  WEEK 05 SCENE</a:t>
+              <a:t>UNITY EDITOR PREVIEW  /  WEEK 07 HARDWARE</a:t>
             </a:r>
           </a:p>
         </p:txBody>
@@ -4785,7 +4795,7 @@
     </p:spTree>
     <p:extLst>
       <p:ext uri="{BB962C8B-B14F-4D97-AF65-F5344CB8AC3E}">
-        <p14:creationId xmlns:p14="http://schemas.microsoft.com/office/powerpoint/2010/main" val="2073032981"/>
+        <p14:creationId xmlns:p14="http://schemas.microsoft.com/office/powerpoint/2010/main" val="697602603"/>
       </p:ext>
     </p:extLst>
   </p:cSld>
@@ -4816,7 +4826,7 @@
           <p:cNvPr id="30" name="">
             <a:extLst xmlns:a="http://schemas.openxmlformats.org/drawingml/2006/main">
               <a:ext uri="{FF2B5EF4-FFF2-40B4-BE49-F238E27FC236}">
-                <a16:creationId xmlns:a16="http://schemas.microsoft.com/office/drawing/2014/main" id="{E973ACAC-D364-4EC8-BFF5-4E1CC39BFC5C}"/>
+                <a16:creationId xmlns:a16="http://schemas.microsoft.com/office/drawing/2014/main" id="{7F64197F-747F-4A92-9ECD-27566A4003AB}"/>
               </a:ext>
             </a:extLst>
           </p:cNvPr>
@@ -4847,7 +4857,7 @@
           <p:cNvPr id="2" name="">
             <a:extLst xmlns:a="http://schemas.openxmlformats.org/drawingml/2006/main">
               <a:ext uri="{FF2B5EF4-FFF2-40B4-BE49-F238E27FC236}">
-                <a16:creationId xmlns:a16="http://schemas.microsoft.com/office/drawing/2014/main" id="{0468318F-E1B9-483A-9C7B-917AE986E988}"/>
+                <a16:creationId xmlns:a16="http://schemas.microsoft.com/office/drawing/2014/main" id="{A20971B0-10FC-47A1-BE63-1278FEB187A1}"/>
               </a:ext>
             </a:extLst>
           </p:cNvPr>
@@ -5006,7 +5016,7 @@
           <p:cNvPr id="3" name="">
             <a:extLst xmlns:a="http://schemas.openxmlformats.org/drawingml/2006/main">
               <a:ext uri="{FF2B5EF4-FFF2-40B4-BE49-F238E27FC236}">
-                <a16:creationId xmlns:a16="http://schemas.microsoft.com/office/drawing/2014/main" id="{9A5213AD-3D0E-43D9-A1E5-D953A60AE17A}"/>
+                <a16:creationId xmlns:a16="http://schemas.microsoft.com/office/drawing/2014/main" id="{9A86032F-FADE-41E1-9C63-CFB7075A04D9}"/>
               </a:ext>
             </a:extLst>
           </p:cNvPr>
@@ -5037,7 +5047,7 @@
           <p:cNvPr id="4" name="">
             <a:extLst xmlns:a="http://schemas.openxmlformats.org/drawingml/2006/main">
               <a:ext uri="{FF2B5EF4-FFF2-40B4-BE49-F238E27FC236}">
-                <a16:creationId xmlns:a16="http://schemas.microsoft.com/office/drawing/2014/main" id="{CC62FF03-9532-492C-8418-330C04F51664}"/>
+                <a16:creationId xmlns:a16="http://schemas.microsoft.com/office/drawing/2014/main" id="{8739B516-149C-429D-8D1B-C2D1FEE1FA81}"/>
               </a:ext>
             </a:extLst>
           </p:cNvPr>
@@ -5196,7 +5206,7 @@
           <p:cNvPr id="5" name="">
             <a:extLst xmlns:a="http://schemas.openxmlformats.org/drawingml/2006/main">
               <a:ext uri="{FF2B5EF4-FFF2-40B4-BE49-F238E27FC236}">
-                <a16:creationId xmlns:a16="http://schemas.microsoft.com/office/drawing/2014/main" id="{81911A64-1B56-4FAB-9768-996723B55D73}"/>
+                <a16:creationId xmlns:a16="http://schemas.microsoft.com/office/drawing/2014/main" id="{2C941163-D022-41FE-BE68-21592141E7ED}"/>
               </a:ext>
             </a:extLst>
           </p:cNvPr>
@@ -5355,7 +5365,7 @@
           <p:cNvPr id="6" name="">
             <a:extLst xmlns:a="http://schemas.openxmlformats.org/drawingml/2006/main">
               <a:ext uri="{FF2B5EF4-FFF2-40B4-BE49-F238E27FC236}">
-                <a16:creationId xmlns:a16="http://schemas.microsoft.com/office/drawing/2014/main" id="{D99274BB-98EF-4BA3-BE0E-FB5A77F4B4BD}"/>
+                <a16:creationId xmlns:a16="http://schemas.microsoft.com/office/drawing/2014/main" id="{81BA6226-B02E-4F72-875B-490DA8D6B169}"/>
               </a:ext>
             </a:extLst>
           </p:cNvPr>
@@ -5514,7 +5524,7 @@
           <p:cNvPr id="7" name="">
             <a:extLst xmlns:a="http://schemas.openxmlformats.org/drawingml/2006/main">
               <a:ext uri="{FF2B5EF4-FFF2-40B4-BE49-F238E27FC236}">
-                <a16:creationId xmlns:a16="http://schemas.microsoft.com/office/drawing/2014/main" id="{6F58ED10-68A0-4351-B479-4EAF746008A5}"/>
+                <a16:creationId xmlns:a16="http://schemas.microsoft.com/office/drawing/2014/main" id="{55363773-440D-4433-8EF4-FD64D781B005}"/>
               </a:ext>
             </a:extLst>
           </p:cNvPr>
@@ -5547,7 +5557,7 @@
           <p:cNvPr id="8" name="">
             <a:extLst xmlns:a="http://schemas.openxmlformats.org/drawingml/2006/main">
               <a:ext uri="{FF2B5EF4-FFF2-40B4-BE49-F238E27FC236}">
-                <a16:creationId xmlns:a16="http://schemas.microsoft.com/office/drawing/2014/main" id="{9C9F58A0-7377-4E0F-97C7-C99E4596D9AF}"/>
+                <a16:creationId xmlns:a16="http://schemas.microsoft.com/office/drawing/2014/main" id="{611EE0C8-B508-40A3-9CF3-5E470222FFFB}"/>
               </a:ext>
             </a:extLst>
           </p:cNvPr>
@@ -5706,7 +5716,7 @@
           <p:cNvPr id="9" name="">
             <a:extLst xmlns:a="http://schemas.openxmlformats.org/drawingml/2006/main">
               <a:ext uri="{FF2B5EF4-FFF2-40B4-BE49-F238E27FC236}">
-                <a16:creationId xmlns:a16="http://schemas.microsoft.com/office/drawing/2014/main" id="{56A9F6FE-E7E3-4D58-B27B-66DC5AA1139D}"/>
+                <a16:creationId xmlns:a16="http://schemas.microsoft.com/office/drawing/2014/main" id="{C894091C-9F92-44B5-A5FC-3BFB608685CD}"/>
               </a:ext>
             </a:extLst>
           </p:cNvPr>
@@ -5865,7 +5875,7 @@
           <p:cNvPr id="10" name="">
             <a:extLst xmlns:a="http://schemas.openxmlformats.org/drawingml/2006/main">
               <a:ext uri="{FF2B5EF4-FFF2-40B4-BE49-F238E27FC236}">
-                <a16:creationId xmlns:a16="http://schemas.microsoft.com/office/drawing/2014/main" id="{ABB07FC1-751F-437B-9ED1-E20361779FA0}"/>
+                <a16:creationId xmlns:a16="http://schemas.microsoft.com/office/drawing/2014/main" id="{420EA93E-A708-4EBE-8AE9-DAA8493C4244}"/>
               </a:ext>
             </a:extLst>
           </p:cNvPr>
@@ -6024,7 +6034,7 @@
           <p:cNvPr id="11" name="">
             <a:extLst xmlns:a="http://schemas.openxmlformats.org/drawingml/2006/main">
               <a:ext uri="{FF2B5EF4-FFF2-40B4-BE49-F238E27FC236}">
-                <a16:creationId xmlns:a16="http://schemas.microsoft.com/office/drawing/2014/main" id="{852780D1-7EA4-4188-B3F7-D5E2C15D0472}"/>
+                <a16:creationId xmlns:a16="http://schemas.microsoft.com/office/drawing/2014/main" id="{E0759321-EA58-436A-BE9A-55CBD86E966F}"/>
               </a:ext>
             </a:extLst>
           </p:cNvPr>
@@ -6057,7 +6067,7 @@
           <p:cNvPr id="12" name="">
             <a:extLst xmlns:a="http://schemas.openxmlformats.org/drawingml/2006/main">
               <a:ext uri="{FF2B5EF4-FFF2-40B4-BE49-F238E27FC236}">
-                <a16:creationId xmlns:a16="http://schemas.microsoft.com/office/drawing/2014/main" id="{53586198-36DF-4E3E-A18E-53C1713B0AC3}"/>
+                <a16:creationId xmlns:a16="http://schemas.microsoft.com/office/drawing/2014/main" id="{9C6A2FE7-BFDC-4298-9F14-135D0AF0CDE2}"/>
               </a:ext>
             </a:extLst>
           </p:cNvPr>
@@ -6216,7 +6226,7 @@
           <p:cNvPr id="13" name="">
             <a:extLst xmlns:a="http://schemas.openxmlformats.org/drawingml/2006/main">
               <a:ext uri="{FF2B5EF4-FFF2-40B4-BE49-F238E27FC236}">
-                <a16:creationId xmlns:a16="http://schemas.microsoft.com/office/drawing/2014/main" id="{5F23A260-2667-4B39-895D-664B53051D5F}"/>
+                <a16:creationId xmlns:a16="http://schemas.microsoft.com/office/drawing/2014/main" id="{6D1BE567-6D1B-455C-8ECB-372754B3CA08}"/>
               </a:ext>
             </a:extLst>
           </p:cNvPr>
@@ -6375,7 +6385,7 @@
           <p:cNvPr id="14" name="">
             <a:extLst xmlns:a="http://schemas.openxmlformats.org/drawingml/2006/main">
               <a:ext uri="{FF2B5EF4-FFF2-40B4-BE49-F238E27FC236}">
-                <a16:creationId xmlns:a16="http://schemas.microsoft.com/office/drawing/2014/main" id="{1A924774-5E26-4A78-94B7-A4EC063C87DB}"/>
+                <a16:creationId xmlns:a16="http://schemas.microsoft.com/office/drawing/2014/main" id="{052A62B9-0213-4928-8598-AE6A54C83738}"/>
               </a:ext>
             </a:extLst>
           </p:cNvPr>
@@ -6524,7 +6534,7 @@
                 <a:ea typeface="Arial"/>
                 <a:cs typeface="Arial"/>
               </a:rPr>
-              <a:t>Pick up the cyan core</a:t>
+              <a:t>Pick up the E-07 energy core</a:t>
             </a:r>
           </a:p>
         </p:txBody>
@@ -6534,7 +6544,7 @@
           <p:cNvPr id="15" name="">
             <a:extLst xmlns:a="http://schemas.openxmlformats.org/drawingml/2006/main">
               <a:ext uri="{FF2B5EF4-FFF2-40B4-BE49-F238E27FC236}">
-                <a16:creationId xmlns:a16="http://schemas.microsoft.com/office/drawing/2014/main" id="{9A3A4601-3CFD-400A-82E6-00FD7404B56D}"/>
+                <a16:creationId xmlns:a16="http://schemas.microsoft.com/office/drawing/2014/main" id="{E602FCEF-1AEF-48A9-BDC3-60643C446C1D}"/>
               </a:ext>
             </a:extLst>
           </p:cNvPr>
@@ -6567,7 +6577,7 @@
           <p:cNvPr id="16" name="">
             <a:extLst xmlns:a="http://schemas.openxmlformats.org/drawingml/2006/main">
               <a:ext uri="{FF2B5EF4-FFF2-40B4-BE49-F238E27FC236}">
-                <a16:creationId xmlns:a16="http://schemas.microsoft.com/office/drawing/2014/main" id="{BB4D7036-066D-4A65-823A-497BBAC369B5}"/>
+                <a16:creationId xmlns:a16="http://schemas.microsoft.com/office/drawing/2014/main" id="{3037ADCA-F5A7-4E51-9B28-C6BEBDB867EA}"/>
               </a:ext>
             </a:extLst>
           </p:cNvPr>
@@ -6726,7 +6736,7 @@
           <p:cNvPr id="17" name="">
             <a:extLst xmlns:a="http://schemas.openxmlformats.org/drawingml/2006/main">
               <a:ext uri="{FF2B5EF4-FFF2-40B4-BE49-F238E27FC236}">
-                <a16:creationId xmlns:a16="http://schemas.microsoft.com/office/drawing/2014/main" id="{E26657FE-995F-4438-9D19-DDBF87692002}"/>
+                <a16:creationId xmlns:a16="http://schemas.microsoft.com/office/drawing/2014/main" id="{B996BC9C-8C3A-4191-AE76-83DE4A6C16D5}"/>
               </a:ext>
             </a:extLst>
           </p:cNvPr>
@@ -6885,7 +6895,7 @@
           <p:cNvPr id="18" name="">
             <a:extLst xmlns:a="http://schemas.openxmlformats.org/drawingml/2006/main">
               <a:ext uri="{FF2B5EF4-FFF2-40B4-BE49-F238E27FC236}">
-                <a16:creationId xmlns:a16="http://schemas.microsoft.com/office/drawing/2014/main" id="{B4A884C1-4970-4349-BFD3-A26974B0EB31}"/>
+                <a16:creationId xmlns:a16="http://schemas.microsoft.com/office/drawing/2014/main" id="{60BAE886-01CD-48BC-B467-6DF448662157}"/>
               </a:ext>
             </a:extLst>
           </p:cNvPr>
@@ -7034,7 +7044,7 @@
                 <a:ea typeface="Arial"/>
                 <a:cs typeface="Arial"/>
               </a:rPr>
-              <a:t>Release it by the orange socket</a:t>
+              <a:t>Release it at the amber coupler</a:t>
             </a:r>
           </a:p>
         </p:txBody>
@@ -7044,7 +7054,7 @@
           <p:cNvPr id="19" name="">
             <a:extLst xmlns:a="http://schemas.openxmlformats.org/drawingml/2006/main">
               <a:ext uri="{FF2B5EF4-FFF2-40B4-BE49-F238E27FC236}">
-                <a16:creationId xmlns:a16="http://schemas.microsoft.com/office/drawing/2014/main" id="{87CAAC44-417A-4FB3-A232-E63BEFFAECA1}"/>
+                <a16:creationId xmlns:a16="http://schemas.microsoft.com/office/drawing/2014/main" id="{3EFE6C9C-3DA8-440C-A9EF-C2FC0EB59344}"/>
               </a:ext>
             </a:extLst>
           </p:cNvPr>
@@ -7077,7 +7087,7 @@
           <p:cNvPr id="20" name="">
             <a:extLst xmlns:a="http://schemas.openxmlformats.org/drawingml/2006/main">
               <a:ext uri="{FF2B5EF4-FFF2-40B4-BE49-F238E27FC236}">
-                <a16:creationId xmlns:a16="http://schemas.microsoft.com/office/drawing/2014/main" id="{28D7D6D0-56BA-4772-BE10-F0898149DD64}"/>
+                <a16:creationId xmlns:a16="http://schemas.microsoft.com/office/drawing/2014/main" id="{6D44578F-1B69-4B09-AC8F-D9A2EB7C3BFA}"/>
               </a:ext>
             </a:extLst>
           </p:cNvPr>
@@ -7236,7 +7246,7 @@
           <p:cNvPr id="21" name="">
             <a:extLst xmlns:a="http://schemas.openxmlformats.org/drawingml/2006/main">
               <a:ext uri="{FF2B5EF4-FFF2-40B4-BE49-F238E27FC236}">
-                <a16:creationId xmlns:a16="http://schemas.microsoft.com/office/drawing/2014/main" id="{5C5AEBF8-3DA8-475D-A822-DA326B3B98FC}"/>
+                <a16:creationId xmlns:a16="http://schemas.microsoft.com/office/drawing/2014/main" id="{FE6B2CC3-A90C-4C2F-A94F-FFF3C68D5470}"/>
               </a:ext>
             </a:extLst>
           </p:cNvPr>
@@ -7395,7 +7405,7 @@
           <p:cNvPr id="22" name="">
             <a:extLst xmlns:a="http://schemas.openxmlformats.org/drawingml/2006/main">
               <a:ext uri="{FF2B5EF4-FFF2-40B4-BE49-F238E27FC236}">
-                <a16:creationId xmlns:a16="http://schemas.microsoft.com/office/drawing/2014/main" id="{B911F43E-D703-4699-9F73-243FEAC07EAE}"/>
+                <a16:creationId xmlns:a16="http://schemas.microsoft.com/office/drawing/2014/main" id="{14A65C08-250F-4B50-8114-D1448E27516F}"/>
               </a:ext>
             </a:extLst>
           </p:cNvPr>
@@ -7544,7 +7554,7 @@
                 <a:ea typeface="Arial"/>
                 <a:cs typeface="Arial"/>
               </a:rPr>
-              <a:t>Watch the powered hatch rise</a:t>
+              <a:t>Watch both door panels slide apart</a:t>
             </a:r>
           </a:p>
         </p:txBody>
@@ -7554,7 +7564,7 @@
           <p:cNvPr id="23" name="">
             <a:extLst xmlns:a="http://schemas.openxmlformats.org/drawingml/2006/main">
               <a:ext uri="{FF2B5EF4-FFF2-40B4-BE49-F238E27FC236}">
-                <a16:creationId xmlns:a16="http://schemas.microsoft.com/office/drawing/2014/main" id="{28879568-6A88-4EE8-8B89-043DE0C61E11}"/>
+                <a16:creationId xmlns:a16="http://schemas.microsoft.com/office/drawing/2014/main" id="{9722C5ED-114E-43D2-BCB2-B656AAA8AEE5}"/>
               </a:ext>
             </a:extLst>
           </p:cNvPr>
@@ -7587,7 +7597,7 @@
           <p:cNvPr id="24" name="">
             <a:extLst xmlns:a="http://schemas.openxmlformats.org/drawingml/2006/main">
               <a:ext uri="{FF2B5EF4-FFF2-40B4-BE49-F238E27FC236}">
-                <a16:creationId xmlns:a16="http://schemas.microsoft.com/office/drawing/2014/main" id="{32E555C9-F0B8-49A2-ACE0-DA2F3E06BA22}"/>
+                <a16:creationId xmlns:a16="http://schemas.microsoft.com/office/drawing/2014/main" id="{A9AB91D1-9A16-45C8-8C2B-285191F5DB54}"/>
               </a:ext>
             </a:extLst>
           </p:cNvPr>
@@ -7746,7 +7756,7 @@
           <p:cNvPr id="25" name="">
             <a:extLst xmlns:a="http://schemas.openxmlformats.org/drawingml/2006/main">
               <a:ext uri="{FF2B5EF4-FFF2-40B4-BE49-F238E27FC236}">
-                <a16:creationId xmlns:a16="http://schemas.microsoft.com/office/drawing/2014/main" id="{968DFCEC-FB60-43D4-9CAE-54EFCF0576C2}"/>
+                <a16:creationId xmlns:a16="http://schemas.microsoft.com/office/drawing/2014/main" id="{CBB035EE-0252-4174-9F62-438CD5FCCFC0}"/>
               </a:ext>
             </a:extLst>
           </p:cNvPr>
@@ -7905,7 +7915,7 @@
           <p:cNvPr id="26" name="">
             <a:extLst xmlns:a="http://schemas.openxmlformats.org/drawingml/2006/main">
               <a:ext uri="{FF2B5EF4-FFF2-40B4-BE49-F238E27FC236}">
-                <a16:creationId xmlns:a16="http://schemas.microsoft.com/office/drawing/2014/main" id="{15A2C788-3076-47C6-8A9A-0539DCA97D1B}"/>
+                <a16:creationId xmlns:a16="http://schemas.microsoft.com/office/drawing/2014/main" id="{8C8E97F0-ACC8-4802-8102-0E7D285E5A5C}"/>
               </a:ext>
             </a:extLst>
           </p:cNvPr>
@@ -8064,7 +8074,7 @@
           <p:cNvPr id="27" name="">
             <a:extLst xmlns:a="http://schemas.openxmlformats.org/drawingml/2006/main">
               <a:ext uri="{FF2B5EF4-FFF2-40B4-BE49-F238E27FC236}">
-                <a16:creationId xmlns:a16="http://schemas.microsoft.com/office/drawing/2014/main" id="{F1510425-7401-496E-A7C5-339AE57467E2}"/>
+                <a16:creationId xmlns:a16="http://schemas.microsoft.com/office/drawing/2014/main" id="{4362E841-E0A3-486B-AE90-1416C75BA0F2}"/>
               </a:ext>
             </a:extLst>
           </p:cNvPr>
@@ -8095,7 +8105,7 @@
           <p:cNvPr id="28" name="">
             <a:extLst xmlns:a="http://schemas.openxmlformats.org/drawingml/2006/main">
               <a:ext uri="{FF2B5EF4-FFF2-40B4-BE49-F238E27FC236}">
-                <a16:creationId xmlns:a16="http://schemas.microsoft.com/office/drawing/2014/main" id="{D7DCA174-52D8-4D85-9D6B-464D1F77627E}"/>
+                <a16:creationId xmlns:a16="http://schemas.microsoft.com/office/drawing/2014/main" id="{C8F75957-AB66-41F4-9471-DA15BDFCCBCC}"/>
               </a:ext>
             </a:extLst>
           </p:cNvPr>
@@ -8254,7 +8264,7 @@
           <p:cNvPr id="29" name="">
             <a:extLst xmlns:a="http://schemas.openxmlformats.org/drawingml/2006/main">
               <a:ext uri="{FF2B5EF4-FFF2-40B4-BE49-F238E27FC236}">
-                <a16:creationId xmlns:a16="http://schemas.microsoft.com/office/drawing/2014/main" id="{236283B6-FC0E-412C-932C-976D0937CF4B}"/>
+                <a16:creationId xmlns:a16="http://schemas.microsoft.com/office/drawing/2014/main" id="{F67197D6-751C-4E71-9AE5-9833F3EC88D9}"/>
               </a:ext>
             </a:extLst>
           </p:cNvPr>
@@ -8426,7 +8436,7 @@
                 <a:ea typeface="Arial"/>
                 <a:cs typeface="Arial"/>
               </a:rPr>
-              <a:t>Power changes the indicator and opens the hatch.</a:t>
+              <a:t>The clamps engage, the locks retract, and both doors open.</a:t>
             </a:r>
           </a:p>
         </p:txBody>
@@ -8434,7 +8444,7 @@
     </p:spTree>
     <p:extLst>
       <p:ext uri="{BB962C8B-B14F-4D97-AF65-F5344CB8AC3E}">
-        <p14:creationId xmlns:p14="http://schemas.microsoft.com/office/powerpoint/2010/main" val="326498232"/>
+        <p14:creationId xmlns:p14="http://schemas.microsoft.com/office/powerpoint/2010/main" val="410288425"/>
       </p:ext>
     </p:extLst>
   </p:cSld>
@@ -8465,7 +8475,7 @@
           <p:cNvPr id="12" name="">
             <a:extLst xmlns:a="http://schemas.openxmlformats.org/drawingml/2006/main">
               <a:ext uri="{FF2B5EF4-FFF2-40B4-BE49-F238E27FC236}">
-                <a16:creationId xmlns:a16="http://schemas.microsoft.com/office/drawing/2014/main" id="{557AC2AB-8E92-4948-BA19-66406BEA5846}"/>
+                <a16:creationId xmlns:a16="http://schemas.microsoft.com/office/drawing/2014/main" id="{8B6D368F-2C8F-486A-94EF-FF0F8FADFAB6}"/>
               </a:ext>
             </a:extLst>
           </p:cNvPr>
@@ -8496,7 +8506,7 @@
           <p:cNvPr id="2" name="">
             <a:extLst xmlns:a="http://schemas.openxmlformats.org/drawingml/2006/main">
               <a:ext uri="{FF2B5EF4-FFF2-40B4-BE49-F238E27FC236}">
-                <a16:creationId xmlns:a16="http://schemas.microsoft.com/office/drawing/2014/main" id="{F49F716D-5C14-4A43-B984-B340A6DC42CB}"/>
+                <a16:creationId xmlns:a16="http://schemas.microsoft.com/office/drawing/2014/main" id="{8FDB5CBA-33F7-4288-B494-2DF314085CB9}"/>
               </a:ext>
             </a:extLst>
           </p:cNvPr>
@@ -8655,7 +8665,7 @@
           <p:cNvPr id="3" name="">
             <a:extLst xmlns:a="http://schemas.openxmlformats.org/drawingml/2006/main">
               <a:ext uri="{FF2B5EF4-FFF2-40B4-BE49-F238E27FC236}">
-                <a16:creationId xmlns:a16="http://schemas.microsoft.com/office/drawing/2014/main" id="{AF319A08-32B5-4313-B601-B8644FD6FD7A}"/>
+                <a16:creationId xmlns:a16="http://schemas.microsoft.com/office/drawing/2014/main" id="{2763137D-9A8D-46E5-82D8-13F8EB07120E}"/>
               </a:ext>
             </a:extLst>
           </p:cNvPr>
@@ -8686,7 +8696,7 @@
           <p:cNvPr id="4" name="">
             <a:extLst xmlns:a="http://schemas.openxmlformats.org/drawingml/2006/main">
               <a:ext uri="{FF2B5EF4-FFF2-40B4-BE49-F238E27FC236}">
-                <a16:creationId xmlns:a16="http://schemas.microsoft.com/office/drawing/2014/main" id="{C7C3B604-0B80-4C94-89EA-33205FD01778}"/>
+                <a16:creationId xmlns:a16="http://schemas.microsoft.com/office/drawing/2014/main" id="{EDEDF68B-75C1-4170-BFD3-AA32B7AAD3CE}"/>
               </a:ext>
             </a:extLst>
           </p:cNvPr>
@@ -8845,7 +8855,7 @@
           <p:cNvPr id="5" name="">
             <a:extLst xmlns:a="http://schemas.openxmlformats.org/drawingml/2006/main">
               <a:ext uri="{FF2B5EF4-FFF2-40B4-BE49-F238E27FC236}">
-                <a16:creationId xmlns:a16="http://schemas.microsoft.com/office/drawing/2014/main" id="{B923A859-975F-4FDE-B0EC-ACA196723A44}"/>
+                <a16:creationId xmlns:a16="http://schemas.microsoft.com/office/drawing/2014/main" id="{5DBA4166-C9BD-432A-A096-85494374F0DF}"/>
               </a:ext>
             </a:extLst>
           </p:cNvPr>
@@ -9004,7 +9014,7 @@
           <p:cNvPr id="6" name="">
             <a:extLst xmlns:a="http://schemas.openxmlformats.org/drawingml/2006/main">
               <a:ext uri="{FF2B5EF4-FFF2-40B4-BE49-F238E27FC236}">
-                <a16:creationId xmlns:a16="http://schemas.microsoft.com/office/drawing/2014/main" id="{550B53A1-18C6-4B1A-B099-8F41B35FEC2A}"/>
+                <a16:creationId xmlns:a16="http://schemas.microsoft.com/office/drawing/2014/main" id="{49C1433A-DB8E-4329-8881-EE9051E7EDE8}"/>
               </a:ext>
             </a:extLst>
           </p:cNvPr>
@@ -9163,7 +9173,7 @@
           <p:cNvPr id="7" name="">
             <a:extLst xmlns:a="http://schemas.openxmlformats.org/drawingml/2006/main">
               <a:ext uri="{FF2B5EF4-FFF2-40B4-BE49-F238E27FC236}">
-                <a16:creationId xmlns:a16="http://schemas.microsoft.com/office/drawing/2014/main" id="{61690A7B-17B4-4471-8C34-4508CE62A6A1}"/>
+                <a16:creationId xmlns:a16="http://schemas.microsoft.com/office/drawing/2014/main" id="{5E3BA73D-B216-42DC-8204-C8045D4BA1A9}"/>
               </a:ext>
             </a:extLst>
           </p:cNvPr>
@@ -9173,7 +9183,7 @@
           <p:nvPr/>
         </p:nvPicPr>
         <p:blipFill>
-          <a:blip xmlns:r="http://schemas.openxmlformats.org/officeDocument/2006/relationships" xmlns:a="http://schemas.openxmlformats.org/drawingml/2006/main" r:embed="R954af5aa6ac747f4"/>
+          <a:blip xmlns:r="http://schemas.openxmlformats.org/officeDocument/2006/relationships" xmlns:a="http://schemas.openxmlformats.org/drawingml/2006/main" r:embed="R613fff0b0fe74f61"/>
           <a:stretch xmlns:a="http://schemas.openxmlformats.org/drawingml/2006/main"/>
         </p:blipFill>
         <p:spPr>
@@ -9191,7 +9201,7 @@
           <p:cNvPr id="8" name="">
             <a:extLst xmlns:a="http://schemas.openxmlformats.org/drawingml/2006/main">
               <a:ext uri="{FF2B5EF4-FFF2-40B4-BE49-F238E27FC236}">
-                <a16:creationId xmlns:a16="http://schemas.microsoft.com/office/drawing/2014/main" id="{091C42BC-856F-40AB-9031-C12CFAFFE6FD}"/>
+                <a16:creationId xmlns:a16="http://schemas.microsoft.com/office/drawing/2014/main" id="{54191E0B-107A-4B2E-B6C9-1B3F67F2EC84}"/>
               </a:ext>
             </a:extLst>
           </p:cNvPr>
@@ -9201,7 +9211,7 @@
           <p:nvPr/>
         </p:nvPicPr>
         <p:blipFill>
-          <a:blip xmlns:r="http://schemas.openxmlformats.org/officeDocument/2006/relationships" xmlns:a="http://schemas.openxmlformats.org/drawingml/2006/main" r:embed="Rf9eac769b78641a4"/>
+          <a:blip xmlns:r="http://schemas.openxmlformats.org/officeDocument/2006/relationships" xmlns:a="http://schemas.openxmlformats.org/drawingml/2006/main" r:embed="Rcf8c568b04884df3"/>
           <a:stretch xmlns:a="http://schemas.openxmlformats.org/drawingml/2006/main"/>
         </p:blipFill>
         <p:spPr>
@@ -9219,7 +9229,7 @@
           <p:cNvPr id="9" name="">
             <a:extLst xmlns:a="http://schemas.openxmlformats.org/drawingml/2006/main">
               <a:ext uri="{FF2B5EF4-FFF2-40B4-BE49-F238E27FC236}">
-                <a16:creationId xmlns:a16="http://schemas.microsoft.com/office/drawing/2014/main" id="{B6E36EDD-858D-457F-9CF0-E2C1B0567932}"/>
+                <a16:creationId xmlns:a16="http://schemas.microsoft.com/office/drawing/2014/main" id="{49E29290-B065-47EA-8CAF-71F61E18BEEE}"/>
               </a:ext>
             </a:extLst>
           </p:cNvPr>
@@ -9378,7 +9388,7 @@
           <p:cNvPr id="10" name="">
             <a:extLst xmlns:a="http://schemas.openxmlformats.org/drawingml/2006/main">
               <a:ext uri="{FF2B5EF4-FFF2-40B4-BE49-F238E27FC236}">
-                <a16:creationId xmlns:a16="http://schemas.microsoft.com/office/drawing/2014/main" id="{2DA5BAA0-C0FD-4D4E-B739-799AB508EF09}"/>
+                <a16:creationId xmlns:a16="http://schemas.microsoft.com/office/drawing/2014/main" id="{D2EADDB4-73FE-4D48-AF98-2D52A7C7FBA0}"/>
               </a:ext>
             </a:extLst>
           </p:cNvPr>
@@ -9537,7 +9547,7 @@
           <p:cNvPr id="11" name="">
             <a:extLst xmlns:a="http://schemas.openxmlformats.org/drawingml/2006/main">
               <a:ext uri="{FF2B5EF4-FFF2-40B4-BE49-F238E27FC236}">
-                <a16:creationId xmlns:a16="http://schemas.microsoft.com/office/drawing/2014/main" id="{E792B290-74AA-4199-B3F8-791509EA7390}"/>
+                <a16:creationId xmlns:a16="http://schemas.microsoft.com/office/drawing/2014/main" id="{82556C06-9817-4EA3-9CE1-F725424AB042}"/>
               </a:ext>
             </a:extLst>
           </p:cNvPr>
@@ -9694,7 +9704,7 @@
     </p:spTree>
     <p:extLst>
       <p:ext uri="{BB962C8B-B14F-4D97-AF65-F5344CB8AC3E}">
-        <p14:creationId xmlns:p14="http://schemas.microsoft.com/office/powerpoint/2010/main" val="1257076547"/>
+        <p14:creationId xmlns:p14="http://schemas.microsoft.com/office/powerpoint/2010/main" val="1911076991"/>
       </p:ext>
     </p:extLst>
   </p:cSld>
@@ -9722,10 +9732,10 @@
       </p:grpSpPr>
       <p:sp>
         <p:nvSpPr>
-          <p:cNvPr id="21" name="">
+          <p:cNvPr id="15" name="">
             <a:extLst xmlns:a="http://schemas.openxmlformats.org/drawingml/2006/main">
               <a:ext uri="{FF2B5EF4-FFF2-40B4-BE49-F238E27FC236}">
-                <a16:creationId xmlns:a16="http://schemas.microsoft.com/office/drawing/2014/main" id="{A6E2397E-07FC-4FFD-8153-12057DEA29BB}"/>
+                <a16:creationId xmlns:a16="http://schemas.microsoft.com/office/drawing/2014/main" id="{C9E10E8E-E28A-4DC9-8F82-C1D0ADE90867}"/>
               </a:ext>
             </a:extLst>
           </p:cNvPr>
@@ -9756,7 +9766,7 @@
           <p:cNvPr id="2" name="">
             <a:extLst xmlns:a="http://schemas.openxmlformats.org/drawingml/2006/main">
               <a:ext uri="{FF2B5EF4-FFF2-40B4-BE49-F238E27FC236}">
-                <a16:creationId xmlns:a16="http://schemas.microsoft.com/office/drawing/2014/main" id="{F5915F0E-C11C-4626-B062-28385F3E0C15}"/>
+                <a16:creationId xmlns:a16="http://schemas.microsoft.com/office/drawing/2014/main" id="{C787CEDB-CBC0-4F56-B15D-E58F113B13C7}"/>
               </a:ext>
             </a:extLst>
           </p:cNvPr>
@@ -9905,7 +9915,7 @@
                 <a:ea typeface="Arial"/>
                 <a:cs typeface="Arial"/>
               </a:rPr>
-              <a:t>One mission state connects input and feedback</a:t>
+              <a:t>Core, coupler and airlock feedback</a:t>
             </a:r>
           </a:p>
         </p:txBody>
@@ -9915,7 +9925,7 @@
           <p:cNvPr id="3" name="">
             <a:extLst xmlns:a="http://schemas.openxmlformats.org/drawingml/2006/main">
               <a:ext uri="{FF2B5EF4-FFF2-40B4-BE49-F238E27FC236}">
-                <a16:creationId xmlns:a16="http://schemas.microsoft.com/office/drawing/2014/main" id="{B8DB9A20-0B48-4D81-8643-42EA790E628A}"/>
+                <a16:creationId xmlns:a16="http://schemas.microsoft.com/office/drawing/2014/main" id="{54B9E59A-D3E7-4410-907C-E259F5E1FCCA}"/>
               </a:ext>
             </a:extLst>
           </p:cNvPr>
@@ -9946,7 +9956,7 @@
           <p:cNvPr id="4" name="">
             <a:extLst xmlns:a="http://schemas.openxmlformats.org/drawingml/2006/main">
               <a:ext uri="{FF2B5EF4-FFF2-40B4-BE49-F238E27FC236}">
-                <a16:creationId xmlns:a16="http://schemas.microsoft.com/office/drawing/2014/main" id="{D7E45362-5ACA-4490-97C3-733034414061}"/>
+                <a16:creationId xmlns:a16="http://schemas.microsoft.com/office/drawing/2014/main" id="{2814AC6B-560F-44EA-AB65-1D041C03F7B9}"/>
               </a:ext>
             </a:extLst>
           </p:cNvPr>
@@ -10105,7 +10115,7 @@
           <p:cNvPr id="5" name="">
             <a:extLst xmlns:a="http://schemas.openxmlformats.org/drawingml/2006/main">
               <a:ext uri="{FF2B5EF4-FFF2-40B4-BE49-F238E27FC236}">
-                <a16:creationId xmlns:a16="http://schemas.microsoft.com/office/drawing/2014/main" id="{5505BBE8-5FA4-44FA-A02E-59D6A3FA30A3}"/>
+                <a16:creationId xmlns:a16="http://schemas.microsoft.com/office/drawing/2014/main" id="{6A6E0975-E00E-4EDD-8566-5CED2B7AF30B}"/>
               </a:ext>
             </a:extLst>
           </p:cNvPr>
@@ -10264,7 +10274,7 @@
           <p:cNvPr id="6" name="">
             <a:extLst xmlns:a="http://schemas.openxmlformats.org/drawingml/2006/main">
               <a:ext uri="{FF2B5EF4-FFF2-40B4-BE49-F238E27FC236}">
-                <a16:creationId xmlns:a16="http://schemas.microsoft.com/office/drawing/2014/main" id="{B33747E2-303F-4066-BF5E-EE8AE814D5BC}"/>
+                <a16:creationId xmlns:a16="http://schemas.microsoft.com/office/drawing/2014/main" id="{9C8355CE-FDCB-4D90-9E0C-9E2DA61D3E13}"/>
               </a:ext>
             </a:extLst>
           </p:cNvPr>
@@ -10275,8 +10285,8 @@
         </p:nvSpPr>
         <p:spPr>
           <a:xfrm xmlns:a="http://schemas.openxmlformats.org/drawingml/2006/main">
-            <a:off x="666750" y="1733550"/>
-            <a:ext cx="2095500" cy="304800"/>
+            <a:off x="666750" y="1609725"/>
+            <a:ext cx="4953000" cy="323850"/>
           </a:xfrm>
           <a:prstGeom xmlns:a="http://schemas.openxmlformats.org/drawingml/2006/main" prst="rect">
             <a:avLst/>
@@ -10413,17 +10423,45 @@
                 <a:ea typeface="Arial"/>
                 <a:cs typeface="Arial"/>
               </a:rPr>
-              <a:t>Input</a:t>
+              <a:t>E-07 ENERGY CORE</a:t>
             </a:r>
           </a:p>
         </p:txBody>
       </p:sp>
-      <p:sp>
-        <p:nvSpPr>
+      <p:pic>
+        <p:nvPicPr>
           <p:cNvPr id="7" name="">
             <a:extLst xmlns:a="http://schemas.openxmlformats.org/drawingml/2006/main">
               <a:ext uri="{FF2B5EF4-FFF2-40B4-BE49-F238E27FC236}">
-                <a16:creationId xmlns:a16="http://schemas.microsoft.com/office/drawing/2014/main" id="{1F6821D0-6D29-4499-815A-459CFFC7B106}"/>
+                <a16:creationId xmlns:a16="http://schemas.microsoft.com/office/drawing/2014/main" id="{414DA2B8-8ED4-4106-A017-677D70E80BE2}"/>
+              </a:ext>
+            </a:extLst>
+          </p:cNvPr>
+          <p:cNvPicPr>
+            <a:picLocks xmlns:a="http://schemas.openxmlformats.org/drawingml/2006/main" noChangeAspect="1"/>
+          </p:cNvPicPr>
+          <p:nvPr/>
+        </p:nvPicPr>
+        <p:blipFill>
+          <a:blip xmlns:r="http://schemas.openxmlformats.org/officeDocument/2006/relationships" xmlns:a="http://schemas.openxmlformats.org/drawingml/2006/main" r:embed="R51a24679f09d47ec"/>
+          <a:stretch xmlns:a="http://schemas.openxmlformats.org/drawingml/2006/main"/>
+        </p:blipFill>
+        <p:spPr>
+          <a:xfrm xmlns:a="http://schemas.openxmlformats.org/drawingml/2006/main">
+            <a:off x="666750" y="2125266"/>
+            <a:ext cx="5143500" cy="2893219"/>
+          </a:xfrm>
+          <a:prstGeom xmlns:a="http://schemas.openxmlformats.org/drawingml/2006/main" prst="rect">
+            <a:avLst/>
+          </a:prstGeom>
+        </p:spPr>
+      </p:pic>
+      <p:sp>
+        <p:nvSpPr>
+          <p:cNvPr id="8" name="">
+            <a:extLst xmlns:a="http://schemas.openxmlformats.org/drawingml/2006/main">
+              <a:ext uri="{FF2B5EF4-FFF2-40B4-BE49-F238E27FC236}">
+                <a16:creationId xmlns:a16="http://schemas.microsoft.com/office/drawing/2014/main" id="{2994FC61-1357-4306-BAA0-B31966FD2806}"/>
               </a:ext>
             </a:extLst>
           </p:cNvPr>
@@ -10434,8 +10472,326 @@
         </p:nvSpPr>
         <p:spPr>
           <a:xfrm xmlns:a="http://schemas.openxmlformats.org/drawingml/2006/main">
-            <a:off x="4391025" y="1733550"/>
-            <a:ext cx="2857500" cy="304800"/>
+            <a:off x="666750" y="5153025"/>
+            <a:ext cx="5143500" cy="523875"/>
+          </a:xfrm>
+          <a:prstGeom xmlns:a="http://schemas.openxmlformats.org/drawingml/2006/main" prst="rect">
+            <a:avLst/>
+          </a:prstGeom>
+          <a:noFill xmlns:a="http://schemas.openxmlformats.org/drawingml/2006/main"/>
+          <a:ln xmlns:a="http://schemas.openxmlformats.org/drawingml/2006/main" w="0">
+            <a:noFill/>
+            <a:prstDash val="solid"/>
+          </a:ln>
+        </p:spPr>
+        <p:txBody>
+          <a:bodyPr xmlns:a="http://schemas.openxmlformats.org/drawingml/2006/main" wrap="square" lIns="0" tIns="0" rIns="0" bIns="0" anchor="ctr">
+            <a:normAutofit fontScale="100000"/>
+          </a:bodyPr>
+          <a:lstStyle xmlns:a="http://schemas.openxmlformats.org/drawingml/2006/main">
+            <a:defPPr algn="l">
+              <a:defRPr sz="1350" b="0">
+                <a:solidFill>
+                  <a:srgbClr val="F5FBFE"/>
+                </a:solidFill>
+                <a:latin typeface="Arial"/>
+                <a:ea typeface="Arial"/>
+                <a:cs typeface="Arial"/>
+              </a:defRPr>
+            </a:defPPr>
+            <a:lvl1pPr algn="l">
+              <a:defRPr sz="1350" b="0">
+                <a:solidFill>
+                  <a:srgbClr val="F5FBFE"/>
+                </a:solidFill>
+                <a:latin typeface="Arial"/>
+                <a:ea typeface="Arial"/>
+                <a:cs typeface="Arial"/>
+              </a:defRPr>
+            </a:lvl1pPr>
+            <a:lvl2pPr algn="l">
+              <a:defRPr sz="1350" b="0">
+                <a:solidFill>
+                  <a:srgbClr val="F5FBFE"/>
+                </a:solidFill>
+                <a:latin typeface="Arial"/>
+                <a:ea typeface="Arial"/>
+                <a:cs typeface="Arial"/>
+              </a:defRPr>
+            </a:lvl2pPr>
+            <a:lvl3pPr algn="l">
+              <a:defRPr sz="1350" b="0">
+                <a:solidFill>
+                  <a:srgbClr val="F5FBFE"/>
+                </a:solidFill>
+                <a:latin typeface="Arial"/>
+                <a:ea typeface="Arial"/>
+                <a:cs typeface="Arial"/>
+              </a:defRPr>
+            </a:lvl3pPr>
+            <a:lvl4pPr algn="l">
+              <a:defRPr sz="1350" b="0">
+                <a:solidFill>
+                  <a:srgbClr val="F5FBFE"/>
+                </a:solidFill>
+                <a:latin typeface="Arial"/>
+                <a:ea typeface="Arial"/>
+                <a:cs typeface="Arial"/>
+              </a:defRPr>
+            </a:lvl4pPr>
+            <a:lvl5pPr algn="l">
+              <a:defRPr sz="1350" b="0">
+                <a:solidFill>
+                  <a:srgbClr val="F5FBFE"/>
+                </a:solidFill>
+                <a:latin typeface="Arial"/>
+                <a:ea typeface="Arial"/>
+                <a:cs typeface="Arial"/>
+              </a:defRPr>
+            </a:lvl5pPr>
+            <a:lvl6pPr algn="l">
+              <a:defRPr sz="1350" b="0">
+                <a:solidFill>
+                  <a:srgbClr val="F5FBFE"/>
+                </a:solidFill>
+                <a:latin typeface="Arial"/>
+                <a:ea typeface="Arial"/>
+                <a:cs typeface="Arial"/>
+              </a:defRPr>
+            </a:lvl6pPr>
+            <a:lvl7pPr algn="l">
+              <a:defRPr sz="1350" b="0">
+                <a:solidFill>
+                  <a:srgbClr val="F5FBFE"/>
+                </a:solidFill>
+                <a:latin typeface="Arial"/>
+                <a:ea typeface="Arial"/>
+                <a:cs typeface="Arial"/>
+              </a:defRPr>
+            </a:lvl7pPr>
+            <a:lvl8pPr algn="l">
+              <a:defRPr sz="1350" b="0">
+                <a:solidFill>
+                  <a:srgbClr val="F5FBFE"/>
+                </a:solidFill>
+                <a:latin typeface="Arial"/>
+                <a:ea typeface="Arial"/>
+                <a:cs typeface="Arial"/>
+              </a:defRPr>
+            </a:lvl8pPr>
+            <a:lvl9pPr algn="l">
+              <a:defRPr sz="1350" b="0">
+                <a:solidFill>
+                  <a:srgbClr val="F5FBFE"/>
+                </a:solidFill>
+                <a:latin typeface="Arial"/>
+                <a:ea typeface="Arial"/>
+                <a:cs typeface="Arial"/>
+              </a:defRPr>
+            </a:lvl9pPr>
+          </a:lstStyle>
+          <a:p xmlns:a="http://schemas.openxmlformats.org/drawingml/2006/main">
+            <a:pPr algn="l">
+              <a:defRPr sz="1350" b="0">
+                <a:solidFill>
+                  <a:srgbClr val="F5FBFE"/>
+                </a:solidFill>
+                <a:latin typeface="Arial"/>
+                <a:ea typeface="Arial"/>
+                <a:cs typeface="Arial"/>
+              </a:defRPr>
+            </a:pPr>
+            <a:r>
+              <a:rPr sz="1350" b="0">
+                <a:solidFill>
+                  <a:srgbClr val="F5FBFE"/>
+                </a:solidFill>
+                <a:latin typeface="Arial"/>
+                <a:ea typeface="Arial"/>
+                <a:cs typeface="Arial"/>
+              </a:rPr>
+              <a:t>Metal cage, cyan crystal and three-clamp coupler</a:t>
+            </a:r>
+          </a:p>
+        </p:txBody>
+      </p:sp>
+      <p:sp>
+        <p:nvSpPr>
+          <p:cNvPr id="9" name="">
+            <a:extLst xmlns:a="http://schemas.openxmlformats.org/drawingml/2006/main">
+              <a:ext uri="{FF2B5EF4-FFF2-40B4-BE49-F238E27FC236}">
+                <a16:creationId xmlns:a16="http://schemas.microsoft.com/office/drawing/2014/main" id="{FDA0FA1E-D3AA-4752-8529-6329DB35A7DE}"/>
+              </a:ext>
+            </a:extLst>
+          </p:cNvPr>
+          <p:cNvSpPr>
+            <a:spLocks xmlns:a="http://schemas.openxmlformats.org/drawingml/2006/main" noGrp="1"/>
+          </p:cNvSpPr>
+          <p:nvPr/>
+        </p:nvSpPr>
+        <p:spPr>
+          <a:xfrm xmlns:a="http://schemas.openxmlformats.org/drawingml/2006/main">
+            <a:off x="666750" y="5791200"/>
+            <a:ext cx="5143500" cy="295275"/>
+          </a:xfrm>
+          <a:prstGeom xmlns:a="http://schemas.openxmlformats.org/drawingml/2006/main" prst="rect">
+            <a:avLst/>
+          </a:prstGeom>
+          <a:noFill xmlns:a="http://schemas.openxmlformats.org/drawingml/2006/main"/>
+          <a:ln xmlns:a="http://schemas.openxmlformats.org/drawingml/2006/main" w="0">
+            <a:noFill/>
+            <a:prstDash val="solid"/>
+          </a:ln>
+        </p:spPr>
+        <p:txBody>
+          <a:bodyPr xmlns:a="http://schemas.openxmlformats.org/drawingml/2006/main" wrap="square" lIns="0" tIns="0" rIns="0" bIns="0" anchor="ctr">
+            <a:normAutofit fontScale="100000"/>
+          </a:bodyPr>
+          <a:lstStyle xmlns:a="http://schemas.openxmlformats.org/drawingml/2006/main">
+            <a:defPPr algn="l">
+              <a:defRPr sz="1050" b="0">
+                <a:solidFill>
+                  <a:srgbClr val="9DBACA"/>
+                </a:solidFill>
+                <a:latin typeface="Arial"/>
+                <a:ea typeface="Arial"/>
+                <a:cs typeface="Arial"/>
+              </a:defRPr>
+            </a:defPPr>
+            <a:lvl1pPr algn="l">
+              <a:defRPr sz="1050" b="0">
+                <a:solidFill>
+                  <a:srgbClr val="9DBACA"/>
+                </a:solidFill>
+                <a:latin typeface="Arial"/>
+                <a:ea typeface="Arial"/>
+                <a:cs typeface="Arial"/>
+              </a:defRPr>
+            </a:lvl1pPr>
+            <a:lvl2pPr algn="l">
+              <a:defRPr sz="1050" b="0">
+                <a:solidFill>
+                  <a:srgbClr val="9DBACA"/>
+                </a:solidFill>
+                <a:latin typeface="Arial"/>
+                <a:ea typeface="Arial"/>
+                <a:cs typeface="Arial"/>
+              </a:defRPr>
+            </a:lvl2pPr>
+            <a:lvl3pPr algn="l">
+              <a:defRPr sz="1050" b="0">
+                <a:solidFill>
+                  <a:srgbClr val="9DBACA"/>
+                </a:solidFill>
+                <a:latin typeface="Arial"/>
+                <a:ea typeface="Arial"/>
+                <a:cs typeface="Arial"/>
+              </a:defRPr>
+            </a:lvl3pPr>
+            <a:lvl4pPr algn="l">
+              <a:defRPr sz="1050" b="0">
+                <a:solidFill>
+                  <a:srgbClr val="9DBACA"/>
+                </a:solidFill>
+                <a:latin typeface="Arial"/>
+                <a:ea typeface="Arial"/>
+                <a:cs typeface="Arial"/>
+              </a:defRPr>
+            </a:lvl4pPr>
+            <a:lvl5pPr algn="l">
+              <a:defRPr sz="1050" b="0">
+                <a:solidFill>
+                  <a:srgbClr val="9DBACA"/>
+                </a:solidFill>
+                <a:latin typeface="Arial"/>
+                <a:ea typeface="Arial"/>
+                <a:cs typeface="Arial"/>
+              </a:defRPr>
+            </a:lvl5pPr>
+            <a:lvl6pPr algn="l">
+              <a:defRPr sz="1050" b="0">
+                <a:solidFill>
+                  <a:srgbClr val="9DBACA"/>
+                </a:solidFill>
+                <a:latin typeface="Arial"/>
+                <a:ea typeface="Arial"/>
+                <a:cs typeface="Arial"/>
+              </a:defRPr>
+            </a:lvl6pPr>
+            <a:lvl7pPr algn="l">
+              <a:defRPr sz="1050" b="0">
+                <a:solidFill>
+                  <a:srgbClr val="9DBACA"/>
+                </a:solidFill>
+                <a:latin typeface="Arial"/>
+                <a:ea typeface="Arial"/>
+                <a:cs typeface="Arial"/>
+              </a:defRPr>
+            </a:lvl7pPr>
+            <a:lvl8pPr algn="l">
+              <a:defRPr sz="1050" b="0">
+                <a:solidFill>
+                  <a:srgbClr val="9DBACA"/>
+                </a:solidFill>
+                <a:latin typeface="Arial"/>
+                <a:ea typeface="Arial"/>
+                <a:cs typeface="Arial"/>
+              </a:defRPr>
+            </a:lvl8pPr>
+            <a:lvl9pPr algn="l">
+              <a:defRPr sz="1050" b="0">
+                <a:solidFill>
+                  <a:srgbClr val="9DBACA"/>
+                </a:solidFill>
+                <a:latin typeface="Arial"/>
+                <a:ea typeface="Arial"/>
+                <a:cs typeface="Arial"/>
+              </a:defRPr>
+            </a:lvl9pPr>
+          </a:lstStyle>
+          <a:p xmlns:a="http://schemas.openxmlformats.org/drawingml/2006/main">
+            <a:pPr algn="l">
+              <a:defRPr sz="1050" b="0">
+                <a:solidFill>
+                  <a:srgbClr val="9DBACA"/>
+                </a:solidFill>
+                <a:latin typeface="Arial"/>
+                <a:ea typeface="Arial"/>
+                <a:cs typeface="Arial"/>
+              </a:defRPr>
+            </a:pPr>
+            <a:r>
+              <a:rPr sz="1050" b="0">
+                <a:solidFill>
+                  <a:srgbClr val="9DBACA"/>
+                </a:solidFill>
+                <a:latin typeface="Arial"/>
+                <a:ea typeface="Arial"/>
+                <a:cs typeface="Arial"/>
+              </a:rPr>
+              <a:t>Unity Editor preview. Quest handling remains pending.</a:t>
+            </a:r>
+          </a:p>
+        </p:txBody>
+      </p:sp>
+      <p:sp>
+        <p:nvSpPr>
+          <p:cNvPr id="10" name="">
+            <a:extLst xmlns:a="http://schemas.openxmlformats.org/drawingml/2006/main">
+              <a:ext uri="{FF2B5EF4-FFF2-40B4-BE49-F238E27FC236}">
+                <a16:creationId xmlns:a16="http://schemas.microsoft.com/office/drawing/2014/main" id="{022C1AF6-5618-41E8-99DC-FBA14E0F40BB}"/>
+              </a:ext>
+            </a:extLst>
+          </p:cNvPr>
+          <p:cNvSpPr>
+            <a:spLocks xmlns:a="http://schemas.openxmlformats.org/drawingml/2006/main" noGrp="1"/>
+          </p:cNvSpPr>
+          <p:nvPr/>
+        </p:nvSpPr>
+        <p:spPr>
+          <a:xfrm xmlns:a="http://schemas.openxmlformats.org/drawingml/2006/main">
+            <a:off x="6381750" y="1609725"/>
+            <a:ext cx="5143500" cy="323850"/>
           </a:xfrm>
           <a:prstGeom xmlns:a="http://schemas.openxmlformats.org/drawingml/2006/main" prst="rect">
             <a:avLst/>
@@ -10572,17 +10928,17 @@
                 <a:ea typeface="Arial"/>
                 <a:cs typeface="Arial"/>
               </a:rPr>
-              <a:t>Mission state</a:t>
+              <a:t>2.65-SECOND OPENING SEQUENCE</a:t>
             </a:r>
           </a:p>
         </p:txBody>
       </p:sp>
       <p:sp>
         <p:nvSpPr>
-          <p:cNvPr id="8" name="">
+          <p:cNvPr id="11" name="">
             <a:extLst xmlns:a="http://schemas.openxmlformats.org/drawingml/2006/main">
               <a:ext uri="{FF2B5EF4-FFF2-40B4-BE49-F238E27FC236}">
-                <a16:creationId xmlns:a16="http://schemas.microsoft.com/office/drawing/2014/main" id="{4DDE2DD5-2608-45ED-8DBF-AE4D7E31A3F2}"/>
+                <a16:creationId xmlns:a16="http://schemas.microsoft.com/office/drawing/2014/main" id="{C143952E-E5FF-4755-A7E4-45A10A4D7FDC}"/>
               </a:ext>
             </a:extLst>
           </p:cNvPr>
@@ -10593,8 +10949,8 @@
         </p:nvSpPr>
         <p:spPr>
           <a:xfrm xmlns:a="http://schemas.openxmlformats.org/drawingml/2006/main">
-            <a:off x="8353425" y="1733550"/>
-            <a:ext cx="2667000" cy="304800"/>
+            <a:off x="6381750" y="2095500"/>
+            <a:ext cx="5143500" cy="1905000"/>
           </a:xfrm>
           <a:prstGeom xmlns:a="http://schemas.openxmlformats.org/drawingml/2006/main" prst="rect">
             <a:avLst/>
@@ -10611,9 +10967,9 @@
           </a:bodyPr>
           <a:lstStyle xmlns:a="http://schemas.openxmlformats.org/drawingml/2006/main">
             <a:defPPr algn="l">
-              <a:defRPr sz="1500" b="1">
-                <a:solidFill>
-                  <a:srgbClr val="72E7F4"/>
+              <a:defRPr sz="1875" b="0">
+                <a:solidFill>
+                  <a:srgbClr val="F5FBFE"/>
                 </a:solidFill>
                 <a:latin typeface="Arial"/>
                 <a:ea typeface="Arial"/>
@@ -10621,9 +10977,9 @@
               </a:defRPr>
             </a:defPPr>
             <a:lvl1pPr algn="l">
-              <a:defRPr sz="1500" b="1">
-                <a:solidFill>
-                  <a:srgbClr val="72E7F4"/>
+              <a:defRPr sz="1875" b="0">
+                <a:solidFill>
+                  <a:srgbClr val="F5FBFE"/>
                 </a:solidFill>
                 <a:latin typeface="Arial"/>
                 <a:ea typeface="Arial"/>
@@ -10631,9 +10987,9 @@
               </a:defRPr>
             </a:lvl1pPr>
             <a:lvl2pPr algn="l">
-              <a:defRPr sz="1500" b="1">
-                <a:solidFill>
-                  <a:srgbClr val="72E7F4"/>
+              <a:defRPr sz="1875" b="0">
+                <a:solidFill>
+                  <a:srgbClr val="F5FBFE"/>
                 </a:solidFill>
                 <a:latin typeface="Arial"/>
                 <a:ea typeface="Arial"/>
@@ -10641,9 +10997,9 @@
               </a:defRPr>
             </a:lvl2pPr>
             <a:lvl3pPr algn="l">
-              <a:defRPr sz="1500" b="1">
-                <a:solidFill>
-                  <a:srgbClr val="72E7F4"/>
+              <a:defRPr sz="1875" b="0">
+                <a:solidFill>
+                  <a:srgbClr val="F5FBFE"/>
                 </a:solidFill>
                 <a:latin typeface="Arial"/>
                 <a:ea typeface="Arial"/>
@@ -10651,9 +11007,9 @@
               </a:defRPr>
             </a:lvl3pPr>
             <a:lvl4pPr algn="l">
-              <a:defRPr sz="1500" b="1">
-                <a:solidFill>
-                  <a:srgbClr val="72E7F4"/>
+              <a:defRPr sz="1875" b="0">
+                <a:solidFill>
+                  <a:srgbClr val="F5FBFE"/>
                 </a:solidFill>
                 <a:latin typeface="Arial"/>
                 <a:ea typeface="Arial"/>
@@ -10661,9 +11017,9 @@
               </a:defRPr>
             </a:lvl4pPr>
             <a:lvl5pPr algn="l">
-              <a:defRPr sz="1500" b="1">
-                <a:solidFill>
-                  <a:srgbClr val="72E7F4"/>
+              <a:defRPr sz="1875" b="0">
+                <a:solidFill>
+                  <a:srgbClr val="F5FBFE"/>
                 </a:solidFill>
                 <a:latin typeface="Arial"/>
                 <a:ea typeface="Arial"/>
@@ -10671,9 +11027,9 @@
               </a:defRPr>
             </a:lvl5pPr>
             <a:lvl6pPr algn="l">
-              <a:defRPr sz="1500" b="1">
-                <a:solidFill>
-                  <a:srgbClr val="72E7F4"/>
+              <a:defRPr sz="1875" b="0">
+                <a:solidFill>
+                  <a:srgbClr val="F5FBFE"/>
                 </a:solidFill>
                 <a:latin typeface="Arial"/>
                 <a:ea typeface="Arial"/>
@@ -10681,9 +11037,9 @@
               </a:defRPr>
             </a:lvl6pPr>
             <a:lvl7pPr algn="l">
-              <a:defRPr sz="1500" b="1">
-                <a:solidFill>
-                  <a:srgbClr val="72E7F4"/>
+              <a:defRPr sz="1875" b="0">
+                <a:solidFill>
+                  <a:srgbClr val="F5FBFE"/>
                 </a:solidFill>
                 <a:latin typeface="Arial"/>
                 <a:ea typeface="Arial"/>
@@ -10691,9 +11047,9 @@
               </a:defRPr>
             </a:lvl7pPr>
             <a:lvl8pPr algn="l">
-              <a:defRPr sz="1500" b="1">
-                <a:solidFill>
-                  <a:srgbClr val="72E7F4"/>
+              <a:defRPr sz="1875" b="0">
+                <a:solidFill>
+                  <a:srgbClr val="F5FBFE"/>
                 </a:solidFill>
                 <a:latin typeface="Arial"/>
                 <a:ea typeface="Arial"/>
@@ -10701,9 +11057,9 @@
               </a:defRPr>
             </a:lvl8pPr>
             <a:lvl9pPr algn="l">
-              <a:defRPr sz="1500" b="1">
-                <a:solidFill>
-                  <a:srgbClr val="72E7F4"/>
+              <a:defRPr sz="1875" b="0">
+                <a:solidFill>
+                  <a:srgbClr val="F5FBFE"/>
                 </a:solidFill>
                 <a:latin typeface="Arial"/>
                 <a:ea typeface="Arial"/>
@@ -10713,9 +11069,9 @@
           </a:lstStyle>
           <a:p xmlns:a="http://schemas.openxmlformats.org/drawingml/2006/main">
             <a:pPr algn="l">
-              <a:defRPr sz="1500" b="1">
-                <a:solidFill>
-                  <a:srgbClr val="72E7F4"/>
+              <a:defRPr sz="1875" b="0">
+                <a:solidFill>
+                  <a:srgbClr val="F5FBFE"/>
                 </a:solidFill>
                 <a:latin typeface="Arial"/>
                 <a:ea typeface="Arial"/>
@@ -10723,25 +11079,94 @@
               </a:defRPr>
             </a:pPr>
             <a:r>
-              <a:rPr sz="1500" b="1">
-                <a:solidFill>
-                  <a:srgbClr val="72E7F4"/>
+              <a:rPr sz="1875" b="0">
+                <a:solidFill>
+                  <a:srgbClr val="F5FBFE"/>
                 </a:solidFill>
                 <a:latin typeface="Arial"/>
                 <a:ea typeface="Arial"/>
                 <a:cs typeface="Arial"/>
               </a:rPr>
-              <a:t>Feedback</a:t>
+              <a:t>1   Clamps secure the core</a:t>
+            </a:r>
+          </a:p>
+          <a:p xmlns:a="http://schemas.openxmlformats.org/drawingml/2006/main">
+            <a:pPr algn="l">
+              <a:defRPr sz="1875" b="0">
+                <a:solidFill>
+                  <a:srgbClr val="F5FBFE"/>
+                </a:solidFill>
+                <a:latin typeface="Arial"/>
+                <a:ea typeface="Arial"/>
+                <a:cs typeface="Arial"/>
+              </a:defRPr>
+            </a:pPr>
+            <a:r>
+              <a:rPr sz="1875" b="0">
+                <a:solidFill>
+                  <a:srgbClr val="F5FBFE"/>
+                </a:solidFill>
+                <a:latin typeface="Arial"/>
+                <a:ea typeface="Arial"/>
+                <a:cs typeface="Arial"/>
+              </a:rPr>
+              <a:t>2   Door locks retract</a:t>
+            </a:r>
+          </a:p>
+          <a:p xmlns:a="http://schemas.openxmlformats.org/drawingml/2006/main">
+            <a:pPr algn="l">
+              <a:defRPr sz="1875" b="0">
+                <a:solidFill>
+                  <a:srgbClr val="F5FBFE"/>
+                </a:solidFill>
+                <a:latin typeface="Arial"/>
+                <a:ea typeface="Arial"/>
+                <a:cs typeface="Arial"/>
+              </a:defRPr>
+            </a:pPr>
+            <a:r>
+              <a:rPr sz="1875" b="0">
+                <a:solidFill>
+                  <a:srgbClr val="F5FBFE"/>
+                </a:solidFill>
+                <a:latin typeface="Arial"/>
+                <a:ea typeface="Arial"/>
+                <a:cs typeface="Arial"/>
+              </a:rPr>
+              <a:t>3   Twin panels slide apart</a:t>
+            </a:r>
+          </a:p>
+          <a:p xmlns:a="http://schemas.openxmlformats.org/drawingml/2006/main">
+            <a:pPr algn="l">
+              <a:defRPr sz="1875" b="0">
+                <a:solidFill>
+                  <a:srgbClr val="F5FBFE"/>
+                </a:solidFill>
+                <a:latin typeface="Arial"/>
+                <a:ea typeface="Arial"/>
+                <a:cs typeface="Arial"/>
+              </a:defRPr>
+            </a:pPr>
+            <a:r>
+              <a:rPr sz="1875" b="0">
+                <a:solidFill>
+                  <a:srgbClr val="F5FBFE"/>
+                </a:solidFill>
+                <a:latin typeface="Arial"/>
+                <a:ea typeface="Arial"/>
+                <a:cs typeface="Arial"/>
+              </a:rPr>
+              <a:t>4   Passage lights turn green</a:t>
             </a:r>
           </a:p>
         </p:txBody>
       </p:sp>
       <p:sp>
         <p:nvSpPr>
-          <p:cNvPr id="9" name="">
+          <p:cNvPr id="12" name="">
             <a:extLst xmlns:a="http://schemas.openxmlformats.org/drawingml/2006/main">
               <a:ext uri="{FF2B5EF4-FFF2-40B4-BE49-F238E27FC236}">
-                <a16:creationId xmlns:a16="http://schemas.microsoft.com/office/drawing/2014/main" id="{DE1364BC-CF2C-4556-82BF-6AEC7D47618A}"/>
+                <a16:creationId xmlns:a16="http://schemas.microsoft.com/office/drawing/2014/main" id="{A6CDC79E-CDA6-43BE-B468-BEAE13744EAD}"/>
               </a:ext>
             </a:extLst>
           </p:cNvPr>
@@ -10752,16 +11177,14 @@
         </p:nvSpPr>
         <p:spPr>
           <a:xfrm xmlns:a="http://schemas.openxmlformats.org/drawingml/2006/main">
-            <a:off x="666750" y="2200275"/>
-            <a:ext cx="2714625" cy="1962150"/>
+            <a:off x="6381750" y="4238625"/>
+            <a:ext cx="5143500" cy="19050"/>
           </a:xfrm>
-          <a:prstGeom xmlns:a="http://schemas.openxmlformats.org/drawingml/2006/main" prst="roundRect">
-            <a:avLst>
-              <a:gd name="adj" fmla="val 5825"/>
-            </a:avLst>
+          <a:prstGeom xmlns:a="http://schemas.openxmlformats.org/drawingml/2006/main" prst="rect">
+            <a:avLst/>
           </a:prstGeom>
           <a:solidFill xmlns:a="http://schemas.openxmlformats.org/drawingml/2006/main">
-            <a:srgbClr val="0B2033"/>
+            <a:srgbClr val="28475A"/>
           </a:solidFill>
           <a:ln xmlns:a="http://schemas.openxmlformats.org/drawingml/2006/main" w="0">
             <a:noFill/>
@@ -10771,10 +11194,10 @@
       </p:sp>
       <p:sp>
         <p:nvSpPr>
-          <p:cNvPr id="10" name="">
+          <p:cNvPr id="13" name="">
             <a:extLst xmlns:a="http://schemas.openxmlformats.org/drawingml/2006/main">
               <a:ext uri="{FF2B5EF4-FFF2-40B4-BE49-F238E27FC236}">
-                <a16:creationId xmlns:a16="http://schemas.microsoft.com/office/drawing/2014/main" id="{BDD7D897-F13D-45BB-9997-4820E6611BB6}"/>
+                <a16:creationId xmlns:a16="http://schemas.microsoft.com/office/drawing/2014/main" id="{70211B16-E2AC-46AD-ACD6-3575E0881A8B}"/>
               </a:ext>
             </a:extLst>
           </p:cNvPr>
@@ -10785,8 +11208,8 @@
         </p:nvSpPr>
         <p:spPr>
           <a:xfrm xmlns:a="http://schemas.openxmlformats.org/drawingml/2006/main">
-            <a:off x="895350" y="2400300"/>
-            <a:ext cx="2190750" cy="1562100"/>
+            <a:off x="6381750" y="4438650"/>
+            <a:ext cx="5143500" cy="742950"/>
           </a:xfrm>
           <a:prstGeom xmlns:a="http://schemas.openxmlformats.org/drawingml/2006/main" prst="rect">
             <a:avLst/>
@@ -10803,7 +11226,7 @@
           </a:bodyPr>
           <a:lstStyle xmlns:a="http://schemas.openxmlformats.org/drawingml/2006/main">
             <a:defPPr algn="l">
-              <a:defRPr sz="1800" b="0">
+              <a:defRPr sz="1650" b="0">
                 <a:solidFill>
                   <a:srgbClr val="F5FBFE"/>
                 </a:solidFill>
@@ -10813,7 +11236,7 @@
               </a:defRPr>
             </a:defPPr>
             <a:lvl1pPr algn="l">
-              <a:defRPr sz="1800" b="0">
+              <a:defRPr sz="1650" b="0">
                 <a:solidFill>
                   <a:srgbClr val="F5FBFE"/>
                 </a:solidFill>
@@ -10823,7 +11246,7 @@
               </a:defRPr>
             </a:lvl1pPr>
             <a:lvl2pPr algn="l">
-              <a:defRPr sz="1800" b="0">
+              <a:defRPr sz="1650" b="0">
                 <a:solidFill>
                   <a:srgbClr val="F5FBFE"/>
                 </a:solidFill>
@@ -10833,7 +11256,7 @@
               </a:defRPr>
             </a:lvl2pPr>
             <a:lvl3pPr algn="l">
-              <a:defRPr sz="1800" b="0">
+              <a:defRPr sz="1650" b="0">
                 <a:solidFill>
                   <a:srgbClr val="F5FBFE"/>
                 </a:solidFill>
@@ -10843,7 +11266,7 @@
               </a:defRPr>
             </a:lvl3pPr>
             <a:lvl4pPr algn="l">
-              <a:defRPr sz="1800" b="0">
+              <a:defRPr sz="1650" b="0">
                 <a:solidFill>
                   <a:srgbClr val="F5FBFE"/>
                 </a:solidFill>
@@ -10853,7 +11276,7 @@
               </a:defRPr>
             </a:lvl4pPr>
             <a:lvl5pPr algn="l">
-              <a:defRPr sz="1800" b="0">
+              <a:defRPr sz="1650" b="0">
                 <a:solidFill>
                   <a:srgbClr val="F5FBFE"/>
                 </a:solidFill>
@@ -10863,7 +11286,7 @@
               </a:defRPr>
             </a:lvl5pPr>
             <a:lvl6pPr algn="l">
-              <a:defRPr sz="1800" b="0">
+              <a:defRPr sz="1650" b="0">
                 <a:solidFill>
                   <a:srgbClr val="F5FBFE"/>
                 </a:solidFill>
@@ -10873,7 +11296,7 @@
               </a:defRPr>
             </a:lvl6pPr>
             <a:lvl7pPr algn="l">
-              <a:defRPr sz="1800" b="0">
+              <a:defRPr sz="1650" b="0">
                 <a:solidFill>
                   <a:srgbClr val="F5FBFE"/>
                 </a:solidFill>
@@ -10883,7 +11306,7 @@
               </a:defRPr>
             </a:lvl7pPr>
             <a:lvl8pPr algn="l">
-              <a:defRPr sz="1800" b="0">
+              <a:defRPr sz="1650" b="0">
                 <a:solidFill>
                   <a:srgbClr val="F5FBFE"/>
                 </a:solidFill>
@@ -10893,7 +11316,7 @@
               </a:defRPr>
             </a:lvl8pPr>
             <a:lvl9pPr algn="l">
-              <a:defRPr sz="1800" b="0">
+              <a:defRPr sz="1650" b="0">
                 <a:solidFill>
                   <a:srgbClr val="F5FBFE"/>
                 </a:solidFill>
@@ -10905,7 +11328,7 @@
           </a:lstStyle>
           <a:p xmlns:a="http://schemas.openxmlformats.org/drawingml/2006/main">
             <a:pPr algn="l">
-              <a:defRPr sz="1800" b="0">
+              <a:defRPr sz="1650" b="0">
                 <a:solidFill>
                   <a:srgbClr val="F5FBFE"/>
                 </a:solidFill>
@@ -10915,7 +11338,7 @@
               </a:defRPr>
             </a:pPr>
             <a:r>
-              <a:rPr sz="1800" b="0">
+              <a:rPr sz="1650" b="0">
                 <a:solidFill>
                   <a:srgbClr val="F5FBFE"/>
                 </a:solidFill>
@@ -10923,12 +11346,12 @@
                 <a:ea typeface="Arial"/>
                 <a:cs typeface="Arial"/>
               </a:rPr>
-              <a:t>Meta XR rig</a:t>
+              <a:t>One mission state drives the status panel,</a:t>
             </a:r>
           </a:p>
           <a:p xmlns:a="http://schemas.openxmlformats.org/drawingml/2006/main">
             <a:pPr algn="l">
-              <a:defRPr sz="1800" b="0">
+              <a:defRPr sz="1650" b="0">
                 <a:solidFill>
                   <a:srgbClr val="F5FBFE"/>
                 </a:solidFill>
@@ -10938,7 +11361,7 @@
               </a:defRPr>
             </a:pPr>
             <a:r>
-              <a:rPr sz="1800" b="0">
+              <a:rPr sz="1650" b="0">
                 <a:solidFill>
                   <a:srgbClr val="F5FBFE"/>
                 </a:solidFill>
@@ -10946,63 +11369,17 @@
                 <a:ea typeface="Arial"/>
                 <a:cs typeface="Arial"/>
               </a:rPr>
-              <a:t>Controller teleport</a:t>
-            </a:r>
-          </a:p>
-          <a:p xmlns:a="http://schemas.openxmlformats.org/drawingml/2006/main">
-            <a:pPr algn="l">
-              <a:defRPr sz="1800" b="0">
-                <a:solidFill>
-                  <a:srgbClr val="F5FBFE"/>
-                </a:solidFill>
-                <a:latin typeface="Arial"/>
-                <a:ea typeface="Arial"/>
-                <a:cs typeface="Arial"/>
-              </a:defRPr>
-            </a:pPr>
-            <a:r>
-              <a:rPr sz="1800" b="0">
-                <a:solidFill>
-                  <a:srgbClr val="F5FBFE"/>
-                </a:solidFill>
-                <a:latin typeface="Arial"/>
-                <a:ea typeface="Arial"/>
-                <a:cs typeface="Arial"/>
-              </a:rPr>
-              <a:t>Grip grab</a:t>
-            </a:r>
-          </a:p>
-          <a:p xmlns:a="http://schemas.openxmlformats.org/drawingml/2006/main">
-            <a:pPr algn="l">
-              <a:defRPr sz="1800" b="0">
-                <a:solidFill>
-                  <a:srgbClr val="F5FBFE"/>
-                </a:solidFill>
-                <a:latin typeface="Arial"/>
-                <a:ea typeface="Arial"/>
-                <a:cs typeface="Arial"/>
-              </a:defRPr>
-            </a:pPr>
-            <a:r>
-              <a:rPr sz="1800" b="0">
-                <a:solidFill>
-                  <a:srgbClr val="F5FBFE"/>
-                </a:solidFill>
-                <a:latin typeface="Arial"/>
-                <a:ea typeface="Arial"/>
-                <a:cs typeface="Arial"/>
-              </a:rPr>
-              <a:t>Ray UI input</a:t>
+              <a:t>indicator lights and mechanism audio.</a:t>
             </a:r>
           </a:p>
         </p:txBody>
       </p:sp>
       <p:sp>
         <p:nvSpPr>
-          <p:cNvPr id="11" name="">
+          <p:cNvPr id="14" name="">
             <a:extLst xmlns:a="http://schemas.openxmlformats.org/drawingml/2006/main">
               <a:ext uri="{FF2B5EF4-FFF2-40B4-BE49-F238E27FC236}">
-                <a16:creationId xmlns:a16="http://schemas.microsoft.com/office/drawing/2014/main" id="{04047E6D-8E71-4CFA-87F3-2A254717BD1C}"/>
+                <a16:creationId xmlns:a16="http://schemas.microsoft.com/office/drawing/2014/main" id="{D3B68BC1-5D19-4941-A9C1-358970D484F8}"/>
               </a:ext>
             </a:extLst>
           </p:cNvPr>
@@ -11013,1197 +11390,8 @@
         </p:nvSpPr>
         <p:spPr>
           <a:xfrm xmlns:a="http://schemas.openxmlformats.org/drawingml/2006/main">
-            <a:off x="4000500" y="2200275"/>
-            <a:ext cx="3305175" cy="1962150"/>
-          </a:xfrm>
-          <a:prstGeom xmlns:a="http://schemas.openxmlformats.org/drawingml/2006/main" prst="roundRect">
-            <a:avLst>
-              <a:gd name="adj" fmla="val 5825"/>
-            </a:avLst>
-          </a:prstGeom>
-          <a:solidFill xmlns:a="http://schemas.openxmlformats.org/drawingml/2006/main">
-            <a:srgbClr val="0B2033"/>
-          </a:solidFill>
-          <a:ln xmlns:a="http://schemas.openxmlformats.org/drawingml/2006/main" w="0">
-            <a:noFill/>
-            <a:prstDash val="solid"/>
-          </a:ln>
-        </p:spPr>
-      </p:sp>
-      <p:sp>
-        <p:nvSpPr>
-          <p:cNvPr id="12" name="">
-            <a:extLst xmlns:a="http://schemas.openxmlformats.org/drawingml/2006/main">
-              <a:ext uri="{FF2B5EF4-FFF2-40B4-BE49-F238E27FC236}">
-                <a16:creationId xmlns:a16="http://schemas.microsoft.com/office/drawing/2014/main" id="{D37D9C22-15C0-49ED-911A-250E00FA80ED}"/>
-              </a:ext>
-            </a:extLst>
-          </p:cNvPr>
-          <p:cNvSpPr>
-            <a:spLocks xmlns:a="http://schemas.openxmlformats.org/drawingml/2006/main" noGrp="1"/>
-          </p:cNvSpPr>
-          <p:nvPr/>
-        </p:nvSpPr>
-        <p:spPr>
-          <a:xfrm xmlns:a="http://schemas.openxmlformats.org/drawingml/2006/main">
-            <a:off x="4257675" y="2400300"/>
-            <a:ext cx="2781300" cy="1562100"/>
-          </a:xfrm>
-          <a:prstGeom xmlns:a="http://schemas.openxmlformats.org/drawingml/2006/main" prst="rect">
-            <a:avLst/>
-          </a:prstGeom>
-          <a:noFill xmlns:a="http://schemas.openxmlformats.org/drawingml/2006/main"/>
-          <a:ln xmlns:a="http://schemas.openxmlformats.org/drawingml/2006/main" w="0">
-            <a:noFill/>
-            <a:prstDash val="solid"/>
-          </a:ln>
-        </p:spPr>
-        <p:txBody>
-          <a:bodyPr xmlns:a="http://schemas.openxmlformats.org/drawingml/2006/main" wrap="square" lIns="0" tIns="0" rIns="0" bIns="0" anchor="ctr">
-            <a:normAutofit fontScale="100000"/>
-          </a:bodyPr>
-          <a:lstStyle xmlns:a="http://schemas.openxmlformats.org/drawingml/2006/main">
-            <a:defPPr algn="l">
-              <a:defRPr sz="1800" b="0">
-                <a:solidFill>
-                  <a:srgbClr val="F5FBFE"/>
-                </a:solidFill>
-                <a:latin typeface="Arial"/>
-                <a:ea typeface="Arial"/>
-                <a:cs typeface="Arial"/>
-              </a:defRPr>
-            </a:defPPr>
-            <a:lvl1pPr algn="l">
-              <a:defRPr sz="1800" b="0">
-                <a:solidFill>
-                  <a:srgbClr val="F5FBFE"/>
-                </a:solidFill>
-                <a:latin typeface="Arial"/>
-                <a:ea typeface="Arial"/>
-                <a:cs typeface="Arial"/>
-              </a:defRPr>
-            </a:lvl1pPr>
-            <a:lvl2pPr algn="l">
-              <a:defRPr sz="1800" b="0">
-                <a:solidFill>
-                  <a:srgbClr val="F5FBFE"/>
-                </a:solidFill>
-                <a:latin typeface="Arial"/>
-                <a:ea typeface="Arial"/>
-                <a:cs typeface="Arial"/>
-              </a:defRPr>
-            </a:lvl2pPr>
-            <a:lvl3pPr algn="l">
-              <a:defRPr sz="1800" b="0">
-                <a:solidFill>
-                  <a:srgbClr val="F5FBFE"/>
-                </a:solidFill>
-                <a:latin typeface="Arial"/>
-                <a:ea typeface="Arial"/>
-                <a:cs typeface="Arial"/>
-              </a:defRPr>
-            </a:lvl3pPr>
-            <a:lvl4pPr algn="l">
-              <a:defRPr sz="1800" b="0">
-                <a:solidFill>
-                  <a:srgbClr val="F5FBFE"/>
-                </a:solidFill>
-                <a:latin typeface="Arial"/>
-                <a:ea typeface="Arial"/>
-                <a:cs typeface="Arial"/>
-              </a:defRPr>
-            </a:lvl4pPr>
-            <a:lvl5pPr algn="l">
-              <a:defRPr sz="1800" b="0">
-                <a:solidFill>
-                  <a:srgbClr val="F5FBFE"/>
-                </a:solidFill>
-                <a:latin typeface="Arial"/>
-                <a:ea typeface="Arial"/>
-                <a:cs typeface="Arial"/>
-              </a:defRPr>
-            </a:lvl5pPr>
-            <a:lvl6pPr algn="l">
-              <a:defRPr sz="1800" b="0">
-                <a:solidFill>
-                  <a:srgbClr val="F5FBFE"/>
-                </a:solidFill>
-                <a:latin typeface="Arial"/>
-                <a:ea typeface="Arial"/>
-                <a:cs typeface="Arial"/>
-              </a:defRPr>
-            </a:lvl6pPr>
-            <a:lvl7pPr algn="l">
-              <a:defRPr sz="1800" b="0">
-                <a:solidFill>
-                  <a:srgbClr val="F5FBFE"/>
-                </a:solidFill>
-                <a:latin typeface="Arial"/>
-                <a:ea typeface="Arial"/>
-                <a:cs typeface="Arial"/>
-              </a:defRPr>
-            </a:lvl7pPr>
-            <a:lvl8pPr algn="l">
-              <a:defRPr sz="1800" b="0">
-                <a:solidFill>
-                  <a:srgbClr val="F5FBFE"/>
-                </a:solidFill>
-                <a:latin typeface="Arial"/>
-                <a:ea typeface="Arial"/>
-                <a:cs typeface="Arial"/>
-              </a:defRPr>
-            </a:lvl8pPr>
-            <a:lvl9pPr algn="l">
-              <a:defRPr sz="1800" b="0">
-                <a:solidFill>
-                  <a:srgbClr val="F5FBFE"/>
-                </a:solidFill>
-                <a:latin typeface="Arial"/>
-                <a:ea typeface="Arial"/>
-                <a:cs typeface="Arial"/>
-              </a:defRPr>
-            </a:lvl9pPr>
-          </a:lstStyle>
-          <a:p xmlns:a="http://schemas.openxmlformats.org/drawingml/2006/main">
-            <a:pPr algn="l">
-              <a:defRPr sz="1800" b="0">
-                <a:solidFill>
-                  <a:srgbClr val="F5FBFE"/>
-                </a:solidFill>
-                <a:latin typeface="Arial"/>
-                <a:ea typeface="Arial"/>
-                <a:cs typeface="Arial"/>
-              </a:defRPr>
-            </a:pPr>
-            <a:r>
-              <a:rPr sz="1800" b="0">
-                <a:solidFill>
-                  <a:srgbClr val="F5FBFE"/>
-                </a:solidFill>
-                <a:latin typeface="Arial"/>
-                <a:ea typeface="Arial"/>
-                <a:cs typeface="Arial"/>
-              </a:rPr>
-              <a:t>Core grabbed</a:t>
-            </a:r>
-          </a:p>
-          <a:p xmlns:a="http://schemas.openxmlformats.org/drawingml/2006/main">
-            <a:pPr algn="l">
-              <a:defRPr sz="1800" b="0">
-                <a:solidFill>
-                  <a:srgbClr val="F5FBFE"/>
-                </a:solidFill>
-                <a:latin typeface="Arial"/>
-                <a:ea typeface="Arial"/>
-                <a:cs typeface="Arial"/>
-              </a:defRPr>
-            </a:pPr>
-            <a:r>
-              <a:rPr sz="1800" b="0">
-                <a:solidFill>
-                  <a:srgbClr val="F5FBFE"/>
-                </a:solidFill>
-                <a:latin typeface="Arial"/>
-                <a:ea typeface="Arial"/>
-                <a:cs typeface="Arial"/>
-              </a:rPr>
-              <a:t>Core released at socket</a:t>
-            </a:r>
-          </a:p>
-          <a:p xmlns:a="http://schemas.openxmlformats.org/drawingml/2006/main">
-            <a:pPr algn="l">
-              <a:defRPr sz="1800" b="0">
-                <a:solidFill>
-                  <a:srgbClr val="F5FBFE"/>
-                </a:solidFill>
-                <a:latin typeface="Arial"/>
-                <a:ea typeface="Arial"/>
-                <a:cs typeface="Arial"/>
-              </a:defRPr>
-            </a:pPr>
-            <a:r>
-              <a:rPr sz="1800" b="0">
-                <a:solidFill>
-                  <a:srgbClr val="F5FBFE"/>
-                </a:solidFill>
-                <a:latin typeface="Arial"/>
-                <a:ea typeface="Arial"/>
-                <a:cs typeface="Arial"/>
-              </a:rPr>
-              <a:t>Hatch open</a:t>
-            </a:r>
-          </a:p>
-          <a:p xmlns:a="http://schemas.openxmlformats.org/drawingml/2006/main">
-            <a:pPr algn="l">
-              <a:defRPr sz="1800" b="0">
-                <a:solidFill>
-                  <a:srgbClr val="F5FBFE"/>
-                </a:solidFill>
-                <a:latin typeface="Arial"/>
-                <a:ea typeface="Arial"/>
-                <a:cs typeface="Arial"/>
-              </a:defRPr>
-            </a:pPr>
-            <a:r>
-              <a:rPr sz="1800" b="0">
-                <a:solidFill>
-                  <a:srgbClr val="F5FBFE"/>
-                </a:solidFill>
-                <a:latin typeface="Arial"/>
-                <a:ea typeface="Arial"/>
-                <a:cs typeface="Arial"/>
-              </a:rPr>
-              <a:t>Exit reached</a:t>
-            </a:r>
-          </a:p>
-        </p:txBody>
-      </p:sp>
-      <p:sp>
-        <p:nvSpPr>
-          <p:cNvPr id="13" name="">
-            <a:extLst xmlns:a="http://schemas.openxmlformats.org/drawingml/2006/main">
-              <a:ext uri="{FF2B5EF4-FFF2-40B4-BE49-F238E27FC236}">
-                <a16:creationId xmlns:a16="http://schemas.microsoft.com/office/drawing/2014/main" id="{F738B80A-67FF-484F-8015-5F5FE68BABF6}"/>
-              </a:ext>
-            </a:extLst>
-          </p:cNvPr>
-          <p:cNvSpPr>
-            <a:spLocks xmlns:a="http://schemas.openxmlformats.org/drawingml/2006/main" noGrp="1"/>
-          </p:cNvSpPr>
-          <p:nvPr/>
-        </p:nvSpPr>
-        <p:spPr>
-          <a:xfrm xmlns:a="http://schemas.openxmlformats.org/drawingml/2006/main">
-            <a:off x="7915275" y="2200275"/>
-            <a:ext cx="3609975" cy="1962150"/>
-          </a:xfrm>
-          <a:prstGeom xmlns:a="http://schemas.openxmlformats.org/drawingml/2006/main" prst="roundRect">
-            <a:avLst>
-              <a:gd name="adj" fmla="val 5825"/>
-            </a:avLst>
-          </a:prstGeom>
-          <a:solidFill xmlns:a="http://schemas.openxmlformats.org/drawingml/2006/main">
-            <a:srgbClr val="0B2033"/>
-          </a:solidFill>
-          <a:ln xmlns:a="http://schemas.openxmlformats.org/drawingml/2006/main" w="0">
-            <a:noFill/>
-            <a:prstDash val="solid"/>
-          </a:ln>
-        </p:spPr>
-      </p:sp>
-      <p:sp>
-        <p:nvSpPr>
-          <p:cNvPr id="14" name="">
-            <a:extLst xmlns:a="http://schemas.openxmlformats.org/drawingml/2006/main">
-              <a:ext uri="{FF2B5EF4-FFF2-40B4-BE49-F238E27FC236}">
-                <a16:creationId xmlns:a16="http://schemas.microsoft.com/office/drawing/2014/main" id="{FFC3BD3D-6348-47E0-AA72-FBDA3F842CB7}"/>
-              </a:ext>
-            </a:extLst>
-          </p:cNvPr>
-          <p:cNvSpPr>
-            <a:spLocks xmlns:a="http://schemas.openxmlformats.org/drawingml/2006/main" noGrp="1"/>
-          </p:cNvSpPr>
-          <p:nvPr/>
-        </p:nvSpPr>
-        <p:spPr>
-          <a:xfrm xmlns:a="http://schemas.openxmlformats.org/drawingml/2006/main">
-            <a:off x="8172450" y="2400300"/>
-            <a:ext cx="3048000" cy="1562100"/>
-          </a:xfrm>
-          <a:prstGeom xmlns:a="http://schemas.openxmlformats.org/drawingml/2006/main" prst="rect">
-            <a:avLst/>
-          </a:prstGeom>
-          <a:noFill xmlns:a="http://schemas.openxmlformats.org/drawingml/2006/main"/>
-          <a:ln xmlns:a="http://schemas.openxmlformats.org/drawingml/2006/main" w="0">
-            <a:noFill/>
-            <a:prstDash val="solid"/>
-          </a:ln>
-        </p:spPr>
-        <p:txBody>
-          <a:bodyPr xmlns:a="http://schemas.openxmlformats.org/drawingml/2006/main" wrap="square" lIns="0" tIns="0" rIns="0" bIns="0" anchor="ctr">
-            <a:normAutofit fontScale="100000"/>
-          </a:bodyPr>
-          <a:lstStyle xmlns:a="http://schemas.openxmlformats.org/drawingml/2006/main">
-            <a:defPPr algn="l">
-              <a:defRPr sz="1800" b="0">
-                <a:solidFill>
-                  <a:srgbClr val="F5FBFE"/>
-                </a:solidFill>
-                <a:latin typeface="Arial"/>
-                <a:ea typeface="Arial"/>
-                <a:cs typeface="Arial"/>
-              </a:defRPr>
-            </a:defPPr>
-            <a:lvl1pPr algn="l">
-              <a:defRPr sz="1800" b="0">
-                <a:solidFill>
-                  <a:srgbClr val="F5FBFE"/>
-                </a:solidFill>
-                <a:latin typeface="Arial"/>
-                <a:ea typeface="Arial"/>
-                <a:cs typeface="Arial"/>
-              </a:defRPr>
-            </a:lvl1pPr>
-            <a:lvl2pPr algn="l">
-              <a:defRPr sz="1800" b="0">
-                <a:solidFill>
-                  <a:srgbClr val="F5FBFE"/>
-                </a:solidFill>
-                <a:latin typeface="Arial"/>
-                <a:ea typeface="Arial"/>
-                <a:cs typeface="Arial"/>
-              </a:defRPr>
-            </a:lvl2pPr>
-            <a:lvl3pPr algn="l">
-              <a:defRPr sz="1800" b="0">
-                <a:solidFill>
-                  <a:srgbClr val="F5FBFE"/>
-                </a:solidFill>
-                <a:latin typeface="Arial"/>
-                <a:ea typeface="Arial"/>
-                <a:cs typeface="Arial"/>
-              </a:defRPr>
-            </a:lvl3pPr>
-            <a:lvl4pPr algn="l">
-              <a:defRPr sz="1800" b="0">
-                <a:solidFill>
-                  <a:srgbClr val="F5FBFE"/>
-                </a:solidFill>
-                <a:latin typeface="Arial"/>
-                <a:ea typeface="Arial"/>
-                <a:cs typeface="Arial"/>
-              </a:defRPr>
-            </a:lvl4pPr>
-            <a:lvl5pPr algn="l">
-              <a:defRPr sz="1800" b="0">
-                <a:solidFill>
-                  <a:srgbClr val="F5FBFE"/>
-                </a:solidFill>
-                <a:latin typeface="Arial"/>
-                <a:ea typeface="Arial"/>
-                <a:cs typeface="Arial"/>
-              </a:defRPr>
-            </a:lvl5pPr>
-            <a:lvl6pPr algn="l">
-              <a:defRPr sz="1800" b="0">
-                <a:solidFill>
-                  <a:srgbClr val="F5FBFE"/>
-                </a:solidFill>
-                <a:latin typeface="Arial"/>
-                <a:ea typeface="Arial"/>
-                <a:cs typeface="Arial"/>
-              </a:defRPr>
-            </a:lvl6pPr>
-            <a:lvl7pPr algn="l">
-              <a:defRPr sz="1800" b="0">
-                <a:solidFill>
-                  <a:srgbClr val="F5FBFE"/>
-                </a:solidFill>
-                <a:latin typeface="Arial"/>
-                <a:ea typeface="Arial"/>
-                <a:cs typeface="Arial"/>
-              </a:defRPr>
-            </a:lvl7pPr>
-            <a:lvl8pPr algn="l">
-              <a:defRPr sz="1800" b="0">
-                <a:solidFill>
-                  <a:srgbClr val="F5FBFE"/>
-                </a:solidFill>
-                <a:latin typeface="Arial"/>
-                <a:ea typeface="Arial"/>
-                <a:cs typeface="Arial"/>
-              </a:defRPr>
-            </a:lvl8pPr>
-            <a:lvl9pPr algn="l">
-              <a:defRPr sz="1800" b="0">
-                <a:solidFill>
-                  <a:srgbClr val="F5FBFE"/>
-                </a:solidFill>
-                <a:latin typeface="Arial"/>
-                <a:ea typeface="Arial"/>
-                <a:cs typeface="Arial"/>
-              </a:defRPr>
-            </a:lvl9pPr>
-          </a:lstStyle>
-          <a:p xmlns:a="http://schemas.openxmlformats.org/drawingml/2006/main">
-            <a:pPr algn="l">
-              <a:defRPr sz="1800" b="0">
-                <a:solidFill>
-                  <a:srgbClr val="F5FBFE"/>
-                </a:solidFill>
-                <a:latin typeface="Arial"/>
-                <a:ea typeface="Arial"/>
-                <a:cs typeface="Arial"/>
-              </a:defRPr>
-            </a:pPr>
-            <a:r>
-              <a:rPr sz="1800" b="0">
-                <a:solidFill>
-                  <a:srgbClr val="F5FBFE"/>
-                </a:solidFill>
-                <a:latin typeface="Arial"/>
-                <a:ea typeface="Arial"/>
-                <a:cs typeface="Arial"/>
-              </a:rPr>
-              <a:t>Status and help</a:t>
-            </a:r>
-          </a:p>
-          <a:p xmlns:a="http://schemas.openxmlformats.org/drawingml/2006/main">
-            <a:pPr algn="l">
-              <a:defRPr sz="1800" b="0">
-                <a:solidFill>
-                  <a:srgbClr val="F5FBFE"/>
-                </a:solidFill>
-                <a:latin typeface="Arial"/>
-                <a:ea typeface="Arial"/>
-                <a:cs typeface="Arial"/>
-              </a:defRPr>
-            </a:pPr>
-            <a:r>
-              <a:rPr sz="1800" b="0">
-                <a:solidFill>
-                  <a:srgbClr val="F5FBFE"/>
-                </a:solidFill>
-                <a:latin typeface="Arial"/>
-                <a:ea typeface="Arial"/>
-                <a:cs typeface="Arial"/>
-              </a:rPr>
-              <a:t>Indicator light</a:t>
-            </a:r>
-          </a:p>
-          <a:p xmlns:a="http://schemas.openxmlformats.org/drawingml/2006/main">
-            <a:pPr algn="l">
-              <a:defRPr sz="1800" b="0">
-                <a:solidFill>
-                  <a:srgbClr val="F5FBFE"/>
-                </a:solidFill>
-                <a:latin typeface="Arial"/>
-                <a:ea typeface="Arial"/>
-                <a:cs typeface="Arial"/>
-              </a:defRPr>
-            </a:pPr>
-            <a:r>
-              <a:rPr sz="1800" b="0">
-                <a:solidFill>
-                  <a:srgbClr val="F5FBFE"/>
-                </a:solidFill>
-                <a:latin typeface="Arial"/>
-                <a:ea typeface="Arial"/>
-                <a:cs typeface="Arial"/>
-              </a:rPr>
-              <a:t>Spatial audio</a:t>
-            </a:r>
-          </a:p>
-          <a:p xmlns:a="http://schemas.openxmlformats.org/drawingml/2006/main">
-            <a:pPr algn="l">
-              <a:defRPr sz="1800" b="0">
-                <a:solidFill>
-                  <a:srgbClr val="F5FBFE"/>
-                </a:solidFill>
-                <a:latin typeface="Arial"/>
-                <a:ea typeface="Arial"/>
-                <a:cs typeface="Arial"/>
-              </a:defRPr>
-            </a:pPr>
-            <a:r>
-              <a:rPr sz="1800" b="0">
-                <a:solidFill>
-                  <a:srgbClr val="F5FBFE"/>
-                </a:solidFill>
-                <a:latin typeface="Arial"/>
-                <a:ea typeface="Arial"/>
-                <a:cs typeface="Arial"/>
-              </a:rPr>
-              <a:t>Haptic response</a:t>
-            </a:r>
-          </a:p>
-        </p:txBody>
-      </p:sp>
-      <p:sp>
-        <p:nvSpPr>
-          <p:cNvPr id="15" name="">
-            <a:extLst xmlns:a="http://schemas.openxmlformats.org/drawingml/2006/main">
-              <a:ext uri="{FF2B5EF4-FFF2-40B4-BE49-F238E27FC236}">
-                <a16:creationId xmlns:a16="http://schemas.microsoft.com/office/drawing/2014/main" id="{B57B0DE3-A42E-4EB9-B648-9D286744D966}"/>
-              </a:ext>
-            </a:extLst>
-          </p:cNvPr>
-          <p:cNvSpPr>
-            <a:spLocks xmlns:a="http://schemas.openxmlformats.org/drawingml/2006/main" noGrp="1"/>
-          </p:cNvSpPr>
-          <p:nvPr/>
-        </p:nvSpPr>
-        <p:spPr>
-          <a:xfrm xmlns:a="http://schemas.openxmlformats.org/drawingml/2006/main">
-            <a:off x="3552825" y="2914650"/>
-            <a:ext cx="276225" cy="400050"/>
-          </a:xfrm>
-          <a:prstGeom xmlns:a="http://schemas.openxmlformats.org/drawingml/2006/main" prst="rect">
-            <a:avLst/>
-          </a:prstGeom>
-          <a:noFill xmlns:a="http://schemas.openxmlformats.org/drawingml/2006/main"/>
-          <a:ln xmlns:a="http://schemas.openxmlformats.org/drawingml/2006/main" w="0">
-            <a:noFill/>
-            <a:prstDash val="solid"/>
-          </a:ln>
-        </p:spPr>
-        <p:txBody>
-          <a:bodyPr xmlns:a="http://schemas.openxmlformats.org/drawingml/2006/main" wrap="square" lIns="0" tIns="0" rIns="0" bIns="0" anchor="ctr">
-            <a:normAutofit fontScale="100000"/>
-          </a:bodyPr>
-          <a:lstStyle xmlns:a="http://schemas.openxmlformats.org/drawingml/2006/main">
-            <a:defPPr algn="ctr">
-              <a:defRPr sz="2400" b="1">
-                <a:solidFill>
-                  <a:srgbClr val="FF831B"/>
-                </a:solidFill>
-                <a:latin typeface="Arial"/>
-                <a:ea typeface="Arial"/>
-                <a:cs typeface="Arial"/>
-              </a:defRPr>
-            </a:defPPr>
-            <a:lvl1pPr algn="ctr">
-              <a:defRPr sz="2400" b="1">
-                <a:solidFill>
-                  <a:srgbClr val="FF831B"/>
-                </a:solidFill>
-                <a:latin typeface="Arial"/>
-                <a:ea typeface="Arial"/>
-                <a:cs typeface="Arial"/>
-              </a:defRPr>
-            </a:lvl1pPr>
-            <a:lvl2pPr algn="ctr">
-              <a:defRPr sz="2400" b="1">
-                <a:solidFill>
-                  <a:srgbClr val="FF831B"/>
-                </a:solidFill>
-                <a:latin typeface="Arial"/>
-                <a:ea typeface="Arial"/>
-                <a:cs typeface="Arial"/>
-              </a:defRPr>
-            </a:lvl2pPr>
-            <a:lvl3pPr algn="ctr">
-              <a:defRPr sz="2400" b="1">
-                <a:solidFill>
-                  <a:srgbClr val="FF831B"/>
-                </a:solidFill>
-                <a:latin typeface="Arial"/>
-                <a:ea typeface="Arial"/>
-                <a:cs typeface="Arial"/>
-              </a:defRPr>
-            </a:lvl3pPr>
-            <a:lvl4pPr algn="ctr">
-              <a:defRPr sz="2400" b="1">
-                <a:solidFill>
-                  <a:srgbClr val="FF831B"/>
-                </a:solidFill>
-                <a:latin typeface="Arial"/>
-                <a:ea typeface="Arial"/>
-                <a:cs typeface="Arial"/>
-              </a:defRPr>
-            </a:lvl4pPr>
-            <a:lvl5pPr algn="ctr">
-              <a:defRPr sz="2400" b="1">
-                <a:solidFill>
-                  <a:srgbClr val="FF831B"/>
-                </a:solidFill>
-                <a:latin typeface="Arial"/>
-                <a:ea typeface="Arial"/>
-                <a:cs typeface="Arial"/>
-              </a:defRPr>
-            </a:lvl5pPr>
-            <a:lvl6pPr algn="ctr">
-              <a:defRPr sz="2400" b="1">
-                <a:solidFill>
-                  <a:srgbClr val="FF831B"/>
-                </a:solidFill>
-                <a:latin typeface="Arial"/>
-                <a:ea typeface="Arial"/>
-                <a:cs typeface="Arial"/>
-              </a:defRPr>
-            </a:lvl6pPr>
-            <a:lvl7pPr algn="ctr">
-              <a:defRPr sz="2400" b="1">
-                <a:solidFill>
-                  <a:srgbClr val="FF831B"/>
-                </a:solidFill>
-                <a:latin typeface="Arial"/>
-                <a:ea typeface="Arial"/>
-                <a:cs typeface="Arial"/>
-              </a:defRPr>
-            </a:lvl7pPr>
-            <a:lvl8pPr algn="ctr">
-              <a:defRPr sz="2400" b="1">
-                <a:solidFill>
-                  <a:srgbClr val="FF831B"/>
-                </a:solidFill>
-                <a:latin typeface="Arial"/>
-                <a:ea typeface="Arial"/>
-                <a:cs typeface="Arial"/>
-              </a:defRPr>
-            </a:lvl8pPr>
-            <a:lvl9pPr algn="ctr">
-              <a:defRPr sz="2400" b="1">
-                <a:solidFill>
-                  <a:srgbClr val="FF831B"/>
-                </a:solidFill>
-                <a:latin typeface="Arial"/>
-                <a:ea typeface="Arial"/>
-                <a:cs typeface="Arial"/>
-              </a:defRPr>
-            </a:lvl9pPr>
-          </a:lstStyle>
-          <a:p xmlns:a="http://schemas.openxmlformats.org/drawingml/2006/main">
-            <a:pPr algn="ctr">
-              <a:defRPr sz="2400" b="1">
-                <a:solidFill>
-                  <a:srgbClr val="FF831B"/>
-                </a:solidFill>
-                <a:latin typeface="Arial"/>
-                <a:ea typeface="Arial"/>
-                <a:cs typeface="Arial"/>
-              </a:defRPr>
-            </a:pPr>
-            <a:r>
-              <a:rPr sz="2400" b="1">
-                <a:solidFill>
-                  <a:srgbClr val="FF831B"/>
-                </a:solidFill>
-                <a:latin typeface="Arial"/>
-                <a:ea typeface="Arial"/>
-                <a:cs typeface="Arial"/>
-              </a:rPr>
-              <a:t>&gt;</a:t>
-            </a:r>
-          </a:p>
-        </p:txBody>
-      </p:sp>
-      <p:sp>
-        <p:nvSpPr>
-          <p:cNvPr id="16" name="">
-            <a:extLst xmlns:a="http://schemas.openxmlformats.org/drawingml/2006/main">
-              <a:ext uri="{FF2B5EF4-FFF2-40B4-BE49-F238E27FC236}">
-                <a16:creationId xmlns:a16="http://schemas.microsoft.com/office/drawing/2014/main" id="{9AE29557-BD2B-4F48-98CE-B2FDBA047F1D}"/>
-              </a:ext>
-            </a:extLst>
-          </p:cNvPr>
-          <p:cNvSpPr>
-            <a:spLocks xmlns:a="http://schemas.openxmlformats.org/drawingml/2006/main" noGrp="1"/>
-          </p:cNvSpPr>
-          <p:nvPr/>
-        </p:nvSpPr>
-        <p:spPr>
-          <a:xfrm xmlns:a="http://schemas.openxmlformats.org/drawingml/2006/main">
-            <a:off x="7477125" y="2914650"/>
-            <a:ext cx="276225" cy="400050"/>
-          </a:xfrm>
-          <a:prstGeom xmlns:a="http://schemas.openxmlformats.org/drawingml/2006/main" prst="rect">
-            <a:avLst/>
-          </a:prstGeom>
-          <a:noFill xmlns:a="http://schemas.openxmlformats.org/drawingml/2006/main"/>
-          <a:ln xmlns:a="http://schemas.openxmlformats.org/drawingml/2006/main" w="0">
-            <a:noFill/>
-            <a:prstDash val="solid"/>
-          </a:ln>
-        </p:spPr>
-        <p:txBody>
-          <a:bodyPr xmlns:a="http://schemas.openxmlformats.org/drawingml/2006/main" wrap="square" lIns="0" tIns="0" rIns="0" bIns="0" anchor="ctr">
-            <a:normAutofit fontScale="100000"/>
-          </a:bodyPr>
-          <a:lstStyle xmlns:a="http://schemas.openxmlformats.org/drawingml/2006/main">
-            <a:defPPr algn="ctr">
-              <a:defRPr sz="2400" b="1">
-                <a:solidFill>
-                  <a:srgbClr val="FF831B"/>
-                </a:solidFill>
-                <a:latin typeface="Arial"/>
-                <a:ea typeface="Arial"/>
-                <a:cs typeface="Arial"/>
-              </a:defRPr>
-            </a:defPPr>
-            <a:lvl1pPr algn="ctr">
-              <a:defRPr sz="2400" b="1">
-                <a:solidFill>
-                  <a:srgbClr val="FF831B"/>
-                </a:solidFill>
-                <a:latin typeface="Arial"/>
-                <a:ea typeface="Arial"/>
-                <a:cs typeface="Arial"/>
-              </a:defRPr>
-            </a:lvl1pPr>
-            <a:lvl2pPr algn="ctr">
-              <a:defRPr sz="2400" b="1">
-                <a:solidFill>
-                  <a:srgbClr val="FF831B"/>
-                </a:solidFill>
-                <a:latin typeface="Arial"/>
-                <a:ea typeface="Arial"/>
-                <a:cs typeface="Arial"/>
-              </a:defRPr>
-            </a:lvl2pPr>
-            <a:lvl3pPr algn="ctr">
-              <a:defRPr sz="2400" b="1">
-                <a:solidFill>
-                  <a:srgbClr val="FF831B"/>
-                </a:solidFill>
-                <a:latin typeface="Arial"/>
-                <a:ea typeface="Arial"/>
-                <a:cs typeface="Arial"/>
-              </a:defRPr>
-            </a:lvl3pPr>
-            <a:lvl4pPr algn="ctr">
-              <a:defRPr sz="2400" b="1">
-                <a:solidFill>
-                  <a:srgbClr val="FF831B"/>
-                </a:solidFill>
-                <a:latin typeface="Arial"/>
-                <a:ea typeface="Arial"/>
-                <a:cs typeface="Arial"/>
-              </a:defRPr>
-            </a:lvl4pPr>
-            <a:lvl5pPr algn="ctr">
-              <a:defRPr sz="2400" b="1">
-                <a:solidFill>
-                  <a:srgbClr val="FF831B"/>
-                </a:solidFill>
-                <a:latin typeface="Arial"/>
-                <a:ea typeface="Arial"/>
-                <a:cs typeface="Arial"/>
-              </a:defRPr>
-            </a:lvl5pPr>
-            <a:lvl6pPr algn="ctr">
-              <a:defRPr sz="2400" b="1">
-                <a:solidFill>
-                  <a:srgbClr val="FF831B"/>
-                </a:solidFill>
-                <a:latin typeface="Arial"/>
-                <a:ea typeface="Arial"/>
-                <a:cs typeface="Arial"/>
-              </a:defRPr>
-            </a:lvl6pPr>
-            <a:lvl7pPr algn="ctr">
-              <a:defRPr sz="2400" b="1">
-                <a:solidFill>
-                  <a:srgbClr val="FF831B"/>
-                </a:solidFill>
-                <a:latin typeface="Arial"/>
-                <a:ea typeface="Arial"/>
-                <a:cs typeface="Arial"/>
-              </a:defRPr>
-            </a:lvl7pPr>
-            <a:lvl8pPr algn="ctr">
-              <a:defRPr sz="2400" b="1">
-                <a:solidFill>
-                  <a:srgbClr val="FF831B"/>
-                </a:solidFill>
-                <a:latin typeface="Arial"/>
-                <a:ea typeface="Arial"/>
-                <a:cs typeface="Arial"/>
-              </a:defRPr>
-            </a:lvl8pPr>
-            <a:lvl9pPr algn="ctr">
-              <a:defRPr sz="2400" b="1">
-                <a:solidFill>
-                  <a:srgbClr val="FF831B"/>
-                </a:solidFill>
-                <a:latin typeface="Arial"/>
-                <a:ea typeface="Arial"/>
-                <a:cs typeface="Arial"/>
-              </a:defRPr>
-            </a:lvl9pPr>
-          </a:lstStyle>
-          <a:p xmlns:a="http://schemas.openxmlformats.org/drawingml/2006/main">
-            <a:pPr algn="ctr">
-              <a:defRPr sz="2400" b="1">
-                <a:solidFill>
-                  <a:srgbClr val="FF831B"/>
-                </a:solidFill>
-                <a:latin typeface="Arial"/>
-                <a:ea typeface="Arial"/>
-                <a:cs typeface="Arial"/>
-              </a:defRPr>
-            </a:pPr>
-            <a:r>
-              <a:rPr sz="2400" b="1">
-                <a:solidFill>
-                  <a:srgbClr val="FF831B"/>
-                </a:solidFill>
-                <a:latin typeface="Arial"/>
-                <a:ea typeface="Arial"/>
-                <a:cs typeface="Arial"/>
-              </a:rPr>
-              <a:t>&gt;</a:t>
-            </a:r>
-          </a:p>
-        </p:txBody>
-      </p:sp>
-      <p:sp>
-        <p:nvSpPr>
-          <p:cNvPr id="17" name="">
-            <a:extLst xmlns:a="http://schemas.openxmlformats.org/drawingml/2006/main">
-              <a:ext uri="{FF2B5EF4-FFF2-40B4-BE49-F238E27FC236}">
-                <a16:creationId xmlns:a16="http://schemas.microsoft.com/office/drawing/2014/main" id="{43B82103-169A-4E65-9CBB-E4C723200CA5}"/>
-              </a:ext>
-            </a:extLst>
-          </p:cNvPr>
-          <p:cNvSpPr>
-            <a:spLocks xmlns:a="http://schemas.openxmlformats.org/drawingml/2006/main" noGrp="1"/>
-          </p:cNvSpPr>
-          <p:nvPr/>
-        </p:nvSpPr>
-        <p:spPr>
-          <a:xfrm xmlns:a="http://schemas.openxmlformats.org/drawingml/2006/main">
-            <a:off x="666750" y="4533900"/>
-            <a:ext cx="10858500" cy="19050"/>
-          </a:xfrm>
-          <a:prstGeom xmlns:a="http://schemas.openxmlformats.org/drawingml/2006/main" prst="rect">
-            <a:avLst/>
-          </a:prstGeom>
-          <a:solidFill xmlns:a="http://schemas.openxmlformats.org/drawingml/2006/main">
-            <a:srgbClr val="28475A"/>
-          </a:solidFill>
-          <a:ln xmlns:a="http://schemas.openxmlformats.org/drawingml/2006/main" w="0">
-            <a:noFill/>
-            <a:prstDash val="solid"/>
-          </a:ln>
-        </p:spPr>
-      </p:sp>
-      <p:sp>
-        <p:nvSpPr>
-          <p:cNvPr id="18" name="">
-            <a:extLst xmlns:a="http://schemas.openxmlformats.org/drawingml/2006/main">
-              <a:ext uri="{FF2B5EF4-FFF2-40B4-BE49-F238E27FC236}">
-                <a16:creationId xmlns:a16="http://schemas.microsoft.com/office/drawing/2014/main" id="{737F0734-0867-42CB-A06F-49F7F23462CB}"/>
-              </a:ext>
-            </a:extLst>
-          </p:cNvPr>
-          <p:cNvSpPr>
-            <a:spLocks xmlns:a="http://schemas.openxmlformats.org/drawingml/2006/main" noGrp="1"/>
-          </p:cNvSpPr>
-          <p:nvPr/>
-        </p:nvSpPr>
-        <p:spPr>
-          <a:xfrm xmlns:a="http://schemas.openxmlformats.org/drawingml/2006/main">
-            <a:off x="666750" y="4810125"/>
-            <a:ext cx="2171700" cy="342900"/>
-          </a:xfrm>
-          <a:prstGeom xmlns:a="http://schemas.openxmlformats.org/drawingml/2006/main" prst="rect">
-            <a:avLst/>
-          </a:prstGeom>
-          <a:noFill xmlns:a="http://schemas.openxmlformats.org/drawingml/2006/main"/>
-          <a:ln xmlns:a="http://schemas.openxmlformats.org/drawingml/2006/main" w="0">
-            <a:noFill/>
-            <a:prstDash val="solid"/>
-          </a:ln>
-        </p:spPr>
-        <p:txBody>
-          <a:bodyPr xmlns:a="http://schemas.openxmlformats.org/drawingml/2006/main" wrap="square" lIns="0" tIns="0" rIns="0" bIns="0" anchor="ctr">
-            <a:normAutofit fontScale="100000"/>
-          </a:bodyPr>
-          <a:lstStyle xmlns:a="http://schemas.openxmlformats.org/drawingml/2006/main">
-            <a:defPPr algn="l">
-              <a:defRPr sz="1575" b="1">
-                <a:solidFill>
-                  <a:srgbClr val="72E7F4"/>
-                </a:solidFill>
-                <a:latin typeface="Arial"/>
-                <a:ea typeface="Arial"/>
-                <a:cs typeface="Arial"/>
-              </a:defRPr>
-            </a:defPPr>
-            <a:lvl1pPr algn="l">
-              <a:defRPr sz="1575" b="1">
-                <a:solidFill>
-                  <a:srgbClr val="72E7F4"/>
-                </a:solidFill>
-                <a:latin typeface="Arial"/>
-                <a:ea typeface="Arial"/>
-                <a:cs typeface="Arial"/>
-              </a:defRPr>
-            </a:lvl1pPr>
-            <a:lvl2pPr algn="l">
-              <a:defRPr sz="1575" b="1">
-                <a:solidFill>
-                  <a:srgbClr val="72E7F4"/>
-                </a:solidFill>
-                <a:latin typeface="Arial"/>
-                <a:ea typeface="Arial"/>
-                <a:cs typeface="Arial"/>
-              </a:defRPr>
-            </a:lvl2pPr>
-            <a:lvl3pPr algn="l">
-              <a:defRPr sz="1575" b="1">
-                <a:solidFill>
-                  <a:srgbClr val="72E7F4"/>
-                </a:solidFill>
-                <a:latin typeface="Arial"/>
-                <a:ea typeface="Arial"/>
-                <a:cs typeface="Arial"/>
-              </a:defRPr>
-            </a:lvl3pPr>
-            <a:lvl4pPr algn="l">
-              <a:defRPr sz="1575" b="1">
-                <a:solidFill>
-                  <a:srgbClr val="72E7F4"/>
-                </a:solidFill>
-                <a:latin typeface="Arial"/>
-                <a:ea typeface="Arial"/>
-                <a:cs typeface="Arial"/>
-              </a:defRPr>
-            </a:lvl4pPr>
-            <a:lvl5pPr algn="l">
-              <a:defRPr sz="1575" b="1">
-                <a:solidFill>
-                  <a:srgbClr val="72E7F4"/>
-                </a:solidFill>
-                <a:latin typeface="Arial"/>
-                <a:ea typeface="Arial"/>
-                <a:cs typeface="Arial"/>
-              </a:defRPr>
-            </a:lvl5pPr>
-            <a:lvl6pPr algn="l">
-              <a:defRPr sz="1575" b="1">
-                <a:solidFill>
-                  <a:srgbClr val="72E7F4"/>
-                </a:solidFill>
-                <a:latin typeface="Arial"/>
-                <a:ea typeface="Arial"/>
-                <a:cs typeface="Arial"/>
-              </a:defRPr>
-            </a:lvl6pPr>
-            <a:lvl7pPr algn="l">
-              <a:defRPr sz="1575" b="1">
-                <a:solidFill>
-                  <a:srgbClr val="72E7F4"/>
-                </a:solidFill>
-                <a:latin typeface="Arial"/>
-                <a:ea typeface="Arial"/>
-                <a:cs typeface="Arial"/>
-              </a:defRPr>
-            </a:lvl7pPr>
-            <a:lvl8pPr algn="l">
-              <a:defRPr sz="1575" b="1">
-                <a:solidFill>
-                  <a:srgbClr val="72E7F4"/>
-                </a:solidFill>
-                <a:latin typeface="Arial"/>
-                <a:ea typeface="Arial"/>
-                <a:cs typeface="Arial"/>
-              </a:defRPr>
-            </a:lvl8pPr>
-            <a:lvl9pPr algn="l">
-              <a:defRPr sz="1575" b="1">
-                <a:solidFill>
-                  <a:srgbClr val="72E7F4"/>
-                </a:solidFill>
-                <a:latin typeface="Arial"/>
-                <a:ea typeface="Arial"/>
-                <a:cs typeface="Arial"/>
-              </a:defRPr>
-            </a:lvl9pPr>
-          </a:lstStyle>
-          <a:p xmlns:a="http://schemas.openxmlformats.org/drawingml/2006/main">
-            <a:pPr algn="l">
-              <a:defRPr sz="1575" b="1">
-                <a:solidFill>
-                  <a:srgbClr val="72E7F4"/>
-                </a:solidFill>
-                <a:latin typeface="Arial"/>
-                <a:ea typeface="Arial"/>
-                <a:cs typeface="Arial"/>
-              </a:defRPr>
-            </a:pPr>
-            <a:r>
-              <a:rPr sz="1575" b="1">
-                <a:solidFill>
-                  <a:srgbClr val="72E7F4"/>
-                </a:solidFill>
-                <a:latin typeface="Arial"/>
-                <a:ea typeface="Arial"/>
-                <a:cs typeface="Arial"/>
-              </a:rPr>
-              <a:t>Checked so far</a:t>
-            </a:r>
-          </a:p>
-        </p:txBody>
-      </p:sp>
-      <p:sp>
-        <p:nvSpPr>
-          <p:cNvPr id="19" name="">
-            <a:extLst xmlns:a="http://schemas.openxmlformats.org/drawingml/2006/main">
-              <a:ext uri="{FF2B5EF4-FFF2-40B4-BE49-F238E27FC236}">
-                <a16:creationId xmlns:a16="http://schemas.microsoft.com/office/drawing/2014/main" id="{0AE91388-9DD5-4C45-B4B4-14CBA849C04E}"/>
-              </a:ext>
-            </a:extLst>
-          </p:cNvPr>
-          <p:cNvSpPr>
-            <a:spLocks xmlns:a="http://schemas.openxmlformats.org/drawingml/2006/main" noGrp="1"/>
-          </p:cNvSpPr>
-          <p:nvPr/>
-        </p:nvSpPr>
-        <p:spPr>
-          <a:xfrm xmlns:a="http://schemas.openxmlformats.org/drawingml/2006/main">
-            <a:off x="2819400" y="4752975"/>
-            <a:ext cx="8096250" cy="733425"/>
-          </a:xfrm>
-          <a:prstGeom xmlns:a="http://schemas.openxmlformats.org/drawingml/2006/main" prst="rect">
-            <a:avLst/>
-          </a:prstGeom>
-          <a:noFill xmlns:a="http://schemas.openxmlformats.org/drawingml/2006/main"/>
-          <a:ln xmlns:a="http://schemas.openxmlformats.org/drawingml/2006/main" w="0">
-            <a:noFill/>
-            <a:prstDash val="solid"/>
-          </a:ln>
-        </p:spPr>
-        <p:txBody>
-          <a:bodyPr xmlns:a="http://schemas.openxmlformats.org/drawingml/2006/main" wrap="square" lIns="0" tIns="0" rIns="0" bIns="0" anchor="ctr">
-            <a:normAutofit fontScale="100000"/>
-          </a:bodyPr>
-          <a:lstStyle xmlns:a="http://schemas.openxmlformats.org/drawingml/2006/main">
-            <a:defPPr algn="l">
-              <a:defRPr sz="1575" b="0">
-                <a:solidFill>
-                  <a:srgbClr val="F5FBFE"/>
-                </a:solidFill>
-                <a:latin typeface="Arial"/>
-                <a:ea typeface="Arial"/>
-                <a:cs typeface="Arial"/>
-              </a:defRPr>
-            </a:defPPr>
-            <a:lvl1pPr algn="l">
-              <a:defRPr sz="1575" b="0">
-                <a:solidFill>
-                  <a:srgbClr val="F5FBFE"/>
-                </a:solidFill>
-                <a:latin typeface="Arial"/>
-                <a:ea typeface="Arial"/>
-                <a:cs typeface="Arial"/>
-              </a:defRPr>
-            </a:lvl1pPr>
-            <a:lvl2pPr algn="l">
-              <a:defRPr sz="1575" b="0">
-                <a:solidFill>
-                  <a:srgbClr val="F5FBFE"/>
-                </a:solidFill>
-                <a:latin typeface="Arial"/>
-                <a:ea typeface="Arial"/>
-                <a:cs typeface="Arial"/>
-              </a:defRPr>
-            </a:lvl2pPr>
-            <a:lvl3pPr algn="l">
-              <a:defRPr sz="1575" b="0">
-                <a:solidFill>
-                  <a:srgbClr val="F5FBFE"/>
-                </a:solidFill>
-                <a:latin typeface="Arial"/>
-                <a:ea typeface="Arial"/>
-                <a:cs typeface="Arial"/>
-              </a:defRPr>
-            </a:lvl3pPr>
-            <a:lvl4pPr algn="l">
-              <a:defRPr sz="1575" b="0">
-                <a:solidFill>
-                  <a:srgbClr val="F5FBFE"/>
-                </a:solidFill>
-                <a:latin typeface="Arial"/>
-                <a:ea typeface="Arial"/>
-                <a:cs typeface="Arial"/>
-              </a:defRPr>
-            </a:lvl4pPr>
-            <a:lvl5pPr algn="l">
-              <a:defRPr sz="1575" b="0">
-                <a:solidFill>
-                  <a:srgbClr val="F5FBFE"/>
-                </a:solidFill>
-                <a:latin typeface="Arial"/>
-                <a:ea typeface="Arial"/>
-                <a:cs typeface="Arial"/>
-              </a:defRPr>
-            </a:lvl5pPr>
-            <a:lvl6pPr algn="l">
-              <a:defRPr sz="1575" b="0">
-                <a:solidFill>
-                  <a:srgbClr val="F5FBFE"/>
-                </a:solidFill>
-                <a:latin typeface="Arial"/>
-                <a:ea typeface="Arial"/>
-                <a:cs typeface="Arial"/>
-              </a:defRPr>
-            </a:lvl6pPr>
-            <a:lvl7pPr algn="l">
-              <a:defRPr sz="1575" b="0">
-                <a:solidFill>
-                  <a:srgbClr val="F5FBFE"/>
-                </a:solidFill>
-                <a:latin typeface="Arial"/>
-                <a:ea typeface="Arial"/>
-                <a:cs typeface="Arial"/>
-              </a:defRPr>
-            </a:lvl7pPr>
-            <a:lvl8pPr algn="l">
-              <a:defRPr sz="1575" b="0">
-                <a:solidFill>
-                  <a:srgbClr val="F5FBFE"/>
-                </a:solidFill>
-                <a:latin typeface="Arial"/>
-                <a:ea typeface="Arial"/>
-                <a:cs typeface="Arial"/>
-              </a:defRPr>
-            </a:lvl8pPr>
-            <a:lvl9pPr algn="l">
-              <a:defRPr sz="1575" b="0">
-                <a:solidFill>
-                  <a:srgbClr val="F5FBFE"/>
-                </a:solidFill>
-                <a:latin typeface="Arial"/>
-                <a:ea typeface="Arial"/>
-                <a:cs typeface="Arial"/>
-              </a:defRPr>
-            </a:lvl9pPr>
-          </a:lstStyle>
-          <a:p xmlns:a="http://schemas.openxmlformats.org/drawingml/2006/main">
-            <a:pPr algn="l">
-              <a:defRPr sz="1575" b="0">
-                <a:solidFill>
-                  <a:srgbClr val="F5FBFE"/>
-                </a:solidFill>
-                <a:latin typeface="Arial"/>
-                <a:ea typeface="Arial"/>
-                <a:cs typeface="Arial"/>
-              </a:defRPr>
-            </a:pPr>
-            <a:r>
-              <a:rPr sz="1575" b="0">
-                <a:solidFill>
-                  <a:srgbClr val="F5FBFE"/>
-                </a:solidFill>
-                <a:latin typeface="Arial"/>
-                <a:ea typeface="Arial"/>
-                <a:cs typeface="Arial"/>
-              </a:rPr>
-              <a:t>Simulator mission path and audio calls; Android APK build; UI scene and prefab structure.</a:t>
-            </a:r>
-          </a:p>
-        </p:txBody>
-      </p:sp>
-      <p:sp>
-        <p:nvSpPr>
-          <p:cNvPr id="20" name="">
-            <a:extLst xmlns:a="http://schemas.openxmlformats.org/drawingml/2006/main">
-              <a:ext uri="{FF2B5EF4-FFF2-40B4-BE49-F238E27FC236}">
-                <a16:creationId xmlns:a16="http://schemas.microsoft.com/office/drawing/2014/main" id="{DA8CE135-D390-4262-BF72-78DC433AED3F}"/>
-              </a:ext>
-            </a:extLst>
-          </p:cNvPr>
-          <p:cNvSpPr>
-            <a:spLocks xmlns:a="http://schemas.openxmlformats.org/drawingml/2006/main" noGrp="1"/>
-          </p:cNvSpPr>
-          <p:nvPr/>
-        </p:nvSpPr>
-        <p:spPr>
-          <a:xfrm xmlns:a="http://schemas.openxmlformats.org/drawingml/2006/main">
-            <a:off x="2819400" y="5553075"/>
-            <a:ext cx="8096250" cy="428625"/>
+            <a:off x="6381750" y="5381625"/>
+            <a:ext cx="5143500" cy="676275"/>
           </a:xfrm>
           <a:prstGeom xmlns:a="http://schemas.openxmlformats.org/drawingml/2006/main" prst="rect">
             <a:avLst/>
@@ -12340,7 +11528,7 @@
                 <a:ea typeface="Arial"/>
                 <a:cs typeface="Arial"/>
               </a:rPr>
-              <a:t>Pending: controller-ray UI clicks in Play, Quest feel, headset audio and haptics.</a:t>
+              <a:t>Implemented in Unity. This image shows the Editor preview; runtime and device checks are separate.</a:t>
             </a:r>
           </a:p>
         </p:txBody>
@@ -12348,7 +11536,7 @@
     </p:spTree>
     <p:extLst>
       <p:ext uri="{BB962C8B-B14F-4D97-AF65-F5344CB8AC3E}">
-        <p14:creationId xmlns:p14="http://schemas.microsoft.com/office/powerpoint/2010/main" val="800093419"/>
+        <p14:creationId xmlns:p14="http://schemas.microsoft.com/office/powerpoint/2010/main" val="800734603"/>
       </p:ext>
     </p:extLst>
   </p:cSld>
@@ -12379,7 +11567,7 @@
           <p:cNvPr id="15" name="">
             <a:extLst xmlns:a="http://schemas.openxmlformats.org/drawingml/2006/main">
               <a:ext uri="{FF2B5EF4-FFF2-40B4-BE49-F238E27FC236}">
-                <a16:creationId xmlns:a16="http://schemas.microsoft.com/office/drawing/2014/main" id="{5165EE8A-4AEB-427F-BA15-0A4F20CBDD9E}"/>
+                <a16:creationId xmlns:a16="http://schemas.microsoft.com/office/drawing/2014/main" id="{14935501-C8E0-463C-8EA0-4F5681867B5E}"/>
               </a:ext>
             </a:extLst>
           </p:cNvPr>
@@ -12410,7 +11598,7 @@
           <p:cNvPr id="2" name="">
             <a:extLst xmlns:a="http://schemas.openxmlformats.org/drawingml/2006/main">
               <a:ext uri="{FF2B5EF4-FFF2-40B4-BE49-F238E27FC236}">
-                <a16:creationId xmlns:a16="http://schemas.microsoft.com/office/drawing/2014/main" id="{3EF6033E-F8BE-456B-AE67-867D068F38FA}"/>
+                <a16:creationId xmlns:a16="http://schemas.microsoft.com/office/drawing/2014/main" id="{C3A9FA3E-9C1C-46F4-8866-D4B939257304}"/>
               </a:ext>
             </a:extLst>
           </p:cNvPr>
@@ -12569,7 +11757,7 @@
           <p:cNvPr id="3" name="">
             <a:extLst xmlns:a="http://schemas.openxmlformats.org/drawingml/2006/main">
               <a:ext uri="{FF2B5EF4-FFF2-40B4-BE49-F238E27FC236}">
-                <a16:creationId xmlns:a16="http://schemas.microsoft.com/office/drawing/2014/main" id="{E2352347-A23D-4C85-9B3A-C00B4411A433}"/>
+                <a16:creationId xmlns:a16="http://schemas.microsoft.com/office/drawing/2014/main" id="{F9579CFF-DB5E-4CC1-A872-9A3FDB4D7A8D}"/>
               </a:ext>
             </a:extLst>
           </p:cNvPr>
@@ -12600,7 +11788,7 @@
           <p:cNvPr id="4" name="">
             <a:extLst xmlns:a="http://schemas.openxmlformats.org/drawingml/2006/main">
               <a:ext uri="{FF2B5EF4-FFF2-40B4-BE49-F238E27FC236}">
-                <a16:creationId xmlns:a16="http://schemas.microsoft.com/office/drawing/2014/main" id="{20803F5A-C76B-441E-8B7A-2C9996DE5D75}"/>
+                <a16:creationId xmlns:a16="http://schemas.microsoft.com/office/drawing/2014/main" id="{535BA7FE-0E2D-49AE-B896-6963BBFA7AEE}"/>
               </a:ext>
             </a:extLst>
           </p:cNvPr>
@@ -12759,7 +11947,7 @@
           <p:cNvPr id="5" name="">
             <a:extLst xmlns:a="http://schemas.openxmlformats.org/drawingml/2006/main">
               <a:ext uri="{FF2B5EF4-FFF2-40B4-BE49-F238E27FC236}">
-                <a16:creationId xmlns:a16="http://schemas.microsoft.com/office/drawing/2014/main" id="{56DBF674-6AEB-4F81-9C8A-45B71FC27F79}"/>
+                <a16:creationId xmlns:a16="http://schemas.microsoft.com/office/drawing/2014/main" id="{A1A07A21-5214-40C9-861A-A044832951BE}"/>
               </a:ext>
             </a:extLst>
           </p:cNvPr>
@@ -12918,7 +12106,7 @@
           <p:cNvPr id="6" name="">
             <a:extLst xmlns:a="http://schemas.openxmlformats.org/drawingml/2006/main">
               <a:ext uri="{FF2B5EF4-FFF2-40B4-BE49-F238E27FC236}">
-                <a16:creationId xmlns:a16="http://schemas.microsoft.com/office/drawing/2014/main" id="{A1E16DA5-D8B6-490C-9E85-A5591C2904B2}"/>
+                <a16:creationId xmlns:a16="http://schemas.microsoft.com/office/drawing/2014/main" id="{8D37F947-BE09-45E0-A28C-74540E9E5C72}"/>
               </a:ext>
             </a:extLst>
           </p:cNvPr>
@@ -12951,7 +12139,7 @@
           <p:cNvPr id="7" name="">
             <a:extLst xmlns:a="http://schemas.openxmlformats.org/drawingml/2006/main">
               <a:ext uri="{FF2B5EF4-FFF2-40B4-BE49-F238E27FC236}">
-                <a16:creationId xmlns:a16="http://schemas.microsoft.com/office/drawing/2014/main" id="{B46BABF5-6775-49AB-BEFA-1B9CB4EC509D}"/>
+                <a16:creationId xmlns:a16="http://schemas.microsoft.com/office/drawing/2014/main" id="{B1D813E0-7A3A-447B-A502-1D1046642B5C}"/>
               </a:ext>
             </a:extLst>
           </p:cNvPr>
@@ -12984,7 +12172,7 @@
           <p:cNvPr id="8" name="">
             <a:extLst xmlns:a="http://schemas.openxmlformats.org/drawingml/2006/main">
               <a:ext uri="{FF2B5EF4-FFF2-40B4-BE49-F238E27FC236}">
-                <a16:creationId xmlns:a16="http://schemas.microsoft.com/office/drawing/2014/main" id="{8A415014-836F-4E29-A94C-06170FDAF206}"/>
+                <a16:creationId xmlns:a16="http://schemas.microsoft.com/office/drawing/2014/main" id="{782AB48E-D263-4343-BF6A-1441B682DDFB}"/>
               </a:ext>
             </a:extLst>
           </p:cNvPr>
@@ -13143,7 +12331,7 @@
           <p:cNvPr id="9" name="">
             <a:extLst xmlns:a="http://schemas.openxmlformats.org/drawingml/2006/main">
               <a:ext uri="{FF2B5EF4-FFF2-40B4-BE49-F238E27FC236}">
-                <a16:creationId xmlns:a16="http://schemas.microsoft.com/office/drawing/2014/main" id="{C225A2B3-03AA-4904-9CFF-3A198F343909}"/>
+                <a16:creationId xmlns:a16="http://schemas.microsoft.com/office/drawing/2014/main" id="{A0483CC0-70C7-4A78-99AE-C0FAAA9FE383}"/>
               </a:ext>
             </a:extLst>
           </p:cNvPr>
@@ -13302,7 +12490,7 @@
           <p:cNvPr id="10" name="">
             <a:extLst xmlns:a="http://schemas.openxmlformats.org/drawingml/2006/main">
               <a:ext uri="{FF2B5EF4-FFF2-40B4-BE49-F238E27FC236}">
-                <a16:creationId xmlns:a16="http://schemas.microsoft.com/office/drawing/2014/main" id="{CD864FE2-FC53-4052-A62A-D0F4797A7588}"/>
+                <a16:creationId xmlns:a16="http://schemas.microsoft.com/office/drawing/2014/main" id="{F091ED00-8B32-40C9-AC62-D558F15D651C}"/>
               </a:ext>
             </a:extLst>
           </p:cNvPr>
@@ -13461,7 +12649,7 @@
           <p:cNvPr id="11" name="">
             <a:extLst xmlns:a="http://schemas.openxmlformats.org/drawingml/2006/main">
               <a:ext uri="{FF2B5EF4-FFF2-40B4-BE49-F238E27FC236}">
-                <a16:creationId xmlns:a16="http://schemas.microsoft.com/office/drawing/2014/main" id="{21CF2051-3454-4F8A-BAC3-D533D8D423C8}"/>
+                <a16:creationId xmlns:a16="http://schemas.microsoft.com/office/drawing/2014/main" id="{265AA4DC-63C0-4056-87A1-EF1F934A2598}"/>
               </a:ext>
             </a:extLst>
           </p:cNvPr>
@@ -13620,7 +12808,7 @@
           <p:cNvPr id="12" name="">
             <a:extLst xmlns:a="http://schemas.openxmlformats.org/drawingml/2006/main">
               <a:ext uri="{FF2B5EF4-FFF2-40B4-BE49-F238E27FC236}">
-                <a16:creationId xmlns:a16="http://schemas.microsoft.com/office/drawing/2014/main" id="{68745305-F6D1-44CF-8A14-72B4A68D7E64}"/>
+                <a16:creationId xmlns:a16="http://schemas.microsoft.com/office/drawing/2014/main" id="{4ED1AB9F-DDC8-486B-8973-D1F8D3A7E606}"/>
               </a:ext>
             </a:extLst>
           </p:cNvPr>
@@ -13779,7 +12967,7 @@
           <p:cNvPr id="13" name="">
             <a:extLst xmlns:a="http://schemas.openxmlformats.org/drawingml/2006/main">
               <a:ext uri="{FF2B5EF4-FFF2-40B4-BE49-F238E27FC236}">
-                <a16:creationId xmlns:a16="http://schemas.microsoft.com/office/drawing/2014/main" id="{47DBE84D-8D22-4BBC-A99A-E1B1D1FCC065}"/>
+                <a16:creationId xmlns:a16="http://schemas.microsoft.com/office/drawing/2014/main" id="{04C777C0-5C1B-42BE-947B-8F83B13B3D49}"/>
               </a:ext>
             </a:extLst>
           </p:cNvPr>
@@ -13938,7 +13126,7 @@
           <p:cNvPr id="14" name="">
             <a:extLst xmlns:a="http://schemas.openxmlformats.org/drawingml/2006/main">
               <a:ext uri="{FF2B5EF4-FFF2-40B4-BE49-F238E27FC236}">
-                <a16:creationId xmlns:a16="http://schemas.microsoft.com/office/drawing/2014/main" id="{2448700D-45DE-4789-9157-C8D517DD3DC8}"/>
+                <a16:creationId xmlns:a16="http://schemas.microsoft.com/office/drawing/2014/main" id="{7648A144-F8A3-44A4-AE87-FDD077B5DD36}"/>
               </a:ext>
             </a:extLst>
           </p:cNvPr>
@@ -14095,7 +13283,7 @@
     </p:spTree>
     <p:extLst>
       <p:ext uri="{BB962C8B-B14F-4D97-AF65-F5344CB8AC3E}">
-        <p14:creationId xmlns:p14="http://schemas.microsoft.com/office/powerpoint/2010/main" val="584870286"/>
+        <p14:creationId xmlns:p14="http://schemas.microsoft.com/office/powerpoint/2010/main" val="255403426"/>
       </p:ext>
     </p:extLst>
   </p:cSld>
@@ -14126,7 +13314,7 @@
           <p:cNvPr id="26" name="">
             <a:extLst xmlns:a="http://schemas.openxmlformats.org/drawingml/2006/main">
               <a:ext uri="{FF2B5EF4-FFF2-40B4-BE49-F238E27FC236}">
-                <a16:creationId xmlns:a16="http://schemas.microsoft.com/office/drawing/2014/main" id="{6379C4F4-E166-4348-9E81-4149701C67E4}"/>
+                <a16:creationId xmlns:a16="http://schemas.microsoft.com/office/drawing/2014/main" id="{D8855348-5B11-4FB8-950E-B163979308C7}"/>
               </a:ext>
             </a:extLst>
           </p:cNvPr>
@@ -14157,7 +13345,7 @@
           <p:cNvPr id="2" name="">
             <a:extLst xmlns:a="http://schemas.openxmlformats.org/drawingml/2006/main">
               <a:ext uri="{FF2B5EF4-FFF2-40B4-BE49-F238E27FC236}">
-                <a16:creationId xmlns:a16="http://schemas.microsoft.com/office/drawing/2014/main" id="{B1D24D78-A4C3-4369-97CC-5FE0D7735474}"/>
+                <a16:creationId xmlns:a16="http://schemas.microsoft.com/office/drawing/2014/main" id="{DDFFA9C4-4E63-49C3-81EF-D4FE5F28855A}"/>
               </a:ext>
             </a:extLst>
           </p:cNvPr>
@@ -14316,7 +13504,7 @@
           <p:cNvPr id="3" name="">
             <a:extLst xmlns:a="http://schemas.openxmlformats.org/drawingml/2006/main">
               <a:ext uri="{FF2B5EF4-FFF2-40B4-BE49-F238E27FC236}">
-                <a16:creationId xmlns:a16="http://schemas.microsoft.com/office/drawing/2014/main" id="{50FA6F22-B568-4650-810B-513BFEF76514}"/>
+                <a16:creationId xmlns:a16="http://schemas.microsoft.com/office/drawing/2014/main" id="{F1B60C98-1D80-4305-89E9-CB167FEFE051}"/>
               </a:ext>
             </a:extLst>
           </p:cNvPr>
@@ -14347,7 +13535,7 @@
           <p:cNvPr id="4" name="">
             <a:extLst xmlns:a="http://schemas.openxmlformats.org/drawingml/2006/main">
               <a:ext uri="{FF2B5EF4-FFF2-40B4-BE49-F238E27FC236}">
-                <a16:creationId xmlns:a16="http://schemas.microsoft.com/office/drawing/2014/main" id="{4F0B2A21-AAB3-4CCE-BD6F-2105EEF937EE}"/>
+                <a16:creationId xmlns:a16="http://schemas.microsoft.com/office/drawing/2014/main" id="{CF66B598-7BFB-4E87-A2E7-D9564EF96833}"/>
               </a:ext>
             </a:extLst>
           </p:cNvPr>
@@ -14506,7 +13694,7 @@
           <p:cNvPr id="5" name="">
             <a:extLst xmlns:a="http://schemas.openxmlformats.org/drawingml/2006/main">
               <a:ext uri="{FF2B5EF4-FFF2-40B4-BE49-F238E27FC236}">
-                <a16:creationId xmlns:a16="http://schemas.microsoft.com/office/drawing/2014/main" id="{CE64ADE7-7679-40C1-A91B-1E635787360B}"/>
+                <a16:creationId xmlns:a16="http://schemas.microsoft.com/office/drawing/2014/main" id="{340D7F07-4233-4045-9EF0-A68B4FD67270}"/>
               </a:ext>
             </a:extLst>
           </p:cNvPr>
@@ -14665,7 +13853,7 @@
           <p:cNvPr id="6" name="">
             <a:extLst xmlns:a="http://schemas.openxmlformats.org/drawingml/2006/main">
               <a:ext uri="{FF2B5EF4-FFF2-40B4-BE49-F238E27FC236}">
-                <a16:creationId xmlns:a16="http://schemas.microsoft.com/office/drawing/2014/main" id="{43F2A7D1-15EE-47D9-B5F4-A93044D01C44}"/>
+                <a16:creationId xmlns:a16="http://schemas.microsoft.com/office/drawing/2014/main" id="{CCD62D53-ADB1-498E-9F7D-B97F47B7950F}"/>
               </a:ext>
             </a:extLst>
           </p:cNvPr>
@@ -14824,7 +14012,7 @@
           <p:cNvPr id="7" name="">
             <a:extLst xmlns:a="http://schemas.openxmlformats.org/drawingml/2006/main">
               <a:ext uri="{FF2B5EF4-FFF2-40B4-BE49-F238E27FC236}">
-                <a16:creationId xmlns:a16="http://schemas.microsoft.com/office/drawing/2014/main" id="{3FDA5CD5-4835-48EC-BE57-B1504D29D197}"/>
+                <a16:creationId xmlns:a16="http://schemas.microsoft.com/office/drawing/2014/main" id="{0F341E87-BCAF-4E82-AAF6-6CE95599FE13}"/>
               </a:ext>
             </a:extLst>
           </p:cNvPr>
@@ -14983,7 +14171,7 @@
           <p:cNvPr id="8" name="">
             <a:extLst xmlns:a="http://schemas.openxmlformats.org/drawingml/2006/main">
               <a:ext uri="{FF2B5EF4-FFF2-40B4-BE49-F238E27FC236}">
-                <a16:creationId xmlns:a16="http://schemas.microsoft.com/office/drawing/2014/main" id="{4B94C653-A120-48A0-9DB2-F4AC629D77B5}"/>
+                <a16:creationId xmlns:a16="http://schemas.microsoft.com/office/drawing/2014/main" id="{456CC9AD-5DD3-474C-A57D-F0DCE63ABD14}"/>
               </a:ext>
             </a:extLst>
           </p:cNvPr>
@@ -15014,7 +14202,7 @@
           <p:cNvPr id="9" name="">
             <a:extLst xmlns:a="http://schemas.openxmlformats.org/drawingml/2006/main">
               <a:ext uri="{FF2B5EF4-FFF2-40B4-BE49-F238E27FC236}">
-                <a16:creationId xmlns:a16="http://schemas.microsoft.com/office/drawing/2014/main" id="{E4804655-4DDA-4A0F-8016-701F25B6F296}"/>
+                <a16:creationId xmlns:a16="http://schemas.microsoft.com/office/drawing/2014/main" id="{B322AC1F-749D-47BF-BAB2-946ABC5CAC63}"/>
               </a:ext>
             </a:extLst>
           </p:cNvPr>
@@ -15173,7 +14361,7 @@
           <p:cNvPr id="10" name="">
             <a:extLst xmlns:a="http://schemas.openxmlformats.org/drawingml/2006/main">
               <a:ext uri="{FF2B5EF4-FFF2-40B4-BE49-F238E27FC236}">
-                <a16:creationId xmlns:a16="http://schemas.microsoft.com/office/drawing/2014/main" id="{2EA40AED-46BE-4EEC-8DF2-8A4E8D092ECA}"/>
+                <a16:creationId xmlns:a16="http://schemas.microsoft.com/office/drawing/2014/main" id="{C13C55D2-E292-4D0F-9802-0DA18703CB82}"/>
               </a:ext>
             </a:extLst>
           </p:cNvPr>
@@ -15332,7 +14520,7 @@
           <p:cNvPr id="11" name="">
             <a:extLst xmlns:a="http://schemas.openxmlformats.org/drawingml/2006/main">
               <a:ext uri="{FF2B5EF4-FFF2-40B4-BE49-F238E27FC236}">
-                <a16:creationId xmlns:a16="http://schemas.microsoft.com/office/drawing/2014/main" id="{E6B8C049-030B-4954-A4CC-4AE38FA49F9B}"/>
+                <a16:creationId xmlns:a16="http://schemas.microsoft.com/office/drawing/2014/main" id="{3105142E-8C1E-4394-96A6-85437891B2FD}"/>
               </a:ext>
             </a:extLst>
           </p:cNvPr>
@@ -15363,7 +14551,7 @@
           <p:cNvPr id="12" name="">
             <a:extLst xmlns:a="http://schemas.openxmlformats.org/drawingml/2006/main">
               <a:ext uri="{FF2B5EF4-FFF2-40B4-BE49-F238E27FC236}">
-                <a16:creationId xmlns:a16="http://schemas.microsoft.com/office/drawing/2014/main" id="{33311B89-AD86-4249-A357-5E60E0C94FC0}"/>
+                <a16:creationId xmlns:a16="http://schemas.microsoft.com/office/drawing/2014/main" id="{03664125-63CA-4FAD-8586-279C21D99EB7}"/>
               </a:ext>
             </a:extLst>
           </p:cNvPr>
@@ -15522,7 +14710,7 @@
           <p:cNvPr id="13" name="">
             <a:extLst xmlns:a="http://schemas.openxmlformats.org/drawingml/2006/main">
               <a:ext uri="{FF2B5EF4-FFF2-40B4-BE49-F238E27FC236}">
-                <a16:creationId xmlns:a16="http://schemas.microsoft.com/office/drawing/2014/main" id="{DC0569AD-C576-46DA-A67A-892182755DDF}"/>
+                <a16:creationId xmlns:a16="http://schemas.microsoft.com/office/drawing/2014/main" id="{E7A9CB87-68D5-4F0B-86FA-A392E6200401}"/>
               </a:ext>
             </a:extLst>
           </p:cNvPr>
@@ -15681,7 +14869,7 @@
           <p:cNvPr id="14" name="">
             <a:extLst xmlns:a="http://schemas.openxmlformats.org/drawingml/2006/main">
               <a:ext uri="{FF2B5EF4-FFF2-40B4-BE49-F238E27FC236}">
-                <a16:creationId xmlns:a16="http://schemas.microsoft.com/office/drawing/2014/main" id="{A8933D56-DBF7-4F90-9670-4AC86D14A820}"/>
+                <a16:creationId xmlns:a16="http://schemas.microsoft.com/office/drawing/2014/main" id="{D6D10F85-4C7E-4AC0-8F82-6DC56F1D1362}"/>
               </a:ext>
             </a:extLst>
           </p:cNvPr>
@@ -15712,7 +14900,7 @@
           <p:cNvPr id="15" name="">
             <a:extLst xmlns:a="http://schemas.openxmlformats.org/drawingml/2006/main">
               <a:ext uri="{FF2B5EF4-FFF2-40B4-BE49-F238E27FC236}">
-                <a16:creationId xmlns:a16="http://schemas.microsoft.com/office/drawing/2014/main" id="{ACF3A99D-6541-497B-9703-4996E176EBB1}"/>
+                <a16:creationId xmlns:a16="http://schemas.microsoft.com/office/drawing/2014/main" id="{7E68221E-C254-4005-AC2E-362FF2A65A96}"/>
               </a:ext>
             </a:extLst>
           </p:cNvPr>
@@ -15871,7 +15059,7 @@
           <p:cNvPr id="16" name="">
             <a:extLst xmlns:a="http://schemas.openxmlformats.org/drawingml/2006/main">
               <a:ext uri="{FF2B5EF4-FFF2-40B4-BE49-F238E27FC236}">
-                <a16:creationId xmlns:a16="http://schemas.microsoft.com/office/drawing/2014/main" id="{910E86CC-0675-4107-A04A-2307D4F45801}"/>
+                <a16:creationId xmlns:a16="http://schemas.microsoft.com/office/drawing/2014/main" id="{F262AAC6-2C42-49B7-AF1A-D24EDE5FD2EF}"/>
               </a:ext>
             </a:extLst>
           </p:cNvPr>
@@ -16020,7 +15208,7 @@
                 <a:ea typeface="Arial"/>
                 <a:cs typeface="Arial"/>
               </a:rPr>
-              <a:t>Release at the socket; show the hatch</a:t>
+              <a:t>Release at the socket; show the doors</a:t>
             </a:r>
           </a:p>
         </p:txBody>
@@ -16030,7 +15218,7 @@
           <p:cNvPr id="17" name="">
             <a:extLst xmlns:a="http://schemas.openxmlformats.org/drawingml/2006/main">
               <a:ext uri="{FF2B5EF4-FFF2-40B4-BE49-F238E27FC236}">
-                <a16:creationId xmlns:a16="http://schemas.microsoft.com/office/drawing/2014/main" id="{E9C2C714-0476-4971-9BB0-BA58878709C2}"/>
+                <a16:creationId xmlns:a16="http://schemas.microsoft.com/office/drawing/2014/main" id="{8D3F53C7-C1D3-4FE3-8B2D-3249FC7B3E1F}"/>
               </a:ext>
             </a:extLst>
           </p:cNvPr>
@@ -16061,7 +15249,7 @@
           <p:cNvPr id="18" name="">
             <a:extLst xmlns:a="http://schemas.openxmlformats.org/drawingml/2006/main">
               <a:ext uri="{FF2B5EF4-FFF2-40B4-BE49-F238E27FC236}">
-                <a16:creationId xmlns:a16="http://schemas.microsoft.com/office/drawing/2014/main" id="{1C440BF4-C7CB-41BF-8660-18C306F2F957}"/>
+                <a16:creationId xmlns:a16="http://schemas.microsoft.com/office/drawing/2014/main" id="{972CC1BF-BCF5-4E44-91F4-654497C6700A}"/>
               </a:ext>
             </a:extLst>
           </p:cNvPr>
@@ -16220,7 +15408,7 @@
           <p:cNvPr id="19" name="">
             <a:extLst xmlns:a="http://schemas.openxmlformats.org/drawingml/2006/main">
               <a:ext uri="{FF2B5EF4-FFF2-40B4-BE49-F238E27FC236}">
-                <a16:creationId xmlns:a16="http://schemas.microsoft.com/office/drawing/2014/main" id="{83363450-925C-48A0-AA47-ED9A9A61905D}"/>
+                <a16:creationId xmlns:a16="http://schemas.microsoft.com/office/drawing/2014/main" id="{142705ED-22FD-42F9-B58C-8DD172514E42}"/>
               </a:ext>
             </a:extLst>
           </p:cNvPr>
@@ -16379,7 +15567,7 @@
           <p:cNvPr id="20" name="">
             <a:extLst xmlns:a="http://schemas.openxmlformats.org/drawingml/2006/main">
               <a:ext uri="{FF2B5EF4-FFF2-40B4-BE49-F238E27FC236}">
-                <a16:creationId xmlns:a16="http://schemas.microsoft.com/office/drawing/2014/main" id="{71BE0013-6F70-4323-B355-DFFC1669423F}"/>
+                <a16:creationId xmlns:a16="http://schemas.microsoft.com/office/drawing/2014/main" id="{E741A573-DCCE-4A77-87D1-7178F20045B6}"/>
               </a:ext>
             </a:extLst>
           </p:cNvPr>
@@ -16410,7 +15598,7 @@
           <p:cNvPr id="21" name="">
             <a:extLst xmlns:a="http://schemas.openxmlformats.org/drawingml/2006/main">
               <a:ext uri="{FF2B5EF4-FFF2-40B4-BE49-F238E27FC236}">
-                <a16:creationId xmlns:a16="http://schemas.microsoft.com/office/drawing/2014/main" id="{778A9343-429A-4D48-955C-46533B9E0CE3}"/>
+                <a16:creationId xmlns:a16="http://schemas.microsoft.com/office/drawing/2014/main" id="{26B72641-CEF5-421B-9630-98777BDE6EA3}"/>
               </a:ext>
             </a:extLst>
           </p:cNvPr>
@@ -16569,7 +15757,7 @@
           <p:cNvPr id="22" name="">
             <a:extLst xmlns:a="http://schemas.openxmlformats.org/drawingml/2006/main">
               <a:ext uri="{FF2B5EF4-FFF2-40B4-BE49-F238E27FC236}">
-                <a16:creationId xmlns:a16="http://schemas.microsoft.com/office/drawing/2014/main" id="{BB2B7B9B-342C-4268-88FF-33237C9D5F21}"/>
+                <a16:creationId xmlns:a16="http://schemas.microsoft.com/office/drawing/2014/main" id="{A1DCF561-F826-44C5-969D-E8DEAE83D210}"/>
               </a:ext>
             </a:extLst>
           </p:cNvPr>
@@ -16728,7 +15916,7 @@
           <p:cNvPr id="23" name="">
             <a:extLst xmlns:a="http://schemas.openxmlformats.org/drawingml/2006/main">
               <a:ext uri="{FF2B5EF4-FFF2-40B4-BE49-F238E27FC236}">
-                <a16:creationId xmlns:a16="http://schemas.microsoft.com/office/drawing/2014/main" id="{E6808115-E329-4502-A438-68091A53C45A}"/>
+                <a16:creationId xmlns:a16="http://schemas.microsoft.com/office/drawing/2014/main" id="{5350560F-8846-4D07-BED6-EB61EB4C5066}"/>
               </a:ext>
             </a:extLst>
           </p:cNvPr>
@@ -16738,7 +15926,7 @@
           <p:nvPr/>
         </p:nvPicPr>
         <p:blipFill>
-          <a:blip xmlns:r="http://schemas.openxmlformats.org/officeDocument/2006/relationships" xmlns:a="http://schemas.openxmlformats.org/drawingml/2006/main" r:embed="R714bfc30d79543f3"/>
+          <a:blip xmlns:r="http://schemas.openxmlformats.org/officeDocument/2006/relationships" xmlns:a="http://schemas.openxmlformats.org/drawingml/2006/main" r:embed="Rec0d3d1fd8aa4257"/>
           <a:stretch xmlns:a="http://schemas.openxmlformats.org/drawingml/2006/main"/>
         </p:blipFill>
         <p:spPr>
@@ -16756,7 +15944,7 @@
           <p:cNvPr id="24" name="">
             <a:extLst xmlns:a="http://schemas.openxmlformats.org/drawingml/2006/main">
               <a:ext uri="{FF2B5EF4-FFF2-40B4-BE49-F238E27FC236}">
-                <a16:creationId xmlns:a16="http://schemas.microsoft.com/office/drawing/2014/main" id="{EE01DDBC-81D8-434B-9A07-BFC71D16539A}"/>
+                <a16:creationId xmlns:a16="http://schemas.microsoft.com/office/drawing/2014/main" id="{0DA791B3-AC2F-49C0-8F3E-EC869CC02FA8}"/>
               </a:ext>
             </a:extLst>
           </p:cNvPr>
@@ -16905,7 +16093,7 @@
                 <a:ea typeface="Arial"/>
                 <a:cs typeface="Arial"/>
               </a:rPr>
-              <a:t>Earlier simulator video still</a:t>
+              <a:t>Current Unity Editor preview</a:t>
             </a:r>
           </a:p>
         </p:txBody>
@@ -16915,7 +16103,7 @@
           <p:cNvPr id="25" name="">
             <a:extLst xmlns:a="http://schemas.openxmlformats.org/drawingml/2006/main">
               <a:ext uri="{FF2B5EF4-FFF2-40B4-BE49-F238E27FC236}">
-                <a16:creationId xmlns:a16="http://schemas.microsoft.com/office/drawing/2014/main" id="{4B49D2B7-BDB9-4A27-91D5-47E3AB66D7A2}"/>
+                <a16:creationId xmlns:a16="http://schemas.microsoft.com/office/drawing/2014/main" id="{1EAD4A73-E422-437F-A68B-661B0C6FCF20}"/>
               </a:ext>
             </a:extLst>
           </p:cNvPr>
@@ -17072,7 +16260,7 @@
     </p:spTree>
     <p:extLst>
       <p:ext uri="{BB962C8B-B14F-4D97-AF65-F5344CB8AC3E}">
-        <p14:creationId xmlns:p14="http://schemas.microsoft.com/office/powerpoint/2010/main" val="1618878937"/>
+        <p14:creationId xmlns:p14="http://schemas.microsoft.com/office/powerpoint/2010/main" val="1795524758"/>
       </p:ext>
     </p:extLst>
   </p:cSld>

--- a/Docs/Week07/Wang_VR_Week07_Midterm.pptx
+++ b/Docs/Week07/Wang_VR_Week07_Midterm.pptx
@@ -2,18 +2,18 @@
 <file path=ppt/presentation.xml><?xml version="1.0" encoding="utf-8"?>
 <p:presentation xmlns:p="http://schemas.openxmlformats.org/presentationml/2006/main">
   <p:sldMasterIdLst>
-    <p:sldMasterId xmlns:r="http://schemas.openxmlformats.org/officeDocument/2006/relationships" id="2147483648" r:id="Rfe099805b0d24ad2"/>
+    <p:sldMasterId xmlns:r="http://schemas.openxmlformats.org/officeDocument/2006/relationships" id="2147483648" r:id="Rf9a1844412a243f4"/>
   </p:sldMasterIdLst>
   <p:notesMasterIdLst>
-    <p:notesMasterId xmlns:r="http://schemas.openxmlformats.org/officeDocument/2006/relationships" r:id="R13cf3b1392fe461c"/>
+    <p:notesMasterId xmlns:r="http://schemas.openxmlformats.org/officeDocument/2006/relationships" r:id="R6951411c0a654044"/>
   </p:notesMasterIdLst>
   <p:sldIdLst>
-    <p:sldId xmlns:r="http://schemas.openxmlformats.org/officeDocument/2006/relationships" id="256" r:id="R7aa8583837f84b9c"/>
-    <p:sldId xmlns:r="http://schemas.openxmlformats.org/officeDocument/2006/relationships" id="257" r:id="Ra76ba9d2f57c48c4"/>
-    <p:sldId xmlns:r="http://schemas.openxmlformats.org/officeDocument/2006/relationships" id="258" r:id="R345770580d0e4bdc"/>
-    <p:sldId xmlns:r="http://schemas.openxmlformats.org/officeDocument/2006/relationships" id="259" r:id="Ra289dae934c24c8f"/>
-    <p:sldId xmlns:r="http://schemas.openxmlformats.org/officeDocument/2006/relationships" id="260" r:id="R82b4818c306040e0"/>
-    <p:sldId xmlns:r="http://schemas.openxmlformats.org/officeDocument/2006/relationships" id="261" r:id="R1cbc1304c1034d08"/>
+    <p:sldId xmlns:r="http://schemas.openxmlformats.org/officeDocument/2006/relationships" id="256" r:id="Rbb37f35305344887"/>
+    <p:sldId xmlns:r="http://schemas.openxmlformats.org/officeDocument/2006/relationships" id="257" r:id="R7cdc944095a14416"/>
+    <p:sldId xmlns:r="http://schemas.openxmlformats.org/officeDocument/2006/relationships" id="258" r:id="R2f31e757d82a4290"/>
+    <p:sldId xmlns:r="http://schemas.openxmlformats.org/officeDocument/2006/relationships" id="259" r:id="R871546f693ca487f"/>
+    <p:sldId xmlns:r="http://schemas.openxmlformats.org/officeDocument/2006/relationships" id="260" r:id="Ra44065c86828461a"/>
+    <p:sldId xmlns:r="http://schemas.openxmlformats.org/officeDocument/2006/relationships" id="261" r:id="R07295f1ed70a4e71"/>
   </p:sldIdLst>
   <p:sldSz cx="12192000" cy="6858000"/>
   <p:notesSz cx="6858000" cy="9144000"/>
@@ -460,6 +460,11 @@
               <a:t>Prior presentation visual reference: C:\Users\31797\Documents\ChatGPT\作业 3\VR_Presentation_20261008\output\Lost_Station_ZH_KO_20261008.pptx</a:t>
             </a:r>
           </a:p>
+          <a:p xmlns:a="http://schemas.openxmlformats.org/drawingml/2006/main">
+            <a:r>
+              <a:t>Affiliation: Department of Artificial Intelligence, Dong-A University. Official source: https://ibm.donga.ac.kr/abouteng/CMS/Contents/Contents.do?mCode=MN097</a:t>
+            </a:r>
+          </a:p>
         </p:txBody>
       </p:sp>
       <p:sp>
@@ -612,17 +617,12 @@
           <a:lstStyle xmlns:a="http://schemas.openxmlformats.org/drawingml/2006/main"/>
           <a:p xmlns:a="http://schemas.openxmlformats.org/drawingml/2006/main">
             <a:r>
-              <a:t>讲述建议（约 55 秒）：首次玩家可能不知道下一步操作，任务面板用英文状态和三步帮助说明目标。SHOW HELP/HIDE HELP 与 RESET MISSION 已接入场景。截图为 Unity Editor 预览，不能把它说成 Quest 测试。</a:t>
+              <a:t>讲述建议（约45秒）：这些是实际Quest 2 USB Link录像帧。左摇杆移动，右摇杆转向或传送，中指Grip抓取，食指Trigger点击。左手菜单键开关说明，B只关闭菜单，重置使用RESET MISSION。录像展示Help/Reset与完成状态，不代表每种手势都已验收。</a:t>
             </a:r>
           </a:p>
           <a:p xmlns:a="http://schemas.openxmlformats.org/drawingml/2006/main">
             <a:r>
-              <a:t>Source: C:\Users\31797\Documents\ChatGPT\作业 3\VR_Project_2026_2\Docs\Week06_Team_Integration.md</a:t>
-            </a:r>
-          </a:p>
-          <a:p xmlns:a="http://schemas.openxmlformats.org/drawingml/2006/main">
-            <a:r>
-              <a:t>Images: C:\Users\31797\Documents\ChatGPT\作业 3\VR_Project_2026_2\CourseValidation\Runtime\Week06_UI_Status_EditorPreview.png ; C:\Users\31797\Documents\ChatGPT\作业 3\VR_Project_2026_2\CourseValidation\Runtime\Week06_UI_Help_EditorPreview.png</a:t>
+              <a:t>Source: CourseValidation/Runtime/Quest_PCLink_Demo_20261021.json; Deliverables/Week07/Wang_VR_Week07_PCLink_Demo.mp4. Actual physical Quest 2 + USB Link + Windows Unity PC VR, recorded 21 Oct 2026. This is not native APK footage.</a:t>
             </a:r>
           </a:p>
         </p:txBody>
@@ -692,22 +692,17 @@
           <a:lstStyle xmlns:a="http://schemas.openxmlformats.org/drawingml/2006/main"/>
           <a:p xmlns:a="http://schemas.openxmlformats.org/drawingml/2006/main">
             <a:r>
-              <a:t>讲述建议（约 60 秒）：Meta XR 仍负责传送、抓取和射线输入。任务状态连接任务面板与硬件反馈。本周将小球改为带金属笼架和青色晶体的 E-07 核心，配套插槽带三只夹爪和分段灯环。完整开门过程实现为 2.65 秒，依次固定核心、缩回锁扣、双门向两侧滑开、通行灯变绿，并播放机械音效。图中为 Unity Editor 预览，不能视为实际控制器、Quest 性能或触觉测试结果。</a:t>
+              <a:t>讲述建议（约45秒）：图中仍为Editor预览。E-07核心与配套夹爪插槽触发2.65秒门动画，真实USB Link录像已展示抓取、供电、开门、出口。振动感知与独立APK性能仍待测。</a:t>
             </a:r>
           </a:p>
           <a:p xmlns:a="http://schemas.openxmlformats.org/drawingml/2006/main">
             <a:r>
-              <a:t>Source: C:\Users\31797\Documents\ChatGPT\作业 3\VR_Project_2026_2\Assets\02_Scripts\SpaceStationHardware.cs</a:t>
+              <a:t>Source: CourseValidation/Runtime/Quest_PCLink_Demo_20261021.json; Deliverables/Week07/Wang_VR_Week07_PCLink_Demo.mp4. Actual physical Quest 2 + USB Link + Windows Unity PC VR, recorded 21 Oct 2026. This is not native APK footage.</a:t>
             </a:r>
           </a:p>
           <a:p xmlns:a="http://schemas.openxmlformats.org/drawingml/2006/main">
             <a:r>
-              <a:t>Source: C:\Users\31797\Documents\ChatGPT\作业 3\VR_Project_2026_2\Assets\Editor\StationHardwareBuilder.cs</a:t>
-            </a:r>
-          </a:p>
-          <a:p xmlns:a="http://schemas.openxmlformats.org/drawingml/2006/main">
-            <a:r>
-              <a:t>Image: C:\Users\31797\Documents\ChatGPT\作业 3\VR_Project_2026_2\CourseValidation\Runtime\Week07_CoreDock_EditorPreview.png</a:t>
+              <a:t>Source: Assets/02_Scripts/SpaceStationHardware.cs</a:t>
             </a:r>
           </a:p>
         </p:txBody>
@@ -777,17 +772,12 @@
           <a:lstStyle xmlns:a="http://schemas.openxmlformats.org/drawingml/2006/main"/>
           <a:p xmlns:a="http://schemas.openxmlformats.org/drawingml/2006/main">
             <a:r>
-              <a:t>讲述建议（约 45 秒）：同学明天可试玩约十分钟；我会记录卡住位置、严重度，修复最重要的问题，并请同一同学做相同任务复测。Quest 也安排明天连接，此前不报告真人观察结果或真机视频。</a:t>
+              <a:t>讲述建议（约40秒）：10月21日已有真实头显操作录像，通过USB Link运行电脑端Unity。54秒为连续原速片段，保留游戏声音。目前APK已构建0.4.0，但尚未安装到Quest独立运行。同学首次使用测试及复测也尚未完成。</a:t>
             </a:r>
           </a:p>
           <a:p xmlns:a="http://schemas.openxmlformats.org/drawingml/2006/main">
             <a:r>
-              <a:t>Source: C:\Users\31797\Documents\ChatGPT\作业 3\VR_Project_2026_2\Docs\Week06_UI_Peer_Test.md</a:t>
-            </a:r>
-          </a:p>
-          <a:p xmlns:a="http://schemas.openxmlformats.org/drawingml/2006/main">
-            <a:r>
-              <a:t>Source: C:\Users\31797\Documents\ChatGPT\作业 3\VR_Project_2026_2\Docs\Week07\Wang_VR_Week07_CreativeAward_Draft.docx</a:t>
+              <a:t>Source: CourseValidation/Runtime/Quest_PCLink_Demo_20261021.json; Deliverables/Week07/Wang_VR_Week07_PCLink_Demo.mp4. Actual physical Quest 2 + USB Link + Windows Unity PC VR, recorded 21 Oct 2026. This is not native APK footage.</a:t>
             </a:r>
           </a:p>
         </p:txBody>
@@ -857,17 +847,12 @@
           <a:lstStyle xmlns:a="http://schemas.openxmlformats.org/drawingml/2006/main"/>
           <a:p xmlns:a="http://schemas.openxmlformats.org/drawingml/2006/main">
             <a:r>
-              <a:t>讲述建议（演示约 6 分钟）：演示时依次操作面板、传送、抓取、松开插入、观看夹爪与双门动画、到出口、重置。如改为录像，必须在 Quest 实机录制后使用真实画面。本页右侧是当前双门完全打开时的 Unity Editor 预览，不是视频帧，也不是 Quest 实机。</a:t>
+              <a:t>演示说明：可按左侧顺序现场演示，或播放随交付材料提供的54秒PC VR视频并解释流程。视频路径：Deliverables/Week07/Wang_VR_Week07_PCLink_Demo.mp4。右图是40秒视频帧。Zoom共享时勾选共享声音。课程单组10分钟汇报后另有5分钟问答；视频作为补充材料，不能替代要求的原生APK录像。</a:t>
             </a:r>
           </a:p>
           <a:p xmlns:a="http://schemas.openxmlformats.org/drawingml/2006/main">
             <a:r>
-              <a:t>Image: C:\Users\31797\Documents\ChatGPT\作业 3\VR_Project_2026_2\CourseValidation\Runtime\Week07_AirlockOpen_EditorPreview.png</a:t>
-            </a:r>
-          </a:p>
-          <a:p xmlns:a="http://schemas.openxmlformats.org/drawingml/2006/main">
-            <a:r>
-              <a:t>Source: C:\Users\31797\Documents\ChatGPT\作业 3\VR_Project_2026_2\Docs\Week06_UI_Peer_Test.md</a:t>
+              <a:t>Source: CourseValidation/Runtime/Quest_PCLink_Demo_20261021.json; Deliverables/Week07/Wang_VR_Week07_PCLink_Demo.mp4. Actual physical Quest 2 + USB Link + Windows Unity PC VR, recorded 21 Oct 2026. This is not native APK footage.</a:t>
             </a:r>
           </a:p>
         </p:txBody>
@@ -3310,12 +3295,12 @@
   </p:cSld>
   <p:clrMap bg1="lt1" tx1="dk1" bg2="lt2" tx2="dk2" accent1="accent1" accent2="accent2" accent3="accent3" accent4="accent4" accent5="accent5" accent6="accent6" hlink="hlink" folHlink="folHlink"/>
   <p:sldLayoutIdLst>
-    <p:sldLayoutId xmlns:r="http://schemas.openxmlformats.org/officeDocument/2006/relationships" id="2147483649" r:id="R925c8f53bb7d4470"/>
-    <p:sldLayoutId xmlns:r="http://schemas.openxmlformats.org/officeDocument/2006/relationships" id="2147483650" r:id="R505722ad65284e6f"/>
-    <p:sldLayoutId xmlns:r="http://schemas.openxmlformats.org/officeDocument/2006/relationships" id="2147483651" r:id="R3ea7d4079d044cb8"/>
-    <p:sldLayoutId xmlns:r="http://schemas.openxmlformats.org/officeDocument/2006/relationships" id="2147483652" r:id="Rc8e1de56e6714e5e"/>
-    <p:sldLayoutId xmlns:r="http://schemas.openxmlformats.org/officeDocument/2006/relationships" id="2147483653" r:id="Ra7b381510b944a2c"/>
-    <p:sldLayoutId xmlns:r="http://schemas.openxmlformats.org/officeDocument/2006/relationships" id="2147483654" r:id="R43a64591fe4d448c"/>
+    <p:sldLayoutId xmlns:r="http://schemas.openxmlformats.org/officeDocument/2006/relationships" id="2147483649" r:id="Rb7efb651b37440ed"/>
+    <p:sldLayoutId xmlns:r="http://schemas.openxmlformats.org/officeDocument/2006/relationships" id="2147483650" r:id="Ra8a31b6e30d24a7a"/>
+    <p:sldLayoutId xmlns:r="http://schemas.openxmlformats.org/officeDocument/2006/relationships" id="2147483651" r:id="Rd0fe27e7f15d45b5"/>
+    <p:sldLayoutId xmlns:r="http://schemas.openxmlformats.org/officeDocument/2006/relationships" id="2147483652" r:id="R3515980c00f74b4e"/>
+    <p:sldLayoutId xmlns:r="http://schemas.openxmlformats.org/officeDocument/2006/relationships" id="2147483653" r:id="Rd418025e93bc42cf"/>
+    <p:sldLayoutId xmlns:r="http://schemas.openxmlformats.org/officeDocument/2006/relationships" id="2147483654" r:id="Rf239af84f92c43a0"/>
   </p:sldLayoutIdLst>
   <p:txStyles>
     <p:titleStyle>
@@ -3936,6 +3921,7 @@
               </a:defRPr>
             </a:defPPr>
             <a:lvl1pPr algn="l">
+              <a:buNone/>
               <a:defRPr sz="1275" b="1">
                 <a:solidFill>
                   <a:srgbClr val="72E7F4"/>
@@ -3946,6 +3932,7 @@
               </a:defRPr>
             </a:lvl1pPr>
             <a:lvl2pPr algn="l">
+              <a:buNone/>
               <a:defRPr sz="1275" b="1">
                 <a:solidFill>
                   <a:srgbClr val="72E7F4"/>
@@ -3956,6 +3943,7 @@
               </a:defRPr>
             </a:lvl2pPr>
             <a:lvl3pPr algn="l">
+              <a:buNone/>
               <a:defRPr sz="1275" b="1">
                 <a:solidFill>
                   <a:srgbClr val="72E7F4"/>
@@ -3966,6 +3954,7 @@
               </a:defRPr>
             </a:lvl3pPr>
             <a:lvl4pPr algn="l">
+              <a:buNone/>
               <a:defRPr sz="1275" b="1">
                 <a:solidFill>
                   <a:srgbClr val="72E7F4"/>
@@ -3976,6 +3965,7 @@
               </a:defRPr>
             </a:lvl4pPr>
             <a:lvl5pPr algn="l">
+              <a:buNone/>
               <a:defRPr sz="1275" b="1">
                 <a:solidFill>
                   <a:srgbClr val="72E7F4"/>
@@ -3986,6 +3976,7 @@
               </a:defRPr>
             </a:lvl5pPr>
             <a:lvl6pPr algn="l">
+              <a:buNone/>
               <a:defRPr sz="1275" b="1">
                 <a:solidFill>
                   <a:srgbClr val="72E7F4"/>
@@ -3996,6 +3987,7 @@
               </a:defRPr>
             </a:lvl6pPr>
             <a:lvl7pPr algn="l">
+              <a:buNone/>
               <a:defRPr sz="1275" b="1">
                 <a:solidFill>
                   <a:srgbClr val="72E7F4"/>
@@ -4006,6 +3998,7 @@
               </a:defRPr>
             </a:lvl7pPr>
             <a:lvl8pPr algn="l">
+              <a:buNone/>
               <a:defRPr sz="1275" b="1">
                 <a:solidFill>
                   <a:srgbClr val="72E7F4"/>
@@ -4016,6 +4009,7 @@
               </a:defRPr>
             </a:lvl8pPr>
             <a:lvl9pPr algn="l">
+              <a:buNone/>
               <a:defRPr sz="1275" b="1">
                 <a:solidFill>
                   <a:srgbClr val="72E7F4"/>
@@ -4028,6 +4022,7 @@
           </a:lstStyle>
           <a:p xmlns:a="http://schemas.openxmlformats.org/drawingml/2006/main">
             <a:pPr algn="l">
+              <a:buNone/>
               <a:defRPr sz="1275" b="1">
                 <a:solidFill>
                   <a:srgbClr val="72E7F4"/>
@@ -4095,6 +4090,7 @@
               </a:defRPr>
             </a:defPPr>
             <a:lvl1pPr algn="l">
+              <a:buNone/>
               <a:defRPr sz="4575" b="1">
                 <a:solidFill>
                   <a:srgbClr val="F5FBFE"/>
@@ -4105,6 +4101,7 @@
               </a:defRPr>
             </a:lvl1pPr>
             <a:lvl2pPr algn="l">
+              <a:buNone/>
               <a:defRPr sz="4575" b="1">
                 <a:solidFill>
                   <a:srgbClr val="F5FBFE"/>
@@ -4115,6 +4112,7 @@
               </a:defRPr>
             </a:lvl2pPr>
             <a:lvl3pPr algn="l">
+              <a:buNone/>
               <a:defRPr sz="4575" b="1">
                 <a:solidFill>
                   <a:srgbClr val="F5FBFE"/>
@@ -4125,6 +4123,7 @@
               </a:defRPr>
             </a:lvl3pPr>
             <a:lvl4pPr algn="l">
+              <a:buNone/>
               <a:defRPr sz="4575" b="1">
                 <a:solidFill>
                   <a:srgbClr val="F5FBFE"/>
@@ -4135,6 +4134,7 @@
               </a:defRPr>
             </a:lvl4pPr>
             <a:lvl5pPr algn="l">
+              <a:buNone/>
               <a:defRPr sz="4575" b="1">
                 <a:solidFill>
                   <a:srgbClr val="F5FBFE"/>
@@ -4145,6 +4145,7 @@
               </a:defRPr>
             </a:lvl5pPr>
             <a:lvl6pPr algn="l">
+              <a:buNone/>
               <a:defRPr sz="4575" b="1">
                 <a:solidFill>
                   <a:srgbClr val="F5FBFE"/>
@@ -4155,6 +4156,7 @@
               </a:defRPr>
             </a:lvl6pPr>
             <a:lvl7pPr algn="l">
+              <a:buNone/>
               <a:defRPr sz="4575" b="1">
                 <a:solidFill>
                   <a:srgbClr val="F5FBFE"/>
@@ -4165,6 +4167,7 @@
               </a:defRPr>
             </a:lvl7pPr>
             <a:lvl8pPr algn="l">
+              <a:buNone/>
               <a:defRPr sz="4575" b="1">
                 <a:solidFill>
                   <a:srgbClr val="F5FBFE"/>
@@ -4175,6 +4178,7 @@
               </a:defRPr>
             </a:lvl8pPr>
             <a:lvl9pPr algn="l">
+              <a:buNone/>
               <a:defRPr sz="4575" b="1">
                 <a:solidFill>
                   <a:srgbClr val="F5FBFE"/>
@@ -4187,6 +4191,7 @@
           </a:lstStyle>
           <a:p xmlns:a="http://schemas.openxmlformats.org/drawingml/2006/main">
             <a:pPr algn="l">
+              <a:buNone/>
               <a:defRPr sz="4575" b="1">
                 <a:solidFill>
                   <a:srgbClr val="F5FBFE"/>
@@ -4210,6 +4215,7 @@
           </a:p>
           <a:p xmlns:a="http://schemas.openxmlformats.org/drawingml/2006/main">
             <a:pPr algn="l">
+              <a:buNone/>
               <a:defRPr sz="4575" b="1">
                 <a:solidFill>
                   <a:srgbClr val="F5FBFE"/>
@@ -4308,6 +4314,7 @@
               </a:defRPr>
             </a:defPPr>
             <a:lvl1pPr algn="l">
+              <a:buNone/>
               <a:defRPr sz="2025" b="0">
                 <a:solidFill>
                   <a:srgbClr val="F5FBFE"/>
@@ -4318,6 +4325,7 @@
               </a:defRPr>
             </a:lvl1pPr>
             <a:lvl2pPr algn="l">
+              <a:buNone/>
               <a:defRPr sz="2025" b="0">
                 <a:solidFill>
                   <a:srgbClr val="F5FBFE"/>
@@ -4328,6 +4336,7 @@
               </a:defRPr>
             </a:lvl2pPr>
             <a:lvl3pPr algn="l">
+              <a:buNone/>
               <a:defRPr sz="2025" b="0">
                 <a:solidFill>
                   <a:srgbClr val="F5FBFE"/>
@@ -4338,6 +4347,7 @@
               </a:defRPr>
             </a:lvl3pPr>
             <a:lvl4pPr algn="l">
+              <a:buNone/>
               <a:defRPr sz="2025" b="0">
                 <a:solidFill>
                   <a:srgbClr val="F5FBFE"/>
@@ -4348,6 +4358,7 @@
               </a:defRPr>
             </a:lvl4pPr>
             <a:lvl5pPr algn="l">
+              <a:buNone/>
               <a:defRPr sz="2025" b="0">
                 <a:solidFill>
                   <a:srgbClr val="F5FBFE"/>
@@ -4358,6 +4369,7 @@
               </a:defRPr>
             </a:lvl5pPr>
             <a:lvl6pPr algn="l">
+              <a:buNone/>
               <a:defRPr sz="2025" b="0">
                 <a:solidFill>
                   <a:srgbClr val="F5FBFE"/>
@@ -4368,6 +4380,7 @@
               </a:defRPr>
             </a:lvl6pPr>
             <a:lvl7pPr algn="l">
+              <a:buNone/>
               <a:defRPr sz="2025" b="0">
                 <a:solidFill>
                   <a:srgbClr val="F5FBFE"/>
@@ -4378,6 +4391,7 @@
               </a:defRPr>
             </a:lvl7pPr>
             <a:lvl8pPr algn="l">
+              <a:buNone/>
               <a:defRPr sz="2025" b="0">
                 <a:solidFill>
                   <a:srgbClr val="F5FBFE"/>
@@ -4388,6 +4402,7 @@
               </a:defRPr>
             </a:lvl8pPr>
             <a:lvl9pPr algn="l">
+              <a:buNone/>
               <a:defRPr sz="2025" b="0">
                 <a:solidFill>
                   <a:srgbClr val="F5FBFE"/>
@@ -4400,6 +4415,7 @@
           </a:lstStyle>
           <a:p xmlns:a="http://schemas.openxmlformats.org/drawingml/2006/main">
             <a:pPr algn="l">
+              <a:buNone/>
               <a:defRPr sz="2025" b="0">
                 <a:solidFill>
                   <a:srgbClr val="F5FBFE"/>
@@ -4467,6 +4483,7 @@
               </a:defRPr>
             </a:defPPr>
             <a:lvl1pPr algn="l">
+              <a:buNone/>
               <a:defRPr sz="1425" b="0">
                 <a:solidFill>
                   <a:srgbClr val="9DBACA"/>
@@ -4477,6 +4494,7 @@
               </a:defRPr>
             </a:lvl1pPr>
             <a:lvl2pPr algn="l">
+              <a:buNone/>
               <a:defRPr sz="1425" b="0">
                 <a:solidFill>
                   <a:srgbClr val="9DBACA"/>
@@ -4487,6 +4505,7 @@
               </a:defRPr>
             </a:lvl2pPr>
             <a:lvl3pPr algn="l">
+              <a:buNone/>
               <a:defRPr sz="1425" b="0">
                 <a:solidFill>
                   <a:srgbClr val="9DBACA"/>
@@ -4497,6 +4516,7 @@
               </a:defRPr>
             </a:lvl3pPr>
             <a:lvl4pPr algn="l">
+              <a:buNone/>
               <a:defRPr sz="1425" b="0">
                 <a:solidFill>
                   <a:srgbClr val="9DBACA"/>
@@ -4507,6 +4527,7 @@
               </a:defRPr>
             </a:lvl4pPr>
             <a:lvl5pPr algn="l">
+              <a:buNone/>
               <a:defRPr sz="1425" b="0">
                 <a:solidFill>
                   <a:srgbClr val="9DBACA"/>
@@ -4517,6 +4538,7 @@
               </a:defRPr>
             </a:lvl5pPr>
             <a:lvl6pPr algn="l">
+              <a:buNone/>
               <a:defRPr sz="1425" b="0">
                 <a:solidFill>
                   <a:srgbClr val="9DBACA"/>
@@ -4527,6 +4549,7 @@
               </a:defRPr>
             </a:lvl6pPr>
             <a:lvl7pPr algn="l">
+              <a:buNone/>
               <a:defRPr sz="1425" b="0">
                 <a:solidFill>
                   <a:srgbClr val="9DBACA"/>
@@ -4537,6 +4560,7 @@
               </a:defRPr>
             </a:lvl7pPr>
             <a:lvl8pPr algn="l">
+              <a:buNone/>
               <a:defRPr sz="1425" b="0">
                 <a:solidFill>
                   <a:srgbClr val="9DBACA"/>
@@ -4547,6 +4571,7 @@
               </a:defRPr>
             </a:lvl8pPr>
             <a:lvl9pPr algn="l">
+              <a:buNone/>
               <a:defRPr sz="1425" b="0">
                 <a:solidFill>
                   <a:srgbClr val="9DBACA"/>
@@ -4559,6 +4584,7 @@
           </a:lstStyle>
           <a:p xmlns:a="http://schemas.openxmlformats.org/drawingml/2006/main">
             <a:pPr algn="l">
+              <a:buNone/>
               <a:defRPr sz="1425" b="0">
                 <a:solidFill>
                   <a:srgbClr val="9DBACA"/>
@@ -4582,6 +4608,7 @@
           </a:p>
           <a:p xmlns:a="http://schemas.openxmlformats.org/drawingml/2006/main">
             <a:pPr algn="l">
+              <a:buNone/>
               <a:defRPr sz="1425" b="0">
                 <a:solidFill>
                   <a:srgbClr val="9DBACA"/>
@@ -4600,7 +4627,7 @@
                 <a:ea typeface="Arial"/>
                 <a:cs typeface="Arial"/>
               </a:rPr>
-              <a:t>Independent student group</a:t>
+              <a:t>Dong-A University | Independent group</a:t>
             </a:r>
           </a:p>
         </p:txBody>
@@ -4610,7 +4637,7 @@
           <p:cNvPr id="7" name="">
             <a:extLst xmlns:a="http://schemas.openxmlformats.org/drawingml/2006/main">
               <a:ext uri="{FF2B5EF4-FFF2-40B4-BE49-F238E27FC236}">
-                <a16:creationId xmlns:a16="http://schemas.microsoft.com/office/drawing/2014/main" id="{A02F336D-A99A-4616-A3F3-8733886BC888}"/>
+                <a16:creationId xmlns:a16="http://schemas.microsoft.com/office/drawing/2014/main" id="{12CA1D39-5B86-4A1A-A786-F6D8DE8609B1}"/>
               </a:ext>
             </a:extLst>
           </p:cNvPr>
@@ -4620,7 +4647,7 @@
           <p:nvPr/>
         </p:nvPicPr>
         <p:blipFill>
-          <a:blip xmlns:r="http://schemas.openxmlformats.org/officeDocument/2006/relationships" xmlns:a="http://schemas.openxmlformats.org/drawingml/2006/main" r:embed="Raea5678f746d4627"/>
+          <a:blip xmlns:r="http://schemas.openxmlformats.org/officeDocument/2006/relationships" xmlns:a="http://schemas.openxmlformats.org/drawingml/2006/main" r:embed="R79d2b60d76c94c84"/>
           <a:stretch xmlns:a="http://schemas.openxmlformats.org/drawingml/2006/main"/>
         </p:blipFill>
         <p:spPr>
@@ -4677,6 +4704,7 @@
               </a:defRPr>
             </a:defPPr>
             <a:lvl1pPr algn="l">
+              <a:buNone/>
               <a:defRPr sz="1050" b="1">
                 <a:solidFill>
                   <a:srgbClr val="9DBACA"/>
@@ -4687,6 +4715,7 @@
               </a:defRPr>
             </a:lvl1pPr>
             <a:lvl2pPr algn="l">
+              <a:buNone/>
               <a:defRPr sz="1050" b="1">
                 <a:solidFill>
                   <a:srgbClr val="9DBACA"/>
@@ -4697,6 +4726,7 @@
               </a:defRPr>
             </a:lvl2pPr>
             <a:lvl3pPr algn="l">
+              <a:buNone/>
               <a:defRPr sz="1050" b="1">
                 <a:solidFill>
                   <a:srgbClr val="9DBACA"/>
@@ -4707,6 +4737,7 @@
               </a:defRPr>
             </a:lvl3pPr>
             <a:lvl4pPr algn="l">
+              <a:buNone/>
               <a:defRPr sz="1050" b="1">
                 <a:solidFill>
                   <a:srgbClr val="9DBACA"/>
@@ -4717,6 +4748,7 @@
               </a:defRPr>
             </a:lvl4pPr>
             <a:lvl5pPr algn="l">
+              <a:buNone/>
               <a:defRPr sz="1050" b="1">
                 <a:solidFill>
                   <a:srgbClr val="9DBACA"/>
@@ -4727,6 +4759,7 @@
               </a:defRPr>
             </a:lvl5pPr>
             <a:lvl6pPr algn="l">
+              <a:buNone/>
               <a:defRPr sz="1050" b="1">
                 <a:solidFill>
                   <a:srgbClr val="9DBACA"/>
@@ -4737,6 +4770,7 @@
               </a:defRPr>
             </a:lvl6pPr>
             <a:lvl7pPr algn="l">
+              <a:buNone/>
               <a:defRPr sz="1050" b="1">
                 <a:solidFill>
                   <a:srgbClr val="9DBACA"/>
@@ -4747,6 +4781,7 @@
               </a:defRPr>
             </a:lvl7pPr>
             <a:lvl8pPr algn="l">
+              <a:buNone/>
               <a:defRPr sz="1050" b="1">
                 <a:solidFill>
                   <a:srgbClr val="9DBACA"/>
@@ -4757,6 +4792,7 @@
               </a:defRPr>
             </a:lvl8pPr>
             <a:lvl9pPr algn="l">
+              <a:buNone/>
               <a:defRPr sz="1050" b="1">
                 <a:solidFill>
                   <a:srgbClr val="9DBACA"/>
@@ -4769,6 +4805,7 @@
           </a:lstStyle>
           <a:p xmlns:a="http://schemas.openxmlformats.org/drawingml/2006/main">
             <a:pPr algn="l">
+              <a:buNone/>
               <a:defRPr sz="1050" b="1">
                 <a:solidFill>
                   <a:srgbClr val="9DBACA"/>
@@ -4896,6 +4933,7 @@
               </a:defRPr>
             </a:defPPr>
             <a:lvl1pPr algn="l">
+              <a:buNone/>
               <a:defRPr sz="2850" b="1">
                 <a:solidFill>
                   <a:srgbClr val="F5FBFE"/>
@@ -4906,6 +4944,7 @@
               </a:defRPr>
             </a:lvl1pPr>
             <a:lvl2pPr algn="l">
+              <a:buNone/>
               <a:defRPr sz="2850" b="1">
                 <a:solidFill>
                   <a:srgbClr val="F5FBFE"/>
@@ -4916,6 +4955,7 @@
               </a:defRPr>
             </a:lvl2pPr>
             <a:lvl3pPr algn="l">
+              <a:buNone/>
               <a:defRPr sz="2850" b="1">
                 <a:solidFill>
                   <a:srgbClr val="F5FBFE"/>
@@ -4926,6 +4966,7 @@
               </a:defRPr>
             </a:lvl3pPr>
             <a:lvl4pPr algn="l">
+              <a:buNone/>
               <a:defRPr sz="2850" b="1">
                 <a:solidFill>
                   <a:srgbClr val="F5FBFE"/>
@@ -4936,6 +4977,7 @@
               </a:defRPr>
             </a:lvl4pPr>
             <a:lvl5pPr algn="l">
+              <a:buNone/>
               <a:defRPr sz="2850" b="1">
                 <a:solidFill>
                   <a:srgbClr val="F5FBFE"/>
@@ -4946,6 +4988,7 @@
               </a:defRPr>
             </a:lvl5pPr>
             <a:lvl6pPr algn="l">
+              <a:buNone/>
               <a:defRPr sz="2850" b="1">
                 <a:solidFill>
                   <a:srgbClr val="F5FBFE"/>
@@ -4956,6 +4999,7 @@
               </a:defRPr>
             </a:lvl6pPr>
             <a:lvl7pPr algn="l">
+              <a:buNone/>
               <a:defRPr sz="2850" b="1">
                 <a:solidFill>
                   <a:srgbClr val="F5FBFE"/>
@@ -4966,6 +5010,7 @@
               </a:defRPr>
             </a:lvl7pPr>
             <a:lvl8pPr algn="l">
+              <a:buNone/>
               <a:defRPr sz="2850" b="1">
                 <a:solidFill>
                   <a:srgbClr val="F5FBFE"/>
@@ -4976,6 +5021,7 @@
               </a:defRPr>
             </a:lvl8pPr>
             <a:lvl9pPr algn="l">
+              <a:buNone/>
               <a:defRPr sz="2850" b="1">
                 <a:solidFill>
                   <a:srgbClr val="F5FBFE"/>
@@ -4988,6 +5034,7 @@
           </a:lstStyle>
           <a:p xmlns:a="http://schemas.openxmlformats.org/drawingml/2006/main">
             <a:pPr algn="l">
+              <a:buNone/>
               <a:defRPr sz="2850" b="1">
                 <a:solidFill>
                   <a:srgbClr val="F5FBFE"/>
@@ -5086,6 +5133,7 @@
               </a:defRPr>
             </a:defPPr>
             <a:lvl1pPr algn="l">
+              <a:buNone/>
               <a:defRPr sz="975" b="1">
                 <a:solidFill>
                   <a:srgbClr val="9DBACA"/>
@@ -5096,6 +5144,7 @@
               </a:defRPr>
             </a:lvl1pPr>
             <a:lvl2pPr algn="l">
+              <a:buNone/>
               <a:defRPr sz="975" b="1">
                 <a:solidFill>
                   <a:srgbClr val="9DBACA"/>
@@ -5106,6 +5155,7 @@
               </a:defRPr>
             </a:lvl2pPr>
             <a:lvl3pPr algn="l">
+              <a:buNone/>
               <a:defRPr sz="975" b="1">
                 <a:solidFill>
                   <a:srgbClr val="9DBACA"/>
@@ -5116,6 +5166,7 @@
               </a:defRPr>
             </a:lvl3pPr>
             <a:lvl4pPr algn="l">
+              <a:buNone/>
               <a:defRPr sz="975" b="1">
                 <a:solidFill>
                   <a:srgbClr val="9DBACA"/>
@@ -5126,6 +5177,7 @@
               </a:defRPr>
             </a:lvl4pPr>
             <a:lvl5pPr algn="l">
+              <a:buNone/>
               <a:defRPr sz="975" b="1">
                 <a:solidFill>
                   <a:srgbClr val="9DBACA"/>
@@ -5136,6 +5188,7 @@
               </a:defRPr>
             </a:lvl5pPr>
             <a:lvl6pPr algn="l">
+              <a:buNone/>
               <a:defRPr sz="975" b="1">
                 <a:solidFill>
                   <a:srgbClr val="9DBACA"/>
@@ -5146,6 +5199,7 @@
               </a:defRPr>
             </a:lvl6pPr>
             <a:lvl7pPr algn="l">
+              <a:buNone/>
               <a:defRPr sz="975" b="1">
                 <a:solidFill>
                   <a:srgbClr val="9DBACA"/>
@@ -5156,6 +5210,7 @@
               </a:defRPr>
             </a:lvl7pPr>
             <a:lvl8pPr algn="l">
+              <a:buNone/>
               <a:defRPr sz="975" b="1">
                 <a:solidFill>
                   <a:srgbClr val="9DBACA"/>
@@ -5166,6 +5221,7 @@
               </a:defRPr>
             </a:lvl8pPr>
             <a:lvl9pPr algn="l">
+              <a:buNone/>
               <a:defRPr sz="975" b="1">
                 <a:solidFill>
                   <a:srgbClr val="9DBACA"/>
@@ -5178,6 +5234,7 @@
           </a:lstStyle>
           <a:p xmlns:a="http://schemas.openxmlformats.org/drawingml/2006/main">
             <a:pPr algn="l">
+              <a:buNone/>
               <a:defRPr sz="975" b="1">
                 <a:solidFill>
                   <a:srgbClr val="9DBACA"/>
@@ -5245,6 +5302,7 @@
               </a:defRPr>
             </a:defPPr>
             <a:lvl1pPr algn="r">
+              <a:buNone/>
               <a:defRPr sz="1200" b="1">
                 <a:solidFill>
                   <a:srgbClr val="72E7F4"/>
@@ -5255,6 +5313,7 @@
               </a:defRPr>
             </a:lvl1pPr>
             <a:lvl2pPr algn="r">
+              <a:buNone/>
               <a:defRPr sz="1200" b="1">
                 <a:solidFill>
                   <a:srgbClr val="72E7F4"/>
@@ -5265,6 +5324,7 @@
               </a:defRPr>
             </a:lvl2pPr>
             <a:lvl3pPr algn="r">
+              <a:buNone/>
               <a:defRPr sz="1200" b="1">
                 <a:solidFill>
                   <a:srgbClr val="72E7F4"/>
@@ -5275,6 +5335,7 @@
               </a:defRPr>
             </a:lvl3pPr>
             <a:lvl4pPr algn="r">
+              <a:buNone/>
               <a:defRPr sz="1200" b="1">
                 <a:solidFill>
                   <a:srgbClr val="72E7F4"/>
@@ -5285,6 +5346,7 @@
               </a:defRPr>
             </a:lvl4pPr>
             <a:lvl5pPr algn="r">
+              <a:buNone/>
               <a:defRPr sz="1200" b="1">
                 <a:solidFill>
                   <a:srgbClr val="72E7F4"/>
@@ -5295,6 +5357,7 @@
               </a:defRPr>
             </a:lvl5pPr>
             <a:lvl6pPr algn="r">
+              <a:buNone/>
               <a:defRPr sz="1200" b="1">
                 <a:solidFill>
                   <a:srgbClr val="72E7F4"/>
@@ -5305,6 +5368,7 @@
               </a:defRPr>
             </a:lvl6pPr>
             <a:lvl7pPr algn="r">
+              <a:buNone/>
               <a:defRPr sz="1200" b="1">
                 <a:solidFill>
                   <a:srgbClr val="72E7F4"/>
@@ -5315,6 +5379,7 @@
               </a:defRPr>
             </a:lvl7pPr>
             <a:lvl8pPr algn="r">
+              <a:buNone/>
               <a:defRPr sz="1200" b="1">
                 <a:solidFill>
                   <a:srgbClr val="72E7F4"/>
@@ -5325,6 +5390,7 @@
               </a:defRPr>
             </a:lvl8pPr>
             <a:lvl9pPr algn="r">
+              <a:buNone/>
               <a:defRPr sz="1200" b="1">
                 <a:solidFill>
                   <a:srgbClr val="72E7F4"/>
@@ -5337,6 +5403,7 @@
           </a:lstStyle>
           <a:p xmlns:a="http://schemas.openxmlformats.org/drawingml/2006/main">
             <a:pPr algn="r">
+              <a:buNone/>
               <a:defRPr sz="1200" b="1">
                 <a:solidFill>
                   <a:srgbClr val="72E7F4"/>
@@ -5404,6 +5471,7 @@
               </a:defRPr>
             </a:defPPr>
             <a:lvl1pPr algn="l">
+              <a:buNone/>
               <a:defRPr sz="1650" b="0">
                 <a:solidFill>
                   <a:srgbClr val="9DBACA"/>
@@ -5414,6 +5482,7 @@
               </a:defRPr>
             </a:lvl1pPr>
             <a:lvl2pPr algn="l">
+              <a:buNone/>
               <a:defRPr sz="1650" b="0">
                 <a:solidFill>
                   <a:srgbClr val="9DBACA"/>
@@ -5424,6 +5493,7 @@
               </a:defRPr>
             </a:lvl2pPr>
             <a:lvl3pPr algn="l">
+              <a:buNone/>
               <a:defRPr sz="1650" b="0">
                 <a:solidFill>
                   <a:srgbClr val="9DBACA"/>
@@ -5434,6 +5504,7 @@
               </a:defRPr>
             </a:lvl3pPr>
             <a:lvl4pPr algn="l">
+              <a:buNone/>
               <a:defRPr sz="1650" b="0">
                 <a:solidFill>
                   <a:srgbClr val="9DBACA"/>
@@ -5444,6 +5515,7 @@
               </a:defRPr>
             </a:lvl4pPr>
             <a:lvl5pPr algn="l">
+              <a:buNone/>
               <a:defRPr sz="1650" b="0">
                 <a:solidFill>
                   <a:srgbClr val="9DBACA"/>
@@ -5454,6 +5526,7 @@
               </a:defRPr>
             </a:lvl5pPr>
             <a:lvl6pPr algn="l">
+              <a:buNone/>
               <a:defRPr sz="1650" b="0">
                 <a:solidFill>
                   <a:srgbClr val="9DBACA"/>
@@ -5464,6 +5537,7 @@
               </a:defRPr>
             </a:lvl6pPr>
             <a:lvl7pPr algn="l">
+              <a:buNone/>
               <a:defRPr sz="1650" b="0">
                 <a:solidFill>
                   <a:srgbClr val="9DBACA"/>
@@ -5474,6 +5548,7 @@
               </a:defRPr>
             </a:lvl7pPr>
             <a:lvl8pPr algn="l">
+              <a:buNone/>
               <a:defRPr sz="1650" b="0">
                 <a:solidFill>
                   <a:srgbClr val="9DBACA"/>
@@ -5484,6 +5559,7 @@
               </a:defRPr>
             </a:lvl8pPr>
             <a:lvl9pPr algn="l">
+              <a:buNone/>
               <a:defRPr sz="1650" b="0">
                 <a:solidFill>
                   <a:srgbClr val="9DBACA"/>
@@ -5496,6 +5572,7 @@
           </a:lstStyle>
           <a:p xmlns:a="http://schemas.openxmlformats.org/drawingml/2006/main">
             <a:pPr algn="l">
+              <a:buNone/>
               <a:defRPr sz="1650" b="0">
                 <a:solidFill>
                   <a:srgbClr val="9DBACA"/>
@@ -5596,6 +5673,7 @@
               </a:defRPr>
             </a:defPPr>
             <a:lvl1pPr algn="ctr">
+              <a:buNone/>
               <a:defRPr sz="1875" b="1">
                 <a:solidFill>
                   <a:srgbClr val="72E7F4"/>
@@ -5606,6 +5684,7 @@
               </a:defRPr>
             </a:lvl1pPr>
             <a:lvl2pPr algn="ctr">
+              <a:buNone/>
               <a:defRPr sz="1875" b="1">
                 <a:solidFill>
                   <a:srgbClr val="72E7F4"/>
@@ -5616,6 +5695,7 @@
               </a:defRPr>
             </a:lvl2pPr>
             <a:lvl3pPr algn="ctr">
+              <a:buNone/>
               <a:defRPr sz="1875" b="1">
                 <a:solidFill>
                   <a:srgbClr val="72E7F4"/>
@@ -5626,6 +5706,7 @@
               </a:defRPr>
             </a:lvl3pPr>
             <a:lvl4pPr algn="ctr">
+              <a:buNone/>
               <a:defRPr sz="1875" b="1">
                 <a:solidFill>
                   <a:srgbClr val="72E7F4"/>
@@ -5636,6 +5717,7 @@
               </a:defRPr>
             </a:lvl4pPr>
             <a:lvl5pPr algn="ctr">
+              <a:buNone/>
               <a:defRPr sz="1875" b="1">
                 <a:solidFill>
                   <a:srgbClr val="72E7F4"/>
@@ -5646,6 +5728,7 @@
               </a:defRPr>
             </a:lvl5pPr>
             <a:lvl6pPr algn="ctr">
+              <a:buNone/>
               <a:defRPr sz="1875" b="1">
                 <a:solidFill>
                   <a:srgbClr val="72E7F4"/>
@@ -5656,6 +5739,7 @@
               </a:defRPr>
             </a:lvl6pPr>
             <a:lvl7pPr algn="ctr">
+              <a:buNone/>
               <a:defRPr sz="1875" b="1">
                 <a:solidFill>
                   <a:srgbClr val="72E7F4"/>
@@ -5666,6 +5750,7 @@
               </a:defRPr>
             </a:lvl7pPr>
             <a:lvl8pPr algn="ctr">
+              <a:buNone/>
               <a:defRPr sz="1875" b="1">
                 <a:solidFill>
                   <a:srgbClr val="72E7F4"/>
@@ -5676,6 +5761,7 @@
               </a:defRPr>
             </a:lvl8pPr>
             <a:lvl9pPr algn="ctr">
+              <a:buNone/>
               <a:defRPr sz="1875" b="1">
                 <a:solidFill>
                   <a:srgbClr val="72E7F4"/>
@@ -5688,6 +5774,7 @@
           </a:lstStyle>
           <a:p xmlns:a="http://schemas.openxmlformats.org/drawingml/2006/main">
             <a:pPr algn="ctr">
+              <a:buNone/>
               <a:defRPr sz="1875" b="1">
                 <a:solidFill>
                   <a:srgbClr val="72E7F4"/>
@@ -5741,7 +5828,7 @@
         </p:spPr>
         <p:txBody>
           <a:bodyPr xmlns:a="http://schemas.openxmlformats.org/drawingml/2006/main" wrap="square" lIns="0" tIns="0" rIns="0" bIns="0" anchor="ctr">
-            <a:normAutofit fontScale="100000"/>
+            <a:normAutofit fontScale="98145"/>
           </a:bodyPr>
           <a:lstStyle xmlns:a="http://schemas.openxmlformats.org/drawingml/2006/main">
             <a:defPPr algn="l">
@@ -5755,6 +5842,7 @@
               </a:defRPr>
             </a:defPPr>
             <a:lvl1pPr algn="l">
+              <a:buNone/>
               <a:defRPr sz="1575" b="1">
                 <a:solidFill>
                   <a:srgbClr val="F5FBFE"/>
@@ -5765,6 +5853,7 @@
               </a:defRPr>
             </a:lvl1pPr>
             <a:lvl2pPr algn="l">
+              <a:buNone/>
               <a:defRPr sz="1575" b="1">
                 <a:solidFill>
                   <a:srgbClr val="F5FBFE"/>
@@ -5775,6 +5864,7 @@
               </a:defRPr>
             </a:lvl2pPr>
             <a:lvl3pPr algn="l">
+              <a:buNone/>
               <a:defRPr sz="1575" b="1">
                 <a:solidFill>
                   <a:srgbClr val="F5FBFE"/>
@@ -5785,6 +5875,7 @@
               </a:defRPr>
             </a:lvl3pPr>
             <a:lvl4pPr algn="l">
+              <a:buNone/>
               <a:defRPr sz="1575" b="1">
                 <a:solidFill>
                   <a:srgbClr val="F5FBFE"/>
@@ -5795,6 +5886,7 @@
               </a:defRPr>
             </a:lvl4pPr>
             <a:lvl5pPr algn="l">
+              <a:buNone/>
               <a:defRPr sz="1575" b="1">
                 <a:solidFill>
                   <a:srgbClr val="F5FBFE"/>
@@ -5805,6 +5897,7 @@
               </a:defRPr>
             </a:lvl5pPr>
             <a:lvl6pPr algn="l">
+              <a:buNone/>
               <a:defRPr sz="1575" b="1">
                 <a:solidFill>
                   <a:srgbClr val="F5FBFE"/>
@@ -5815,6 +5908,7 @@
               </a:defRPr>
             </a:lvl6pPr>
             <a:lvl7pPr algn="l">
+              <a:buNone/>
               <a:defRPr sz="1575" b="1">
                 <a:solidFill>
                   <a:srgbClr val="F5FBFE"/>
@@ -5825,6 +5919,7 @@
               </a:defRPr>
             </a:lvl7pPr>
             <a:lvl8pPr algn="l">
+              <a:buNone/>
               <a:defRPr sz="1575" b="1">
                 <a:solidFill>
                   <a:srgbClr val="F5FBFE"/>
@@ -5835,6 +5930,7 @@
               </a:defRPr>
             </a:lvl8pPr>
             <a:lvl9pPr algn="l">
+              <a:buNone/>
               <a:defRPr sz="1575" b="1">
                 <a:solidFill>
                   <a:srgbClr val="F5FBFE"/>
@@ -5847,6 +5943,7 @@
           </a:lstStyle>
           <a:p xmlns:a="http://schemas.openxmlformats.org/drawingml/2006/main">
             <a:pPr algn="l">
+              <a:buNone/>
               <a:defRPr sz="1575" b="1">
                 <a:solidFill>
                   <a:srgbClr val="F5FBFE"/>
@@ -5865,7 +5962,7 @@
                 <a:ea typeface="Arial"/>
                 <a:cs typeface="Arial"/>
               </a:rPr>
-              <a:t>TELEPORT</a:t>
+              <a:t>MOVE / TELEPORT</a:t>
             </a:r>
           </a:p>
         </p:txBody>
@@ -5914,6 +6011,7 @@
               </a:defRPr>
             </a:defPPr>
             <a:lvl1pPr algn="l">
+              <a:buNone/>
               <a:defRPr sz="1350" b="0">
                 <a:solidFill>
                   <a:srgbClr val="9DBACA"/>
@@ -5924,6 +6022,7 @@
               </a:defRPr>
             </a:lvl1pPr>
             <a:lvl2pPr algn="l">
+              <a:buNone/>
               <a:defRPr sz="1350" b="0">
                 <a:solidFill>
                   <a:srgbClr val="9DBACA"/>
@@ -5934,6 +6033,7 @@
               </a:defRPr>
             </a:lvl2pPr>
             <a:lvl3pPr algn="l">
+              <a:buNone/>
               <a:defRPr sz="1350" b="0">
                 <a:solidFill>
                   <a:srgbClr val="9DBACA"/>
@@ -5944,6 +6044,7 @@
               </a:defRPr>
             </a:lvl3pPr>
             <a:lvl4pPr algn="l">
+              <a:buNone/>
               <a:defRPr sz="1350" b="0">
                 <a:solidFill>
                   <a:srgbClr val="9DBACA"/>
@@ -5954,6 +6055,7 @@
               </a:defRPr>
             </a:lvl4pPr>
             <a:lvl5pPr algn="l">
+              <a:buNone/>
               <a:defRPr sz="1350" b="0">
                 <a:solidFill>
                   <a:srgbClr val="9DBACA"/>
@@ -5964,6 +6066,7 @@
               </a:defRPr>
             </a:lvl5pPr>
             <a:lvl6pPr algn="l">
+              <a:buNone/>
               <a:defRPr sz="1350" b="0">
                 <a:solidFill>
                   <a:srgbClr val="9DBACA"/>
@@ -5974,6 +6077,7 @@
               </a:defRPr>
             </a:lvl6pPr>
             <a:lvl7pPr algn="l">
+              <a:buNone/>
               <a:defRPr sz="1350" b="0">
                 <a:solidFill>
                   <a:srgbClr val="9DBACA"/>
@@ -5984,6 +6088,7 @@
               </a:defRPr>
             </a:lvl7pPr>
             <a:lvl8pPr algn="l">
+              <a:buNone/>
               <a:defRPr sz="1350" b="0">
                 <a:solidFill>
                   <a:srgbClr val="9DBACA"/>
@@ -5994,6 +6099,7 @@
               </a:defRPr>
             </a:lvl8pPr>
             <a:lvl9pPr algn="l">
+              <a:buNone/>
               <a:defRPr sz="1350" b="0">
                 <a:solidFill>
                   <a:srgbClr val="9DBACA"/>
@@ -6006,6 +6112,7 @@
           </a:lstStyle>
           <a:p xmlns:a="http://schemas.openxmlformats.org/drawingml/2006/main">
             <a:pPr algn="l">
+              <a:buNone/>
               <a:defRPr sz="1350" b="0">
                 <a:solidFill>
                   <a:srgbClr val="9DBACA"/>
@@ -6106,6 +6213,7 @@
               </a:defRPr>
             </a:defPPr>
             <a:lvl1pPr algn="ctr">
+              <a:buNone/>
               <a:defRPr sz="1875" b="1">
                 <a:solidFill>
                   <a:srgbClr val="72E7F4"/>
@@ -6116,6 +6224,7 @@
               </a:defRPr>
             </a:lvl1pPr>
             <a:lvl2pPr algn="ctr">
+              <a:buNone/>
               <a:defRPr sz="1875" b="1">
                 <a:solidFill>
                   <a:srgbClr val="72E7F4"/>
@@ -6126,6 +6235,7 @@
               </a:defRPr>
             </a:lvl2pPr>
             <a:lvl3pPr algn="ctr">
+              <a:buNone/>
               <a:defRPr sz="1875" b="1">
                 <a:solidFill>
                   <a:srgbClr val="72E7F4"/>
@@ -6136,6 +6246,7 @@
               </a:defRPr>
             </a:lvl3pPr>
             <a:lvl4pPr algn="ctr">
+              <a:buNone/>
               <a:defRPr sz="1875" b="1">
                 <a:solidFill>
                   <a:srgbClr val="72E7F4"/>
@@ -6146,6 +6257,7 @@
               </a:defRPr>
             </a:lvl4pPr>
             <a:lvl5pPr algn="ctr">
+              <a:buNone/>
               <a:defRPr sz="1875" b="1">
                 <a:solidFill>
                   <a:srgbClr val="72E7F4"/>
@@ -6156,6 +6268,7 @@
               </a:defRPr>
             </a:lvl5pPr>
             <a:lvl6pPr algn="ctr">
+              <a:buNone/>
               <a:defRPr sz="1875" b="1">
                 <a:solidFill>
                   <a:srgbClr val="72E7F4"/>
@@ -6166,6 +6279,7 @@
               </a:defRPr>
             </a:lvl6pPr>
             <a:lvl7pPr algn="ctr">
+              <a:buNone/>
               <a:defRPr sz="1875" b="1">
                 <a:solidFill>
                   <a:srgbClr val="72E7F4"/>
@@ -6176,6 +6290,7 @@
               </a:defRPr>
             </a:lvl7pPr>
             <a:lvl8pPr algn="ctr">
+              <a:buNone/>
               <a:defRPr sz="1875" b="1">
                 <a:solidFill>
                   <a:srgbClr val="72E7F4"/>
@@ -6186,6 +6301,7 @@
               </a:defRPr>
             </a:lvl8pPr>
             <a:lvl9pPr algn="ctr">
+              <a:buNone/>
               <a:defRPr sz="1875" b="1">
                 <a:solidFill>
                   <a:srgbClr val="72E7F4"/>
@@ -6198,6 +6314,7 @@
           </a:lstStyle>
           <a:p xmlns:a="http://schemas.openxmlformats.org/drawingml/2006/main">
             <a:pPr algn="ctr">
+              <a:buNone/>
               <a:defRPr sz="1875" b="1">
                 <a:solidFill>
                   <a:srgbClr val="72E7F4"/>
@@ -6265,6 +6382,7 @@
               </a:defRPr>
             </a:defPPr>
             <a:lvl1pPr algn="l">
+              <a:buNone/>
               <a:defRPr sz="1575" b="1">
                 <a:solidFill>
                   <a:srgbClr val="F5FBFE"/>
@@ -6275,6 +6393,7 @@
               </a:defRPr>
             </a:lvl1pPr>
             <a:lvl2pPr algn="l">
+              <a:buNone/>
               <a:defRPr sz="1575" b="1">
                 <a:solidFill>
                   <a:srgbClr val="F5FBFE"/>
@@ -6285,6 +6404,7 @@
               </a:defRPr>
             </a:lvl2pPr>
             <a:lvl3pPr algn="l">
+              <a:buNone/>
               <a:defRPr sz="1575" b="1">
                 <a:solidFill>
                   <a:srgbClr val="F5FBFE"/>
@@ -6295,6 +6415,7 @@
               </a:defRPr>
             </a:lvl3pPr>
             <a:lvl4pPr algn="l">
+              <a:buNone/>
               <a:defRPr sz="1575" b="1">
                 <a:solidFill>
                   <a:srgbClr val="F5FBFE"/>
@@ -6305,6 +6426,7 @@
               </a:defRPr>
             </a:lvl4pPr>
             <a:lvl5pPr algn="l">
+              <a:buNone/>
               <a:defRPr sz="1575" b="1">
                 <a:solidFill>
                   <a:srgbClr val="F5FBFE"/>
@@ -6315,6 +6437,7 @@
               </a:defRPr>
             </a:lvl5pPr>
             <a:lvl6pPr algn="l">
+              <a:buNone/>
               <a:defRPr sz="1575" b="1">
                 <a:solidFill>
                   <a:srgbClr val="F5FBFE"/>
@@ -6325,6 +6448,7 @@
               </a:defRPr>
             </a:lvl6pPr>
             <a:lvl7pPr algn="l">
+              <a:buNone/>
               <a:defRPr sz="1575" b="1">
                 <a:solidFill>
                   <a:srgbClr val="F5FBFE"/>
@@ -6335,6 +6459,7 @@
               </a:defRPr>
             </a:lvl7pPr>
             <a:lvl8pPr algn="l">
+              <a:buNone/>
               <a:defRPr sz="1575" b="1">
                 <a:solidFill>
                   <a:srgbClr val="F5FBFE"/>
@@ -6345,6 +6470,7 @@
               </a:defRPr>
             </a:lvl8pPr>
             <a:lvl9pPr algn="l">
+              <a:buNone/>
               <a:defRPr sz="1575" b="1">
                 <a:solidFill>
                   <a:srgbClr val="F5FBFE"/>
@@ -6357,6 +6483,7 @@
           </a:lstStyle>
           <a:p xmlns:a="http://schemas.openxmlformats.org/drawingml/2006/main">
             <a:pPr algn="l">
+              <a:buNone/>
               <a:defRPr sz="1575" b="1">
                 <a:solidFill>
                   <a:srgbClr val="F5FBFE"/>
@@ -6424,6 +6551,7 @@
               </a:defRPr>
             </a:defPPr>
             <a:lvl1pPr algn="l">
+              <a:buNone/>
               <a:defRPr sz="1350" b="0">
                 <a:solidFill>
                   <a:srgbClr val="9DBACA"/>
@@ -6434,6 +6562,7 @@
               </a:defRPr>
             </a:lvl1pPr>
             <a:lvl2pPr algn="l">
+              <a:buNone/>
               <a:defRPr sz="1350" b="0">
                 <a:solidFill>
                   <a:srgbClr val="9DBACA"/>
@@ -6444,6 +6573,7 @@
               </a:defRPr>
             </a:lvl2pPr>
             <a:lvl3pPr algn="l">
+              <a:buNone/>
               <a:defRPr sz="1350" b="0">
                 <a:solidFill>
                   <a:srgbClr val="9DBACA"/>
@@ -6454,6 +6584,7 @@
               </a:defRPr>
             </a:lvl3pPr>
             <a:lvl4pPr algn="l">
+              <a:buNone/>
               <a:defRPr sz="1350" b="0">
                 <a:solidFill>
                   <a:srgbClr val="9DBACA"/>
@@ -6464,6 +6595,7 @@
               </a:defRPr>
             </a:lvl4pPr>
             <a:lvl5pPr algn="l">
+              <a:buNone/>
               <a:defRPr sz="1350" b="0">
                 <a:solidFill>
                   <a:srgbClr val="9DBACA"/>
@@ -6474,6 +6606,7 @@
               </a:defRPr>
             </a:lvl5pPr>
             <a:lvl6pPr algn="l">
+              <a:buNone/>
               <a:defRPr sz="1350" b="0">
                 <a:solidFill>
                   <a:srgbClr val="9DBACA"/>
@@ -6484,6 +6617,7 @@
               </a:defRPr>
             </a:lvl6pPr>
             <a:lvl7pPr algn="l">
+              <a:buNone/>
               <a:defRPr sz="1350" b="0">
                 <a:solidFill>
                   <a:srgbClr val="9DBACA"/>
@@ -6494,6 +6628,7 @@
               </a:defRPr>
             </a:lvl7pPr>
             <a:lvl8pPr algn="l">
+              <a:buNone/>
               <a:defRPr sz="1350" b="0">
                 <a:solidFill>
                   <a:srgbClr val="9DBACA"/>
@@ -6504,6 +6639,7 @@
               </a:defRPr>
             </a:lvl8pPr>
             <a:lvl9pPr algn="l">
+              <a:buNone/>
               <a:defRPr sz="1350" b="0">
                 <a:solidFill>
                   <a:srgbClr val="9DBACA"/>
@@ -6516,6 +6652,7 @@
           </a:lstStyle>
           <a:p xmlns:a="http://schemas.openxmlformats.org/drawingml/2006/main">
             <a:pPr algn="l">
+              <a:buNone/>
               <a:defRPr sz="1350" b="0">
                 <a:solidFill>
                   <a:srgbClr val="9DBACA"/>
@@ -6616,6 +6753,7 @@
               </a:defRPr>
             </a:defPPr>
             <a:lvl1pPr algn="ctr">
+              <a:buNone/>
               <a:defRPr sz="1875" b="1">
                 <a:solidFill>
                   <a:srgbClr val="72E7F4"/>
@@ -6626,6 +6764,7 @@
               </a:defRPr>
             </a:lvl1pPr>
             <a:lvl2pPr algn="ctr">
+              <a:buNone/>
               <a:defRPr sz="1875" b="1">
                 <a:solidFill>
                   <a:srgbClr val="72E7F4"/>
@@ -6636,6 +6775,7 @@
               </a:defRPr>
             </a:lvl2pPr>
             <a:lvl3pPr algn="ctr">
+              <a:buNone/>
               <a:defRPr sz="1875" b="1">
                 <a:solidFill>
                   <a:srgbClr val="72E7F4"/>
@@ -6646,6 +6786,7 @@
               </a:defRPr>
             </a:lvl3pPr>
             <a:lvl4pPr algn="ctr">
+              <a:buNone/>
               <a:defRPr sz="1875" b="1">
                 <a:solidFill>
                   <a:srgbClr val="72E7F4"/>
@@ -6656,6 +6797,7 @@
               </a:defRPr>
             </a:lvl4pPr>
             <a:lvl5pPr algn="ctr">
+              <a:buNone/>
               <a:defRPr sz="1875" b="1">
                 <a:solidFill>
                   <a:srgbClr val="72E7F4"/>
@@ -6666,6 +6808,7 @@
               </a:defRPr>
             </a:lvl5pPr>
             <a:lvl6pPr algn="ctr">
+              <a:buNone/>
               <a:defRPr sz="1875" b="1">
                 <a:solidFill>
                   <a:srgbClr val="72E7F4"/>
@@ -6676,6 +6819,7 @@
               </a:defRPr>
             </a:lvl6pPr>
             <a:lvl7pPr algn="ctr">
+              <a:buNone/>
               <a:defRPr sz="1875" b="1">
                 <a:solidFill>
                   <a:srgbClr val="72E7F4"/>
@@ -6686,6 +6830,7 @@
               </a:defRPr>
             </a:lvl7pPr>
             <a:lvl8pPr algn="ctr">
+              <a:buNone/>
               <a:defRPr sz="1875" b="1">
                 <a:solidFill>
                   <a:srgbClr val="72E7F4"/>
@@ -6696,6 +6841,7 @@
               </a:defRPr>
             </a:lvl8pPr>
             <a:lvl9pPr algn="ctr">
+              <a:buNone/>
               <a:defRPr sz="1875" b="1">
                 <a:solidFill>
                   <a:srgbClr val="72E7F4"/>
@@ -6708,6 +6854,7 @@
           </a:lstStyle>
           <a:p xmlns:a="http://schemas.openxmlformats.org/drawingml/2006/main">
             <a:pPr algn="ctr">
+              <a:buNone/>
               <a:defRPr sz="1875" b="1">
                 <a:solidFill>
                   <a:srgbClr val="72E7F4"/>
@@ -6775,6 +6922,7 @@
               </a:defRPr>
             </a:defPPr>
             <a:lvl1pPr algn="l">
+              <a:buNone/>
               <a:defRPr sz="1575" b="1">
                 <a:solidFill>
                   <a:srgbClr val="F5FBFE"/>
@@ -6785,6 +6933,7 @@
               </a:defRPr>
             </a:lvl1pPr>
             <a:lvl2pPr algn="l">
+              <a:buNone/>
               <a:defRPr sz="1575" b="1">
                 <a:solidFill>
                   <a:srgbClr val="F5FBFE"/>
@@ -6795,6 +6944,7 @@
               </a:defRPr>
             </a:lvl2pPr>
             <a:lvl3pPr algn="l">
+              <a:buNone/>
               <a:defRPr sz="1575" b="1">
                 <a:solidFill>
                   <a:srgbClr val="F5FBFE"/>
@@ -6805,6 +6955,7 @@
               </a:defRPr>
             </a:lvl3pPr>
             <a:lvl4pPr algn="l">
+              <a:buNone/>
               <a:defRPr sz="1575" b="1">
                 <a:solidFill>
                   <a:srgbClr val="F5FBFE"/>
@@ -6815,6 +6966,7 @@
               </a:defRPr>
             </a:lvl4pPr>
             <a:lvl5pPr algn="l">
+              <a:buNone/>
               <a:defRPr sz="1575" b="1">
                 <a:solidFill>
                   <a:srgbClr val="F5FBFE"/>
@@ -6825,6 +6977,7 @@
               </a:defRPr>
             </a:lvl5pPr>
             <a:lvl6pPr algn="l">
+              <a:buNone/>
               <a:defRPr sz="1575" b="1">
                 <a:solidFill>
                   <a:srgbClr val="F5FBFE"/>
@@ -6835,6 +6988,7 @@
               </a:defRPr>
             </a:lvl6pPr>
             <a:lvl7pPr algn="l">
+              <a:buNone/>
               <a:defRPr sz="1575" b="1">
                 <a:solidFill>
                   <a:srgbClr val="F5FBFE"/>
@@ -6845,6 +6999,7 @@
               </a:defRPr>
             </a:lvl7pPr>
             <a:lvl8pPr algn="l">
+              <a:buNone/>
               <a:defRPr sz="1575" b="1">
                 <a:solidFill>
                   <a:srgbClr val="F5FBFE"/>
@@ -6855,6 +7010,7 @@
               </a:defRPr>
             </a:lvl8pPr>
             <a:lvl9pPr algn="l">
+              <a:buNone/>
               <a:defRPr sz="1575" b="1">
                 <a:solidFill>
                   <a:srgbClr val="F5FBFE"/>
@@ -6867,6 +7023,7 @@
           </a:lstStyle>
           <a:p xmlns:a="http://schemas.openxmlformats.org/drawingml/2006/main">
             <a:pPr algn="l">
+              <a:buNone/>
               <a:defRPr sz="1575" b="1">
                 <a:solidFill>
                   <a:srgbClr val="F5FBFE"/>
@@ -6934,6 +7091,7 @@
               </a:defRPr>
             </a:defPPr>
             <a:lvl1pPr algn="l">
+              <a:buNone/>
               <a:defRPr sz="1350" b="0">
                 <a:solidFill>
                   <a:srgbClr val="9DBACA"/>
@@ -6944,6 +7102,7 @@
               </a:defRPr>
             </a:lvl1pPr>
             <a:lvl2pPr algn="l">
+              <a:buNone/>
               <a:defRPr sz="1350" b="0">
                 <a:solidFill>
                   <a:srgbClr val="9DBACA"/>
@@ -6954,6 +7113,7 @@
               </a:defRPr>
             </a:lvl2pPr>
             <a:lvl3pPr algn="l">
+              <a:buNone/>
               <a:defRPr sz="1350" b="0">
                 <a:solidFill>
                   <a:srgbClr val="9DBACA"/>
@@ -6964,6 +7124,7 @@
               </a:defRPr>
             </a:lvl3pPr>
             <a:lvl4pPr algn="l">
+              <a:buNone/>
               <a:defRPr sz="1350" b="0">
                 <a:solidFill>
                   <a:srgbClr val="9DBACA"/>
@@ -6974,6 +7135,7 @@
               </a:defRPr>
             </a:lvl4pPr>
             <a:lvl5pPr algn="l">
+              <a:buNone/>
               <a:defRPr sz="1350" b="0">
                 <a:solidFill>
                   <a:srgbClr val="9DBACA"/>
@@ -6984,6 +7146,7 @@
               </a:defRPr>
             </a:lvl5pPr>
             <a:lvl6pPr algn="l">
+              <a:buNone/>
               <a:defRPr sz="1350" b="0">
                 <a:solidFill>
                   <a:srgbClr val="9DBACA"/>
@@ -6994,6 +7157,7 @@
               </a:defRPr>
             </a:lvl6pPr>
             <a:lvl7pPr algn="l">
+              <a:buNone/>
               <a:defRPr sz="1350" b="0">
                 <a:solidFill>
                   <a:srgbClr val="9DBACA"/>
@@ -7004,6 +7168,7 @@
               </a:defRPr>
             </a:lvl7pPr>
             <a:lvl8pPr algn="l">
+              <a:buNone/>
               <a:defRPr sz="1350" b="0">
                 <a:solidFill>
                   <a:srgbClr val="9DBACA"/>
@@ -7014,6 +7179,7 @@
               </a:defRPr>
             </a:lvl8pPr>
             <a:lvl9pPr algn="l">
+              <a:buNone/>
               <a:defRPr sz="1350" b="0">
                 <a:solidFill>
                   <a:srgbClr val="9DBACA"/>
@@ -7026,6 +7192,7 @@
           </a:lstStyle>
           <a:p xmlns:a="http://schemas.openxmlformats.org/drawingml/2006/main">
             <a:pPr algn="l">
+              <a:buNone/>
               <a:defRPr sz="1350" b="0">
                 <a:solidFill>
                   <a:srgbClr val="9DBACA"/>
@@ -7126,6 +7293,7 @@
               </a:defRPr>
             </a:defPPr>
             <a:lvl1pPr algn="ctr">
+              <a:buNone/>
               <a:defRPr sz="1875" b="1">
                 <a:solidFill>
                   <a:srgbClr val="72E7F4"/>
@@ -7136,6 +7304,7 @@
               </a:defRPr>
             </a:lvl1pPr>
             <a:lvl2pPr algn="ctr">
+              <a:buNone/>
               <a:defRPr sz="1875" b="1">
                 <a:solidFill>
                   <a:srgbClr val="72E7F4"/>
@@ -7146,6 +7315,7 @@
               </a:defRPr>
             </a:lvl2pPr>
             <a:lvl3pPr algn="ctr">
+              <a:buNone/>
               <a:defRPr sz="1875" b="1">
                 <a:solidFill>
                   <a:srgbClr val="72E7F4"/>
@@ -7156,6 +7326,7 @@
               </a:defRPr>
             </a:lvl3pPr>
             <a:lvl4pPr algn="ctr">
+              <a:buNone/>
               <a:defRPr sz="1875" b="1">
                 <a:solidFill>
                   <a:srgbClr val="72E7F4"/>
@@ -7166,6 +7337,7 @@
               </a:defRPr>
             </a:lvl4pPr>
             <a:lvl5pPr algn="ctr">
+              <a:buNone/>
               <a:defRPr sz="1875" b="1">
                 <a:solidFill>
                   <a:srgbClr val="72E7F4"/>
@@ -7176,6 +7348,7 @@
               </a:defRPr>
             </a:lvl5pPr>
             <a:lvl6pPr algn="ctr">
+              <a:buNone/>
               <a:defRPr sz="1875" b="1">
                 <a:solidFill>
                   <a:srgbClr val="72E7F4"/>
@@ -7186,6 +7359,7 @@
               </a:defRPr>
             </a:lvl6pPr>
             <a:lvl7pPr algn="ctr">
+              <a:buNone/>
               <a:defRPr sz="1875" b="1">
                 <a:solidFill>
                   <a:srgbClr val="72E7F4"/>
@@ -7196,6 +7370,7 @@
               </a:defRPr>
             </a:lvl7pPr>
             <a:lvl8pPr algn="ctr">
+              <a:buNone/>
               <a:defRPr sz="1875" b="1">
                 <a:solidFill>
                   <a:srgbClr val="72E7F4"/>
@@ -7206,6 +7381,7 @@
               </a:defRPr>
             </a:lvl8pPr>
             <a:lvl9pPr algn="ctr">
+              <a:buNone/>
               <a:defRPr sz="1875" b="1">
                 <a:solidFill>
                   <a:srgbClr val="72E7F4"/>
@@ -7218,6 +7394,7 @@
           </a:lstStyle>
           <a:p xmlns:a="http://schemas.openxmlformats.org/drawingml/2006/main">
             <a:pPr algn="ctr">
+              <a:buNone/>
               <a:defRPr sz="1875" b="1">
                 <a:solidFill>
                   <a:srgbClr val="72E7F4"/>
@@ -7285,6 +7462,7 @@
               </a:defRPr>
             </a:defPPr>
             <a:lvl1pPr algn="l">
+              <a:buNone/>
               <a:defRPr sz="1575" b="1">
                 <a:solidFill>
                   <a:srgbClr val="F5FBFE"/>
@@ -7295,6 +7473,7 @@
               </a:defRPr>
             </a:lvl1pPr>
             <a:lvl2pPr algn="l">
+              <a:buNone/>
               <a:defRPr sz="1575" b="1">
                 <a:solidFill>
                   <a:srgbClr val="F5FBFE"/>
@@ -7305,6 +7484,7 @@
               </a:defRPr>
             </a:lvl2pPr>
             <a:lvl3pPr algn="l">
+              <a:buNone/>
               <a:defRPr sz="1575" b="1">
                 <a:solidFill>
                   <a:srgbClr val="F5FBFE"/>
@@ -7315,6 +7495,7 @@
               </a:defRPr>
             </a:lvl3pPr>
             <a:lvl4pPr algn="l">
+              <a:buNone/>
               <a:defRPr sz="1575" b="1">
                 <a:solidFill>
                   <a:srgbClr val="F5FBFE"/>
@@ -7325,6 +7506,7 @@
               </a:defRPr>
             </a:lvl4pPr>
             <a:lvl5pPr algn="l">
+              <a:buNone/>
               <a:defRPr sz="1575" b="1">
                 <a:solidFill>
                   <a:srgbClr val="F5FBFE"/>
@@ -7335,6 +7517,7 @@
               </a:defRPr>
             </a:lvl5pPr>
             <a:lvl6pPr algn="l">
+              <a:buNone/>
               <a:defRPr sz="1575" b="1">
                 <a:solidFill>
                   <a:srgbClr val="F5FBFE"/>
@@ -7345,6 +7528,7 @@
               </a:defRPr>
             </a:lvl6pPr>
             <a:lvl7pPr algn="l">
+              <a:buNone/>
               <a:defRPr sz="1575" b="1">
                 <a:solidFill>
                   <a:srgbClr val="F5FBFE"/>
@@ -7355,6 +7539,7 @@
               </a:defRPr>
             </a:lvl7pPr>
             <a:lvl8pPr algn="l">
+              <a:buNone/>
               <a:defRPr sz="1575" b="1">
                 <a:solidFill>
                   <a:srgbClr val="F5FBFE"/>
@@ -7365,6 +7550,7 @@
               </a:defRPr>
             </a:lvl8pPr>
             <a:lvl9pPr algn="l">
+              <a:buNone/>
               <a:defRPr sz="1575" b="1">
                 <a:solidFill>
                   <a:srgbClr val="F5FBFE"/>
@@ -7377,6 +7563,7 @@
           </a:lstStyle>
           <a:p xmlns:a="http://schemas.openxmlformats.org/drawingml/2006/main">
             <a:pPr algn="l">
+              <a:buNone/>
               <a:defRPr sz="1575" b="1">
                 <a:solidFill>
                   <a:srgbClr val="F5FBFE"/>
@@ -7444,6 +7631,7 @@
               </a:defRPr>
             </a:defPPr>
             <a:lvl1pPr algn="l">
+              <a:buNone/>
               <a:defRPr sz="1350" b="0">
                 <a:solidFill>
                   <a:srgbClr val="9DBACA"/>
@@ -7454,6 +7642,7 @@
               </a:defRPr>
             </a:lvl1pPr>
             <a:lvl2pPr algn="l">
+              <a:buNone/>
               <a:defRPr sz="1350" b="0">
                 <a:solidFill>
                   <a:srgbClr val="9DBACA"/>
@@ -7464,6 +7653,7 @@
               </a:defRPr>
             </a:lvl2pPr>
             <a:lvl3pPr algn="l">
+              <a:buNone/>
               <a:defRPr sz="1350" b="0">
                 <a:solidFill>
                   <a:srgbClr val="9DBACA"/>
@@ -7474,6 +7664,7 @@
               </a:defRPr>
             </a:lvl3pPr>
             <a:lvl4pPr algn="l">
+              <a:buNone/>
               <a:defRPr sz="1350" b="0">
                 <a:solidFill>
                   <a:srgbClr val="9DBACA"/>
@@ -7484,6 +7675,7 @@
               </a:defRPr>
             </a:lvl4pPr>
             <a:lvl5pPr algn="l">
+              <a:buNone/>
               <a:defRPr sz="1350" b="0">
                 <a:solidFill>
                   <a:srgbClr val="9DBACA"/>
@@ -7494,6 +7686,7 @@
               </a:defRPr>
             </a:lvl5pPr>
             <a:lvl6pPr algn="l">
+              <a:buNone/>
               <a:defRPr sz="1350" b="0">
                 <a:solidFill>
                   <a:srgbClr val="9DBACA"/>
@@ -7504,6 +7697,7 @@
               </a:defRPr>
             </a:lvl6pPr>
             <a:lvl7pPr algn="l">
+              <a:buNone/>
               <a:defRPr sz="1350" b="0">
                 <a:solidFill>
                   <a:srgbClr val="9DBACA"/>
@@ -7514,6 +7708,7 @@
               </a:defRPr>
             </a:lvl7pPr>
             <a:lvl8pPr algn="l">
+              <a:buNone/>
               <a:defRPr sz="1350" b="0">
                 <a:solidFill>
                   <a:srgbClr val="9DBACA"/>
@@ -7524,6 +7719,7 @@
               </a:defRPr>
             </a:lvl8pPr>
             <a:lvl9pPr algn="l">
+              <a:buNone/>
               <a:defRPr sz="1350" b="0">
                 <a:solidFill>
                   <a:srgbClr val="9DBACA"/>
@@ -7536,6 +7732,7 @@
           </a:lstStyle>
           <a:p xmlns:a="http://schemas.openxmlformats.org/drawingml/2006/main">
             <a:pPr algn="l">
+              <a:buNone/>
               <a:defRPr sz="1350" b="0">
                 <a:solidFill>
                   <a:srgbClr val="9DBACA"/>
@@ -7636,6 +7833,7 @@
               </a:defRPr>
             </a:defPPr>
             <a:lvl1pPr algn="ctr">
+              <a:buNone/>
               <a:defRPr sz="1875" b="1">
                 <a:solidFill>
                   <a:srgbClr val="72E7F4"/>
@@ -7646,6 +7844,7 @@
               </a:defRPr>
             </a:lvl1pPr>
             <a:lvl2pPr algn="ctr">
+              <a:buNone/>
               <a:defRPr sz="1875" b="1">
                 <a:solidFill>
                   <a:srgbClr val="72E7F4"/>
@@ -7656,6 +7855,7 @@
               </a:defRPr>
             </a:lvl2pPr>
             <a:lvl3pPr algn="ctr">
+              <a:buNone/>
               <a:defRPr sz="1875" b="1">
                 <a:solidFill>
                   <a:srgbClr val="72E7F4"/>
@@ -7666,6 +7866,7 @@
               </a:defRPr>
             </a:lvl3pPr>
             <a:lvl4pPr algn="ctr">
+              <a:buNone/>
               <a:defRPr sz="1875" b="1">
                 <a:solidFill>
                   <a:srgbClr val="72E7F4"/>
@@ -7676,6 +7877,7 @@
               </a:defRPr>
             </a:lvl4pPr>
             <a:lvl5pPr algn="ctr">
+              <a:buNone/>
               <a:defRPr sz="1875" b="1">
                 <a:solidFill>
                   <a:srgbClr val="72E7F4"/>
@@ -7686,6 +7888,7 @@
               </a:defRPr>
             </a:lvl5pPr>
             <a:lvl6pPr algn="ctr">
+              <a:buNone/>
               <a:defRPr sz="1875" b="1">
                 <a:solidFill>
                   <a:srgbClr val="72E7F4"/>
@@ -7696,6 +7899,7 @@
               </a:defRPr>
             </a:lvl6pPr>
             <a:lvl7pPr algn="ctr">
+              <a:buNone/>
               <a:defRPr sz="1875" b="1">
                 <a:solidFill>
                   <a:srgbClr val="72E7F4"/>
@@ -7706,6 +7910,7 @@
               </a:defRPr>
             </a:lvl7pPr>
             <a:lvl8pPr algn="ctr">
+              <a:buNone/>
               <a:defRPr sz="1875" b="1">
                 <a:solidFill>
                   <a:srgbClr val="72E7F4"/>
@@ -7716,6 +7921,7 @@
               </a:defRPr>
             </a:lvl8pPr>
             <a:lvl9pPr algn="ctr">
+              <a:buNone/>
               <a:defRPr sz="1875" b="1">
                 <a:solidFill>
                   <a:srgbClr val="72E7F4"/>
@@ -7728,6 +7934,7 @@
           </a:lstStyle>
           <a:p xmlns:a="http://schemas.openxmlformats.org/drawingml/2006/main">
             <a:pPr algn="ctr">
+              <a:buNone/>
               <a:defRPr sz="1875" b="1">
                 <a:solidFill>
                   <a:srgbClr val="72E7F4"/>
@@ -7795,6 +8002,7 @@
               </a:defRPr>
             </a:defPPr>
             <a:lvl1pPr algn="l">
+              <a:buNone/>
               <a:defRPr sz="1575" b="1">
                 <a:solidFill>
                   <a:srgbClr val="F5FBFE"/>
@@ -7805,6 +8013,7 @@
               </a:defRPr>
             </a:lvl1pPr>
             <a:lvl2pPr algn="l">
+              <a:buNone/>
               <a:defRPr sz="1575" b="1">
                 <a:solidFill>
                   <a:srgbClr val="F5FBFE"/>
@@ -7815,6 +8024,7 @@
               </a:defRPr>
             </a:lvl2pPr>
             <a:lvl3pPr algn="l">
+              <a:buNone/>
               <a:defRPr sz="1575" b="1">
                 <a:solidFill>
                   <a:srgbClr val="F5FBFE"/>
@@ -7825,6 +8035,7 @@
               </a:defRPr>
             </a:lvl3pPr>
             <a:lvl4pPr algn="l">
+              <a:buNone/>
               <a:defRPr sz="1575" b="1">
                 <a:solidFill>
                   <a:srgbClr val="F5FBFE"/>
@@ -7835,6 +8046,7 @@
               </a:defRPr>
             </a:lvl4pPr>
             <a:lvl5pPr algn="l">
+              <a:buNone/>
               <a:defRPr sz="1575" b="1">
                 <a:solidFill>
                   <a:srgbClr val="F5FBFE"/>
@@ -7845,6 +8057,7 @@
               </a:defRPr>
             </a:lvl5pPr>
             <a:lvl6pPr algn="l">
+              <a:buNone/>
               <a:defRPr sz="1575" b="1">
                 <a:solidFill>
                   <a:srgbClr val="F5FBFE"/>
@@ -7855,6 +8068,7 @@
               </a:defRPr>
             </a:lvl6pPr>
             <a:lvl7pPr algn="l">
+              <a:buNone/>
               <a:defRPr sz="1575" b="1">
                 <a:solidFill>
                   <a:srgbClr val="F5FBFE"/>
@@ -7865,6 +8079,7 @@
               </a:defRPr>
             </a:lvl7pPr>
             <a:lvl8pPr algn="l">
+              <a:buNone/>
               <a:defRPr sz="1575" b="1">
                 <a:solidFill>
                   <a:srgbClr val="F5FBFE"/>
@@ -7875,6 +8090,7 @@
               </a:defRPr>
             </a:lvl8pPr>
             <a:lvl9pPr algn="l">
+              <a:buNone/>
               <a:defRPr sz="1575" b="1">
                 <a:solidFill>
                   <a:srgbClr val="F5FBFE"/>
@@ -7887,6 +8103,7 @@
           </a:lstStyle>
           <a:p xmlns:a="http://schemas.openxmlformats.org/drawingml/2006/main">
             <a:pPr algn="l">
+              <a:buNone/>
               <a:defRPr sz="1575" b="1">
                 <a:solidFill>
                   <a:srgbClr val="F5FBFE"/>
@@ -7954,6 +8171,7 @@
               </a:defRPr>
             </a:defPPr>
             <a:lvl1pPr algn="l">
+              <a:buNone/>
               <a:defRPr sz="1350" b="0">
                 <a:solidFill>
                   <a:srgbClr val="9DBACA"/>
@@ -7964,6 +8182,7 @@
               </a:defRPr>
             </a:lvl1pPr>
             <a:lvl2pPr algn="l">
+              <a:buNone/>
               <a:defRPr sz="1350" b="0">
                 <a:solidFill>
                   <a:srgbClr val="9DBACA"/>
@@ -7974,6 +8193,7 @@
               </a:defRPr>
             </a:lvl2pPr>
             <a:lvl3pPr algn="l">
+              <a:buNone/>
               <a:defRPr sz="1350" b="0">
                 <a:solidFill>
                   <a:srgbClr val="9DBACA"/>
@@ -7984,6 +8204,7 @@
               </a:defRPr>
             </a:lvl3pPr>
             <a:lvl4pPr algn="l">
+              <a:buNone/>
               <a:defRPr sz="1350" b="0">
                 <a:solidFill>
                   <a:srgbClr val="9DBACA"/>
@@ -7994,6 +8215,7 @@
               </a:defRPr>
             </a:lvl4pPr>
             <a:lvl5pPr algn="l">
+              <a:buNone/>
               <a:defRPr sz="1350" b="0">
                 <a:solidFill>
                   <a:srgbClr val="9DBACA"/>
@@ -8004,6 +8226,7 @@
               </a:defRPr>
             </a:lvl5pPr>
             <a:lvl6pPr algn="l">
+              <a:buNone/>
               <a:defRPr sz="1350" b="0">
                 <a:solidFill>
                   <a:srgbClr val="9DBACA"/>
@@ -8014,6 +8237,7 @@
               </a:defRPr>
             </a:lvl6pPr>
             <a:lvl7pPr algn="l">
+              <a:buNone/>
               <a:defRPr sz="1350" b="0">
                 <a:solidFill>
                   <a:srgbClr val="9DBACA"/>
@@ -8024,6 +8248,7 @@
               </a:defRPr>
             </a:lvl7pPr>
             <a:lvl8pPr algn="l">
+              <a:buNone/>
               <a:defRPr sz="1350" b="0">
                 <a:solidFill>
                   <a:srgbClr val="9DBACA"/>
@@ -8034,6 +8259,7 @@
               </a:defRPr>
             </a:lvl8pPr>
             <a:lvl9pPr algn="l">
+              <a:buNone/>
               <a:defRPr sz="1350" b="0">
                 <a:solidFill>
                   <a:srgbClr val="9DBACA"/>
@@ -8046,6 +8272,7 @@
           </a:lstStyle>
           <a:p xmlns:a="http://schemas.openxmlformats.org/drawingml/2006/main">
             <a:pPr algn="l">
+              <a:buNone/>
               <a:defRPr sz="1350" b="0">
                 <a:solidFill>
                   <a:srgbClr val="9DBACA"/>
@@ -8144,6 +8371,7 @@
               </a:defRPr>
             </a:defPPr>
             <a:lvl1pPr algn="l">
+              <a:buNone/>
               <a:defRPr sz="1500" b="1">
                 <a:solidFill>
                   <a:srgbClr val="72E7F4"/>
@@ -8154,6 +8382,7 @@
               </a:defRPr>
             </a:lvl1pPr>
             <a:lvl2pPr algn="l">
+              <a:buNone/>
               <a:defRPr sz="1500" b="1">
                 <a:solidFill>
                   <a:srgbClr val="72E7F4"/>
@@ -8164,6 +8393,7 @@
               </a:defRPr>
             </a:lvl2pPr>
             <a:lvl3pPr algn="l">
+              <a:buNone/>
               <a:defRPr sz="1500" b="1">
                 <a:solidFill>
                   <a:srgbClr val="72E7F4"/>
@@ -8174,6 +8404,7 @@
               </a:defRPr>
             </a:lvl3pPr>
             <a:lvl4pPr algn="l">
+              <a:buNone/>
               <a:defRPr sz="1500" b="1">
                 <a:solidFill>
                   <a:srgbClr val="72E7F4"/>
@@ -8184,6 +8415,7 @@
               </a:defRPr>
             </a:lvl4pPr>
             <a:lvl5pPr algn="l">
+              <a:buNone/>
               <a:defRPr sz="1500" b="1">
                 <a:solidFill>
                   <a:srgbClr val="72E7F4"/>
@@ -8194,6 +8426,7 @@
               </a:defRPr>
             </a:lvl5pPr>
             <a:lvl6pPr algn="l">
+              <a:buNone/>
               <a:defRPr sz="1500" b="1">
                 <a:solidFill>
                   <a:srgbClr val="72E7F4"/>
@@ -8204,6 +8437,7 @@
               </a:defRPr>
             </a:lvl6pPr>
             <a:lvl7pPr algn="l">
+              <a:buNone/>
               <a:defRPr sz="1500" b="1">
                 <a:solidFill>
                   <a:srgbClr val="72E7F4"/>
@@ -8214,6 +8448,7 @@
               </a:defRPr>
             </a:lvl7pPr>
             <a:lvl8pPr algn="l">
+              <a:buNone/>
               <a:defRPr sz="1500" b="1">
                 <a:solidFill>
                   <a:srgbClr val="72E7F4"/>
@@ -8224,6 +8459,7 @@
               </a:defRPr>
             </a:lvl8pPr>
             <a:lvl9pPr algn="l">
+              <a:buNone/>
               <a:defRPr sz="1500" b="1">
                 <a:solidFill>
                   <a:srgbClr val="72E7F4"/>
@@ -8236,6 +8472,7 @@
           </a:lstStyle>
           <a:p xmlns:a="http://schemas.openxmlformats.org/drawingml/2006/main">
             <a:pPr algn="l">
+              <a:buNone/>
               <a:defRPr sz="1500" b="1">
                 <a:solidFill>
                   <a:srgbClr val="72E7F4"/>
@@ -8303,6 +8540,7 @@
               </a:defRPr>
             </a:defPPr>
             <a:lvl1pPr algn="l">
+              <a:buNone/>
               <a:defRPr sz="1875" b="0">
                 <a:solidFill>
                   <a:srgbClr val="F5FBFE"/>
@@ -8313,6 +8551,7 @@
               </a:defRPr>
             </a:lvl1pPr>
             <a:lvl2pPr algn="l">
+              <a:buNone/>
               <a:defRPr sz="1875" b="0">
                 <a:solidFill>
                   <a:srgbClr val="F5FBFE"/>
@@ -8323,6 +8562,7 @@
               </a:defRPr>
             </a:lvl2pPr>
             <a:lvl3pPr algn="l">
+              <a:buNone/>
               <a:defRPr sz="1875" b="0">
                 <a:solidFill>
                   <a:srgbClr val="F5FBFE"/>
@@ -8333,6 +8573,7 @@
               </a:defRPr>
             </a:lvl3pPr>
             <a:lvl4pPr algn="l">
+              <a:buNone/>
               <a:defRPr sz="1875" b="0">
                 <a:solidFill>
                   <a:srgbClr val="F5FBFE"/>
@@ -8343,6 +8584,7 @@
               </a:defRPr>
             </a:lvl4pPr>
             <a:lvl5pPr algn="l">
+              <a:buNone/>
               <a:defRPr sz="1875" b="0">
                 <a:solidFill>
                   <a:srgbClr val="F5FBFE"/>
@@ -8353,6 +8595,7 @@
               </a:defRPr>
             </a:lvl5pPr>
             <a:lvl6pPr algn="l">
+              <a:buNone/>
               <a:defRPr sz="1875" b="0">
                 <a:solidFill>
                   <a:srgbClr val="F5FBFE"/>
@@ -8363,6 +8606,7 @@
               </a:defRPr>
             </a:lvl6pPr>
             <a:lvl7pPr algn="l">
+              <a:buNone/>
               <a:defRPr sz="1875" b="0">
                 <a:solidFill>
                   <a:srgbClr val="F5FBFE"/>
@@ -8373,6 +8617,7 @@
               </a:defRPr>
             </a:lvl7pPr>
             <a:lvl8pPr algn="l">
+              <a:buNone/>
               <a:defRPr sz="1875" b="0">
                 <a:solidFill>
                   <a:srgbClr val="F5FBFE"/>
@@ -8383,6 +8628,7 @@
               </a:defRPr>
             </a:lvl8pPr>
             <a:lvl9pPr algn="l">
+              <a:buNone/>
               <a:defRPr sz="1875" b="0">
                 <a:solidFill>
                   <a:srgbClr val="F5FBFE"/>
@@ -8395,6 +8641,7 @@
           </a:lstStyle>
           <a:p xmlns:a="http://schemas.openxmlformats.org/drawingml/2006/main">
             <a:pPr algn="l">
+              <a:buNone/>
               <a:defRPr sz="1875" b="0">
                 <a:solidFill>
                   <a:srgbClr val="F5FBFE"/>
@@ -8418,6 +8665,7 @@
           </a:p>
           <a:p xmlns:a="http://schemas.openxmlformats.org/drawingml/2006/main">
             <a:pPr algn="l">
+              <a:buNone/>
               <a:defRPr sz="1875" b="0">
                 <a:solidFill>
                   <a:srgbClr val="F5FBFE"/>
@@ -8545,6 +8793,7 @@
               </a:defRPr>
             </a:defPPr>
             <a:lvl1pPr algn="l">
+              <a:buNone/>
               <a:defRPr sz="2850" b="1">
                 <a:solidFill>
                   <a:srgbClr val="F5FBFE"/>
@@ -8555,6 +8804,7 @@
               </a:defRPr>
             </a:lvl1pPr>
             <a:lvl2pPr algn="l">
+              <a:buNone/>
               <a:defRPr sz="2850" b="1">
                 <a:solidFill>
                   <a:srgbClr val="F5FBFE"/>
@@ -8565,6 +8815,7 @@
               </a:defRPr>
             </a:lvl2pPr>
             <a:lvl3pPr algn="l">
+              <a:buNone/>
               <a:defRPr sz="2850" b="1">
                 <a:solidFill>
                   <a:srgbClr val="F5FBFE"/>
@@ -8575,6 +8826,7 @@
               </a:defRPr>
             </a:lvl3pPr>
             <a:lvl4pPr algn="l">
+              <a:buNone/>
               <a:defRPr sz="2850" b="1">
                 <a:solidFill>
                   <a:srgbClr val="F5FBFE"/>
@@ -8585,6 +8837,7 @@
               </a:defRPr>
             </a:lvl4pPr>
             <a:lvl5pPr algn="l">
+              <a:buNone/>
               <a:defRPr sz="2850" b="1">
                 <a:solidFill>
                   <a:srgbClr val="F5FBFE"/>
@@ -8595,6 +8848,7 @@
               </a:defRPr>
             </a:lvl5pPr>
             <a:lvl6pPr algn="l">
+              <a:buNone/>
               <a:defRPr sz="2850" b="1">
                 <a:solidFill>
                   <a:srgbClr val="F5FBFE"/>
@@ -8605,6 +8859,7 @@
               </a:defRPr>
             </a:lvl6pPr>
             <a:lvl7pPr algn="l">
+              <a:buNone/>
               <a:defRPr sz="2850" b="1">
                 <a:solidFill>
                   <a:srgbClr val="F5FBFE"/>
@@ -8615,6 +8870,7 @@
               </a:defRPr>
             </a:lvl7pPr>
             <a:lvl8pPr algn="l">
+              <a:buNone/>
               <a:defRPr sz="2850" b="1">
                 <a:solidFill>
                   <a:srgbClr val="F5FBFE"/>
@@ -8625,6 +8881,7 @@
               </a:defRPr>
             </a:lvl8pPr>
             <a:lvl9pPr algn="l">
+              <a:buNone/>
               <a:defRPr sz="2850" b="1">
                 <a:solidFill>
                   <a:srgbClr val="F5FBFE"/>
@@ -8637,6 +8894,7 @@
           </a:lstStyle>
           <a:p xmlns:a="http://schemas.openxmlformats.org/drawingml/2006/main">
             <a:pPr algn="l">
+              <a:buNone/>
               <a:defRPr sz="2850" b="1">
                 <a:solidFill>
                   <a:srgbClr val="F5FBFE"/>
@@ -8655,7 +8913,7 @@
                 <a:ea typeface="Arial"/>
                 <a:cs typeface="Arial"/>
               </a:rPr>
-              <a:t>Mission Console makes the next step visible</a:t>
+              <a:t>Mission Console and current controls</a:t>
             </a:r>
           </a:p>
         </p:txBody>
@@ -8735,6 +8993,7 @@
               </a:defRPr>
             </a:defPPr>
             <a:lvl1pPr algn="l">
+              <a:buNone/>
               <a:defRPr sz="975" b="1">
                 <a:solidFill>
                   <a:srgbClr val="9DBACA"/>
@@ -8745,6 +9004,7 @@
               </a:defRPr>
             </a:lvl1pPr>
             <a:lvl2pPr algn="l">
+              <a:buNone/>
               <a:defRPr sz="975" b="1">
                 <a:solidFill>
                   <a:srgbClr val="9DBACA"/>
@@ -8755,6 +9015,7 @@
               </a:defRPr>
             </a:lvl2pPr>
             <a:lvl3pPr algn="l">
+              <a:buNone/>
               <a:defRPr sz="975" b="1">
                 <a:solidFill>
                   <a:srgbClr val="9DBACA"/>
@@ -8765,6 +9026,7 @@
               </a:defRPr>
             </a:lvl3pPr>
             <a:lvl4pPr algn="l">
+              <a:buNone/>
               <a:defRPr sz="975" b="1">
                 <a:solidFill>
                   <a:srgbClr val="9DBACA"/>
@@ -8775,6 +9037,7 @@
               </a:defRPr>
             </a:lvl4pPr>
             <a:lvl5pPr algn="l">
+              <a:buNone/>
               <a:defRPr sz="975" b="1">
                 <a:solidFill>
                   <a:srgbClr val="9DBACA"/>
@@ -8785,6 +9048,7 @@
               </a:defRPr>
             </a:lvl5pPr>
             <a:lvl6pPr algn="l">
+              <a:buNone/>
               <a:defRPr sz="975" b="1">
                 <a:solidFill>
                   <a:srgbClr val="9DBACA"/>
@@ -8795,6 +9059,7 @@
               </a:defRPr>
             </a:lvl6pPr>
             <a:lvl7pPr algn="l">
+              <a:buNone/>
               <a:defRPr sz="975" b="1">
                 <a:solidFill>
                   <a:srgbClr val="9DBACA"/>
@@ -8805,6 +9070,7 @@
               </a:defRPr>
             </a:lvl7pPr>
             <a:lvl8pPr algn="l">
+              <a:buNone/>
               <a:defRPr sz="975" b="1">
                 <a:solidFill>
                   <a:srgbClr val="9DBACA"/>
@@ -8815,6 +9081,7 @@
               </a:defRPr>
             </a:lvl8pPr>
             <a:lvl9pPr algn="l">
+              <a:buNone/>
               <a:defRPr sz="975" b="1">
                 <a:solidFill>
                   <a:srgbClr val="9DBACA"/>
@@ -8827,6 +9094,7 @@
           </a:lstStyle>
           <a:p xmlns:a="http://schemas.openxmlformats.org/drawingml/2006/main">
             <a:pPr algn="l">
+              <a:buNone/>
               <a:defRPr sz="975" b="1">
                 <a:solidFill>
                   <a:srgbClr val="9DBACA"/>
@@ -8894,6 +9162,7 @@
               </a:defRPr>
             </a:defPPr>
             <a:lvl1pPr algn="r">
+              <a:buNone/>
               <a:defRPr sz="1200" b="1">
                 <a:solidFill>
                   <a:srgbClr val="72E7F4"/>
@@ -8904,6 +9173,7 @@
               </a:defRPr>
             </a:lvl1pPr>
             <a:lvl2pPr algn="r">
+              <a:buNone/>
               <a:defRPr sz="1200" b="1">
                 <a:solidFill>
                   <a:srgbClr val="72E7F4"/>
@@ -8914,6 +9184,7 @@
               </a:defRPr>
             </a:lvl2pPr>
             <a:lvl3pPr algn="r">
+              <a:buNone/>
               <a:defRPr sz="1200" b="1">
                 <a:solidFill>
                   <a:srgbClr val="72E7F4"/>
@@ -8924,6 +9195,7 @@
               </a:defRPr>
             </a:lvl3pPr>
             <a:lvl4pPr algn="r">
+              <a:buNone/>
               <a:defRPr sz="1200" b="1">
                 <a:solidFill>
                   <a:srgbClr val="72E7F4"/>
@@ -8934,6 +9206,7 @@
               </a:defRPr>
             </a:lvl4pPr>
             <a:lvl5pPr algn="r">
+              <a:buNone/>
               <a:defRPr sz="1200" b="1">
                 <a:solidFill>
                   <a:srgbClr val="72E7F4"/>
@@ -8944,6 +9217,7 @@
               </a:defRPr>
             </a:lvl5pPr>
             <a:lvl6pPr algn="r">
+              <a:buNone/>
               <a:defRPr sz="1200" b="1">
                 <a:solidFill>
                   <a:srgbClr val="72E7F4"/>
@@ -8954,6 +9228,7 @@
               </a:defRPr>
             </a:lvl6pPr>
             <a:lvl7pPr algn="r">
+              <a:buNone/>
               <a:defRPr sz="1200" b="1">
                 <a:solidFill>
                   <a:srgbClr val="72E7F4"/>
@@ -8964,6 +9239,7 @@
               </a:defRPr>
             </a:lvl7pPr>
             <a:lvl8pPr algn="r">
+              <a:buNone/>
               <a:defRPr sz="1200" b="1">
                 <a:solidFill>
                   <a:srgbClr val="72E7F4"/>
@@ -8974,6 +9250,7 @@
               </a:defRPr>
             </a:lvl8pPr>
             <a:lvl9pPr algn="r">
+              <a:buNone/>
               <a:defRPr sz="1200" b="1">
                 <a:solidFill>
                   <a:srgbClr val="72E7F4"/>
@@ -8986,6 +9263,7 @@
           </a:lstStyle>
           <a:p xmlns:a="http://schemas.openxmlformats.org/drawingml/2006/main">
             <a:pPr algn="r">
+              <a:buNone/>
               <a:defRPr sz="1200" b="1">
                 <a:solidFill>
                   <a:srgbClr val="72E7F4"/>
@@ -9053,6 +9331,7 @@
               </a:defRPr>
             </a:defPPr>
             <a:lvl1pPr algn="l">
+              <a:buNone/>
               <a:defRPr sz="1650" b="0">
                 <a:solidFill>
                   <a:srgbClr val="9DBACA"/>
@@ -9063,6 +9342,7 @@
               </a:defRPr>
             </a:lvl1pPr>
             <a:lvl2pPr algn="l">
+              <a:buNone/>
               <a:defRPr sz="1650" b="0">
                 <a:solidFill>
                   <a:srgbClr val="9DBACA"/>
@@ -9073,6 +9353,7 @@
               </a:defRPr>
             </a:lvl2pPr>
             <a:lvl3pPr algn="l">
+              <a:buNone/>
               <a:defRPr sz="1650" b="0">
                 <a:solidFill>
                   <a:srgbClr val="9DBACA"/>
@@ -9083,6 +9364,7 @@
               </a:defRPr>
             </a:lvl3pPr>
             <a:lvl4pPr algn="l">
+              <a:buNone/>
               <a:defRPr sz="1650" b="0">
                 <a:solidFill>
                   <a:srgbClr val="9DBACA"/>
@@ -9093,6 +9375,7 @@
               </a:defRPr>
             </a:lvl4pPr>
             <a:lvl5pPr algn="l">
+              <a:buNone/>
               <a:defRPr sz="1650" b="0">
                 <a:solidFill>
                   <a:srgbClr val="9DBACA"/>
@@ -9103,6 +9386,7 @@
               </a:defRPr>
             </a:lvl5pPr>
             <a:lvl6pPr algn="l">
+              <a:buNone/>
               <a:defRPr sz="1650" b="0">
                 <a:solidFill>
                   <a:srgbClr val="9DBACA"/>
@@ -9113,6 +9397,7 @@
               </a:defRPr>
             </a:lvl6pPr>
             <a:lvl7pPr algn="l">
+              <a:buNone/>
               <a:defRPr sz="1650" b="0">
                 <a:solidFill>
                   <a:srgbClr val="9DBACA"/>
@@ -9123,6 +9408,7 @@
               </a:defRPr>
             </a:lvl7pPr>
             <a:lvl8pPr algn="l">
+              <a:buNone/>
               <a:defRPr sz="1650" b="0">
                 <a:solidFill>
                   <a:srgbClr val="9DBACA"/>
@@ -9133,6 +9419,7 @@
               </a:defRPr>
             </a:lvl8pPr>
             <a:lvl9pPr algn="l">
+              <a:buNone/>
               <a:defRPr sz="1650" b="0">
                 <a:solidFill>
                   <a:srgbClr val="9DBACA"/>
@@ -9145,6 +9432,7 @@
           </a:lstStyle>
           <a:p xmlns:a="http://schemas.openxmlformats.org/drawingml/2006/main">
             <a:pPr algn="l">
+              <a:buNone/>
               <a:defRPr sz="1650" b="0">
                 <a:solidFill>
                   <a:srgbClr val="9DBACA"/>
@@ -9163,7 +9451,7 @@
                 <a:ea typeface="Arial"/>
                 <a:cs typeface="Arial"/>
               </a:rPr>
-              <a:t>English status, help and reset controls were added to the world-space panel.</a:t>
+              <a:t>Left stick: move | Right stick: turn / teleport | Grip: hold | Trigger: select</a:t>
             </a:r>
           </a:p>
         </p:txBody>
@@ -9173,7 +9461,7 @@
           <p:cNvPr id="7" name="">
             <a:extLst xmlns:a="http://schemas.openxmlformats.org/drawingml/2006/main">
               <a:ext uri="{FF2B5EF4-FFF2-40B4-BE49-F238E27FC236}">
-                <a16:creationId xmlns:a16="http://schemas.microsoft.com/office/drawing/2014/main" id="{5E3BA73D-B216-42DC-8204-C8045D4BA1A9}"/>
+                <a16:creationId xmlns:a16="http://schemas.microsoft.com/office/drawing/2014/main" id="{DC035A10-99B8-45B0-A6DF-B75EC37B7EF6}"/>
               </a:ext>
             </a:extLst>
           </p:cNvPr>
@@ -9183,8 +9471,11 @@
           <p:nvPr/>
         </p:nvPicPr>
         <p:blipFill>
-          <a:blip xmlns:r="http://schemas.openxmlformats.org/officeDocument/2006/relationships" xmlns:a="http://schemas.openxmlformats.org/drawingml/2006/main" r:embed="R613fff0b0fe74f61"/>
-          <a:stretch xmlns:a="http://schemas.openxmlformats.org/drawingml/2006/main"/>
+          <a:blip xmlns:r="http://schemas.openxmlformats.org/officeDocument/2006/relationships" xmlns:a="http://schemas.openxmlformats.org/drawingml/2006/main" r:embed="R5c38f24cb0374f37"/>
+          <a:srcRect xmlns:a="http://schemas.openxmlformats.org/drawingml/2006/main" l="0" t="0" r="0" b="0"/>
+          <a:stretch xmlns:a="http://schemas.openxmlformats.org/drawingml/2006/main">
+            <a:fillRect l="0" t="0" r="0" b="0"/>
+          </a:stretch>
         </p:blipFill>
         <p:spPr>
           <a:xfrm xmlns:a="http://schemas.openxmlformats.org/drawingml/2006/main">
@@ -9201,7 +9492,7 @@
           <p:cNvPr id="8" name="">
             <a:extLst xmlns:a="http://schemas.openxmlformats.org/drawingml/2006/main">
               <a:ext uri="{FF2B5EF4-FFF2-40B4-BE49-F238E27FC236}">
-                <a16:creationId xmlns:a16="http://schemas.microsoft.com/office/drawing/2014/main" id="{54191E0B-107A-4B2E-B6C9-1B3F67F2EC84}"/>
+                <a16:creationId xmlns:a16="http://schemas.microsoft.com/office/drawing/2014/main" id="{7695F1BA-6202-4F49-8DB7-E4C3002FD93E}"/>
               </a:ext>
             </a:extLst>
           </p:cNvPr>
@@ -9211,8 +9502,11 @@
           <p:nvPr/>
         </p:nvPicPr>
         <p:blipFill>
-          <a:blip xmlns:r="http://schemas.openxmlformats.org/officeDocument/2006/relationships" xmlns:a="http://schemas.openxmlformats.org/drawingml/2006/main" r:embed="Rcf8c568b04884df3"/>
-          <a:stretch xmlns:a="http://schemas.openxmlformats.org/drawingml/2006/main"/>
+          <a:blip xmlns:r="http://schemas.openxmlformats.org/officeDocument/2006/relationships" xmlns:a="http://schemas.openxmlformats.org/drawingml/2006/main" r:embed="Refb5e488dce94d34"/>
+          <a:srcRect xmlns:a="http://schemas.openxmlformats.org/drawingml/2006/main" l="0" t="0" r="0" b="0"/>
+          <a:stretch xmlns:a="http://schemas.openxmlformats.org/drawingml/2006/main">
+            <a:fillRect l="0" t="0" r="0" b="0"/>
+          </a:stretch>
         </p:blipFill>
         <p:spPr>
           <a:xfrm xmlns:a="http://schemas.openxmlformats.org/drawingml/2006/main">
@@ -9268,6 +9562,7 @@
               </a:defRPr>
             </a:defPPr>
             <a:lvl1pPr algn="l">
+              <a:buNone/>
               <a:defRPr sz="1425" b="1">
                 <a:solidFill>
                   <a:srgbClr val="72E7F4"/>
@@ -9278,6 +9573,7 @@
               </a:defRPr>
             </a:lvl1pPr>
             <a:lvl2pPr algn="l">
+              <a:buNone/>
               <a:defRPr sz="1425" b="1">
                 <a:solidFill>
                   <a:srgbClr val="72E7F4"/>
@@ -9288,6 +9584,7 @@
               </a:defRPr>
             </a:lvl2pPr>
             <a:lvl3pPr algn="l">
+              <a:buNone/>
               <a:defRPr sz="1425" b="1">
                 <a:solidFill>
                   <a:srgbClr val="72E7F4"/>
@@ -9298,6 +9595,7 @@
               </a:defRPr>
             </a:lvl3pPr>
             <a:lvl4pPr algn="l">
+              <a:buNone/>
               <a:defRPr sz="1425" b="1">
                 <a:solidFill>
                   <a:srgbClr val="72E7F4"/>
@@ -9308,6 +9606,7 @@
               </a:defRPr>
             </a:lvl4pPr>
             <a:lvl5pPr algn="l">
+              <a:buNone/>
               <a:defRPr sz="1425" b="1">
                 <a:solidFill>
                   <a:srgbClr val="72E7F4"/>
@@ -9318,6 +9617,7 @@
               </a:defRPr>
             </a:lvl5pPr>
             <a:lvl6pPr algn="l">
+              <a:buNone/>
               <a:defRPr sz="1425" b="1">
                 <a:solidFill>
                   <a:srgbClr val="72E7F4"/>
@@ -9328,6 +9628,7 @@
               </a:defRPr>
             </a:lvl6pPr>
             <a:lvl7pPr algn="l">
+              <a:buNone/>
               <a:defRPr sz="1425" b="1">
                 <a:solidFill>
                   <a:srgbClr val="72E7F4"/>
@@ -9338,6 +9639,7 @@
               </a:defRPr>
             </a:lvl7pPr>
             <a:lvl8pPr algn="l">
+              <a:buNone/>
               <a:defRPr sz="1425" b="1">
                 <a:solidFill>
                   <a:srgbClr val="72E7F4"/>
@@ -9348,6 +9650,7 @@
               </a:defRPr>
             </a:lvl8pPr>
             <a:lvl9pPr algn="l">
+              <a:buNone/>
               <a:defRPr sz="1425" b="1">
                 <a:solidFill>
                   <a:srgbClr val="72E7F4"/>
@@ -9360,6 +9663,7 @@
           </a:lstStyle>
           <a:p xmlns:a="http://schemas.openxmlformats.org/drawingml/2006/main">
             <a:pPr algn="l">
+              <a:buNone/>
               <a:defRPr sz="1425" b="1">
                 <a:solidFill>
                   <a:srgbClr val="72E7F4"/>
@@ -9378,7 +9682,7 @@
                 <a:ea typeface="Arial"/>
                 <a:cs typeface="Arial"/>
               </a:rPr>
-              <a:t>INITIAL STATUS</a:t>
+              <a:t>HELP AND RESET</a:t>
             </a:r>
           </a:p>
         </p:txBody>
@@ -9427,6 +9731,7 @@
               </a:defRPr>
             </a:defPPr>
             <a:lvl1pPr algn="l">
+              <a:buNone/>
               <a:defRPr sz="1425" b="1">
                 <a:solidFill>
                   <a:srgbClr val="72E7F4"/>
@@ -9437,6 +9742,7 @@
               </a:defRPr>
             </a:lvl1pPr>
             <a:lvl2pPr algn="l">
+              <a:buNone/>
               <a:defRPr sz="1425" b="1">
                 <a:solidFill>
                   <a:srgbClr val="72E7F4"/>
@@ -9447,6 +9753,7 @@
               </a:defRPr>
             </a:lvl2pPr>
             <a:lvl3pPr algn="l">
+              <a:buNone/>
               <a:defRPr sz="1425" b="1">
                 <a:solidFill>
                   <a:srgbClr val="72E7F4"/>
@@ -9457,6 +9764,7 @@
               </a:defRPr>
             </a:lvl3pPr>
             <a:lvl4pPr algn="l">
+              <a:buNone/>
               <a:defRPr sz="1425" b="1">
                 <a:solidFill>
                   <a:srgbClr val="72E7F4"/>
@@ -9467,6 +9775,7 @@
               </a:defRPr>
             </a:lvl4pPr>
             <a:lvl5pPr algn="l">
+              <a:buNone/>
               <a:defRPr sz="1425" b="1">
                 <a:solidFill>
                   <a:srgbClr val="72E7F4"/>
@@ -9477,6 +9786,7 @@
               </a:defRPr>
             </a:lvl5pPr>
             <a:lvl6pPr algn="l">
+              <a:buNone/>
               <a:defRPr sz="1425" b="1">
                 <a:solidFill>
                   <a:srgbClr val="72E7F4"/>
@@ -9487,6 +9797,7 @@
               </a:defRPr>
             </a:lvl6pPr>
             <a:lvl7pPr algn="l">
+              <a:buNone/>
               <a:defRPr sz="1425" b="1">
                 <a:solidFill>
                   <a:srgbClr val="72E7F4"/>
@@ -9497,6 +9808,7 @@
               </a:defRPr>
             </a:lvl7pPr>
             <a:lvl8pPr algn="l">
+              <a:buNone/>
               <a:defRPr sz="1425" b="1">
                 <a:solidFill>
                   <a:srgbClr val="72E7F4"/>
@@ -9507,6 +9819,7 @@
               </a:defRPr>
             </a:lvl8pPr>
             <a:lvl9pPr algn="l">
+              <a:buNone/>
               <a:defRPr sz="1425" b="1">
                 <a:solidFill>
                   <a:srgbClr val="72E7F4"/>
@@ -9519,6 +9832,7 @@
           </a:lstStyle>
           <a:p xmlns:a="http://schemas.openxmlformats.org/drawingml/2006/main">
             <a:pPr algn="l">
+              <a:buNone/>
               <a:defRPr sz="1425" b="1">
                 <a:solidFill>
                   <a:srgbClr val="72E7F4"/>
@@ -9537,7 +9851,7 @@
                 <a:ea typeface="Arial"/>
                 <a:cs typeface="Arial"/>
               </a:rPr>
-              <a:t>HELP EXPANDED</a:t>
+              <a:t>MISSION COMPLETE</a:t>
             </a:r>
           </a:p>
         </p:txBody>
@@ -9586,6 +9900,7 @@
               </a:defRPr>
             </a:defPPr>
             <a:lvl1pPr algn="l">
+              <a:buNone/>
               <a:defRPr sz="1200" b="0">
                 <a:solidFill>
                   <a:srgbClr val="9DBACA"/>
@@ -9596,6 +9911,7 @@
               </a:defRPr>
             </a:lvl1pPr>
             <a:lvl2pPr algn="l">
+              <a:buNone/>
               <a:defRPr sz="1200" b="0">
                 <a:solidFill>
                   <a:srgbClr val="9DBACA"/>
@@ -9606,6 +9922,7 @@
               </a:defRPr>
             </a:lvl2pPr>
             <a:lvl3pPr algn="l">
+              <a:buNone/>
               <a:defRPr sz="1200" b="0">
                 <a:solidFill>
                   <a:srgbClr val="9DBACA"/>
@@ -9616,6 +9933,7 @@
               </a:defRPr>
             </a:lvl3pPr>
             <a:lvl4pPr algn="l">
+              <a:buNone/>
               <a:defRPr sz="1200" b="0">
                 <a:solidFill>
                   <a:srgbClr val="9DBACA"/>
@@ -9626,6 +9944,7 @@
               </a:defRPr>
             </a:lvl4pPr>
             <a:lvl5pPr algn="l">
+              <a:buNone/>
               <a:defRPr sz="1200" b="0">
                 <a:solidFill>
                   <a:srgbClr val="9DBACA"/>
@@ -9636,6 +9955,7 @@
               </a:defRPr>
             </a:lvl5pPr>
             <a:lvl6pPr algn="l">
+              <a:buNone/>
               <a:defRPr sz="1200" b="0">
                 <a:solidFill>
                   <a:srgbClr val="9DBACA"/>
@@ -9646,6 +9966,7 @@
               </a:defRPr>
             </a:lvl6pPr>
             <a:lvl7pPr algn="l">
+              <a:buNone/>
               <a:defRPr sz="1200" b="0">
                 <a:solidFill>
                   <a:srgbClr val="9DBACA"/>
@@ -9656,6 +9977,7 @@
               </a:defRPr>
             </a:lvl7pPr>
             <a:lvl8pPr algn="l">
+              <a:buNone/>
               <a:defRPr sz="1200" b="0">
                 <a:solidFill>
                   <a:srgbClr val="9DBACA"/>
@@ -9666,6 +9988,7 @@
               </a:defRPr>
             </a:lvl8pPr>
             <a:lvl9pPr algn="l">
+              <a:buNone/>
               <a:defRPr sz="1200" b="0">
                 <a:solidFill>
                   <a:srgbClr val="9DBACA"/>
@@ -9678,6 +10001,7 @@
           </a:lstStyle>
           <a:p xmlns:a="http://schemas.openxmlformats.org/drawingml/2006/main">
             <a:pPr algn="l">
+              <a:buNone/>
               <a:defRPr sz="1200" b="0">
                 <a:solidFill>
                   <a:srgbClr val="9DBACA"/>
@@ -9696,7 +10020,7 @@
                 <a:ea typeface="Arial"/>
                 <a:cs typeface="Arial"/>
               </a:rPr>
-              <a:t>Unity Editor previews. Ray-button clicks and headset readability still require Play and Quest checks.</a:t>
+              <a:t>Quest 2 USB Link PC VR frames, 21 Oct. Left Menu: help panel; B: close; RESET MISSION: restart.</a:t>
             </a:r>
           </a:p>
         </p:txBody>
@@ -9805,6 +10129,7 @@
               </a:defRPr>
             </a:defPPr>
             <a:lvl1pPr algn="l">
+              <a:buNone/>
               <a:defRPr sz="2850" b="1">
                 <a:solidFill>
                   <a:srgbClr val="F5FBFE"/>
@@ -9815,6 +10140,7 @@
               </a:defRPr>
             </a:lvl1pPr>
             <a:lvl2pPr algn="l">
+              <a:buNone/>
               <a:defRPr sz="2850" b="1">
                 <a:solidFill>
                   <a:srgbClr val="F5FBFE"/>
@@ -9825,6 +10151,7 @@
               </a:defRPr>
             </a:lvl2pPr>
             <a:lvl3pPr algn="l">
+              <a:buNone/>
               <a:defRPr sz="2850" b="1">
                 <a:solidFill>
                   <a:srgbClr val="F5FBFE"/>
@@ -9835,6 +10162,7 @@
               </a:defRPr>
             </a:lvl3pPr>
             <a:lvl4pPr algn="l">
+              <a:buNone/>
               <a:defRPr sz="2850" b="1">
                 <a:solidFill>
                   <a:srgbClr val="F5FBFE"/>
@@ -9845,6 +10173,7 @@
               </a:defRPr>
             </a:lvl4pPr>
             <a:lvl5pPr algn="l">
+              <a:buNone/>
               <a:defRPr sz="2850" b="1">
                 <a:solidFill>
                   <a:srgbClr val="F5FBFE"/>
@@ -9855,6 +10184,7 @@
               </a:defRPr>
             </a:lvl5pPr>
             <a:lvl6pPr algn="l">
+              <a:buNone/>
               <a:defRPr sz="2850" b="1">
                 <a:solidFill>
                   <a:srgbClr val="F5FBFE"/>
@@ -9865,6 +10195,7 @@
               </a:defRPr>
             </a:lvl6pPr>
             <a:lvl7pPr algn="l">
+              <a:buNone/>
               <a:defRPr sz="2850" b="1">
                 <a:solidFill>
                   <a:srgbClr val="F5FBFE"/>
@@ -9875,6 +10206,7 @@
               </a:defRPr>
             </a:lvl7pPr>
             <a:lvl8pPr algn="l">
+              <a:buNone/>
               <a:defRPr sz="2850" b="1">
                 <a:solidFill>
                   <a:srgbClr val="F5FBFE"/>
@@ -9885,6 +10217,7 @@
               </a:defRPr>
             </a:lvl8pPr>
             <a:lvl9pPr algn="l">
+              <a:buNone/>
               <a:defRPr sz="2850" b="1">
                 <a:solidFill>
                   <a:srgbClr val="F5FBFE"/>
@@ -9897,6 +10230,7 @@
           </a:lstStyle>
           <a:p xmlns:a="http://schemas.openxmlformats.org/drawingml/2006/main">
             <a:pPr algn="l">
+              <a:buNone/>
               <a:defRPr sz="2850" b="1">
                 <a:solidFill>
                   <a:srgbClr val="F5FBFE"/>
@@ -9995,6 +10329,7 @@
               </a:defRPr>
             </a:defPPr>
             <a:lvl1pPr algn="l">
+              <a:buNone/>
               <a:defRPr sz="975" b="1">
                 <a:solidFill>
                   <a:srgbClr val="9DBACA"/>
@@ -10005,6 +10340,7 @@
               </a:defRPr>
             </a:lvl1pPr>
             <a:lvl2pPr algn="l">
+              <a:buNone/>
               <a:defRPr sz="975" b="1">
                 <a:solidFill>
                   <a:srgbClr val="9DBACA"/>
@@ -10015,6 +10351,7 @@
               </a:defRPr>
             </a:lvl2pPr>
             <a:lvl3pPr algn="l">
+              <a:buNone/>
               <a:defRPr sz="975" b="1">
                 <a:solidFill>
                   <a:srgbClr val="9DBACA"/>
@@ -10025,6 +10362,7 @@
               </a:defRPr>
             </a:lvl3pPr>
             <a:lvl4pPr algn="l">
+              <a:buNone/>
               <a:defRPr sz="975" b="1">
                 <a:solidFill>
                   <a:srgbClr val="9DBACA"/>
@@ -10035,6 +10373,7 @@
               </a:defRPr>
             </a:lvl4pPr>
             <a:lvl5pPr algn="l">
+              <a:buNone/>
               <a:defRPr sz="975" b="1">
                 <a:solidFill>
                   <a:srgbClr val="9DBACA"/>
@@ -10045,6 +10384,7 @@
               </a:defRPr>
             </a:lvl5pPr>
             <a:lvl6pPr algn="l">
+              <a:buNone/>
               <a:defRPr sz="975" b="1">
                 <a:solidFill>
                   <a:srgbClr val="9DBACA"/>
@@ -10055,6 +10395,7 @@
               </a:defRPr>
             </a:lvl6pPr>
             <a:lvl7pPr algn="l">
+              <a:buNone/>
               <a:defRPr sz="975" b="1">
                 <a:solidFill>
                   <a:srgbClr val="9DBACA"/>
@@ -10065,6 +10406,7 @@
               </a:defRPr>
             </a:lvl7pPr>
             <a:lvl8pPr algn="l">
+              <a:buNone/>
               <a:defRPr sz="975" b="1">
                 <a:solidFill>
                   <a:srgbClr val="9DBACA"/>
@@ -10075,6 +10417,7 @@
               </a:defRPr>
             </a:lvl8pPr>
             <a:lvl9pPr algn="l">
+              <a:buNone/>
               <a:defRPr sz="975" b="1">
                 <a:solidFill>
                   <a:srgbClr val="9DBACA"/>
@@ -10087,6 +10430,7 @@
           </a:lstStyle>
           <a:p xmlns:a="http://schemas.openxmlformats.org/drawingml/2006/main">
             <a:pPr algn="l">
+              <a:buNone/>
               <a:defRPr sz="975" b="1">
                 <a:solidFill>
                   <a:srgbClr val="9DBACA"/>
@@ -10154,6 +10498,7 @@
               </a:defRPr>
             </a:defPPr>
             <a:lvl1pPr algn="r">
+              <a:buNone/>
               <a:defRPr sz="1200" b="1">
                 <a:solidFill>
                   <a:srgbClr val="72E7F4"/>
@@ -10164,6 +10509,7 @@
               </a:defRPr>
             </a:lvl1pPr>
             <a:lvl2pPr algn="r">
+              <a:buNone/>
               <a:defRPr sz="1200" b="1">
                 <a:solidFill>
                   <a:srgbClr val="72E7F4"/>
@@ -10174,6 +10520,7 @@
               </a:defRPr>
             </a:lvl2pPr>
             <a:lvl3pPr algn="r">
+              <a:buNone/>
               <a:defRPr sz="1200" b="1">
                 <a:solidFill>
                   <a:srgbClr val="72E7F4"/>
@@ -10184,6 +10531,7 @@
               </a:defRPr>
             </a:lvl3pPr>
             <a:lvl4pPr algn="r">
+              <a:buNone/>
               <a:defRPr sz="1200" b="1">
                 <a:solidFill>
                   <a:srgbClr val="72E7F4"/>
@@ -10194,6 +10542,7 @@
               </a:defRPr>
             </a:lvl4pPr>
             <a:lvl5pPr algn="r">
+              <a:buNone/>
               <a:defRPr sz="1200" b="1">
                 <a:solidFill>
                   <a:srgbClr val="72E7F4"/>
@@ -10204,6 +10553,7 @@
               </a:defRPr>
             </a:lvl5pPr>
             <a:lvl6pPr algn="r">
+              <a:buNone/>
               <a:defRPr sz="1200" b="1">
                 <a:solidFill>
                   <a:srgbClr val="72E7F4"/>
@@ -10214,6 +10564,7 @@
               </a:defRPr>
             </a:lvl6pPr>
             <a:lvl7pPr algn="r">
+              <a:buNone/>
               <a:defRPr sz="1200" b="1">
                 <a:solidFill>
                   <a:srgbClr val="72E7F4"/>
@@ -10224,6 +10575,7 @@
               </a:defRPr>
             </a:lvl7pPr>
             <a:lvl8pPr algn="r">
+              <a:buNone/>
               <a:defRPr sz="1200" b="1">
                 <a:solidFill>
                   <a:srgbClr val="72E7F4"/>
@@ -10234,6 +10586,7 @@
               </a:defRPr>
             </a:lvl8pPr>
             <a:lvl9pPr algn="r">
+              <a:buNone/>
               <a:defRPr sz="1200" b="1">
                 <a:solidFill>
                   <a:srgbClr val="72E7F4"/>
@@ -10246,6 +10599,7 @@
           </a:lstStyle>
           <a:p xmlns:a="http://schemas.openxmlformats.org/drawingml/2006/main">
             <a:pPr algn="r">
+              <a:buNone/>
               <a:defRPr sz="1200" b="1">
                 <a:solidFill>
                   <a:srgbClr val="72E7F4"/>
@@ -10313,6 +10667,7 @@
               </a:defRPr>
             </a:defPPr>
             <a:lvl1pPr algn="l">
+              <a:buNone/>
               <a:defRPr sz="1500" b="1">
                 <a:solidFill>
                   <a:srgbClr val="72E7F4"/>
@@ -10323,6 +10678,7 @@
               </a:defRPr>
             </a:lvl1pPr>
             <a:lvl2pPr algn="l">
+              <a:buNone/>
               <a:defRPr sz="1500" b="1">
                 <a:solidFill>
                   <a:srgbClr val="72E7F4"/>
@@ -10333,6 +10689,7 @@
               </a:defRPr>
             </a:lvl2pPr>
             <a:lvl3pPr algn="l">
+              <a:buNone/>
               <a:defRPr sz="1500" b="1">
                 <a:solidFill>
                   <a:srgbClr val="72E7F4"/>
@@ -10343,6 +10700,7 @@
               </a:defRPr>
             </a:lvl3pPr>
             <a:lvl4pPr algn="l">
+              <a:buNone/>
               <a:defRPr sz="1500" b="1">
                 <a:solidFill>
                   <a:srgbClr val="72E7F4"/>
@@ -10353,6 +10711,7 @@
               </a:defRPr>
             </a:lvl4pPr>
             <a:lvl5pPr algn="l">
+              <a:buNone/>
               <a:defRPr sz="1500" b="1">
                 <a:solidFill>
                   <a:srgbClr val="72E7F4"/>
@@ -10363,6 +10722,7 @@
               </a:defRPr>
             </a:lvl5pPr>
             <a:lvl6pPr algn="l">
+              <a:buNone/>
               <a:defRPr sz="1500" b="1">
                 <a:solidFill>
                   <a:srgbClr val="72E7F4"/>
@@ -10373,6 +10733,7 @@
               </a:defRPr>
             </a:lvl6pPr>
             <a:lvl7pPr algn="l">
+              <a:buNone/>
               <a:defRPr sz="1500" b="1">
                 <a:solidFill>
                   <a:srgbClr val="72E7F4"/>
@@ -10383,6 +10744,7 @@
               </a:defRPr>
             </a:lvl7pPr>
             <a:lvl8pPr algn="l">
+              <a:buNone/>
               <a:defRPr sz="1500" b="1">
                 <a:solidFill>
                   <a:srgbClr val="72E7F4"/>
@@ -10393,6 +10755,7 @@
               </a:defRPr>
             </a:lvl8pPr>
             <a:lvl9pPr algn="l">
+              <a:buNone/>
               <a:defRPr sz="1500" b="1">
                 <a:solidFill>
                   <a:srgbClr val="72E7F4"/>
@@ -10405,6 +10768,7 @@
           </a:lstStyle>
           <a:p xmlns:a="http://schemas.openxmlformats.org/drawingml/2006/main">
             <a:pPr algn="l">
+              <a:buNone/>
               <a:defRPr sz="1500" b="1">
                 <a:solidFill>
                   <a:srgbClr val="72E7F4"/>
@@ -10433,7 +10797,7 @@
           <p:cNvPr id="7" name="">
             <a:extLst xmlns:a="http://schemas.openxmlformats.org/drawingml/2006/main">
               <a:ext uri="{FF2B5EF4-FFF2-40B4-BE49-F238E27FC236}">
-                <a16:creationId xmlns:a16="http://schemas.microsoft.com/office/drawing/2014/main" id="{414DA2B8-8ED4-4106-A017-677D70E80BE2}"/>
+                <a16:creationId xmlns:a16="http://schemas.microsoft.com/office/drawing/2014/main" id="{A671B4F9-8A33-4764-89C8-2147A2F24CB6}"/>
               </a:ext>
             </a:extLst>
           </p:cNvPr>
@@ -10443,7 +10807,7 @@
           <p:nvPr/>
         </p:nvPicPr>
         <p:blipFill>
-          <a:blip xmlns:r="http://schemas.openxmlformats.org/officeDocument/2006/relationships" xmlns:a="http://schemas.openxmlformats.org/drawingml/2006/main" r:embed="R51a24679f09d47ec"/>
+          <a:blip xmlns:r="http://schemas.openxmlformats.org/officeDocument/2006/relationships" xmlns:a="http://schemas.openxmlformats.org/drawingml/2006/main" r:embed="Rc76c2c8148864943"/>
           <a:stretch xmlns:a="http://schemas.openxmlformats.org/drawingml/2006/main"/>
         </p:blipFill>
         <p:spPr>
@@ -10500,6 +10864,7 @@
               </a:defRPr>
             </a:defPPr>
             <a:lvl1pPr algn="l">
+              <a:buNone/>
               <a:defRPr sz="1350" b="0">
                 <a:solidFill>
                   <a:srgbClr val="F5FBFE"/>
@@ -10510,6 +10875,7 @@
               </a:defRPr>
             </a:lvl1pPr>
             <a:lvl2pPr algn="l">
+              <a:buNone/>
               <a:defRPr sz="1350" b="0">
                 <a:solidFill>
                   <a:srgbClr val="F5FBFE"/>
@@ -10520,6 +10886,7 @@
               </a:defRPr>
             </a:lvl2pPr>
             <a:lvl3pPr algn="l">
+              <a:buNone/>
               <a:defRPr sz="1350" b="0">
                 <a:solidFill>
                   <a:srgbClr val="F5FBFE"/>
@@ -10530,6 +10897,7 @@
               </a:defRPr>
             </a:lvl3pPr>
             <a:lvl4pPr algn="l">
+              <a:buNone/>
               <a:defRPr sz="1350" b="0">
                 <a:solidFill>
                   <a:srgbClr val="F5FBFE"/>
@@ -10540,6 +10908,7 @@
               </a:defRPr>
             </a:lvl4pPr>
             <a:lvl5pPr algn="l">
+              <a:buNone/>
               <a:defRPr sz="1350" b="0">
                 <a:solidFill>
                   <a:srgbClr val="F5FBFE"/>
@@ -10550,6 +10919,7 @@
               </a:defRPr>
             </a:lvl5pPr>
             <a:lvl6pPr algn="l">
+              <a:buNone/>
               <a:defRPr sz="1350" b="0">
                 <a:solidFill>
                   <a:srgbClr val="F5FBFE"/>
@@ -10560,6 +10930,7 @@
               </a:defRPr>
             </a:lvl6pPr>
             <a:lvl7pPr algn="l">
+              <a:buNone/>
               <a:defRPr sz="1350" b="0">
                 <a:solidFill>
                   <a:srgbClr val="F5FBFE"/>
@@ -10570,6 +10941,7 @@
               </a:defRPr>
             </a:lvl7pPr>
             <a:lvl8pPr algn="l">
+              <a:buNone/>
               <a:defRPr sz="1350" b="0">
                 <a:solidFill>
                   <a:srgbClr val="F5FBFE"/>
@@ -10580,6 +10952,7 @@
               </a:defRPr>
             </a:lvl8pPr>
             <a:lvl9pPr algn="l">
+              <a:buNone/>
               <a:defRPr sz="1350" b="0">
                 <a:solidFill>
                   <a:srgbClr val="F5FBFE"/>
@@ -10592,6 +10965,7 @@
           </a:lstStyle>
           <a:p xmlns:a="http://schemas.openxmlformats.org/drawingml/2006/main">
             <a:pPr algn="l">
+              <a:buNone/>
               <a:defRPr sz="1350" b="0">
                 <a:solidFill>
                   <a:srgbClr val="F5FBFE"/>
@@ -10659,6 +11033,7 @@
               </a:defRPr>
             </a:defPPr>
             <a:lvl1pPr algn="l">
+              <a:buNone/>
               <a:defRPr sz="1050" b="0">
                 <a:solidFill>
                   <a:srgbClr val="9DBACA"/>
@@ -10669,6 +11044,7 @@
               </a:defRPr>
             </a:lvl1pPr>
             <a:lvl2pPr algn="l">
+              <a:buNone/>
               <a:defRPr sz="1050" b="0">
                 <a:solidFill>
                   <a:srgbClr val="9DBACA"/>
@@ -10679,6 +11055,7 @@
               </a:defRPr>
             </a:lvl2pPr>
             <a:lvl3pPr algn="l">
+              <a:buNone/>
               <a:defRPr sz="1050" b="0">
                 <a:solidFill>
                   <a:srgbClr val="9DBACA"/>
@@ -10689,6 +11066,7 @@
               </a:defRPr>
             </a:lvl3pPr>
             <a:lvl4pPr algn="l">
+              <a:buNone/>
               <a:defRPr sz="1050" b="0">
                 <a:solidFill>
                   <a:srgbClr val="9DBACA"/>
@@ -10699,6 +11077,7 @@
               </a:defRPr>
             </a:lvl4pPr>
             <a:lvl5pPr algn="l">
+              <a:buNone/>
               <a:defRPr sz="1050" b="0">
                 <a:solidFill>
                   <a:srgbClr val="9DBACA"/>
@@ -10709,6 +11088,7 @@
               </a:defRPr>
             </a:lvl5pPr>
             <a:lvl6pPr algn="l">
+              <a:buNone/>
               <a:defRPr sz="1050" b="0">
                 <a:solidFill>
                   <a:srgbClr val="9DBACA"/>
@@ -10719,6 +11099,7 @@
               </a:defRPr>
             </a:lvl6pPr>
             <a:lvl7pPr algn="l">
+              <a:buNone/>
               <a:defRPr sz="1050" b="0">
                 <a:solidFill>
                   <a:srgbClr val="9DBACA"/>
@@ -10729,6 +11110,7 @@
               </a:defRPr>
             </a:lvl7pPr>
             <a:lvl8pPr algn="l">
+              <a:buNone/>
               <a:defRPr sz="1050" b="0">
                 <a:solidFill>
                   <a:srgbClr val="9DBACA"/>
@@ -10739,6 +11121,7 @@
               </a:defRPr>
             </a:lvl8pPr>
             <a:lvl9pPr algn="l">
+              <a:buNone/>
               <a:defRPr sz="1050" b="0">
                 <a:solidFill>
                   <a:srgbClr val="9DBACA"/>
@@ -10751,6 +11134,7 @@
           </a:lstStyle>
           <a:p xmlns:a="http://schemas.openxmlformats.org/drawingml/2006/main">
             <a:pPr algn="l">
+              <a:buNone/>
               <a:defRPr sz="1050" b="0">
                 <a:solidFill>
                   <a:srgbClr val="9DBACA"/>
@@ -10769,7 +11153,7 @@
                 <a:ea typeface="Arial"/>
                 <a:cs typeface="Arial"/>
               </a:rPr>
-              <a:t>Unity Editor preview. Quest handling remains pending.</a:t>
+              <a:t>Editor preview. Controller handling recorded via USB Link.</a:t>
             </a:r>
           </a:p>
         </p:txBody>
@@ -10818,6 +11202,7 @@
               </a:defRPr>
             </a:defPPr>
             <a:lvl1pPr algn="l">
+              <a:buNone/>
               <a:defRPr sz="1500" b="1">
                 <a:solidFill>
                   <a:srgbClr val="72E7F4"/>
@@ -10828,6 +11213,7 @@
               </a:defRPr>
             </a:lvl1pPr>
             <a:lvl2pPr algn="l">
+              <a:buNone/>
               <a:defRPr sz="1500" b="1">
                 <a:solidFill>
                   <a:srgbClr val="72E7F4"/>
@@ -10838,6 +11224,7 @@
               </a:defRPr>
             </a:lvl2pPr>
             <a:lvl3pPr algn="l">
+              <a:buNone/>
               <a:defRPr sz="1500" b="1">
                 <a:solidFill>
                   <a:srgbClr val="72E7F4"/>
@@ -10848,6 +11235,7 @@
               </a:defRPr>
             </a:lvl3pPr>
             <a:lvl4pPr algn="l">
+              <a:buNone/>
               <a:defRPr sz="1500" b="1">
                 <a:solidFill>
                   <a:srgbClr val="72E7F4"/>
@@ -10858,6 +11246,7 @@
               </a:defRPr>
             </a:lvl4pPr>
             <a:lvl5pPr algn="l">
+              <a:buNone/>
               <a:defRPr sz="1500" b="1">
                 <a:solidFill>
                   <a:srgbClr val="72E7F4"/>
@@ -10868,6 +11257,7 @@
               </a:defRPr>
             </a:lvl5pPr>
             <a:lvl6pPr algn="l">
+              <a:buNone/>
               <a:defRPr sz="1500" b="1">
                 <a:solidFill>
                   <a:srgbClr val="72E7F4"/>
@@ -10878,6 +11268,7 @@
               </a:defRPr>
             </a:lvl6pPr>
             <a:lvl7pPr algn="l">
+              <a:buNone/>
               <a:defRPr sz="1500" b="1">
                 <a:solidFill>
                   <a:srgbClr val="72E7F4"/>
@@ -10888,6 +11279,7 @@
               </a:defRPr>
             </a:lvl7pPr>
             <a:lvl8pPr algn="l">
+              <a:buNone/>
               <a:defRPr sz="1500" b="1">
                 <a:solidFill>
                   <a:srgbClr val="72E7F4"/>
@@ -10898,6 +11290,7 @@
               </a:defRPr>
             </a:lvl8pPr>
             <a:lvl9pPr algn="l">
+              <a:buNone/>
               <a:defRPr sz="1500" b="1">
                 <a:solidFill>
                   <a:srgbClr val="72E7F4"/>
@@ -10910,6 +11303,7 @@
           </a:lstStyle>
           <a:p xmlns:a="http://schemas.openxmlformats.org/drawingml/2006/main">
             <a:pPr algn="l">
+              <a:buNone/>
               <a:defRPr sz="1500" b="1">
                 <a:solidFill>
                   <a:srgbClr val="72E7F4"/>
@@ -10977,6 +11371,7 @@
               </a:defRPr>
             </a:defPPr>
             <a:lvl1pPr algn="l">
+              <a:buNone/>
               <a:defRPr sz="1875" b="0">
                 <a:solidFill>
                   <a:srgbClr val="F5FBFE"/>
@@ -10987,6 +11382,7 @@
               </a:defRPr>
             </a:lvl1pPr>
             <a:lvl2pPr algn="l">
+              <a:buNone/>
               <a:defRPr sz="1875" b="0">
                 <a:solidFill>
                   <a:srgbClr val="F5FBFE"/>
@@ -10997,6 +11393,7 @@
               </a:defRPr>
             </a:lvl2pPr>
             <a:lvl3pPr algn="l">
+              <a:buNone/>
               <a:defRPr sz="1875" b="0">
                 <a:solidFill>
                   <a:srgbClr val="F5FBFE"/>
@@ -11007,6 +11404,7 @@
               </a:defRPr>
             </a:lvl3pPr>
             <a:lvl4pPr algn="l">
+              <a:buNone/>
               <a:defRPr sz="1875" b="0">
                 <a:solidFill>
                   <a:srgbClr val="F5FBFE"/>
@@ -11017,6 +11415,7 @@
               </a:defRPr>
             </a:lvl4pPr>
             <a:lvl5pPr algn="l">
+              <a:buNone/>
               <a:defRPr sz="1875" b="0">
                 <a:solidFill>
                   <a:srgbClr val="F5FBFE"/>
@@ -11027,6 +11426,7 @@
               </a:defRPr>
             </a:lvl5pPr>
             <a:lvl6pPr algn="l">
+              <a:buNone/>
               <a:defRPr sz="1875" b="0">
                 <a:solidFill>
                   <a:srgbClr val="F5FBFE"/>
@@ -11037,6 +11437,7 @@
               </a:defRPr>
             </a:lvl6pPr>
             <a:lvl7pPr algn="l">
+              <a:buNone/>
               <a:defRPr sz="1875" b="0">
                 <a:solidFill>
                   <a:srgbClr val="F5FBFE"/>
@@ -11047,6 +11448,7 @@
               </a:defRPr>
             </a:lvl7pPr>
             <a:lvl8pPr algn="l">
+              <a:buNone/>
               <a:defRPr sz="1875" b="0">
                 <a:solidFill>
                   <a:srgbClr val="F5FBFE"/>
@@ -11057,6 +11459,7 @@
               </a:defRPr>
             </a:lvl8pPr>
             <a:lvl9pPr algn="l">
+              <a:buNone/>
               <a:defRPr sz="1875" b="0">
                 <a:solidFill>
                   <a:srgbClr val="F5FBFE"/>
@@ -11069,6 +11472,7 @@
           </a:lstStyle>
           <a:p xmlns:a="http://schemas.openxmlformats.org/drawingml/2006/main">
             <a:pPr algn="l">
+              <a:buNone/>
               <a:defRPr sz="1875" b="0">
                 <a:solidFill>
                   <a:srgbClr val="F5FBFE"/>
@@ -11092,6 +11496,7 @@
           </a:p>
           <a:p xmlns:a="http://schemas.openxmlformats.org/drawingml/2006/main">
             <a:pPr algn="l">
+              <a:buNone/>
               <a:defRPr sz="1875" b="0">
                 <a:solidFill>
                   <a:srgbClr val="F5FBFE"/>
@@ -11115,6 +11520,7 @@
           </a:p>
           <a:p xmlns:a="http://schemas.openxmlformats.org/drawingml/2006/main">
             <a:pPr algn="l">
+              <a:buNone/>
               <a:defRPr sz="1875" b="0">
                 <a:solidFill>
                   <a:srgbClr val="F5FBFE"/>
@@ -11138,6 +11544,7 @@
           </a:p>
           <a:p xmlns:a="http://schemas.openxmlformats.org/drawingml/2006/main">
             <a:pPr algn="l">
+              <a:buNone/>
               <a:defRPr sz="1875" b="0">
                 <a:solidFill>
                   <a:srgbClr val="F5FBFE"/>
@@ -11236,6 +11643,7 @@
               </a:defRPr>
             </a:defPPr>
             <a:lvl1pPr algn="l">
+              <a:buNone/>
               <a:defRPr sz="1650" b="0">
                 <a:solidFill>
                   <a:srgbClr val="F5FBFE"/>
@@ -11246,6 +11654,7 @@
               </a:defRPr>
             </a:lvl1pPr>
             <a:lvl2pPr algn="l">
+              <a:buNone/>
               <a:defRPr sz="1650" b="0">
                 <a:solidFill>
                   <a:srgbClr val="F5FBFE"/>
@@ -11256,6 +11665,7 @@
               </a:defRPr>
             </a:lvl2pPr>
             <a:lvl3pPr algn="l">
+              <a:buNone/>
               <a:defRPr sz="1650" b="0">
                 <a:solidFill>
                   <a:srgbClr val="F5FBFE"/>
@@ -11266,6 +11676,7 @@
               </a:defRPr>
             </a:lvl3pPr>
             <a:lvl4pPr algn="l">
+              <a:buNone/>
               <a:defRPr sz="1650" b="0">
                 <a:solidFill>
                   <a:srgbClr val="F5FBFE"/>
@@ -11276,6 +11687,7 @@
               </a:defRPr>
             </a:lvl4pPr>
             <a:lvl5pPr algn="l">
+              <a:buNone/>
               <a:defRPr sz="1650" b="0">
                 <a:solidFill>
                   <a:srgbClr val="F5FBFE"/>
@@ -11286,6 +11698,7 @@
               </a:defRPr>
             </a:lvl5pPr>
             <a:lvl6pPr algn="l">
+              <a:buNone/>
               <a:defRPr sz="1650" b="0">
                 <a:solidFill>
                   <a:srgbClr val="F5FBFE"/>
@@ -11296,6 +11709,7 @@
               </a:defRPr>
             </a:lvl6pPr>
             <a:lvl7pPr algn="l">
+              <a:buNone/>
               <a:defRPr sz="1650" b="0">
                 <a:solidFill>
                   <a:srgbClr val="F5FBFE"/>
@@ -11306,6 +11720,7 @@
               </a:defRPr>
             </a:lvl7pPr>
             <a:lvl8pPr algn="l">
+              <a:buNone/>
               <a:defRPr sz="1650" b="0">
                 <a:solidFill>
                   <a:srgbClr val="F5FBFE"/>
@@ -11316,6 +11731,7 @@
               </a:defRPr>
             </a:lvl8pPr>
             <a:lvl9pPr algn="l">
+              <a:buNone/>
               <a:defRPr sz="1650" b="0">
                 <a:solidFill>
                   <a:srgbClr val="F5FBFE"/>
@@ -11328,6 +11744,7 @@
           </a:lstStyle>
           <a:p xmlns:a="http://schemas.openxmlformats.org/drawingml/2006/main">
             <a:pPr algn="l">
+              <a:buNone/>
               <a:defRPr sz="1650" b="0">
                 <a:solidFill>
                   <a:srgbClr val="F5FBFE"/>
@@ -11351,6 +11768,7 @@
           </a:p>
           <a:p xmlns:a="http://schemas.openxmlformats.org/drawingml/2006/main">
             <a:pPr algn="l">
+              <a:buNone/>
               <a:defRPr sz="1650" b="0">
                 <a:solidFill>
                   <a:srgbClr val="F5FBFE"/>
@@ -11418,6 +11836,7 @@
               </a:defRPr>
             </a:defPPr>
             <a:lvl1pPr algn="l">
+              <a:buNone/>
               <a:defRPr sz="1275" b="0">
                 <a:solidFill>
                   <a:srgbClr val="9DBACA"/>
@@ -11428,6 +11847,7 @@
               </a:defRPr>
             </a:lvl1pPr>
             <a:lvl2pPr algn="l">
+              <a:buNone/>
               <a:defRPr sz="1275" b="0">
                 <a:solidFill>
                   <a:srgbClr val="9DBACA"/>
@@ -11438,6 +11858,7 @@
               </a:defRPr>
             </a:lvl2pPr>
             <a:lvl3pPr algn="l">
+              <a:buNone/>
               <a:defRPr sz="1275" b="0">
                 <a:solidFill>
                   <a:srgbClr val="9DBACA"/>
@@ -11448,6 +11869,7 @@
               </a:defRPr>
             </a:lvl3pPr>
             <a:lvl4pPr algn="l">
+              <a:buNone/>
               <a:defRPr sz="1275" b="0">
                 <a:solidFill>
                   <a:srgbClr val="9DBACA"/>
@@ -11458,6 +11880,7 @@
               </a:defRPr>
             </a:lvl4pPr>
             <a:lvl5pPr algn="l">
+              <a:buNone/>
               <a:defRPr sz="1275" b="0">
                 <a:solidFill>
                   <a:srgbClr val="9DBACA"/>
@@ -11468,6 +11891,7 @@
               </a:defRPr>
             </a:lvl5pPr>
             <a:lvl6pPr algn="l">
+              <a:buNone/>
               <a:defRPr sz="1275" b="0">
                 <a:solidFill>
                   <a:srgbClr val="9DBACA"/>
@@ -11478,6 +11902,7 @@
               </a:defRPr>
             </a:lvl6pPr>
             <a:lvl7pPr algn="l">
+              <a:buNone/>
               <a:defRPr sz="1275" b="0">
                 <a:solidFill>
                   <a:srgbClr val="9DBACA"/>
@@ -11488,6 +11913,7 @@
               </a:defRPr>
             </a:lvl7pPr>
             <a:lvl8pPr algn="l">
+              <a:buNone/>
               <a:defRPr sz="1275" b="0">
                 <a:solidFill>
                   <a:srgbClr val="9DBACA"/>
@@ -11498,6 +11924,7 @@
               </a:defRPr>
             </a:lvl8pPr>
             <a:lvl9pPr algn="l">
+              <a:buNone/>
               <a:defRPr sz="1275" b="0">
                 <a:solidFill>
                   <a:srgbClr val="9DBACA"/>
@@ -11510,6 +11937,7 @@
           </a:lstStyle>
           <a:p xmlns:a="http://schemas.openxmlformats.org/drawingml/2006/main">
             <a:pPr algn="l">
+              <a:buNone/>
               <a:defRPr sz="1275" b="0">
                 <a:solidFill>
                   <a:srgbClr val="9DBACA"/>
@@ -11528,7 +11956,7 @@
                 <a:ea typeface="Arial"/>
                 <a:cs typeface="Arial"/>
               </a:rPr>
-              <a:t>Implemented in Unity. This image shows the Editor preview; runtime and device checks are separate.</a:t>
+              <a:t>The 21 Oct PC VR recording shows the core insertion, door animation and exit completion.</a:t>
             </a:r>
           </a:p>
         </p:txBody>
@@ -11637,6 +12065,7 @@
               </a:defRPr>
             </a:defPPr>
             <a:lvl1pPr algn="l">
+              <a:buNone/>
               <a:defRPr sz="2850" b="1">
                 <a:solidFill>
                   <a:srgbClr val="F5FBFE"/>
@@ -11647,6 +12076,7 @@
               </a:defRPr>
             </a:lvl1pPr>
             <a:lvl2pPr algn="l">
+              <a:buNone/>
               <a:defRPr sz="2850" b="1">
                 <a:solidFill>
                   <a:srgbClr val="F5FBFE"/>
@@ -11657,6 +12087,7 @@
               </a:defRPr>
             </a:lvl2pPr>
             <a:lvl3pPr algn="l">
+              <a:buNone/>
               <a:defRPr sz="2850" b="1">
                 <a:solidFill>
                   <a:srgbClr val="F5FBFE"/>
@@ -11667,6 +12098,7 @@
               </a:defRPr>
             </a:lvl3pPr>
             <a:lvl4pPr algn="l">
+              <a:buNone/>
               <a:defRPr sz="2850" b="1">
                 <a:solidFill>
                   <a:srgbClr val="F5FBFE"/>
@@ -11677,6 +12109,7 @@
               </a:defRPr>
             </a:lvl4pPr>
             <a:lvl5pPr algn="l">
+              <a:buNone/>
               <a:defRPr sz="2850" b="1">
                 <a:solidFill>
                   <a:srgbClr val="F5FBFE"/>
@@ -11687,6 +12120,7 @@
               </a:defRPr>
             </a:lvl5pPr>
             <a:lvl6pPr algn="l">
+              <a:buNone/>
               <a:defRPr sz="2850" b="1">
                 <a:solidFill>
                   <a:srgbClr val="F5FBFE"/>
@@ -11697,6 +12131,7 @@
               </a:defRPr>
             </a:lvl6pPr>
             <a:lvl7pPr algn="l">
+              <a:buNone/>
               <a:defRPr sz="2850" b="1">
                 <a:solidFill>
                   <a:srgbClr val="F5FBFE"/>
@@ -11707,6 +12142,7 @@
               </a:defRPr>
             </a:lvl7pPr>
             <a:lvl8pPr algn="l">
+              <a:buNone/>
               <a:defRPr sz="2850" b="1">
                 <a:solidFill>
                   <a:srgbClr val="F5FBFE"/>
@@ -11717,6 +12153,7 @@
               </a:defRPr>
             </a:lvl8pPr>
             <a:lvl9pPr algn="l">
+              <a:buNone/>
               <a:defRPr sz="2850" b="1">
                 <a:solidFill>
                   <a:srgbClr val="F5FBFE"/>
@@ -11729,6 +12166,7 @@
           </a:lstStyle>
           <a:p xmlns:a="http://schemas.openxmlformats.org/drawingml/2006/main">
             <a:pPr algn="l">
+              <a:buNone/>
               <a:defRPr sz="2850" b="1">
                 <a:solidFill>
                   <a:srgbClr val="F5FBFE"/>
@@ -11747,7 +12185,7 @@
                 <a:ea typeface="Arial"/>
                 <a:cs typeface="Arial"/>
               </a:rPr>
-              <a:t>Next checks use a peer and a Quest headset</a:t>
+              <a:t>Recorded play and remaining evaluation</a:t>
             </a:r>
           </a:p>
         </p:txBody>
@@ -11827,6 +12265,7 @@
               </a:defRPr>
             </a:defPPr>
             <a:lvl1pPr algn="l">
+              <a:buNone/>
               <a:defRPr sz="975" b="1">
                 <a:solidFill>
                   <a:srgbClr val="9DBACA"/>
@@ -11837,6 +12276,7 @@
               </a:defRPr>
             </a:lvl1pPr>
             <a:lvl2pPr algn="l">
+              <a:buNone/>
               <a:defRPr sz="975" b="1">
                 <a:solidFill>
                   <a:srgbClr val="9DBACA"/>
@@ -11847,6 +12287,7 @@
               </a:defRPr>
             </a:lvl2pPr>
             <a:lvl3pPr algn="l">
+              <a:buNone/>
               <a:defRPr sz="975" b="1">
                 <a:solidFill>
                   <a:srgbClr val="9DBACA"/>
@@ -11857,6 +12298,7 @@
               </a:defRPr>
             </a:lvl3pPr>
             <a:lvl4pPr algn="l">
+              <a:buNone/>
               <a:defRPr sz="975" b="1">
                 <a:solidFill>
                   <a:srgbClr val="9DBACA"/>
@@ -11867,6 +12309,7 @@
               </a:defRPr>
             </a:lvl4pPr>
             <a:lvl5pPr algn="l">
+              <a:buNone/>
               <a:defRPr sz="975" b="1">
                 <a:solidFill>
                   <a:srgbClr val="9DBACA"/>
@@ -11877,6 +12320,7 @@
               </a:defRPr>
             </a:lvl5pPr>
             <a:lvl6pPr algn="l">
+              <a:buNone/>
               <a:defRPr sz="975" b="1">
                 <a:solidFill>
                   <a:srgbClr val="9DBACA"/>
@@ -11887,6 +12331,7 @@
               </a:defRPr>
             </a:lvl6pPr>
             <a:lvl7pPr algn="l">
+              <a:buNone/>
               <a:defRPr sz="975" b="1">
                 <a:solidFill>
                   <a:srgbClr val="9DBACA"/>
@@ -11897,6 +12342,7 @@
               </a:defRPr>
             </a:lvl7pPr>
             <a:lvl8pPr algn="l">
+              <a:buNone/>
               <a:defRPr sz="975" b="1">
                 <a:solidFill>
                   <a:srgbClr val="9DBACA"/>
@@ -11907,6 +12353,7 @@
               </a:defRPr>
             </a:lvl8pPr>
             <a:lvl9pPr algn="l">
+              <a:buNone/>
               <a:defRPr sz="975" b="1">
                 <a:solidFill>
                   <a:srgbClr val="9DBACA"/>
@@ -11919,6 +12366,7 @@
           </a:lstStyle>
           <a:p xmlns:a="http://schemas.openxmlformats.org/drawingml/2006/main">
             <a:pPr algn="l">
+              <a:buNone/>
               <a:defRPr sz="975" b="1">
                 <a:solidFill>
                   <a:srgbClr val="9DBACA"/>
@@ -11986,6 +12434,7 @@
               </a:defRPr>
             </a:defPPr>
             <a:lvl1pPr algn="r">
+              <a:buNone/>
               <a:defRPr sz="1200" b="1">
                 <a:solidFill>
                   <a:srgbClr val="72E7F4"/>
@@ -11996,6 +12445,7 @@
               </a:defRPr>
             </a:lvl1pPr>
             <a:lvl2pPr algn="r">
+              <a:buNone/>
               <a:defRPr sz="1200" b="1">
                 <a:solidFill>
                   <a:srgbClr val="72E7F4"/>
@@ -12006,6 +12456,7 @@
               </a:defRPr>
             </a:lvl2pPr>
             <a:lvl3pPr algn="r">
+              <a:buNone/>
               <a:defRPr sz="1200" b="1">
                 <a:solidFill>
                   <a:srgbClr val="72E7F4"/>
@@ -12016,6 +12467,7 @@
               </a:defRPr>
             </a:lvl3pPr>
             <a:lvl4pPr algn="r">
+              <a:buNone/>
               <a:defRPr sz="1200" b="1">
                 <a:solidFill>
                   <a:srgbClr val="72E7F4"/>
@@ -12026,6 +12478,7 @@
               </a:defRPr>
             </a:lvl4pPr>
             <a:lvl5pPr algn="r">
+              <a:buNone/>
               <a:defRPr sz="1200" b="1">
                 <a:solidFill>
                   <a:srgbClr val="72E7F4"/>
@@ -12036,6 +12489,7 @@
               </a:defRPr>
             </a:lvl5pPr>
             <a:lvl6pPr algn="r">
+              <a:buNone/>
               <a:defRPr sz="1200" b="1">
                 <a:solidFill>
                   <a:srgbClr val="72E7F4"/>
@@ -12046,6 +12500,7 @@
               </a:defRPr>
             </a:lvl6pPr>
             <a:lvl7pPr algn="r">
+              <a:buNone/>
               <a:defRPr sz="1200" b="1">
                 <a:solidFill>
                   <a:srgbClr val="72E7F4"/>
@@ -12056,6 +12511,7 @@
               </a:defRPr>
             </a:lvl7pPr>
             <a:lvl8pPr algn="r">
+              <a:buNone/>
               <a:defRPr sz="1200" b="1">
                 <a:solidFill>
                   <a:srgbClr val="72E7F4"/>
@@ -12066,6 +12522,7 @@
               </a:defRPr>
             </a:lvl8pPr>
             <a:lvl9pPr algn="r">
+              <a:buNone/>
               <a:defRPr sz="1200" b="1">
                 <a:solidFill>
                   <a:srgbClr val="72E7F4"/>
@@ -12078,6 +12535,7 @@
           </a:lstStyle>
           <a:p xmlns:a="http://schemas.openxmlformats.org/drawingml/2006/main">
             <a:pPr algn="r">
+              <a:buNone/>
               <a:defRPr sz="1200" b="1">
                 <a:solidFill>
                   <a:srgbClr val="72E7F4"/>
@@ -12211,6 +12669,7 @@
               </a:defRPr>
             </a:defPPr>
             <a:lvl1pPr algn="l">
+              <a:buNone/>
               <a:defRPr sz="1725" b="1">
                 <a:solidFill>
                   <a:srgbClr val="72E7F4"/>
@@ -12221,6 +12680,7 @@
               </a:defRPr>
             </a:lvl1pPr>
             <a:lvl2pPr algn="l">
+              <a:buNone/>
               <a:defRPr sz="1725" b="1">
                 <a:solidFill>
                   <a:srgbClr val="72E7F4"/>
@@ -12231,6 +12691,7 @@
               </a:defRPr>
             </a:lvl2pPr>
             <a:lvl3pPr algn="l">
+              <a:buNone/>
               <a:defRPr sz="1725" b="1">
                 <a:solidFill>
                   <a:srgbClr val="72E7F4"/>
@@ -12241,6 +12702,7 @@
               </a:defRPr>
             </a:lvl3pPr>
             <a:lvl4pPr algn="l">
+              <a:buNone/>
               <a:defRPr sz="1725" b="1">
                 <a:solidFill>
                   <a:srgbClr val="72E7F4"/>
@@ -12251,6 +12713,7 @@
               </a:defRPr>
             </a:lvl4pPr>
             <a:lvl5pPr algn="l">
+              <a:buNone/>
               <a:defRPr sz="1725" b="1">
                 <a:solidFill>
                   <a:srgbClr val="72E7F4"/>
@@ -12261,6 +12724,7 @@
               </a:defRPr>
             </a:lvl5pPr>
             <a:lvl6pPr algn="l">
+              <a:buNone/>
               <a:defRPr sz="1725" b="1">
                 <a:solidFill>
                   <a:srgbClr val="72E7F4"/>
@@ -12271,6 +12735,7 @@
               </a:defRPr>
             </a:lvl6pPr>
             <a:lvl7pPr algn="l">
+              <a:buNone/>
               <a:defRPr sz="1725" b="1">
                 <a:solidFill>
                   <a:srgbClr val="72E7F4"/>
@@ -12281,6 +12746,7 @@
               </a:defRPr>
             </a:lvl7pPr>
             <a:lvl8pPr algn="l">
+              <a:buNone/>
               <a:defRPr sz="1725" b="1">
                 <a:solidFill>
                   <a:srgbClr val="72E7F4"/>
@@ -12291,6 +12757,7 @@
               </a:defRPr>
             </a:lvl8pPr>
             <a:lvl9pPr algn="l">
+              <a:buNone/>
               <a:defRPr sz="1725" b="1">
                 <a:solidFill>
                   <a:srgbClr val="72E7F4"/>
@@ -12303,6 +12770,7 @@
           </a:lstStyle>
           <a:p xmlns:a="http://schemas.openxmlformats.org/drawingml/2006/main">
             <a:pPr algn="l">
+              <a:buNone/>
               <a:defRPr sz="1725" b="1">
                 <a:solidFill>
                   <a:srgbClr val="72E7F4"/>
@@ -12321,7 +12789,7 @@
                 <a:ea typeface="Arial"/>
                 <a:cs typeface="Arial"/>
               </a:rPr>
-              <a:t>10-MINUTE FIRST-USE TEST</a:t>
+              <a:t>RECORDED QUEST 2 PC VR</a:t>
             </a:r>
           </a:p>
         </p:txBody>
@@ -12370,6 +12838,7 @@
               </a:defRPr>
             </a:defPPr>
             <a:lvl1pPr algn="l">
+              <a:buNone/>
               <a:defRPr sz="1875" b="0">
                 <a:solidFill>
                   <a:srgbClr val="F5FBFE"/>
@@ -12380,6 +12849,7 @@
               </a:defRPr>
             </a:lvl1pPr>
             <a:lvl2pPr algn="l">
+              <a:buNone/>
               <a:defRPr sz="1875" b="0">
                 <a:solidFill>
                   <a:srgbClr val="F5FBFE"/>
@@ -12390,6 +12860,7 @@
               </a:defRPr>
             </a:lvl2pPr>
             <a:lvl3pPr algn="l">
+              <a:buNone/>
               <a:defRPr sz="1875" b="0">
                 <a:solidFill>
                   <a:srgbClr val="F5FBFE"/>
@@ -12400,6 +12871,7 @@
               </a:defRPr>
             </a:lvl3pPr>
             <a:lvl4pPr algn="l">
+              <a:buNone/>
               <a:defRPr sz="1875" b="0">
                 <a:solidFill>
                   <a:srgbClr val="F5FBFE"/>
@@ -12410,6 +12882,7 @@
               </a:defRPr>
             </a:lvl4pPr>
             <a:lvl5pPr algn="l">
+              <a:buNone/>
               <a:defRPr sz="1875" b="0">
                 <a:solidFill>
                   <a:srgbClr val="F5FBFE"/>
@@ -12420,6 +12893,7 @@
               </a:defRPr>
             </a:lvl5pPr>
             <a:lvl6pPr algn="l">
+              <a:buNone/>
               <a:defRPr sz="1875" b="0">
                 <a:solidFill>
                   <a:srgbClr val="F5FBFE"/>
@@ -12430,6 +12904,7 @@
               </a:defRPr>
             </a:lvl6pPr>
             <a:lvl7pPr algn="l">
+              <a:buNone/>
               <a:defRPr sz="1875" b="0">
                 <a:solidFill>
                   <a:srgbClr val="F5FBFE"/>
@@ -12440,6 +12915,7 @@
               </a:defRPr>
             </a:lvl7pPr>
             <a:lvl8pPr algn="l">
+              <a:buNone/>
               <a:defRPr sz="1875" b="0">
                 <a:solidFill>
                   <a:srgbClr val="F5FBFE"/>
@@ -12450,6 +12926,7 @@
               </a:defRPr>
             </a:lvl8pPr>
             <a:lvl9pPr algn="l">
+              <a:buNone/>
               <a:defRPr sz="1875" b="0">
                 <a:solidFill>
                   <a:srgbClr val="F5FBFE"/>
@@ -12462,6 +12939,7 @@
           </a:lstStyle>
           <a:p xmlns:a="http://schemas.openxmlformats.org/drawingml/2006/main">
             <a:pPr algn="l">
+              <a:buNone/>
               <a:defRPr sz="1875" b="0">
                 <a:solidFill>
                   <a:srgbClr val="F5FBFE"/>
@@ -12480,7 +12958,7 @@
                 <a:ea typeface="Arial"/>
                 <a:cs typeface="Arial"/>
               </a:rPr>
-              <a:t>One classmate attempts the complete task without step-by-step coaching.</a:t>
+              <a:t>54 seconds of actual headset and controller play through USB Link.</a:t>
             </a:r>
           </a:p>
         </p:txBody>
@@ -12529,6 +13007,7 @@
               </a:defRPr>
             </a:defPPr>
             <a:lvl1pPr algn="l">
+              <a:buNone/>
               <a:defRPr sz="1500" b="0">
                 <a:solidFill>
                   <a:srgbClr val="9DBACA"/>
@@ -12539,6 +13018,7 @@
               </a:defRPr>
             </a:lvl1pPr>
             <a:lvl2pPr algn="l">
+              <a:buNone/>
               <a:defRPr sz="1500" b="0">
                 <a:solidFill>
                   <a:srgbClr val="9DBACA"/>
@@ -12549,6 +13029,7 @@
               </a:defRPr>
             </a:lvl2pPr>
             <a:lvl3pPr algn="l">
+              <a:buNone/>
               <a:defRPr sz="1500" b="0">
                 <a:solidFill>
                   <a:srgbClr val="9DBACA"/>
@@ -12559,6 +13040,7 @@
               </a:defRPr>
             </a:lvl3pPr>
             <a:lvl4pPr algn="l">
+              <a:buNone/>
               <a:defRPr sz="1500" b="0">
                 <a:solidFill>
                   <a:srgbClr val="9DBACA"/>
@@ -12569,6 +13051,7 @@
               </a:defRPr>
             </a:lvl4pPr>
             <a:lvl5pPr algn="l">
+              <a:buNone/>
               <a:defRPr sz="1500" b="0">
                 <a:solidFill>
                   <a:srgbClr val="9DBACA"/>
@@ -12579,6 +13062,7 @@
               </a:defRPr>
             </a:lvl5pPr>
             <a:lvl6pPr algn="l">
+              <a:buNone/>
               <a:defRPr sz="1500" b="0">
                 <a:solidFill>
                   <a:srgbClr val="9DBACA"/>
@@ -12589,6 +13073,7 @@
               </a:defRPr>
             </a:lvl6pPr>
             <a:lvl7pPr algn="l">
+              <a:buNone/>
               <a:defRPr sz="1500" b="0">
                 <a:solidFill>
                   <a:srgbClr val="9DBACA"/>
@@ -12599,6 +13084,7 @@
               </a:defRPr>
             </a:lvl7pPr>
             <a:lvl8pPr algn="l">
+              <a:buNone/>
               <a:defRPr sz="1500" b="0">
                 <a:solidFill>
                   <a:srgbClr val="9DBACA"/>
@@ -12609,6 +13095,7 @@
               </a:defRPr>
             </a:lvl8pPr>
             <a:lvl9pPr algn="l">
+              <a:buNone/>
               <a:defRPr sz="1500" b="0">
                 <a:solidFill>
                   <a:srgbClr val="9DBACA"/>
@@ -12621,6 +13108,7 @@
           </a:lstStyle>
           <a:p xmlns:a="http://schemas.openxmlformats.org/drawingml/2006/main">
             <a:pPr algn="l">
+              <a:buNone/>
               <a:defRPr sz="1500" b="0">
                 <a:solidFill>
                   <a:srgbClr val="9DBACA"/>
@@ -12639,7 +13127,7 @@
                 <a:ea typeface="Arial"/>
                 <a:cs typeface="Arial"/>
               </a:rPr>
-              <a:t>Record pauses, requests for help, button use and completion. Fix the highest-priority issue, then retest the same task.</a:t>
+              <a:t>Reset, Help, movement, grabbing, insertion, door opening and exit. One continuous excerpt with game audio.</a:t>
             </a:r>
           </a:p>
         </p:txBody>
@@ -12688,6 +13176,7 @@
               </a:defRPr>
             </a:defPPr>
             <a:lvl1pPr algn="l">
+              <a:buNone/>
               <a:defRPr sz="1725" b="1">
                 <a:solidFill>
                   <a:srgbClr val="FF831B"/>
@@ -12698,6 +13187,7 @@
               </a:defRPr>
             </a:lvl1pPr>
             <a:lvl2pPr algn="l">
+              <a:buNone/>
               <a:defRPr sz="1725" b="1">
                 <a:solidFill>
                   <a:srgbClr val="FF831B"/>
@@ -12708,6 +13198,7 @@
               </a:defRPr>
             </a:lvl2pPr>
             <a:lvl3pPr algn="l">
+              <a:buNone/>
               <a:defRPr sz="1725" b="1">
                 <a:solidFill>
                   <a:srgbClr val="FF831B"/>
@@ -12718,6 +13209,7 @@
               </a:defRPr>
             </a:lvl3pPr>
             <a:lvl4pPr algn="l">
+              <a:buNone/>
               <a:defRPr sz="1725" b="1">
                 <a:solidFill>
                   <a:srgbClr val="FF831B"/>
@@ -12728,6 +13220,7 @@
               </a:defRPr>
             </a:lvl4pPr>
             <a:lvl5pPr algn="l">
+              <a:buNone/>
               <a:defRPr sz="1725" b="1">
                 <a:solidFill>
                   <a:srgbClr val="FF831B"/>
@@ -12738,6 +13231,7 @@
               </a:defRPr>
             </a:lvl5pPr>
             <a:lvl6pPr algn="l">
+              <a:buNone/>
               <a:defRPr sz="1725" b="1">
                 <a:solidFill>
                   <a:srgbClr val="FF831B"/>
@@ -12748,6 +13242,7 @@
               </a:defRPr>
             </a:lvl6pPr>
             <a:lvl7pPr algn="l">
+              <a:buNone/>
               <a:defRPr sz="1725" b="1">
                 <a:solidFill>
                   <a:srgbClr val="FF831B"/>
@@ -12758,6 +13253,7 @@
               </a:defRPr>
             </a:lvl7pPr>
             <a:lvl8pPr algn="l">
+              <a:buNone/>
               <a:defRPr sz="1725" b="1">
                 <a:solidFill>
                   <a:srgbClr val="FF831B"/>
@@ -12768,6 +13264,7 @@
               </a:defRPr>
             </a:lvl8pPr>
             <a:lvl9pPr algn="l">
+              <a:buNone/>
               <a:defRPr sz="1725" b="1">
                 <a:solidFill>
                   <a:srgbClr val="FF831B"/>
@@ -12780,6 +13277,7 @@
           </a:lstStyle>
           <a:p xmlns:a="http://schemas.openxmlformats.org/drawingml/2006/main">
             <a:pPr algn="l">
+              <a:buNone/>
               <a:defRPr sz="1725" b="1">
                 <a:solidFill>
                   <a:srgbClr val="FF831B"/>
@@ -12798,7 +13296,7 @@
                 <a:ea typeface="Arial"/>
                 <a:cs typeface="Arial"/>
               </a:rPr>
-              <a:t>QUEST DEVICE CHECK</a:t>
+              <a:t>NEXT CHECKS</a:t>
             </a:r>
           </a:p>
         </p:txBody>
@@ -12847,6 +13345,7 @@
               </a:defRPr>
             </a:defPPr>
             <a:lvl1pPr algn="l">
+              <a:buNone/>
               <a:defRPr sz="1875" b="0">
                 <a:solidFill>
                   <a:srgbClr val="F5FBFE"/>
@@ -12857,6 +13356,7 @@
               </a:defRPr>
             </a:lvl1pPr>
             <a:lvl2pPr algn="l">
+              <a:buNone/>
               <a:defRPr sz="1875" b="0">
                 <a:solidFill>
                   <a:srgbClr val="F5FBFE"/>
@@ -12867,6 +13367,7 @@
               </a:defRPr>
             </a:lvl2pPr>
             <a:lvl3pPr algn="l">
+              <a:buNone/>
               <a:defRPr sz="1875" b="0">
                 <a:solidFill>
                   <a:srgbClr val="F5FBFE"/>
@@ -12877,6 +13378,7 @@
               </a:defRPr>
             </a:lvl3pPr>
             <a:lvl4pPr algn="l">
+              <a:buNone/>
               <a:defRPr sz="1875" b="0">
                 <a:solidFill>
                   <a:srgbClr val="F5FBFE"/>
@@ -12887,6 +13389,7 @@
               </a:defRPr>
             </a:lvl4pPr>
             <a:lvl5pPr algn="l">
+              <a:buNone/>
               <a:defRPr sz="1875" b="0">
                 <a:solidFill>
                   <a:srgbClr val="F5FBFE"/>
@@ -12897,6 +13400,7 @@
               </a:defRPr>
             </a:lvl5pPr>
             <a:lvl6pPr algn="l">
+              <a:buNone/>
               <a:defRPr sz="1875" b="0">
                 <a:solidFill>
                   <a:srgbClr val="F5FBFE"/>
@@ -12907,6 +13411,7 @@
               </a:defRPr>
             </a:lvl6pPr>
             <a:lvl7pPr algn="l">
+              <a:buNone/>
               <a:defRPr sz="1875" b="0">
                 <a:solidFill>
                   <a:srgbClr val="F5FBFE"/>
@@ -12917,6 +13422,7 @@
               </a:defRPr>
             </a:lvl7pPr>
             <a:lvl8pPr algn="l">
+              <a:buNone/>
               <a:defRPr sz="1875" b="0">
                 <a:solidFill>
                   <a:srgbClr val="F5FBFE"/>
@@ -12927,6 +13433,7 @@
               </a:defRPr>
             </a:lvl8pPr>
             <a:lvl9pPr algn="l">
+              <a:buNone/>
               <a:defRPr sz="1875" b="0">
                 <a:solidFill>
                   <a:srgbClr val="F5FBFE"/>
@@ -12939,6 +13446,7 @@
           </a:lstStyle>
           <a:p xmlns:a="http://schemas.openxmlformats.org/drawingml/2006/main">
             <a:pPr algn="l">
+              <a:buNone/>
               <a:defRPr sz="1875" b="0">
                 <a:solidFill>
                   <a:srgbClr val="F5FBFE"/>
@@ -12957,7 +13465,7 @@
                 <a:ea typeface="Arial"/>
                 <a:cs typeface="Arial"/>
               </a:rPr>
-              <a:t>Install the Week 07 APK and replay the task with controllers.</a:t>
+              <a:t>Install APK 0.4.0 on Quest and record inside the headset.</a:t>
             </a:r>
           </a:p>
         </p:txBody>
@@ -13006,6 +13514,7 @@
               </a:defRPr>
             </a:defPPr>
             <a:lvl1pPr algn="l">
+              <a:buNone/>
               <a:defRPr sz="1500" b="0">
                 <a:solidFill>
                   <a:srgbClr val="9DBACA"/>
@@ -13016,6 +13525,7 @@
               </a:defRPr>
             </a:lvl1pPr>
             <a:lvl2pPr algn="l">
+              <a:buNone/>
               <a:defRPr sz="1500" b="0">
                 <a:solidFill>
                   <a:srgbClr val="9DBACA"/>
@@ -13026,6 +13536,7 @@
               </a:defRPr>
             </a:lvl2pPr>
             <a:lvl3pPr algn="l">
+              <a:buNone/>
               <a:defRPr sz="1500" b="0">
                 <a:solidFill>
                   <a:srgbClr val="9DBACA"/>
@@ -13036,6 +13547,7 @@
               </a:defRPr>
             </a:lvl3pPr>
             <a:lvl4pPr algn="l">
+              <a:buNone/>
               <a:defRPr sz="1500" b="0">
                 <a:solidFill>
                   <a:srgbClr val="9DBACA"/>
@@ -13046,6 +13558,7 @@
               </a:defRPr>
             </a:lvl4pPr>
             <a:lvl5pPr algn="l">
+              <a:buNone/>
               <a:defRPr sz="1500" b="0">
                 <a:solidFill>
                   <a:srgbClr val="9DBACA"/>
@@ -13056,6 +13569,7 @@
               </a:defRPr>
             </a:lvl5pPr>
             <a:lvl6pPr algn="l">
+              <a:buNone/>
               <a:defRPr sz="1500" b="0">
                 <a:solidFill>
                   <a:srgbClr val="9DBACA"/>
@@ -13066,6 +13580,7 @@
               </a:defRPr>
             </a:lvl6pPr>
             <a:lvl7pPr algn="l">
+              <a:buNone/>
               <a:defRPr sz="1500" b="0">
                 <a:solidFill>
                   <a:srgbClr val="9DBACA"/>
@@ -13076,6 +13591,7 @@
               </a:defRPr>
             </a:lvl7pPr>
             <a:lvl8pPr algn="l">
+              <a:buNone/>
               <a:defRPr sz="1500" b="0">
                 <a:solidFill>
                   <a:srgbClr val="9DBACA"/>
@@ -13086,6 +13602,7 @@
               </a:defRPr>
             </a:lvl8pPr>
             <a:lvl9pPr algn="l">
+              <a:buNone/>
               <a:defRPr sz="1500" b="0">
                 <a:solidFill>
                   <a:srgbClr val="9DBACA"/>
@@ -13098,6 +13615,7 @@
           </a:lstStyle>
           <a:p xmlns:a="http://schemas.openxmlformats.org/drawingml/2006/main">
             <a:pPr algn="l">
+              <a:buNone/>
               <a:defRPr sz="1500" b="0">
                 <a:solidFill>
                   <a:srgbClr val="9DBACA"/>
@@ -13116,7 +13634,7 @@
                 <a:ea typeface="Arial"/>
                 <a:cs typeface="Arial"/>
               </a:rPr>
-              <a:t>Check panel readability, teleport, grip, sound, vibration and comfort. Record the real-headset playthrough after verification.</a:t>
+              <a:t>Check native performance, vibration and comfort. Run a 10-minute peer test, fix the main issue and retest.</a:t>
             </a:r>
           </a:p>
         </p:txBody>
@@ -13165,6 +13683,7 @@
               </a:defRPr>
             </a:defPPr>
             <a:lvl1pPr algn="l">
+              <a:buNone/>
               <a:defRPr sz="1275" b="0">
                 <a:solidFill>
                   <a:srgbClr val="9DBACA"/>
@@ -13175,6 +13694,7 @@
               </a:defRPr>
             </a:lvl1pPr>
             <a:lvl2pPr algn="l">
+              <a:buNone/>
               <a:defRPr sz="1275" b="0">
                 <a:solidFill>
                   <a:srgbClr val="9DBACA"/>
@@ -13185,6 +13705,7 @@
               </a:defRPr>
             </a:lvl2pPr>
             <a:lvl3pPr algn="l">
+              <a:buNone/>
               <a:defRPr sz="1275" b="0">
                 <a:solidFill>
                   <a:srgbClr val="9DBACA"/>
@@ -13195,6 +13716,7 @@
               </a:defRPr>
             </a:lvl3pPr>
             <a:lvl4pPr algn="l">
+              <a:buNone/>
               <a:defRPr sz="1275" b="0">
                 <a:solidFill>
                   <a:srgbClr val="9DBACA"/>
@@ -13205,6 +13727,7 @@
               </a:defRPr>
             </a:lvl4pPr>
             <a:lvl5pPr algn="l">
+              <a:buNone/>
               <a:defRPr sz="1275" b="0">
                 <a:solidFill>
                   <a:srgbClr val="9DBACA"/>
@@ -13215,6 +13738,7 @@
               </a:defRPr>
             </a:lvl5pPr>
             <a:lvl6pPr algn="l">
+              <a:buNone/>
               <a:defRPr sz="1275" b="0">
                 <a:solidFill>
                   <a:srgbClr val="9DBACA"/>
@@ -13225,6 +13749,7 @@
               </a:defRPr>
             </a:lvl6pPr>
             <a:lvl7pPr algn="l">
+              <a:buNone/>
               <a:defRPr sz="1275" b="0">
                 <a:solidFill>
                   <a:srgbClr val="9DBACA"/>
@@ -13235,6 +13760,7 @@
               </a:defRPr>
             </a:lvl7pPr>
             <a:lvl8pPr algn="l">
+              <a:buNone/>
               <a:defRPr sz="1275" b="0">
                 <a:solidFill>
                   <a:srgbClr val="9DBACA"/>
@@ -13245,6 +13771,7 @@
               </a:defRPr>
             </a:lvl8pPr>
             <a:lvl9pPr algn="l">
+              <a:buNone/>
               <a:defRPr sz="1275" b="0">
                 <a:solidFill>
                   <a:srgbClr val="9DBACA"/>
@@ -13257,6 +13784,7 @@
           </a:lstStyle>
           <a:p xmlns:a="http://schemas.openxmlformats.org/drawingml/2006/main">
             <a:pPr algn="l">
+              <a:buNone/>
               <a:defRPr sz="1275" b="0">
                 <a:solidFill>
                   <a:srgbClr val="9DBACA"/>
@@ -13275,7 +13803,7 @@
                 <a:ea typeface="Arial"/>
                 <a:cs typeface="Arial"/>
               </a:rPr>
-              <a:t>As of 20 Oct: peer observations and Quest footage have not yet been collected.</a:t>
+              <a:t>Updated 22 Oct: PC VR play is recorded. Native APK footage and peer evaluation remain pending.</a:t>
             </a:r>
           </a:p>
         </p:txBody>
@@ -13384,6 +13912,7 @@
               </a:defRPr>
             </a:defPPr>
             <a:lvl1pPr algn="l">
+              <a:buNone/>
               <a:defRPr sz="2850" b="1">
                 <a:solidFill>
                   <a:srgbClr val="F5FBFE"/>
@@ -13394,6 +13923,7 @@
               </a:defRPr>
             </a:lvl1pPr>
             <a:lvl2pPr algn="l">
+              <a:buNone/>
               <a:defRPr sz="2850" b="1">
                 <a:solidFill>
                   <a:srgbClr val="F5FBFE"/>
@@ -13404,6 +13934,7 @@
               </a:defRPr>
             </a:lvl2pPr>
             <a:lvl3pPr algn="l">
+              <a:buNone/>
               <a:defRPr sz="2850" b="1">
                 <a:solidFill>
                   <a:srgbClr val="F5FBFE"/>
@@ -13414,6 +13945,7 @@
               </a:defRPr>
             </a:lvl3pPr>
             <a:lvl4pPr algn="l">
+              <a:buNone/>
               <a:defRPr sz="2850" b="1">
                 <a:solidFill>
                   <a:srgbClr val="F5FBFE"/>
@@ -13424,6 +13956,7 @@
               </a:defRPr>
             </a:lvl4pPr>
             <a:lvl5pPr algn="l">
+              <a:buNone/>
               <a:defRPr sz="2850" b="1">
                 <a:solidFill>
                   <a:srgbClr val="F5FBFE"/>
@@ -13434,6 +13967,7 @@
               </a:defRPr>
             </a:lvl5pPr>
             <a:lvl6pPr algn="l">
+              <a:buNone/>
               <a:defRPr sz="2850" b="1">
                 <a:solidFill>
                   <a:srgbClr val="F5FBFE"/>
@@ -13444,6 +13978,7 @@
               </a:defRPr>
             </a:lvl6pPr>
             <a:lvl7pPr algn="l">
+              <a:buNone/>
               <a:defRPr sz="2850" b="1">
                 <a:solidFill>
                   <a:srgbClr val="F5FBFE"/>
@@ -13454,6 +13989,7 @@
               </a:defRPr>
             </a:lvl7pPr>
             <a:lvl8pPr algn="l">
+              <a:buNone/>
               <a:defRPr sz="2850" b="1">
                 <a:solidFill>
                   <a:srgbClr val="F5FBFE"/>
@@ -13464,6 +14000,7 @@
               </a:defRPr>
             </a:lvl8pPr>
             <a:lvl9pPr algn="l">
+              <a:buNone/>
               <a:defRPr sz="2850" b="1">
                 <a:solidFill>
                   <a:srgbClr val="F5FBFE"/>
@@ -13476,6 +14013,7 @@
           </a:lstStyle>
           <a:p xmlns:a="http://schemas.openxmlformats.org/drawingml/2006/main">
             <a:pPr algn="l">
+              <a:buNone/>
               <a:defRPr sz="2850" b="1">
                 <a:solidFill>
                   <a:srgbClr val="F5FBFE"/>
@@ -13494,7 +14032,7 @@
                 <a:ea typeface="Arial"/>
                 <a:cs typeface="Arial"/>
               </a:rPr>
-              <a:t>Six-minute live demo sequence</a:t>
+              <a:t>Prototype demonstration</a:t>
             </a:r>
           </a:p>
         </p:txBody>
@@ -13574,6 +14112,7 @@
               </a:defRPr>
             </a:defPPr>
             <a:lvl1pPr algn="l">
+              <a:buNone/>
               <a:defRPr sz="975" b="1">
                 <a:solidFill>
                   <a:srgbClr val="9DBACA"/>
@@ -13584,6 +14123,7 @@
               </a:defRPr>
             </a:lvl1pPr>
             <a:lvl2pPr algn="l">
+              <a:buNone/>
               <a:defRPr sz="975" b="1">
                 <a:solidFill>
                   <a:srgbClr val="9DBACA"/>
@@ -13594,6 +14134,7 @@
               </a:defRPr>
             </a:lvl2pPr>
             <a:lvl3pPr algn="l">
+              <a:buNone/>
               <a:defRPr sz="975" b="1">
                 <a:solidFill>
                   <a:srgbClr val="9DBACA"/>
@@ -13604,6 +14145,7 @@
               </a:defRPr>
             </a:lvl3pPr>
             <a:lvl4pPr algn="l">
+              <a:buNone/>
               <a:defRPr sz="975" b="1">
                 <a:solidFill>
                   <a:srgbClr val="9DBACA"/>
@@ -13614,6 +14156,7 @@
               </a:defRPr>
             </a:lvl4pPr>
             <a:lvl5pPr algn="l">
+              <a:buNone/>
               <a:defRPr sz="975" b="1">
                 <a:solidFill>
                   <a:srgbClr val="9DBACA"/>
@@ -13624,6 +14167,7 @@
               </a:defRPr>
             </a:lvl5pPr>
             <a:lvl6pPr algn="l">
+              <a:buNone/>
               <a:defRPr sz="975" b="1">
                 <a:solidFill>
                   <a:srgbClr val="9DBACA"/>
@@ -13634,6 +14178,7 @@
               </a:defRPr>
             </a:lvl6pPr>
             <a:lvl7pPr algn="l">
+              <a:buNone/>
               <a:defRPr sz="975" b="1">
                 <a:solidFill>
                   <a:srgbClr val="9DBACA"/>
@@ -13644,6 +14189,7 @@
               </a:defRPr>
             </a:lvl7pPr>
             <a:lvl8pPr algn="l">
+              <a:buNone/>
               <a:defRPr sz="975" b="1">
                 <a:solidFill>
                   <a:srgbClr val="9DBACA"/>
@@ -13654,6 +14200,7 @@
               </a:defRPr>
             </a:lvl8pPr>
             <a:lvl9pPr algn="l">
+              <a:buNone/>
               <a:defRPr sz="975" b="1">
                 <a:solidFill>
                   <a:srgbClr val="9DBACA"/>
@@ -13666,6 +14213,7 @@
           </a:lstStyle>
           <a:p xmlns:a="http://schemas.openxmlformats.org/drawingml/2006/main">
             <a:pPr algn="l">
+              <a:buNone/>
               <a:defRPr sz="975" b="1">
                 <a:solidFill>
                   <a:srgbClr val="9DBACA"/>
@@ -13733,6 +14281,7 @@
               </a:defRPr>
             </a:defPPr>
             <a:lvl1pPr algn="r">
+              <a:buNone/>
               <a:defRPr sz="1200" b="1">
                 <a:solidFill>
                   <a:srgbClr val="72E7F4"/>
@@ -13743,6 +14292,7 @@
               </a:defRPr>
             </a:lvl1pPr>
             <a:lvl2pPr algn="r">
+              <a:buNone/>
               <a:defRPr sz="1200" b="1">
                 <a:solidFill>
                   <a:srgbClr val="72E7F4"/>
@@ -13753,6 +14303,7 @@
               </a:defRPr>
             </a:lvl2pPr>
             <a:lvl3pPr algn="r">
+              <a:buNone/>
               <a:defRPr sz="1200" b="1">
                 <a:solidFill>
                   <a:srgbClr val="72E7F4"/>
@@ -13763,6 +14314,7 @@
               </a:defRPr>
             </a:lvl3pPr>
             <a:lvl4pPr algn="r">
+              <a:buNone/>
               <a:defRPr sz="1200" b="1">
                 <a:solidFill>
                   <a:srgbClr val="72E7F4"/>
@@ -13773,6 +14325,7 @@
               </a:defRPr>
             </a:lvl4pPr>
             <a:lvl5pPr algn="r">
+              <a:buNone/>
               <a:defRPr sz="1200" b="1">
                 <a:solidFill>
                   <a:srgbClr val="72E7F4"/>
@@ -13783,6 +14336,7 @@
               </a:defRPr>
             </a:lvl5pPr>
             <a:lvl6pPr algn="r">
+              <a:buNone/>
               <a:defRPr sz="1200" b="1">
                 <a:solidFill>
                   <a:srgbClr val="72E7F4"/>
@@ -13793,6 +14347,7 @@
               </a:defRPr>
             </a:lvl6pPr>
             <a:lvl7pPr algn="r">
+              <a:buNone/>
               <a:defRPr sz="1200" b="1">
                 <a:solidFill>
                   <a:srgbClr val="72E7F4"/>
@@ -13803,6 +14358,7 @@
               </a:defRPr>
             </a:lvl7pPr>
             <a:lvl8pPr algn="r">
+              <a:buNone/>
               <a:defRPr sz="1200" b="1">
                 <a:solidFill>
                   <a:srgbClr val="72E7F4"/>
@@ -13813,6 +14369,7 @@
               </a:defRPr>
             </a:lvl8pPr>
             <a:lvl9pPr algn="r">
+              <a:buNone/>
               <a:defRPr sz="1200" b="1">
                 <a:solidFill>
                   <a:srgbClr val="72E7F4"/>
@@ -13825,6 +14382,7 @@
           </a:lstStyle>
           <a:p xmlns:a="http://schemas.openxmlformats.org/drawingml/2006/main">
             <a:pPr algn="r">
+              <a:buNone/>
               <a:defRPr sz="1200" b="1">
                 <a:solidFill>
                   <a:srgbClr val="72E7F4"/>
@@ -13892,6 +14450,7 @@
               </a:defRPr>
             </a:defPPr>
             <a:lvl1pPr algn="l">
+              <a:buNone/>
               <a:defRPr sz="1575" b="1">
                 <a:solidFill>
                   <a:srgbClr val="72E7F4"/>
@@ -13902,6 +14461,7 @@
               </a:defRPr>
             </a:lvl1pPr>
             <a:lvl2pPr algn="l">
+              <a:buNone/>
               <a:defRPr sz="1575" b="1">
                 <a:solidFill>
                   <a:srgbClr val="72E7F4"/>
@@ -13912,6 +14472,7 @@
               </a:defRPr>
             </a:lvl2pPr>
             <a:lvl3pPr algn="l">
+              <a:buNone/>
               <a:defRPr sz="1575" b="1">
                 <a:solidFill>
                   <a:srgbClr val="72E7F4"/>
@@ -13922,6 +14483,7 @@
               </a:defRPr>
             </a:lvl3pPr>
             <a:lvl4pPr algn="l">
+              <a:buNone/>
               <a:defRPr sz="1575" b="1">
                 <a:solidFill>
                   <a:srgbClr val="72E7F4"/>
@@ -13932,6 +14494,7 @@
               </a:defRPr>
             </a:lvl4pPr>
             <a:lvl5pPr algn="l">
+              <a:buNone/>
               <a:defRPr sz="1575" b="1">
                 <a:solidFill>
                   <a:srgbClr val="72E7F4"/>
@@ -13942,6 +14505,7 @@
               </a:defRPr>
             </a:lvl5pPr>
             <a:lvl6pPr algn="l">
+              <a:buNone/>
               <a:defRPr sz="1575" b="1">
                 <a:solidFill>
                   <a:srgbClr val="72E7F4"/>
@@ -13952,6 +14516,7 @@
               </a:defRPr>
             </a:lvl6pPr>
             <a:lvl7pPr algn="l">
+              <a:buNone/>
               <a:defRPr sz="1575" b="1">
                 <a:solidFill>
                   <a:srgbClr val="72E7F4"/>
@@ -13962,6 +14527,7 @@
               </a:defRPr>
             </a:lvl7pPr>
             <a:lvl8pPr algn="l">
+              <a:buNone/>
               <a:defRPr sz="1575" b="1">
                 <a:solidFill>
                   <a:srgbClr val="72E7F4"/>
@@ -13972,6 +14538,7 @@
               </a:defRPr>
             </a:lvl8pPr>
             <a:lvl9pPr algn="l">
+              <a:buNone/>
               <a:defRPr sz="1575" b="1">
                 <a:solidFill>
                   <a:srgbClr val="72E7F4"/>
@@ -13984,6 +14551,7 @@
           </a:lstStyle>
           <a:p xmlns:a="http://schemas.openxmlformats.org/drawingml/2006/main">
             <a:pPr algn="l">
+              <a:buNone/>
               <a:defRPr sz="1575" b="1">
                 <a:solidFill>
                   <a:srgbClr val="72E7F4"/>
@@ -14051,6 +14619,7 @@
               </a:defRPr>
             </a:defPPr>
             <a:lvl1pPr algn="l">
+              <a:buNone/>
               <a:defRPr sz="1725" b="0">
                 <a:solidFill>
                   <a:srgbClr val="F5FBFE"/>
@@ -14061,6 +14630,7 @@
               </a:defRPr>
             </a:lvl1pPr>
             <a:lvl2pPr algn="l">
+              <a:buNone/>
               <a:defRPr sz="1725" b="0">
                 <a:solidFill>
                   <a:srgbClr val="F5FBFE"/>
@@ -14071,6 +14641,7 @@
               </a:defRPr>
             </a:lvl2pPr>
             <a:lvl3pPr algn="l">
+              <a:buNone/>
               <a:defRPr sz="1725" b="0">
                 <a:solidFill>
                   <a:srgbClr val="F5FBFE"/>
@@ -14081,6 +14652,7 @@
               </a:defRPr>
             </a:lvl3pPr>
             <a:lvl4pPr algn="l">
+              <a:buNone/>
               <a:defRPr sz="1725" b="0">
                 <a:solidFill>
                   <a:srgbClr val="F5FBFE"/>
@@ -14091,6 +14663,7 @@
               </a:defRPr>
             </a:lvl4pPr>
             <a:lvl5pPr algn="l">
+              <a:buNone/>
               <a:defRPr sz="1725" b="0">
                 <a:solidFill>
                   <a:srgbClr val="F5FBFE"/>
@@ -14101,6 +14674,7 @@
               </a:defRPr>
             </a:lvl5pPr>
             <a:lvl6pPr algn="l">
+              <a:buNone/>
               <a:defRPr sz="1725" b="0">
                 <a:solidFill>
                   <a:srgbClr val="F5FBFE"/>
@@ -14111,6 +14685,7 @@
               </a:defRPr>
             </a:lvl6pPr>
             <a:lvl7pPr algn="l">
+              <a:buNone/>
               <a:defRPr sz="1725" b="0">
                 <a:solidFill>
                   <a:srgbClr val="F5FBFE"/>
@@ -14121,6 +14696,7 @@
               </a:defRPr>
             </a:lvl7pPr>
             <a:lvl8pPr algn="l">
+              <a:buNone/>
               <a:defRPr sz="1725" b="0">
                 <a:solidFill>
                   <a:srgbClr val="F5FBFE"/>
@@ -14131,6 +14707,7 @@
               </a:defRPr>
             </a:lvl8pPr>
             <a:lvl9pPr algn="l">
+              <a:buNone/>
               <a:defRPr sz="1725" b="0">
                 <a:solidFill>
                   <a:srgbClr val="F5FBFE"/>
@@ -14143,6 +14720,7 @@
           </a:lstStyle>
           <a:p xmlns:a="http://schemas.openxmlformats.org/drawingml/2006/main">
             <a:pPr algn="l">
+              <a:buNone/>
               <a:defRPr sz="1725" b="0">
                 <a:solidFill>
                   <a:srgbClr val="F5FBFE"/>
@@ -14241,6 +14819,7 @@
               </a:defRPr>
             </a:defPPr>
             <a:lvl1pPr algn="l">
+              <a:buNone/>
               <a:defRPr sz="1575" b="1">
                 <a:solidFill>
                   <a:srgbClr val="9DBACA"/>
@@ -14251,6 +14830,7 @@
               </a:defRPr>
             </a:lvl1pPr>
             <a:lvl2pPr algn="l">
+              <a:buNone/>
               <a:defRPr sz="1575" b="1">
                 <a:solidFill>
                   <a:srgbClr val="9DBACA"/>
@@ -14261,6 +14841,7 @@
               </a:defRPr>
             </a:lvl2pPr>
             <a:lvl3pPr algn="l">
+              <a:buNone/>
               <a:defRPr sz="1575" b="1">
                 <a:solidFill>
                   <a:srgbClr val="9DBACA"/>
@@ -14271,6 +14852,7 @@
               </a:defRPr>
             </a:lvl3pPr>
             <a:lvl4pPr algn="l">
+              <a:buNone/>
               <a:defRPr sz="1575" b="1">
                 <a:solidFill>
                   <a:srgbClr val="9DBACA"/>
@@ -14281,6 +14863,7 @@
               </a:defRPr>
             </a:lvl4pPr>
             <a:lvl5pPr algn="l">
+              <a:buNone/>
               <a:defRPr sz="1575" b="1">
                 <a:solidFill>
                   <a:srgbClr val="9DBACA"/>
@@ -14291,6 +14874,7 @@
               </a:defRPr>
             </a:lvl5pPr>
             <a:lvl6pPr algn="l">
+              <a:buNone/>
               <a:defRPr sz="1575" b="1">
                 <a:solidFill>
                   <a:srgbClr val="9DBACA"/>
@@ -14301,6 +14885,7 @@
               </a:defRPr>
             </a:lvl6pPr>
             <a:lvl7pPr algn="l">
+              <a:buNone/>
               <a:defRPr sz="1575" b="1">
                 <a:solidFill>
                   <a:srgbClr val="9DBACA"/>
@@ -14311,6 +14896,7 @@
               </a:defRPr>
             </a:lvl7pPr>
             <a:lvl8pPr algn="l">
+              <a:buNone/>
               <a:defRPr sz="1575" b="1">
                 <a:solidFill>
                   <a:srgbClr val="9DBACA"/>
@@ -14321,6 +14907,7 @@
               </a:defRPr>
             </a:lvl8pPr>
             <a:lvl9pPr algn="l">
+              <a:buNone/>
               <a:defRPr sz="1575" b="1">
                 <a:solidFill>
                   <a:srgbClr val="9DBACA"/>
@@ -14333,6 +14920,7 @@
           </a:lstStyle>
           <a:p xmlns:a="http://schemas.openxmlformats.org/drawingml/2006/main">
             <a:pPr algn="l">
+              <a:buNone/>
               <a:defRPr sz="1575" b="1">
                 <a:solidFill>
                   <a:srgbClr val="9DBACA"/>
@@ -14400,6 +14988,7 @@
               </a:defRPr>
             </a:defPPr>
             <a:lvl1pPr algn="l">
+              <a:buNone/>
               <a:defRPr sz="1725" b="0">
                 <a:solidFill>
                   <a:srgbClr val="F5FBFE"/>
@@ -14410,6 +14999,7 @@
               </a:defRPr>
             </a:lvl1pPr>
             <a:lvl2pPr algn="l">
+              <a:buNone/>
               <a:defRPr sz="1725" b="0">
                 <a:solidFill>
                   <a:srgbClr val="F5FBFE"/>
@@ -14420,6 +15010,7 @@
               </a:defRPr>
             </a:lvl2pPr>
             <a:lvl3pPr algn="l">
+              <a:buNone/>
               <a:defRPr sz="1725" b="0">
                 <a:solidFill>
                   <a:srgbClr val="F5FBFE"/>
@@ -14430,6 +15021,7 @@
               </a:defRPr>
             </a:lvl3pPr>
             <a:lvl4pPr algn="l">
+              <a:buNone/>
               <a:defRPr sz="1725" b="0">
                 <a:solidFill>
                   <a:srgbClr val="F5FBFE"/>
@@ -14440,6 +15032,7 @@
               </a:defRPr>
             </a:lvl4pPr>
             <a:lvl5pPr algn="l">
+              <a:buNone/>
               <a:defRPr sz="1725" b="0">
                 <a:solidFill>
                   <a:srgbClr val="F5FBFE"/>
@@ -14450,6 +15043,7 @@
               </a:defRPr>
             </a:lvl5pPr>
             <a:lvl6pPr algn="l">
+              <a:buNone/>
               <a:defRPr sz="1725" b="0">
                 <a:solidFill>
                   <a:srgbClr val="F5FBFE"/>
@@ -14460,6 +15054,7 @@
               </a:defRPr>
             </a:lvl6pPr>
             <a:lvl7pPr algn="l">
+              <a:buNone/>
               <a:defRPr sz="1725" b="0">
                 <a:solidFill>
                   <a:srgbClr val="F5FBFE"/>
@@ -14470,6 +15065,7 @@
               </a:defRPr>
             </a:lvl7pPr>
             <a:lvl8pPr algn="l">
+              <a:buNone/>
               <a:defRPr sz="1725" b="0">
                 <a:solidFill>
                   <a:srgbClr val="F5FBFE"/>
@@ -14480,6 +15076,7 @@
               </a:defRPr>
             </a:lvl8pPr>
             <a:lvl9pPr algn="l">
+              <a:buNone/>
               <a:defRPr sz="1725" b="0">
                 <a:solidFill>
                   <a:srgbClr val="F5FBFE"/>
@@ -14492,6 +15089,7 @@
           </a:lstStyle>
           <a:p xmlns:a="http://schemas.openxmlformats.org/drawingml/2006/main">
             <a:pPr algn="l">
+              <a:buNone/>
               <a:defRPr sz="1725" b="0">
                 <a:solidFill>
                   <a:srgbClr val="F5FBFE"/>
@@ -14510,7 +15108,7 @@
                 <a:ea typeface="Arial"/>
                 <a:cs typeface="Arial"/>
               </a:rPr>
-              <a:t>Teleport to the repair pad</a:t>
+              <a:t>Walk or teleport to the repair pad</a:t>
             </a:r>
           </a:p>
         </p:txBody>
@@ -14590,6 +15188,7 @@
               </a:defRPr>
             </a:defPPr>
             <a:lvl1pPr algn="l">
+              <a:buNone/>
               <a:defRPr sz="1575" b="1">
                 <a:solidFill>
                   <a:srgbClr val="9DBACA"/>
@@ -14600,6 +15199,7 @@
               </a:defRPr>
             </a:lvl1pPr>
             <a:lvl2pPr algn="l">
+              <a:buNone/>
               <a:defRPr sz="1575" b="1">
                 <a:solidFill>
                   <a:srgbClr val="9DBACA"/>
@@ -14610,6 +15210,7 @@
               </a:defRPr>
             </a:lvl2pPr>
             <a:lvl3pPr algn="l">
+              <a:buNone/>
               <a:defRPr sz="1575" b="1">
                 <a:solidFill>
                   <a:srgbClr val="9DBACA"/>
@@ -14620,6 +15221,7 @@
               </a:defRPr>
             </a:lvl3pPr>
             <a:lvl4pPr algn="l">
+              <a:buNone/>
               <a:defRPr sz="1575" b="1">
                 <a:solidFill>
                   <a:srgbClr val="9DBACA"/>
@@ -14630,6 +15232,7 @@
               </a:defRPr>
             </a:lvl4pPr>
             <a:lvl5pPr algn="l">
+              <a:buNone/>
               <a:defRPr sz="1575" b="1">
                 <a:solidFill>
                   <a:srgbClr val="9DBACA"/>
@@ -14640,6 +15243,7 @@
               </a:defRPr>
             </a:lvl5pPr>
             <a:lvl6pPr algn="l">
+              <a:buNone/>
               <a:defRPr sz="1575" b="1">
                 <a:solidFill>
                   <a:srgbClr val="9DBACA"/>
@@ -14650,6 +15254,7 @@
               </a:defRPr>
             </a:lvl6pPr>
             <a:lvl7pPr algn="l">
+              <a:buNone/>
               <a:defRPr sz="1575" b="1">
                 <a:solidFill>
                   <a:srgbClr val="9DBACA"/>
@@ -14660,6 +15265,7 @@
               </a:defRPr>
             </a:lvl7pPr>
             <a:lvl8pPr algn="l">
+              <a:buNone/>
               <a:defRPr sz="1575" b="1">
                 <a:solidFill>
                   <a:srgbClr val="9DBACA"/>
@@ -14670,6 +15276,7 @@
               </a:defRPr>
             </a:lvl8pPr>
             <a:lvl9pPr algn="l">
+              <a:buNone/>
               <a:defRPr sz="1575" b="1">
                 <a:solidFill>
                   <a:srgbClr val="9DBACA"/>
@@ -14682,6 +15289,7 @@
           </a:lstStyle>
           <a:p xmlns:a="http://schemas.openxmlformats.org/drawingml/2006/main">
             <a:pPr algn="l">
+              <a:buNone/>
               <a:defRPr sz="1575" b="1">
                 <a:solidFill>
                   <a:srgbClr val="9DBACA"/>
@@ -14749,6 +15357,7 @@
               </a:defRPr>
             </a:defPPr>
             <a:lvl1pPr algn="l">
+              <a:buNone/>
               <a:defRPr sz="1725" b="0">
                 <a:solidFill>
                   <a:srgbClr val="F5FBFE"/>
@@ -14759,6 +15368,7 @@
               </a:defRPr>
             </a:lvl1pPr>
             <a:lvl2pPr algn="l">
+              <a:buNone/>
               <a:defRPr sz="1725" b="0">
                 <a:solidFill>
                   <a:srgbClr val="F5FBFE"/>
@@ -14769,6 +15379,7 @@
               </a:defRPr>
             </a:lvl2pPr>
             <a:lvl3pPr algn="l">
+              <a:buNone/>
               <a:defRPr sz="1725" b="0">
                 <a:solidFill>
                   <a:srgbClr val="F5FBFE"/>
@@ -14779,6 +15390,7 @@
               </a:defRPr>
             </a:lvl3pPr>
             <a:lvl4pPr algn="l">
+              <a:buNone/>
               <a:defRPr sz="1725" b="0">
                 <a:solidFill>
                   <a:srgbClr val="F5FBFE"/>
@@ -14789,6 +15401,7 @@
               </a:defRPr>
             </a:lvl4pPr>
             <a:lvl5pPr algn="l">
+              <a:buNone/>
               <a:defRPr sz="1725" b="0">
                 <a:solidFill>
                   <a:srgbClr val="F5FBFE"/>
@@ -14799,6 +15412,7 @@
               </a:defRPr>
             </a:lvl5pPr>
             <a:lvl6pPr algn="l">
+              <a:buNone/>
               <a:defRPr sz="1725" b="0">
                 <a:solidFill>
                   <a:srgbClr val="F5FBFE"/>
@@ -14809,6 +15423,7 @@
               </a:defRPr>
             </a:lvl6pPr>
             <a:lvl7pPr algn="l">
+              <a:buNone/>
               <a:defRPr sz="1725" b="0">
                 <a:solidFill>
                   <a:srgbClr val="F5FBFE"/>
@@ -14819,6 +15434,7 @@
               </a:defRPr>
             </a:lvl7pPr>
             <a:lvl8pPr algn="l">
+              <a:buNone/>
               <a:defRPr sz="1725" b="0">
                 <a:solidFill>
                   <a:srgbClr val="F5FBFE"/>
@@ -14829,6 +15445,7 @@
               </a:defRPr>
             </a:lvl8pPr>
             <a:lvl9pPr algn="l">
+              <a:buNone/>
               <a:defRPr sz="1725" b="0">
                 <a:solidFill>
                   <a:srgbClr val="F5FBFE"/>
@@ -14841,6 +15458,7 @@
           </a:lstStyle>
           <a:p xmlns:a="http://schemas.openxmlformats.org/drawingml/2006/main">
             <a:pPr algn="l">
+              <a:buNone/>
               <a:defRPr sz="1725" b="0">
                 <a:solidFill>
                   <a:srgbClr val="F5FBFE"/>
@@ -14939,6 +15557,7 @@
               </a:defRPr>
             </a:defPPr>
             <a:lvl1pPr algn="l">
+              <a:buNone/>
               <a:defRPr sz="1575" b="1">
                 <a:solidFill>
                   <a:srgbClr val="9DBACA"/>
@@ -14949,6 +15568,7 @@
               </a:defRPr>
             </a:lvl1pPr>
             <a:lvl2pPr algn="l">
+              <a:buNone/>
               <a:defRPr sz="1575" b="1">
                 <a:solidFill>
                   <a:srgbClr val="9DBACA"/>
@@ -14959,6 +15579,7 @@
               </a:defRPr>
             </a:lvl2pPr>
             <a:lvl3pPr algn="l">
+              <a:buNone/>
               <a:defRPr sz="1575" b="1">
                 <a:solidFill>
                   <a:srgbClr val="9DBACA"/>
@@ -14969,6 +15590,7 @@
               </a:defRPr>
             </a:lvl3pPr>
             <a:lvl4pPr algn="l">
+              <a:buNone/>
               <a:defRPr sz="1575" b="1">
                 <a:solidFill>
                   <a:srgbClr val="9DBACA"/>
@@ -14979,6 +15601,7 @@
               </a:defRPr>
             </a:lvl4pPr>
             <a:lvl5pPr algn="l">
+              <a:buNone/>
               <a:defRPr sz="1575" b="1">
                 <a:solidFill>
                   <a:srgbClr val="9DBACA"/>
@@ -14989,6 +15612,7 @@
               </a:defRPr>
             </a:lvl5pPr>
             <a:lvl6pPr algn="l">
+              <a:buNone/>
               <a:defRPr sz="1575" b="1">
                 <a:solidFill>
                   <a:srgbClr val="9DBACA"/>
@@ -14999,6 +15623,7 @@
               </a:defRPr>
             </a:lvl6pPr>
             <a:lvl7pPr algn="l">
+              <a:buNone/>
               <a:defRPr sz="1575" b="1">
                 <a:solidFill>
                   <a:srgbClr val="9DBACA"/>
@@ -15009,6 +15634,7 @@
               </a:defRPr>
             </a:lvl7pPr>
             <a:lvl8pPr algn="l">
+              <a:buNone/>
               <a:defRPr sz="1575" b="1">
                 <a:solidFill>
                   <a:srgbClr val="9DBACA"/>
@@ -15019,6 +15645,7 @@
               </a:defRPr>
             </a:lvl8pPr>
             <a:lvl9pPr algn="l">
+              <a:buNone/>
               <a:defRPr sz="1575" b="1">
                 <a:solidFill>
                   <a:srgbClr val="9DBACA"/>
@@ -15031,6 +15658,7 @@
           </a:lstStyle>
           <a:p xmlns:a="http://schemas.openxmlformats.org/drawingml/2006/main">
             <a:pPr algn="l">
+              <a:buNone/>
               <a:defRPr sz="1575" b="1">
                 <a:solidFill>
                   <a:srgbClr val="9DBACA"/>
@@ -15098,6 +15726,7 @@
               </a:defRPr>
             </a:defPPr>
             <a:lvl1pPr algn="l">
+              <a:buNone/>
               <a:defRPr sz="1725" b="0">
                 <a:solidFill>
                   <a:srgbClr val="F5FBFE"/>
@@ -15108,6 +15737,7 @@
               </a:defRPr>
             </a:lvl1pPr>
             <a:lvl2pPr algn="l">
+              <a:buNone/>
               <a:defRPr sz="1725" b="0">
                 <a:solidFill>
                   <a:srgbClr val="F5FBFE"/>
@@ -15118,6 +15748,7 @@
               </a:defRPr>
             </a:lvl2pPr>
             <a:lvl3pPr algn="l">
+              <a:buNone/>
               <a:defRPr sz="1725" b="0">
                 <a:solidFill>
                   <a:srgbClr val="F5FBFE"/>
@@ -15128,6 +15759,7 @@
               </a:defRPr>
             </a:lvl3pPr>
             <a:lvl4pPr algn="l">
+              <a:buNone/>
               <a:defRPr sz="1725" b="0">
                 <a:solidFill>
                   <a:srgbClr val="F5FBFE"/>
@@ -15138,6 +15770,7 @@
               </a:defRPr>
             </a:lvl4pPr>
             <a:lvl5pPr algn="l">
+              <a:buNone/>
               <a:defRPr sz="1725" b="0">
                 <a:solidFill>
                   <a:srgbClr val="F5FBFE"/>
@@ -15148,6 +15781,7 @@
               </a:defRPr>
             </a:lvl5pPr>
             <a:lvl6pPr algn="l">
+              <a:buNone/>
               <a:defRPr sz="1725" b="0">
                 <a:solidFill>
                   <a:srgbClr val="F5FBFE"/>
@@ -15158,6 +15792,7 @@
               </a:defRPr>
             </a:lvl6pPr>
             <a:lvl7pPr algn="l">
+              <a:buNone/>
               <a:defRPr sz="1725" b="0">
                 <a:solidFill>
                   <a:srgbClr val="F5FBFE"/>
@@ -15168,6 +15803,7 @@
               </a:defRPr>
             </a:lvl7pPr>
             <a:lvl8pPr algn="l">
+              <a:buNone/>
               <a:defRPr sz="1725" b="0">
                 <a:solidFill>
                   <a:srgbClr val="F5FBFE"/>
@@ -15178,6 +15814,7 @@
               </a:defRPr>
             </a:lvl8pPr>
             <a:lvl9pPr algn="l">
+              <a:buNone/>
               <a:defRPr sz="1725" b="0">
                 <a:solidFill>
                   <a:srgbClr val="F5FBFE"/>
@@ -15190,6 +15827,7 @@
           </a:lstStyle>
           <a:p xmlns:a="http://schemas.openxmlformats.org/drawingml/2006/main">
             <a:pPr algn="l">
+              <a:buNone/>
               <a:defRPr sz="1725" b="0">
                 <a:solidFill>
                   <a:srgbClr val="F5FBFE"/>
@@ -15288,6 +15926,7 @@
               </a:defRPr>
             </a:defPPr>
             <a:lvl1pPr algn="l">
+              <a:buNone/>
               <a:defRPr sz="1575" b="1">
                 <a:solidFill>
                   <a:srgbClr val="9DBACA"/>
@@ -15298,6 +15937,7 @@
               </a:defRPr>
             </a:lvl1pPr>
             <a:lvl2pPr algn="l">
+              <a:buNone/>
               <a:defRPr sz="1575" b="1">
                 <a:solidFill>
                   <a:srgbClr val="9DBACA"/>
@@ -15308,6 +15948,7 @@
               </a:defRPr>
             </a:lvl2pPr>
             <a:lvl3pPr algn="l">
+              <a:buNone/>
               <a:defRPr sz="1575" b="1">
                 <a:solidFill>
                   <a:srgbClr val="9DBACA"/>
@@ -15318,6 +15959,7 @@
               </a:defRPr>
             </a:lvl3pPr>
             <a:lvl4pPr algn="l">
+              <a:buNone/>
               <a:defRPr sz="1575" b="1">
                 <a:solidFill>
                   <a:srgbClr val="9DBACA"/>
@@ -15328,6 +15970,7 @@
               </a:defRPr>
             </a:lvl4pPr>
             <a:lvl5pPr algn="l">
+              <a:buNone/>
               <a:defRPr sz="1575" b="1">
                 <a:solidFill>
                   <a:srgbClr val="9DBACA"/>
@@ -15338,6 +15981,7 @@
               </a:defRPr>
             </a:lvl5pPr>
             <a:lvl6pPr algn="l">
+              <a:buNone/>
               <a:defRPr sz="1575" b="1">
                 <a:solidFill>
                   <a:srgbClr val="9DBACA"/>
@@ -15348,6 +15992,7 @@
               </a:defRPr>
             </a:lvl6pPr>
             <a:lvl7pPr algn="l">
+              <a:buNone/>
               <a:defRPr sz="1575" b="1">
                 <a:solidFill>
                   <a:srgbClr val="9DBACA"/>
@@ -15358,6 +16003,7 @@
               </a:defRPr>
             </a:lvl7pPr>
             <a:lvl8pPr algn="l">
+              <a:buNone/>
               <a:defRPr sz="1575" b="1">
                 <a:solidFill>
                   <a:srgbClr val="9DBACA"/>
@@ -15368,6 +16014,7 @@
               </a:defRPr>
             </a:lvl8pPr>
             <a:lvl9pPr algn="l">
+              <a:buNone/>
               <a:defRPr sz="1575" b="1">
                 <a:solidFill>
                   <a:srgbClr val="9DBACA"/>
@@ -15380,6 +16027,7 @@
           </a:lstStyle>
           <a:p xmlns:a="http://schemas.openxmlformats.org/drawingml/2006/main">
             <a:pPr algn="l">
+              <a:buNone/>
               <a:defRPr sz="1575" b="1">
                 <a:solidFill>
                   <a:srgbClr val="9DBACA"/>
@@ -15447,6 +16095,7 @@
               </a:defRPr>
             </a:defPPr>
             <a:lvl1pPr algn="l">
+              <a:buNone/>
               <a:defRPr sz="1725" b="0">
                 <a:solidFill>
                   <a:srgbClr val="F5FBFE"/>
@@ -15457,6 +16106,7 @@
               </a:defRPr>
             </a:lvl1pPr>
             <a:lvl2pPr algn="l">
+              <a:buNone/>
               <a:defRPr sz="1725" b="0">
                 <a:solidFill>
                   <a:srgbClr val="F5FBFE"/>
@@ -15467,6 +16117,7 @@
               </a:defRPr>
             </a:lvl2pPr>
             <a:lvl3pPr algn="l">
+              <a:buNone/>
               <a:defRPr sz="1725" b="0">
                 <a:solidFill>
                   <a:srgbClr val="F5FBFE"/>
@@ -15477,6 +16128,7 @@
               </a:defRPr>
             </a:lvl3pPr>
             <a:lvl4pPr algn="l">
+              <a:buNone/>
               <a:defRPr sz="1725" b="0">
                 <a:solidFill>
                   <a:srgbClr val="F5FBFE"/>
@@ -15487,6 +16139,7 @@
               </a:defRPr>
             </a:lvl4pPr>
             <a:lvl5pPr algn="l">
+              <a:buNone/>
               <a:defRPr sz="1725" b="0">
                 <a:solidFill>
                   <a:srgbClr val="F5FBFE"/>
@@ -15497,6 +16150,7 @@
               </a:defRPr>
             </a:lvl5pPr>
             <a:lvl6pPr algn="l">
+              <a:buNone/>
               <a:defRPr sz="1725" b="0">
                 <a:solidFill>
                   <a:srgbClr val="F5FBFE"/>
@@ -15507,6 +16161,7 @@
               </a:defRPr>
             </a:lvl6pPr>
             <a:lvl7pPr algn="l">
+              <a:buNone/>
               <a:defRPr sz="1725" b="0">
                 <a:solidFill>
                   <a:srgbClr val="F5FBFE"/>
@@ -15517,6 +16172,7 @@
               </a:defRPr>
             </a:lvl7pPr>
             <a:lvl8pPr algn="l">
+              <a:buNone/>
               <a:defRPr sz="1725" b="0">
                 <a:solidFill>
                   <a:srgbClr val="F5FBFE"/>
@@ -15527,6 +16183,7 @@
               </a:defRPr>
             </a:lvl8pPr>
             <a:lvl9pPr algn="l">
+              <a:buNone/>
               <a:defRPr sz="1725" b="0">
                 <a:solidFill>
                   <a:srgbClr val="F5FBFE"/>
@@ -15539,6 +16196,7 @@
           </a:lstStyle>
           <a:p xmlns:a="http://schemas.openxmlformats.org/drawingml/2006/main">
             <a:pPr algn="l">
+              <a:buNone/>
               <a:defRPr sz="1725" b="0">
                 <a:solidFill>
                   <a:srgbClr val="F5FBFE"/>
@@ -15637,6 +16295,7 @@
               </a:defRPr>
             </a:defPPr>
             <a:lvl1pPr algn="l">
+              <a:buNone/>
               <a:defRPr sz="1575" b="1">
                 <a:solidFill>
                   <a:srgbClr val="9DBACA"/>
@@ -15647,6 +16306,7 @@
               </a:defRPr>
             </a:lvl1pPr>
             <a:lvl2pPr algn="l">
+              <a:buNone/>
               <a:defRPr sz="1575" b="1">
                 <a:solidFill>
                   <a:srgbClr val="9DBACA"/>
@@ -15657,6 +16317,7 @@
               </a:defRPr>
             </a:lvl2pPr>
             <a:lvl3pPr algn="l">
+              <a:buNone/>
               <a:defRPr sz="1575" b="1">
                 <a:solidFill>
                   <a:srgbClr val="9DBACA"/>
@@ -15667,6 +16328,7 @@
               </a:defRPr>
             </a:lvl3pPr>
             <a:lvl4pPr algn="l">
+              <a:buNone/>
               <a:defRPr sz="1575" b="1">
                 <a:solidFill>
                   <a:srgbClr val="9DBACA"/>
@@ -15677,6 +16339,7 @@
               </a:defRPr>
             </a:lvl4pPr>
             <a:lvl5pPr algn="l">
+              <a:buNone/>
               <a:defRPr sz="1575" b="1">
                 <a:solidFill>
                   <a:srgbClr val="9DBACA"/>
@@ -15687,6 +16350,7 @@
               </a:defRPr>
             </a:lvl5pPr>
             <a:lvl6pPr algn="l">
+              <a:buNone/>
               <a:defRPr sz="1575" b="1">
                 <a:solidFill>
                   <a:srgbClr val="9DBACA"/>
@@ -15697,6 +16361,7 @@
               </a:defRPr>
             </a:lvl6pPr>
             <a:lvl7pPr algn="l">
+              <a:buNone/>
               <a:defRPr sz="1575" b="1">
                 <a:solidFill>
                   <a:srgbClr val="9DBACA"/>
@@ -15707,6 +16372,7 @@
               </a:defRPr>
             </a:lvl7pPr>
             <a:lvl8pPr algn="l">
+              <a:buNone/>
               <a:defRPr sz="1575" b="1">
                 <a:solidFill>
                   <a:srgbClr val="9DBACA"/>
@@ -15717,6 +16383,7 @@
               </a:defRPr>
             </a:lvl8pPr>
             <a:lvl9pPr algn="l">
+              <a:buNone/>
               <a:defRPr sz="1575" b="1">
                 <a:solidFill>
                   <a:srgbClr val="9DBACA"/>
@@ -15729,6 +16396,7 @@
           </a:lstStyle>
           <a:p xmlns:a="http://schemas.openxmlformats.org/drawingml/2006/main">
             <a:pPr algn="l">
+              <a:buNone/>
               <a:defRPr sz="1575" b="1">
                 <a:solidFill>
                   <a:srgbClr val="9DBACA"/>
@@ -15796,6 +16464,7 @@
               </a:defRPr>
             </a:defPPr>
             <a:lvl1pPr algn="l">
+              <a:buNone/>
               <a:defRPr sz="1725" b="0">
                 <a:solidFill>
                   <a:srgbClr val="F5FBFE"/>
@@ -15806,6 +16475,7 @@
               </a:defRPr>
             </a:lvl1pPr>
             <a:lvl2pPr algn="l">
+              <a:buNone/>
               <a:defRPr sz="1725" b="0">
                 <a:solidFill>
                   <a:srgbClr val="F5FBFE"/>
@@ -15816,6 +16486,7 @@
               </a:defRPr>
             </a:lvl2pPr>
             <a:lvl3pPr algn="l">
+              <a:buNone/>
               <a:defRPr sz="1725" b="0">
                 <a:solidFill>
                   <a:srgbClr val="F5FBFE"/>
@@ -15826,6 +16497,7 @@
               </a:defRPr>
             </a:lvl3pPr>
             <a:lvl4pPr algn="l">
+              <a:buNone/>
               <a:defRPr sz="1725" b="0">
                 <a:solidFill>
                   <a:srgbClr val="F5FBFE"/>
@@ -15836,6 +16508,7 @@
               </a:defRPr>
             </a:lvl4pPr>
             <a:lvl5pPr algn="l">
+              <a:buNone/>
               <a:defRPr sz="1725" b="0">
                 <a:solidFill>
                   <a:srgbClr val="F5FBFE"/>
@@ -15846,6 +16519,7 @@
               </a:defRPr>
             </a:lvl5pPr>
             <a:lvl6pPr algn="l">
+              <a:buNone/>
               <a:defRPr sz="1725" b="0">
                 <a:solidFill>
                   <a:srgbClr val="F5FBFE"/>
@@ -15856,6 +16530,7 @@
               </a:defRPr>
             </a:lvl6pPr>
             <a:lvl7pPr algn="l">
+              <a:buNone/>
               <a:defRPr sz="1725" b="0">
                 <a:solidFill>
                   <a:srgbClr val="F5FBFE"/>
@@ -15866,6 +16541,7 @@
               </a:defRPr>
             </a:lvl7pPr>
             <a:lvl8pPr algn="l">
+              <a:buNone/>
               <a:defRPr sz="1725" b="0">
                 <a:solidFill>
                   <a:srgbClr val="F5FBFE"/>
@@ -15876,6 +16552,7 @@
               </a:defRPr>
             </a:lvl8pPr>
             <a:lvl9pPr algn="l">
+              <a:buNone/>
               <a:defRPr sz="1725" b="0">
                 <a:solidFill>
                   <a:srgbClr val="F5FBFE"/>
@@ -15888,6 +16565,7 @@
           </a:lstStyle>
           <a:p xmlns:a="http://schemas.openxmlformats.org/drawingml/2006/main">
             <a:pPr algn="l">
+              <a:buNone/>
               <a:defRPr sz="1725" b="0">
                 <a:solidFill>
                   <a:srgbClr val="F5FBFE"/>
@@ -15906,7 +16584,7 @@
                 <a:ea typeface="Arial"/>
                 <a:cs typeface="Arial"/>
               </a:rPr>
-              <a:t>Reset and answer questions</a:t>
+              <a:t>Reset and explain remaining checks</a:t>
             </a:r>
           </a:p>
         </p:txBody>
@@ -15916,7 +16594,7 @@
           <p:cNvPr id="23" name="">
             <a:extLst xmlns:a="http://schemas.openxmlformats.org/drawingml/2006/main">
               <a:ext uri="{FF2B5EF4-FFF2-40B4-BE49-F238E27FC236}">
-                <a16:creationId xmlns:a16="http://schemas.microsoft.com/office/drawing/2014/main" id="{5350560F-8846-4D07-BED6-EB61EB4C5066}"/>
+                <a16:creationId xmlns:a16="http://schemas.microsoft.com/office/drawing/2014/main" id="{FC1FF9DE-4C7E-49B5-AD10-3AF49FF943C0}"/>
               </a:ext>
             </a:extLst>
           </p:cNvPr>
@@ -15926,8 +16604,11 @@
           <p:nvPr/>
         </p:nvPicPr>
         <p:blipFill>
-          <a:blip xmlns:r="http://schemas.openxmlformats.org/officeDocument/2006/relationships" xmlns:a="http://schemas.openxmlformats.org/drawingml/2006/main" r:embed="Rec0d3d1fd8aa4257"/>
-          <a:stretch xmlns:a="http://schemas.openxmlformats.org/drawingml/2006/main"/>
+          <a:blip xmlns:r="http://schemas.openxmlformats.org/officeDocument/2006/relationships" xmlns:a="http://schemas.openxmlformats.org/drawingml/2006/main" r:embed="R8a21661fd7164509"/>
+          <a:srcRect xmlns:a="http://schemas.openxmlformats.org/drawingml/2006/main" l="0" t="0" r="0" b="0"/>
+          <a:stretch xmlns:a="http://schemas.openxmlformats.org/drawingml/2006/main">
+            <a:fillRect l="0" t="0" r="0" b="0"/>
+          </a:stretch>
         </p:blipFill>
         <p:spPr>
           <a:xfrm xmlns:a="http://schemas.openxmlformats.org/drawingml/2006/main">
@@ -15983,6 +16664,7 @@
               </a:defRPr>
             </a:defPPr>
             <a:lvl1pPr algn="l">
+              <a:buNone/>
               <a:defRPr sz="1200" b="1">
                 <a:solidFill>
                   <a:srgbClr val="72E7F4"/>
@@ -15993,6 +16675,7 @@
               </a:defRPr>
             </a:lvl1pPr>
             <a:lvl2pPr algn="l">
+              <a:buNone/>
               <a:defRPr sz="1200" b="1">
                 <a:solidFill>
                   <a:srgbClr val="72E7F4"/>
@@ -16003,6 +16686,7 @@
               </a:defRPr>
             </a:lvl2pPr>
             <a:lvl3pPr algn="l">
+              <a:buNone/>
               <a:defRPr sz="1200" b="1">
                 <a:solidFill>
                   <a:srgbClr val="72E7F4"/>
@@ -16013,6 +16697,7 @@
               </a:defRPr>
             </a:lvl3pPr>
             <a:lvl4pPr algn="l">
+              <a:buNone/>
               <a:defRPr sz="1200" b="1">
                 <a:solidFill>
                   <a:srgbClr val="72E7F4"/>
@@ -16023,6 +16708,7 @@
               </a:defRPr>
             </a:lvl4pPr>
             <a:lvl5pPr algn="l">
+              <a:buNone/>
               <a:defRPr sz="1200" b="1">
                 <a:solidFill>
                   <a:srgbClr val="72E7F4"/>
@@ -16033,6 +16719,7 @@
               </a:defRPr>
             </a:lvl5pPr>
             <a:lvl6pPr algn="l">
+              <a:buNone/>
               <a:defRPr sz="1200" b="1">
                 <a:solidFill>
                   <a:srgbClr val="72E7F4"/>
@@ -16043,6 +16730,7 @@
               </a:defRPr>
             </a:lvl6pPr>
             <a:lvl7pPr algn="l">
+              <a:buNone/>
               <a:defRPr sz="1200" b="1">
                 <a:solidFill>
                   <a:srgbClr val="72E7F4"/>
@@ -16053,6 +16741,7 @@
               </a:defRPr>
             </a:lvl7pPr>
             <a:lvl8pPr algn="l">
+              <a:buNone/>
               <a:defRPr sz="1200" b="1">
                 <a:solidFill>
                   <a:srgbClr val="72E7F4"/>
@@ -16063,6 +16752,7 @@
               </a:defRPr>
             </a:lvl8pPr>
             <a:lvl9pPr algn="l">
+              <a:buNone/>
               <a:defRPr sz="1200" b="1">
                 <a:solidFill>
                   <a:srgbClr val="72E7F4"/>
@@ -16075,6 +16765,7 @@
           </a:lstStyle>
           <a:p xmlns:a="http://schemas.openxmlformats.org/drawingml/2006/main">
             <a:pPr algn="l">
+              <a:buNone/>
               <a:defRPr sz="1200" b="1">
                 <a:solidFill>
                   <a:srgbClr val="72E7F4"/>
@@ -16093,7 +16784,7 @@
                 <a:ea typeface="Arial"/>
                 <a:cs typeface="Arial"/>
               </a:rPr>
-              <a:t>Current Unity Editor preview</a:t>
+              <a:t>Quest 2 USB Link recording</a:t>
             </a:r>
           </a:p>
         </p:txBody>
@@ -16142,6 +16833,7 @@
               </a:defRPr>
             </a:defPPr>
             <a:lvl1pPr algn="l">
+              <a:buNone/>
               <a:defRPr sz="1350" b="0">
                 <a:solidFill>
                   <a:srgbClr val="9DBACA"/>
@@ -16152,6 +16844,7 @@
               </a:defRPr>
             </a:lvl1pPr>
             <a:lvl2pPr algn="l">
+              <a:buNone/>
               <a:defRPr sz="1350" b="0">
                 <a:solidFill>
                   <a:srgbClr val="9DBACA"/>
@@ -16162,6 +16855,7 @@
               </a:defRPr>
             </a:lvl2pPr>
             <a:lvl3pPr algn="l">
+              <a:buNone/>
               <a:defRPr sz="1350" b="0">
                 <a:solidFill>
                   <a:srgbClr val="9DBACA"/>
@@ -16172,6 +16866,7 @@
               </a:defRPr>
             </a:lvl3pPr>
             <a:lvl4pPr algn="l">
+              <a:buNone/>
               <a:defRPr sz="1350" b="0">
                 <a:solidFill>
                   <a:srgbClr val="9DBACA"/>
@@ -16182,6 +16877,7 @@
               </a:defRPr>
             </a:lvl4pPr>
             <a:lvl5pPr algn="l">
+              <a:buNone/>
               <a:defRPr sz="1350" b="0">
                 <a:solidFill>
                   <a:srgbClr val="9DBACA"/>
@@ -16192,6 +16888,7 @@
               </a:defRPr>
             </a:lvl5pPr>
             <a:lvl6pPr algn="l">
+              <a:buNone/>
               <a:defRPr sz="1350" b="0">
                 <a:solidFill>
                   <a:srgbClr val="9DBACA"/>
@@ -16202,6 +16899,7 @@
               </a:defRPr>
             </a:lvl6pPr>
             <a:lvl7pPr algn="l">
+              <a:buNone/>
               <a:defRPr sz="1350" b="0">
                 <a:solidFill>
                   <a:srgbClr val="9DBACA"/>
@@ -16212,6 +16910,7 @@
               </a:defRPr>
             </a:lvl7pPr>
             <a:lvl8pPr algn="l">
+              <a:buNone/>
               <a:defRPr sz="1350" b="0">
                 <a:solidFill>
                   <a:srgbClr val="9DBACA"/>
@@ -16222,6 +16921,7 @@
               </a:defRPr>
             </a:lvl8pPr>
             <a:lvl9pPr algn="l">
+              <a:buNone/>
               <a:defRPr sz="1350" b="0">
                 <a:solidFill>
                   <a:srgbClr val="9DBACA"/>
@@ -16234,6 +16934,7 @@
           </a:lstStyle>
           <a:p xmlns:a="http://schemas.openxmlformats.org/drawingml/2006/main">
             <a:pPr algn="l">
+              <a:buNone/>
               <a:defRPr sz="1350" b="0">
                 <a:solidFill>
                   <a:srgbClr val="9DBACA"/>
@@ -16252,7 +16953,31 @@
                 <a:ea typeface="Arial"/>
                 <a:cs typeface="Arial"/>
               </a:rPr>
-              <a:t>Quest recording follows the device test.</a:t>
+              <a:t>54-second video with game audio</a:t>
+            </a:r>
+          </a:p>
+          <a:p xmlns:a="http://schemas.openxmlformats.org/drawingml/2006/main">
+            <a:pPr algn="l">
+              <a:buNone/>
+              <a:defRPr sz="1350" b="0">
+                <a:solidFill>
+                  <a:srgbClr val="9DBACA"/>
+                </a:solidFill>
+                <a:latin typeface="Arial"/>
+                <a:ea typeface="Arial"/>
+                <a:cs typeface="Arial"/>
+              </a:defRPr>
+            </a:pPr>
+            <a:r>
+              <a:rPr sz="1350" b="0">
+                <a:solidFill>
+                  <a:srgbClr val="9DBACA"/>
+                </a:solidFill>
+                <a:latin typeface="Arial"/>
+                <a:ea typeface="Arial"/>
+                <a:cs typeface="Arial"/>
+              </a:rPr>
+              <a:t>PC VR; native APK video pending</a:t>
             </a:r>
           </a:p>
         </p:txBody>
